--- a/downloads/presentations/modules/lesson-11-causal-inference-and-ai-in-public-health-decision-making.pptx
+++ b/downloads/presentations/modules/lesson-11-causal-inference-and-ai-in-public-health-decision-making.pptx
@@ -25,9 +25,11 @@
     <p:sldId id="273" r:id="rId19"/>
     <p:sldId id="274" r:id="rId20"/>
     <p:sldId id="275" r:id="rId21"/>
+    <p:sldId id="276" r:id="rId22"/>
+    <p:sldId id="277" r:id="rId23"/>
   </p:sldIdLst>
   <p:notesMasterIdLst>
-    <p:notesMasterId r:id="rId22"/>
+    <p:notesMasterId r:id="rId24"/>
   </p:notesMasterIdLst>
   <p:sldSz cx="12192000" cy="6858000"/>
   <p:notesSz cx="6858000" cy="12192000"/>
@@ -610,9 +612,9 @@
           <a:p>
             <a:r>
               <a:rPr lang="en-US" dirty="0"/>
-              <a:t>Risks, Failure Modes, and Guardrails
-The main failure mode is causal overreach. A dashboard or AI report may state that a program reduced disease, improved access, or changed behavior when the evidence only shows association. A guardrail is to require causal language review before results are used in reports, funding decisions, policy recommendations, or public communications.
-Another risk is inequitable inference. Data may be more complete for some groups than others, and interventions may reach groups differently. A guardrail is to examine whether assumptions hold across populations and whether subgroup effects or access barriers are hidden by aggregate results.</a:t>
+              <a:t>Public Health Example
+A local health department uses an AI model to predict which neighborhoods are likely to experience low vaccination coverage. The model may help target outreach, but it does not prove why coverage is low or which outreach strategy will work. If leaders want to know whether mobile clinics, reminder messages, school partnerships, or community health workers caused an improvement, they need an evaluation design that supports causal inference.
+This distinction prevents overclaiming. The AI model can support prioritization and hypothesis generation, while causal methods can support evaluation of the chosen intervention. Both are valuable, but they answer different questions.</a:t>
             </a:r>
             <a:endParaRPr lang="en-US" dirty="0"/>
           </a:p>
@@ -700,8 +702,10 @@
           <a:p>
             <a:r>
               <a:rPr lang="en-US" dirty="0"/>
-              <a:t>Application to AI-Supported Workflows
-Predictive models can identify risk, but causal inference is needed to decide what action is likely to change that risk. Generative AI may help draft evaluation questions or summarize literature, but humans must verify methods and assumptions. AI-supported decision-making should label outputs clearly as prediction, association, causal evidence, or hypothesis.</a:t>
+              <a:t>Technical and Operational Deep Dive
+Causal inference begins with a clearly framed question. A useful structure is: among which population, what is the intervention or exposure, what is the comparison, what outcome is measured, and over what time period? Without this structure, teams may ask a model to answer a question that the available data cannot support.
+Confounding is one of the most important threats. For example, a program may appear to improve outcomes because participants were already more connected to care. Selection bias may occur when data include only people who interacted with a system. Temporal ambiguity may occur when it is unclear whether the exposure occurred before the outcome. AI can detect patterns in these data, but it does not automatically solve the causal design problem.
+Methods such as matching, regression adjustment, difference-in-differences, interrupted time series, regression discontinuity, and instrumental variables may be useful when randomization is not possible. These methods require assumptions that should be documented and reviewed. Public health staff should know when to consult epidemiologists, statisticians, or evaluators before making causal claims.</a:t>
             </a:r>
             <a:endParaRPr lang="en-US" dirty="0"/>
           </a:p>
@@ -789,10 +793,9 @@
           <a:p>
             <a:r>
               <a:rPr lang="en-US" dirty="0"/>
-              <a:t>Reflection Questions
-What AI outputs in your agency could be mistaken for causal evidence?
-Which decisions require knowing what intervention will change an outcome?
-What confounders are likely in your program area?</a:t>
+              <a:t>Risks, Failure Modes, and Guardrails
+The main failure mode is causal overreach. A dashboard or AI report may state that a program reduced disease, improved access, or changed behavior when the evidence only shows association. A guardrail is to require causal language review before results are used in reports, funding decisions, policy recommendations, or public communications.
+Another risk is inequitable inference. Data may be more complete for some groups than others, and interventions may reach groups differently. A guardrail is to examine whether assumptions hold across populations and whether subgroup effects or access barriers are hidden by aggregate results.</a:t>
             </a:r>
             <a:endParaRPr lang="en-US" dirty="0"/>
           </a:p>
@@ -880,9 +883,8 @@
           <a:p>
             <a:r>
               <a:rPr lang="en-US" dirty="0"/>
-              <a:t>Reflection Questions
-What comparison group could support evaluation?
-Who should review causal claims before public release?</a:t>
+              <a:t>Application to AI-Supported Workflows
+Predictive models can identify risk, but causal inference is needed to decide what action is likely to change that risk. Generative AI may help draft evaluation questions or summarize literature, but humans must verify methods and assumptions. AI-supported decision-making should label outputs clearly as prediction, association, causal evidence, or hypothesis.</a:t>
             </a:r>
             <a:endParaRPr lang="en-US" dirty="0"/>
           </a:p>
@@ -970,8 +972,10 @@
           <a:p>
             <a:r>
               <a:rPr lang="en-US" dirty="0"/>
-              <a:t>Practical Exercise
-Create a causal question framing worksheet for an AI-supported decision. Identify the population, intervention or exposure, comparison, outcome, time period, likely confounders, data limitations, and what evidence would be needed before making a causal claim.</a:t>
+              <a:t>Reflection Questions
+What AI outputs in your agency could be mistaken for causal evidence?
+Which decisions require knowing what intervention will change an outcome?
+What confounders are likely in your program area?</a:t>
             </a:r>
             <a:endParaRPr lang="en-US" dirty="0"/>
           </a:p>
@@ -1059,10 +1063,9 @@
           <a:p>
             <a:r>
               <a:rPr lang="en-US" dirty="0"/>
-              <a:t>Expected Artifact or Evidence
-Causal question framing worksheet
-List of assumptions and likely confounders
-Recommended evaluation design or expert consultation need</a:t>
+              <a:t>Reflection Questions
+What comparison group could support evaluation?
+Who should review causal claims before public release?</a:t>
             </a:r>
             <a:endParaRPr lang="en-US" dirty="0"/>
           </a:p>
@@ -1150,8 +1153,8 @@
           <a:p>
             <a:r>
               <a:rPr lang="en-US" dirty="0"/>
-              <a:t>Expected Artifact or Evidence
-Plain-language statement distinguishing prediction from causation</a:t>
+              <a:t>Practical Exercise
+Create a causal question framing worksheet for an AI-supported decision. Identify the population, intervention or exposure, comparison, outcome, time period, likely confounders, data limitations, and what evidence would be needed before making a causal claim.</a:t>
             </a:r>
             <a:endParaRPr lang="en-US" dirty="0"/>
           </a:p>
@@ -1239,11 +1242,10 @@
           <a:p>
             <a:r>
               <a:rPr lang="en-US" dirty="0"/>
-              <a:t>Expected Assignment
+              <a:t>Expected Artifact or Evidence
 Causal question framing worksheet
 List of assumptions and likely confounders
-Recommended evaluation design or expert consultation need
-Plain-language statement distinguishing prediction from causation</a:t>
+Recommended evaluation design or expert consultation need</a:t>
             </a:r>
             <a:endParaRPr lang="en-US" dirty="0"/>
           </a:p>
@@ -1331,12 +1333,8 @@
           <a:p>
             <a:r>
               <a:rPr lang="en-US" dirty="0"/>
-              <a:t>Knowledge Check
-1. Which statement best distinguishes prediction from causal inference?
-2. What is the best reason to assign an accountability owner?
-3. When should an AI-supported workflow be escalated for review?
-4. Which practice best supports public accountability?
-5. What should happen when data sources, policy, vendor configuration, or workflow use changes?</a:t>
+              <a:t>Expected Artifact or Evidence
+Plain-language statement distinguishing prediction from causation</a:t>
             </a:r>
             <a:endParaRPr lang="en-US" dirty="0"/>
           </a:p>
@@ -1424,12 +1422,11 @@
           <a:p>
             <a:r>
               <a:rPr lang="en-US" dirty="0"/>
-              <a:t>References and Resources
-CDC Public Health Data Strategy and Data Modernization resources: https://www.cdc.gov/public-health-data-strategy/php/about/index.html
-NIST Artificial Intelligence Risk Management Framework and NIST Generative AI Profile: https://www.nist.gov/publications/artificial-intelligence-risk-management-framework-generative-artificial-intelligence
-WHO Ethics and Governance of Artificial Intelligence for Health guidance: https://www.who.int/publications/i/item/9789240029200
-OWASP Top 10 for Large Language Model Applications: https://owasp.org/www-project-top-10-for-large-language-model-applications/
-ONC health IT, interoperability, and information blocking resources: https://www.healthit.gov/</a:t>
+              <a:t>Expected Assignment
+Causal question framing worksheet
+List of assumptions and likely confounders
+Recommended evaluation design or expert consultation need
+Plain-language statement distinguishing prediction from causation</a:t>
             </a:r>
             <a:endParaRPr lang="en-US" dirty="0"/>
           </a:p>
@@ -1609,8 +1606,12 @@
           <a:p>
             <a:r>
               <a:rPr lang="en-US" dirty="0"/>
-              <a:t>References and Resources
-Agency policies for privacy, public records, cybersecurity, procurement, civil rights, accessibility, language access, and emergency communications</a:t>
+              <a:t>Knowledge Check
+1. Which statement best distinguishes prediction from causal inference?
+2. What is the best reason to assign an accountability owner?
+3. When should an AI-supported workflow be escalated for review?
+4. Which practice best supports public accountability?
+5. What should happen when data sources, policy, vendor configuration, or workflow use changes?</a:t>
             </a:r>
             <a:endParaRPr lang="en-US" dirty="0"/>
           </a:p>
@@ -1634,6 +1635,188 @@
             <a:fld id="{F7021451-1387-4CA6-816F-3879F97B5CBC}" type="slidenum">
               <a:rPr lang="en-US"/>
               <a:t>20</a:t>
+            </a:fld>
+            <a:endParaRPr lang="en-US"/>
+          </a:p>
+        </p:txBody>
+      </p:sp>
+    </p:spTree>
+    <p:extLst>
+      <p:ext uri="{BB962C8B-B14F-4D97-AF65-F5344CB8AC3E}">
+        <p14:creationId xmlns:p14="http://schemas.microsoft.com/office/powerpoint/2010/main" val="1024086991"/>
+      </p:ext>
+    </p:extLst>
+  </p:cSld>
+  <p:clrMapOvr>
+    <a:masterClrMapping/>
+  </p:clrMapOvr>
+</p:notes>
+</file>
+
+<file path=ppt/notesSlides/notesSlide21.xml><?xml version="1.0" encoding="utf-8"?>
+<p:notes xmlns:a="http://schemas.openxmlformats.org/drawingml/2006/main" xmlns:r="http://schemas.openxmlformats.org/officeDocument/2006/relationships" xmlns:p="http://schemas.openxmlformats.org/presentationml/2006/main">
+  <p:cSld>
+    <p:spTree>
+      <p:nvGrpSpPr>
+        <p:cNvPr id="1" name=""/>
+        <p:cNvGrpSpPr/>
+        <p:nvPr/>
+      </p:nvGrpSpPr>
+      <p:grpSpPr>
+        <a:xfrm>
+          <a:off x="0" y="0"/>
+          <a:ext cx="0" cy="0"/>
+          <a:chOff x="0" y="0"/>
+          <a:chExt cx="0" cy="0"/>
+        </a:xfrm>
+      </p:grpSpPr>
+      <p:sp>
+        <p:nvSpPr>
+          <p:cNvPr id="2" name="Slide Image Placeholder 1"/>
+          <p:cNvSpPr>
+            <a:spLocks noGrp="1" noRot="1" noChangeAspect="1"/>
+          </p:cNvSpPr>
+          <p:nvPr>
+            <p:ph type="sldImg"/>
+          </p:nvPr>
+        </p:nvSpPr>
+        <p:spPr/>
+      </p:sp>
+      <p:sp>
+        <p:nvSpPr>
+          <p:cNvPr id="3" name="Notes Placeholder 2"/>
+          <p:cNvSpPr>
+            <a:spLocks noGrp="1"/>
+          </p:cNvSpPr>
+          <p:nvPr>
+            <p:ph type="body" idx="1"/>
+          </p:nvPr>
+        </p:nvSpPr>
+        <p:spPr/>
+        <p:txBody>
+          <a:bodyPr/>
+          <a:lstStyle/>
+          <a:p>
+            <a:r>
+              <a:rPr lang="en-US" dirty="0"/>
+              <a:t>References and Resources
+CDC Public Health Data Strategy and Data Modernization resources: https://www.cdc.gov/public-health-data-strategy/php/about/index.html
+NIST Artificial Intelligence Risk Management Framework and NIST Generative AI Profile: https://www.nist.gov/publications/artificial-intelligence-risk-management-framework-generative-artificial-intelligence
+WHO Ethics and Governance of Artificial Intelligence for Health guidance: https://www.who.int/publications/i/item/9789240029200
+OWASP Top 10 for Large Language Model Applications: https://owasp.org/www-project-top-10-for-large-language-model-applications/
+ONC health IT, interoperability, and information blocking resources: https://www.healthit.gov/</a:t>
+            </a:r>
+            <a:endParaRPr lang="en-US" dirty="0"/>
+          </a:p>
+        </p:txBody>
+      </p:sp>
+      <p:sp>
+        <p:nvSpPr>
+          <p:cNvPr id="4" name="Slide Number Placeholder 3"/>
+          <p:cNvSpPr>
+            <a:spLocks noGrp="1"/>
+          </p:cNvSpPr>
+          <p:nvPr>
+            <p:ph type="sldNum" sz="quarter" idx="10"/>
+          </p:nvPr>
+        </p:nvSpPr>
+        <p:spPr/>
+        <p:txBody>
+          <a:bodyPr/>
+          <a:lstStyle/>
+          <a:p>
+            <a:fld id="{F7021451-1387-4CA6-816F-3879F97B5CBC}" type="slidenum">
+              <a:rPr lang="en-US"/>
+              <a:t>21</a:t>
+            </a:fld>
+            <a:endParaRPr lang="en-US"/>
+          </a:p>
+        </p:txBody>
+      </p:sp>
+    </p:spTree>
+    <p:extLst>
+      <p:ext uri="{BB962C8B-B14F-4D97-AF65-F5344CB8AC3E}">
+        <p14:creationId xmlns:p14="http://schemas.microsoft.com/office/powerpoint/2010/main" val="1024086991"/>
+      </p:ext>
+    </p:extLst>
+  </p:cSld>
+  <p:clrMapOvr>
+    <a:masterClrMapping/>
+  </p:clrMapOvr>
+</p:notes>
+</file>
+
+<file path=ppt/notesSlides/notesSlide22.xml><?xml version="1.0" encoding="utf-8"?>
+<p:notes xmlns:a="http://schemas.openxmlformats.org/drawingml/2006/main" xmlns:r="http://schemas.openxmlformats.org/officeDocument/2006/relationships" xmlns:p="http://schemas.openxmlformats.org/presentationml/2006/main">
+  <p:cSld>
+    <p:spTree>
+      <p:nvGrpSpPr>
+        <p:cNvPr id="1" name=""/>
+        <p:cNvGrpSpPr/>
+        <p:nvPr/>
+      </p:nvGrpSpPr>
+      <p:grpSpPr>
+        <a:xfrm>
+          <a:off x="0" y="0"/>
+          <a:ext cx="0" cy="0"/>
+          <a:chOff x="0" y="0"/>
+          <a:chExt cx="0" cy="0"/>
+        </a:xfrm>
+      </p:grpSpPr>
+      <p:sp>
+        <p:nvSpPr>
+          <p:cNvPr id="2" name="Slide Image Placeholder 1"/>
+          <p:cNvSpPr>
+            <a:spLocks noGrp="1" noRot="1" noChangeAspect="1"/>
+          </p:cNvSpPr>
+          <p:nvPr>
+            <p:ph type="sldImg"/>
+          </p:nvPr>
+        </p:nvSpPr>
+        <p:spPr/>
+      </p:sp>
+      <p:sp>
+        <p:nvSpPr>
+          <p:cNvPr id="3" name="Notes Placeholder 2"/>
+          <p:cNvSpPr>
+            <a:spLocks noGrp="1"/>
+          </p:cNvSpPr>
+          <p:nvPr>
+            <p:ph type="body" idx="1"/>
+          </p:nvPr>
+        </p:nvSpPr>
+        <p:spPr/>
+        <p:txBody>
+          <a:bodyPr/>
+          <a:lstStyle/>
+          <a:p>
+            <a:r>
+              <a:rPr lang="en-US" dirty="0"/>
+              <a:t>References and Resources
+Agency policies for privacy, public records, cybersecurity, procurement, civil rights, accessibility, language access, and emergency communications</a:t>
+            </a:r>
+            <a:endParaRPr lang="en-US" dirty="0"/>
+          </a:p>
+        </p:txBody>
+      </p:sp>
+      <p:sp>
+        <p:nvSpPr>
+          <p:cNvPr id="4" name="Slide Number Placeholder 3"/>
+          <p:cNvSpPr>
+            <a:spLocks noGrp="1"/>
+          </p:cNvSpPr>
+          <p:nvPr>
+            <p:ph type="sldNum" sz="quarter" idx="10"/>
+          </p:nvPr>
+        </p:nvSpPr>
+        <p:spPr/>
+        <p:txBody>
+          <a:bodyPr/>
+          <a:lstStyle/>
+          <a:p>
+            <a:fld id="{F7021451-1387-4CA6-816F-3879F97B5CBC}" type="slidenum">
+              <a:rPr lang="en-US"/>
+              <a:t>22</a:t>
             </a:fld>
             <a:endParaRPr lang="en-US"/>
           </a:p>
@@ -1698,12 +1881,11 @@
           <a:p>
             <a:r>
               <a:rPr lang="en-US" dirty="0"/>
-              <a:t>Learning Objectives
-Distinguish prediction from causal inference in public health AI.
-Explain why correlation and prediction do not establish causation.
-Identify confounding, selection bias, collider bias, and temporal ambiguity in public health data.
-Recognize when a decision requires causal evidence rather than risk prediction alone.
-Identify appropriate evidence sources for evaluating interventions or policy effects.</a:t>
+              <a:t>Related Playbook Plays
+Play 11: Build and Deploy AI Solutions - This lesson informs Play 11 by helping learners connect the lesson topic to build and deploy ai solutions work in the AI Playbook.
+Play 7: Prioritize Use Cases - This lesson informs Play 7 by helping learners connect the lesson topic to prioritize use cases work in the AI Playbook sequence.
+Play 1: Vision &amp; Guardrails - This lesson informs Play 1 by helping learners connect the lesson topic to vision &amp; guardrails work in the AI Playbook sequence.
+Play 2: Readiness Assessment - This lesson informs Play 2 by helping learners connect the lesson topic to readiness assessment work in the AI Playbook sequence.</a:t>
             </a:r>
             <a:endParaRPr lang="en-US" dirty="0"/>
           </a:p>
@@ -1791,8 +1973,13 @@
           <a:p>
             <a:r>
               <a:rPr lang="en-US" dirty="0"/>
-              <a:t>Learning Objectives
-Create a causal question framing worksheet for an AI-supported decision.</a:t>
+              <a:t>Related Toolkit Resources
+Tool 3: Equity Impact Assessment Checklist (Checklist) - Use this tool to complete or strengthen the practical exercise for the module using fictional, de-identified, or generalized.
+Tool 4: AI Policy Landscape Scan (Worksheet) - Use AI Policy Landscape Scan to translate this lesson into a documented public health AI planning, governance, implementation,.
+Tool 5: AI Environmental and Resource Impact Review (Checklist) - Use AI Environmental and Resource Impact Review to translate this lesson into a documented public health AI planning,.
+Tool 6: Human-Centered AI Decision Rule Checklist (Checklist) - Use Human-Centered AI Decision Rule Checklist to translate this lesson into a documented public health AI planning, governance,.
+Tool 8: AI Project Charter (Planning) - Use AI Project Charter to translate this lesson into a documented public health AI planning, governance, implementation, or.
+Tool 9: Data Quality Assessment Checklist (Checklist) - Use this tool to complete or strengthen the practical exercise for the module using fictional, de-identified, or generalized.</a:t>
             </a:r>
             <a:endParaRPr lang="en-US" dirty="0"/>
           </a:p>
@@ -1880,9 +2067,12 @@
           <a:p>
             <a:r>
               <a:rPr lang="en-US" dirty="0"/>
-              <a:t>Module Overview
-AI models often predict what is likely to happen, but public health leaders frequently need to know what action will change an outcome. This module helps learners distinguish prediction from causal inference so AI outputs are not misused as evidence that a program, policy, or intervention caused an observed effect.
-Learners examine confounding, bias, comparison groups, counterfactual reasoning, directed acyclic graphs, and quasi-experimental designs at a practical level. The purpose is not to turn every learner into a causal methods expert. The purpose is to help public health teams recognize when causal claims require stronger evidence than a predictive model can provide.</a:t>
+              <a:t>Learning Objectives
+Distinguish prediction from causal inference in public health AI.
+Explain why correlation and prediction do not establish causation.
+Identify confounding, selection bias, collider bias, and temporal ambiguity in public health data.
+Recognize when a decision requires causal evidence rather than risk prediction alone.
+Identify appropriate evidence sources for evaluating interventions or policy effects.</a:t>
             </a:r>
             <a:endParaRPr lang="en-US" dirty="0"/>
           </a:p>
@@ -1970,12 +2160,8 @@
           <a:p>
             <a:r>
               <a:rPr lang="en-US" dirty="0"/>
-              <a:t>Definitions
-Prediction: An estimate of what is likely to happen based on observed patterns.
-Causal inference: The process of estimating whether and how an exposure, policy, program, or intervention changes an outcome.
-Confounding: A distortion that occurs when another factor is related to both the exposure and the outcome.
-Counterfactual: The outcome that would have occurred under a different condition or intervention.
-Quasi-experimental design: An evaluation approach that estimates causal effects without random assignment.</a:t>
+              <a:t>Learning Objectives
+Create a causal question framing worksheet for an AI-supported decision.</a:t>
             </a:r>
             <a:endParaRPr lang="en-US" dirty="0"/>
           </a:p>
@@ -2063,9 +2249,9 @@
           <a:p>
             <a:r>
               <a:rPr lang="en-US" dirty="0"/>
-              <a:t>Why This Topic Matters for Public Health AI
-AI can make weak evidence appear stronger than it is. A model may predict which communities have higher hospitalization risk, but that does not prove which intervention will reduce hospitalization. A model may find that people who receive a service have better outcomes, but that pattern may reflect who was able to access the service rather than the effect of the service itself.
-Public health decisions often involve resource allocation, program design, policy evaluation, and equity tradeoffs. These decisions require clarity about whether the agency is asking a prediction question, an explanation question, or an intervention question. Causal inference helps agencies avoid treating AI-generated associations as proof of program effectiveness.</a:t>
+              <a:t>Module Overview
+AI models often predict what is likely to happen, but public health leaders frequently need to know what action will change an outcome. This module helps learners distinguish prediction from causal inference so AI outputs are not misused as evidence that a program, policy, or intervention caused an observed effect.
+Learners examine confounding, bias, comparison groups, counterfactual reasoning, directed acyclic graphs, and quasi-experimental designs at a practical level. The purpose is not to turn every learner into a causal methods expert. The purpose is to help public health teams recognize when causal claims require stronger evidence than a predictive model can provide.</a:t>
             </a:r>
             <a:endParaRPr lang="en-US" dirty="0"/>
           </a:p>
@@ -2153,9 +2339,12 @@
           <a:p>
             <a:r>
               <a:rPr lang="en-US" dirty="0"/>
-              <a:t>Public Health Example
-A local health department uses an AI model to predict which neighborhoods are likely to experience low vaccination coverage. The model may help target outreach, but it does not prove why coverage is low or which outreach strategy will work. If leaders want to know whether mobile clinics, reminder messages, school partnerships, or community health workers caused an improvement, they need an evaluation design that supports causal inference.
-This distinction prevents overclaiming. The AI model can support prioritization and hypothesis generation, while causal methods can support evaluation of the chosen intervention. Both are valuable, but they answer different questions.</a:t>
+              <a:t>Definitions
+Prediction: An estimate of what is likely to happen based on observed patterns.
+Causal inference: The process of estimating whether and how an exposure, policy, program, or intervention changes an outcome.
+Confounding: A distortion that occurs when another factor is related to both the exposure and the outcome.
+Counterfactual: The outcome that would have occurred under a different condition or intervention.
+Quasi-experimental design: An evaluation approach that estimates causal effects without random assignment.</a:t>
             </a:r>
             <a:endParaRPr lang="en-US" dirty="0"/>
           </a:p>
@@ -2243,10 +2432,9 @@
           <a:p>
             <a:r>
               <a:rPr lang="en-US" dirty="0"/>
-              <a:t>Technical and Operational Deep Dive
-Causal inference begins with a clearly framed question. A useful structure is: among which population, what is the intervention or exposure, what is the comparison, what outcome is measured, and over what time period? Without this structure, teams may ask a model to answer a question that the available data cannot support.
-Confounding is one of the most important threats. For example, a program may appear to improve outcomes because participants were already more connected to care. Selection bias may occur when data include only people who interacted with a system. Temporal ambiguity may occur when it is unclear whether the exposure occurred before the outcome. AI can detect patterns in these data, but it does not automatically solve the causal design problem.
-Methods such as matching, regression adjustment, difference-in-differences, interrupted time series, regression discontinuity, and instrumental variables may be useful when randomization is not possible. These methods require assumptions that should be documented and reviewed. Public health staff should know when to consult epidemiologists, statisticians, or evaluators before making causal claims.</a:t>
+              <a:t>Why This Topic Matters for Public Health AI
+AI can make weak evidence appear stronger than it is. A model may predict which communities have higher hospitalization risk, but that does not prove which intervention will reduce hospitalization. A model may find that people who receive a service have better outcomes, but that pattern may reflect who was able to access the service rather than the effect of the service itself.
+Public health decisions often involve resource allocation, program design, policy evaluation, and equity tradeoffs. These decisions require clarity about whether the agency is asking a prediction question, an explanation question, or an intervention question. Causal inference helps agencies avoid treating AI-generated associations as proof of program effectiveness.</a:t>
             </a:r>
             <a:endParaRPr lang="en-US" dirty="0"/>
           </a:p>
@@ -2869,7 +3057,32 @@
       </p:sp>
       <p:sp>
         <p:nvSpPr>
-          <p:cNvPr id="3" name="Text 1"/>
+          <p:cNvPr id="3" name="Shape 1"/>
+          <p:cNvSpPr/>
+          <p:nvPr/>
+        </p:nvSpPr>
+        <p:spPr>
+          <a:xfrm>
+            <a:off x="0" y="164592"/>
+            <a:ext cx="146304" cy="6693408"/>
+          </a:xfrm>
+          <a:prstGeom prst="rect">
+            <a:avLst/>
+          </a:prstGeom>
+          <a:solidFill>
+            <a:srgbClr val="2F8A28"/>
+          </a:solidFill>
+          <a:ln w="12700">
+            <a:solidFill>
+              <a:srgbClr val="2F8A28"/>
+            </a:solidFill>
+            <a:prstDash val="solid"/>
+          </a:ln>
+        </p:spPr>
+      </p:sp>
+      <p:sp>
+        <p:nvSpPr>
+          <p:cNvPr id="4" name="Text 2"/>
           <p:cNvSpPr/>
           <p:nvPr/>
         </p:nvSpPr>
@@ -2908,7 +3121,7 @@
       </p:sp>
       <p:sp>
         <p:nvSpPr>
-          <p:cNvPr id="4" name="Text 2"/>
+          <p:cNvPr id="5" name="Text 3"/>
           <p:cNvSpPr/>
           <p:nvPr/>
         </p:nvSpPr>
@@ -2947,7 +3160,7 @@
       </p:sp>
       <p:sp>
         <p:nvSpPr>
-          <p:cNvPr id="5" name="Text 3"/>
+          <p:cNvPr id="6" name="Text 4"/>
           <p:cNvSpPr/>
           <p:nvPr/>
         </p:nvSpPr>
@@ -2986,13 +3199,77 @@
       </p:sp>
       <p:sp>
         <p:nvSpPr>
-          <p:cNvPr id="6" name="Text 4"/>
+          <p:cNvPr id="7" name="Shape 5"/>
           <p:cNvSpPr/>
           <p:nvPr/>
         </p:nvSpPr>
         <p:spPr>
           <a:xfrm>
             <a:off x="640080" y="658368"/>
+            <a:ext cx="420624" cy="420624"/>
+          </a:xfrm>
+          <a:prstGeom prst="ellipse">
+            <a:avLst/>
+          </a:prstGeom>
+          <a:solidFill>
+            <a:srgbClr val="0068B7"/>
+          </a:solidFill>
+          <a:ln w="12700">
+            <a:solidFill>
+              <a:srgbClr val="0068B7"/>
+            </a:solidFill>
+            <a:prstDash val="solid"/>
+          </a:ln>
+        </p:spPr>
+      </p:sp>
+      <p:sp>
+        <p:nvSpPr>
+          <p:cNvPr id="8" name="Text 6"/>
+          <p:cNvSpPr/>
+          <p:nvPr/>
+        </p:nvSpPr>
+        <p:spPr>
+          <a:xfrm>
+            <a:off x="640080" y="731520"/>
+            <a:ext cx="420624" cy="164592"/>
+          </a:xfrm>
+          <a:prstGeom prst="rect">
+            <a:avLst/>
+          </a:prstGeom>
+          <a:noFill/>
+          <a:ln/>
+        </p:spPr>
+        <p:txBody>
+          <a:bodyPr wrap="square" lIns="0" tIns="0" rIns="0" bIns="0" rtlCol="0" anchor="ctr"/>
+          <a:lstStyle/>
+          <a:p>
+            <a:pPr algn="ctr" indent="0" marL="0">
+              <a:buNone/>
+            </a:pPr>
+            <a:r>
+              <a:rPr lang="en-US" sz="1100" b="1" dirty="0">
+                <a:solidFill>
+                  <a:srgbClr val="FFFFFF"/>
+                </a:solidFill>
+                <a:latin typeface="Aptos" pitchFamily="34" charset="0"/>
+                <a:ea typeface="Aptos" pitchFamily="34" charset="-122"/>
+                <a:cs typeface="Aptos" pitchFamily="34" charset="-120"/>
+              </a:rPr>
+              <a:t>5</a:t>
+            </a:r>
+            <a:endParaRPr lang="en-US" sz="1100" dirty="0"/>
+          </a:p>
+        </p:txBody>
+      </p:sp>
+      <p:sp>
+        <p:nvSpPr>
+          <p:cNvPr id="9" name="Text 7"/>
+          <p:cNvSpPr/>
+          <p:nvPr/>
+        </p:nvSpPr>
+        <p:spPr>
+          <a:xfrm>
+            <a:off x="640080" y="621792"/>
             <a:ext cx="10881360" cy="566928"/>
           </a:xfrm>
           <a:prstGeom prst="rect">
@@ -3019,7 +3296,7 @@
                 <a:ea typeface="Aptos Display" pitchFamily="34" charset="-122"/>
                 <a:cs typeface="Aptos Display" pitchFamily="34" charset="-120"/>
               </a:rPr>
-              <a:t>Risks, Failure Modes, and Guardrails</a:t>
+              <a:t>Public Health Example</a:t>
             </a:r>
             <a:endParaRPr lang="en-US" sz="2700" dirty="0"/>
           </a:p>
@@ -3027,32 +3304,178 @@
       </p:sp>
       <p:sp>
         <p:nvSpPr>
-          <p:cNvPr id="7" name="Text 5"/>
-          <p:cNvSpPr/>
-          <p:nvPr/>
-        </p:nvSpPr>
-        <p:spPr>
-          <a:xfrm>
-            <a:off x="822960" y="1325880"/>
-            <a:ext cx="10378440" cy="4800600"/>
-          </a:xfrm>
-          <a:prstGeom prst="rect">
-            <a:avLst/>
-          </a:prstGeom>
-          <a:noFill/>
-          <a:ln/>
-        </p:spPr>
-        <p:txBody>
-          <a:bodyPr wrap="square" lIns="1016" tIns="1016" rIns="1016" bIns="1016" rtlCol="0" anchor="t">
+          <p:cNvPr id="10" name="Text 8"/>
+          <p:cNvSpPr/>
+          <p:nvPr/>
+        </p:nvSpPr>
+        <p:spPr>
+          <a:xfrm>
+            <a:off x="868680" y="1417320"/>
+            <a:ext cx="6675120" cy="4434840"/>
+          </a:xfrm>
+          <a:prstGeom prst="rect">
+            <a:avLst/>
+          </a:prstGeom>
+          <a:noFill/>
+          <a:ln/>
+        </p:spPr>
+        <p:txBody>
+          <a:bodyPr wrap="square" lIns="635" tIns="635" rIns="635" bIns="635" rtlCol="0" anchor="t">
             <a:normAutofit/>
           </a:bodyPr>
           <a:lstStyle/>
           <a:p>
+            <a:r>
+              <a:rPr lang="en-US" sz="1700" dirty="0">
+                <a:solidFill>
+                  <a:srgbClr val="17364A"/>
+                </a:solidFill>
+                <a:latin typeface="Aptos" pitchFamily="34" charset="0"/>
+                <a:ea typeface="Aptos" pitchFamily="34" charset="-122"/>
+                <a:cs typeface="Aptos" pitchFamily="34" charset="-120"/>
+              </a:rPr>
+              <a:t>A local health department uses an AI model to predict which neighborhoods are likely to experience low vaccination coverage.</a:t>
+            </a:r>
+            <a:endParaRPr lang="en-US" sz="1700" dirty="0"/>
+          </a:p>
+          <a:p>
+            <a:r>
+              <a:rPr lang="en-US" sz="1700" dirty="0">
+                <a:solidFill>
+                  <a:srgbClr val="17364A"/>
+                </a:solidFill>
+                <a:latin typeface="Aptos" pitchFamily="34" charset="0"/>
+                <a:ea typeface="Aptos" pitchFamily="34" charset="-122"/>
+                <a:cs typeface="Aptos" pitchFamily="34" charset="-120"/>
+              </a:rPr>
+              <a:t>The model may help target outreach, but it does not prove why coverage is low or which outreach strategy will work.</a:t>
+            </a:r>
+            <a:endParaRPr lang="en-US" sz="1700" dirty="0"/>
+          </a:p>
+          <a:p>
+            <a:r>
+              <a:rPr lang="en-US" sz="1700" dirty="0">
+                <a:solidFill>
+                  <a:srgbClr val="17364A"/>
+                </a:solidFill>
+                <a:latin typeface="Aptos" pitchFamily="34" charset="0"/>
+                <a:ea typeface="Aptos" pitchFamily="34" charset="-122"/>
+                <a:cs typeface="Aptos" pitchFamily="34" charset="-120"/>
+              </a:rPr>
+              <a:t>If leaders want to know whether mobile clinics, reminder messages, school partnerships, or community health workers caused.</a:t>
+            </a:r>
+            <a:endParaRPr lang="en-US" sz="1700" dirty="0"/>
+          </a:p>
+          <a:p>
+            <a:r>
+              <a:rPr lang="en-US" sz="1700" dirty="0">
+                <a:solidFill>
+                  <a:srgbClr val="17364A"/>
+                </a:solidFill>
+                <a:latin typeface="Aptos" pitchFamily="34" charset="0"/>
+                <a:ea typeface="Aptos" pitchFamily="34" charset="-122"/>
+                <a:cs typeface="Aptos" pitchFamily="34" charset="-120"/>
+              </a:rPr>
+              <a:t>This distinction prevents overclaiming.</a:t>
+            </a:r>
+            <a:endParaRPr lang="en-US" sz="1700" dirty="0"/>
+          </a:p>
+        </p:txBody>
+      </p:sp>
+      <p:sp>
+        <p:nvSpPr>
+          <p:cNvPr id="11" name="Shape 9"/>
+          <p:cNvSpPr/>
+          <p:nvPr/>
+        </p:nvSpPr>
+        <p:spPr>
+          <a:xfrm>
+            <a:off x="7909560" y="1417320"/>
+            <a:ext cx="3154680" cy="1828800"/>
+          </a:xfrm>
+          <a:prstGeom prst="roundRect">
+            <a:avLst>
+              <a:gd name="adj" fmla="val 6000"/>
+            </a:avLst>
+          </a:prstGeom>
+          <a:solidFill>
+            <a:srgbClr val="EEF8ED"/>
+          </a:solidFill>
+          <a:ln w="12700">
+            <a:solidFill>
+              <a:srgbClr val="B9D7E6"/>
+            </a:solidFill>
+            <a:prstDash val="solid"/>
+          </a:ln>
+        </p:spPr>
+      </p:sp>
+      <p:sp>
+        <p:nvSpPr>
+          <p:cNvPr id="12" name="Text 10"/>
+          <p:cNvSpPr/>
+          <p:nvPr/>
+        </p:nvSpPr>
+        <p:spPr>
+          <a:xfrm>
+            <a:off x="8074152" y="1563624"/>
+            <a:ext cx="2825496" cy="201168"/>
+          </a:xfrm>
+          <a:prstGeom prst="rect">
+            <a:avLst/>
+          </a:prstGeom>
+          <a:noFill/>
+          <a:ln/>
+        </p:spPr>
+        <p:txBody>
+          <a:bodyPr wrap="square" lIns="0" tIns="0" rIns="0" bIns="0" rtlCol="0" anchor="ctr"/>
+          <a:lstStyle/>
+          <a:p>
             <a:pPr indent="0" marL="0">
               <a:buNone/>
             </a:pPr>
             <a:r>
-              <a:rPr lang="en-US" sz="1420" dirty="0">
+              <a:rPr lang="en-US" sz="950" b="1" dirty="0">
+                <a:solidFill>
+                  <a:srgbClr val="0068B7"/>
+                </a:solidFill>
+                <a:latin typeface="Aptos" pitchFamily="34" charset="0"/>
+                <a:ea typeface="Aptos" pitchFamily="34" charset="-122"/>
+                <a:cs typeface="Aptos" pitchFamily="34" charset="-120"/>
+              </a:rPr>
+              <a:t>Key idea</a:t>
+            </a:r>
+            <a:endParaRPr lang="en-US" sz="950" dirty="0"/>
+          </a:p>
+        </p:txBody>
+      </p:sp>
+      <p:sp>
+        <p:nvSpPr>
+          <p:cNvPr id="13" name="Text 11"/>
+          <p:cNvSpPr/>
+          <p:nvPr/>
+        </p:nvSpPr>
+        <p:spPr>
+          <a:xfrm>
+            <a:off x="8074152" y="1856232"/>
+            <a:ext cx="2825496" cy="1261872"/>
+          </a:xfrm>
+          <a:prstGeom prst="rect">
+            <a:avLst/>
+          </a:prstGeom>
+          <a:noFill/>
+          <a:ln/>
+        </p:spPr>
+        <p:txBody>
+          <a:bodyPr wrap="square" lIns="0" tIns="0" rIns="0" bIns="0" rtlCol="0" anchor="t">
+            <a:normAutofit/>
+          </a:bodyPr>
+          <a:lstStyle/>
+          <a:p>
+            <a:pPr indent="0" marL="0">
+              <a:buNone/>
+            </a:pPr>
+            <a:r>
+              <a:rPr lang="en-US" sz="1250" dirty="0">
                 <a:solidFill>
                   <a:srgbClr val="17364A"/>
                 </a:solidFill>
@@ -3060,9 +3483,116 @@
                 <a:ea typeface="Aptos" pitchFamily="34" charset="-122"/>
                 <a:cs typeface="Aptos" pitchFamily="34" charset="-120"/>
               </a:rPr>
-              <a:t>The main failure mode is causal overreach. A dashboard or AI report may state that a program reduced disease, improved access, or changed behavior when the evidence only shows association. A guardrail is to require causal language review before results are used in reports, funding decisions, policy recommendations, or public communications. Another risk is inequitable inference. Data may be more complete for some groups than others, and interventions may reach groups differently. A guardrail is to examine whether assumptions hold across populations and whether subgroup effects or access barriers are hidden by aggregate results.</a:t>
-            </a:r>
-            <a:endParaRPr lang="en-US" sz="1420" dirty="0"/>
+              <a:t>A local health department uses an AI model to predict which neighborhoods are likely to experience low vaccination coverage.</a:t>
+            </a:r>
+            <a:endParaRPr lang="en-US" sz="1250" dirty="0"/>
+          </a:p>
+        </p:txBody>
+      </p:sp>
+      <p:sp>
+        <p:nvSpPr>
+          <p:cNvPr id="14" name="Shape 12"/>
+          <p:cNvSpPr/>
+          <p:nvPr/>
+        </p:nvSpPr>
+        <p:spPr>
+          <a:xfrm>
+            <a:off x="7909560" y="3520440"/>
+            <a:ext cx="3154680" cy="1737360"/>
+          </a:xfrm>
+          <a:prstGeom prst="roundRect">
+            <a:avLst>
+              <a:gd name="adj" fmla="val 6316"/>
+            </a:avLst>
+          </a:prstGeom>
+          <a:solidFill>
+            <a:srgbClr val="EAF6F8"/>
+          </a:solidFill>
+          <a:ln w="12700">
+            <a:solidFill>
+              <a:srgbClr val="B9D7E6"/>
+            </a:solidFill>
+            <a:prstDash val="solid"/>
+          </a:ln>
+        </p:spPr>
+      </p:sp>
+      <p:sp>
+        <p:nvSpPr>
+          <p:cNvPr id="15" name="Text 13"/>
+          <p:cNvSpPr/>
+          <p:nvPr/>
+        </p:nvSpPr>
+        <p:spPr>
+          <a:xfrm>
+            <a:off x="8074152" y="3666744"/>
+            <a:ext cx="2825496" cy="201168"/>
+          </a:xfrm>
+          <a:prstGeom prst="rect">
+            <a:avLst/>
+          </a:prstGeom>
+          <a:noFill/>
+          <a:ln/>
+        </p:spPr>
+        <p:txBody>
+          <a:bodyPr wrap="square" lIns="0" tIns="0" rIns="0" bIns="0" rtlCol="0" anchor="ctr"/>
+          <a:lstStyle/>
+          <a:p>
+            <a:pPr indent="0" marL="0">
+              <a:buNone/>
+            </a:pPr>
+            <a:r>
+              <a:rPr lang="en-US" sz="950" b="1" dirty="0">
+                <a:solidFill>
+                  <a:srgbClr val="0068B7"/>
+                </a:solidFill>
+                <a:latin typeface="Aptos" pitchFamily="34" charset="0"/>
+                <a:ea typeface="Aptos" pitchFamily="34" charset="-122"/>
+                <a:cs typeface="Aptos" pitchFamily="34" charset="-120"/>
+              </a:rPr>
+              <a:t>Use this for</a:t>
+            </a:r>
+            <a:endParaRPr lang="en-US" sz="950" dirty="0"/>
+          </a:p>
+        </p:txBody>
+      </p:sp>
+      <p:sp>
+        <p:nvSpPr>
+          <p:cNvPr id="16" name="Text 14"/>
+          <p:cNvSpPr/>
+          <p:nvPr/>
+        </p:nvSpPr>
+        <p:spPr>
+          <a:xfrm>
+            <a:off x="8074152" y="3959352"/>
+            <a:ext cx="2825496" cy="1170432"/>
+          </a:xfrm>
+          <a:prstGeom prst="rect">
+            <a:avLst/>
+          </a:prstGeom>
+          <a:noFill/>
+          <a:ln/>
+        </p:spPr>
+        <p:txBody>
+          <a:bodyPr wrap="square" lIns="0" tIns="0" rIns="0" bIns="0" rtlCol="0" anchor="t">
+            <a:normAutofit/>
+          </a:bodyPr>
+          <a:lstStyle/>
+          <a:p>
+            <a:pPr indent="0" marL="0">
+              <a:buNone/>
+            </a:pPr>
+            <a:r>
+              <a:rPr lang="en-US" sz="1250" dirty="0">
+                <a:solidFill>
+                  <a:srgbClr val="17364A"/>
+                </a:solidFill>
+                <a:latin typeface="Aptos" pitchFamily="34" charset="0"/>
+                <a:ea typeface="Aptos" pitchFamily="34" charset="-122"/>
+                <a:cs typeface="Aptos" pitchFamily="34" charset="-120"/>
+              </a:rPr>
+              <a:t>Connect the concept to public health decisions, safeguards, documentation, or implementation work.</a:t>
+            </a:r>
+            <a:endParaRPr lang="en-US" sz="1250" dirty="0"/>
           </a:p>
         </p:txBody>
       </p:sp>
@@ -3125,7 +3655,32 @@
       </p:sp>
       <p:sp>
         <p:nvSpPr>
-          <p:cNvPr id="3" name="Text 1"/>
+          <p:cNvPr id="3" name="Shape 1"/>
+          <p:cNvSpPr/>
+          <p:nvPr/>
+        </p:nvSpPr>
+        <p:spPr>
+          <a:xfrm>
+            <a:off x="0" y="164592"/>
+            <a:ext cx="146304" cy="6693408"/>
+          </a:xfrm>
+          <a:prstGeom prst="rect">
+            <a:avLst/>
+          </a:prstGeom>
+          <a:solidFill>
+            <a:srgbClr val="2F8A28"/>
+          </a:solidFill>
+          <a:ln w="12700">
+            <a:solidFill>
+              <a:srgbClr val="2F8A28"/>
+            </a:solidFill>
+            <a:prstDash val="solid"/>
+          </a:ln>
+        </p:spPr>
+      </p:sp>
+      <p:sp>
+        <p:nvSpPr>
+          <p:cNvPr id="4" name="Text 2"/>
           <p:cNvSpPr/>
           <p:nvPr/>
         </p:nvSpPr>
@@ -3164,7 +3719,7 @@
       </p:sp>
       <p:sp>
         <p:nvSpPr>
-          <p:cNvPr id="4" name="Text 2"/>
+          <p:cNvPr id="5" name="Text 3"/>
           <p:cNvSpPr/>
           <p:nvPr/>
         </p:nvSpPr>
@@ -3203,7 +3758,7 @@
       </p:sp>
       <p:sp>
         <p:nvSpPr>
-          <p:cNvPr id="5" name="Text 3"/>
+          <p:cNvPr id="6" name="Text 4"/>
           <p:cNvSpPr/>
           <p:nvPr/>
         </p:nvSpPr>
@@ -3242,13 +3797,77 @@
       </p:sp>
       <p:sp>
         <p:nvSpPr>
-          <p:cNvPr id="6" name="Text 4"/>
+          <p:cNvPr id="7" name="Shape 5"/>
           <p:cNvSpPr/>
           <p:nvPr/>
         </p:nvSpPr>
         <p:spPr>
           <a:xfrm>
             <a:off x="640080" y="658368"/>
+            <a:ext cx="420624" cy="420624"/>
+          </a:xfrm>
+          <a:prstGeom prst="ellipse">
+            <a:avLst/>
+          </a:prstGeom>
+          <a:solidFill>
+            <a:srgbClr val="0068B7"/>
+          </a:solidFill>
+          <a:ln w="12700">
+            <a:solidFill>
+              <a:srgbClr val="0068B7"/>
+            </a:solidFill>
+            <a:prstDash val="solid"/>
+          </a:ln>
+        </p:spPr>
+      </p:sp>
+      <p:sp>
+        <p:nvSpPr>
+          <p:cNvPr id="8" name="Text 6"/>
+          <p:cNvSpPr/>
+          <p:nvPr/>
+        </p:nvSpPr>
+        <p:spPr>
+          <a:xfrm>
+            <a:off x="640080" y="731520"/>
+            <a:ext cx="420624" cy="164592"/>
+          </a:xfrm>
+          <a:prstGeom prst="rect">
+            <a:avLst/>
+          </a:prstGeom>
+          <a:noFill/>
+          <a:ln/>
+        </p:spPr>
+        <p:txBody>
+          <a:bodyPr wrap="square" lIns="0" tIns="0" rIns="0" bIns="0" rtlCol="0" anchor="ctr"/>
+          <a:lstStyle/>
+          <a:p>
+            <a:pPr algn="ctr" indent="0" marL="0">
+              <a:buNone/>
+            </a:pPr>
+            <a:r>
+              <a:rPr lang="en-US" sz="1100" b="1" dirty="0">
+                <a:solidFill>
+                  <a:srgbClr val="FFFFFF"/>
+                </a:solidFill>
+                <a:latin typeface="Aptos" pitchFamily="34" charset="0"/>
+                <a:ea typeface="Aptos" pitchFamily="34" charset="-122"/>
+                <a:cs typeface="Aptos" pitchFamily="34" charset="-120"/>
+              </a:rPr>
+              <a:t>6</a:t>
+            </a:r>
+            <a:endParaRPr lang="en-US" sz="1100" dirty="0"/>
+          </a:p>
+        </p:txBody>
+      </p:sp>
+      <p:sp>
+        <p:nvSpPr>
+          <p:cNvPr id="9" name="Text 7"/>
+          <p:cNvSpPr/>
+          <p:nvPr/>
+        </p:nvSpPr>
+        <p:spPr>
+          <a:xfrm>
+            <a:off x="640080" y="621792"/>
             <a:ext cx="10881360" cy="566928"/>
           </a:xfrm>
           <a:prstGeom prst="rect">
@@ -3275,7 +3894,7 @@
                 <a:ea typeface="Aptos Display" pitchFamily="34" charset="-122"/>
                 <a:cs typeface="Aptos Display" pitchFamily="34" charset="-120"/>
               </a:rPr>
-              <a:t>Application to AI-Supported Workflows</a:t>
+              <a:t>Technical and Operational Deep Dive</a:t>
             </a:r>
             <a:endParaRPr lang="en-US" sz="2700" dirty="0"/>
           </a:p>
@@ -3283,32 +3902,178 @@
       </p:sp>
       <p:sp>
         <p:nvSpPr>
-          <p:cNvPr id="7" name="Text 5"/>
-          <p:cNvSpPr/>
-          <p:nvPr/>
-        </p:nvSpPr>
-        <p:spPr>
-          <a:xfrm>
-            <a:off x="822960" y="1325880"/>
-            <a:ext cx="10378440" cy="4800600"/>
-          </a:xfrm>
-          <a:prstGeom prst="rect">
-            <a:avLst/>
-          </a:prstGeom>
-          <a:noFill/>
-          <a:ln/>
-        </p:spPr>
-        <p:txBody>
-          <a:bodyPr wrap="square" lIns="1016" tIns="1016" rIns="1016" bIns="1016" rtlCol="0" anchor="t">
+          <p:cNvPr id="10" name="Text 8"/>
+          <p:cNvSpPr/>
+          <p:nvPr/>
+        </p:nvSpPr>
+        <p:spPr>
+          <a:xfrm>
+            <a:off x="868680" y="1417320"/>
+            <a:ext cx="6675120" cy="4434840"/>
+          </a:xfrm>
+          <a:prstGeom prst="rect">
+            <a:avLst/>
+          </a:prstGeom>
+          <a:noFill/>
+          <a:ln/>
+        </p:spPr>
+        <p:txBody>
+          <a:bodyPr wrap="square" lIns="635" tIns="635" rIns="635" bIns="635" rtlCol="0" anchor="t">
             <a:normAutofit/>
           </a:bodyPr>
           <a:lstStyle/>
           <a:p>
+            <a:r>
+              <a:rPr lang="en-US" sz="1700" dirty="0">
+                <a:solidFill>
+                  <a:srgbClr val="17364A"/>
+                </a:solidFill>
+                <a:latin typeface="Aptos" pitchFamily="34" charset="0"/>
+                <a:ea typeface="Aptos" pitchFamily="34" charset="-122"/>
+                <a:cs typeface="Aptos" pitchFamily="34" charset="-120"/>
+              </a:rPr>
+              <a:t>Causal inference begins with a clearly framed question.</a:t>
+            </a:r>
+            <a:endParaRPr lang="en-US" sz="1700" dirty="0"/>
+          </a:p>
+          <a:p>
+            <a:r>
+              <a:rPr lang="en-US" sz="1700" dirty="0">
+                <a:solidFill>
+                  <a:srgbClr val="17364A"/>
+                </a:solidFill>
+                <a:latin typeface="Aptos" pitchFamily="34" charset="0"/>
+                <a:ea typeface="Aptos" pitchFamily="34" charset="-122"/>
+                <a:cs typeface="Aptos" pitchFamily="34" charset="-120"/>
+              </a:rPr>
+              <a:t>A useful structure is: among which population, what is the intervention or exposure, what is the comparison, what outcome.</a:t>
+            </a:r>
+            <a:endParaRPr lang="en-US" sz="1700" dirty="0"/>
+          </a:p>
+          <a:p>
+            <a:r>
+              <a:rPr lang="en-US" sz="1700" dirty="0">
+                <a:solidFill>
+                  <a:srgbClr val="17364A"/>
+                </a:solidFill>
+                <a:latin typeface="Aptos" pitchFamily="34" charset="0"/>
+                <a:ea typeface="Aptos" pitchFamily="34" charset="-122"/>
+                <a:cs typeface="Aptos" pitchFamily="34" charset="-120"/>
+              </a:rPr>
+              <a:t>Without this structure, teams may ask a model to answer a question that the available data cannot support.</a:t>
+            </a:r>
+            <a:endParaRPr lang="en-US" sz="1700" dirty="0"/>
+          </a:p>
+          <a:p>
+            <a:r>
+              <a:rPr lang="en-US" sz="1700" dirty="0">
+                <a:solidFill>
+                  <a:srgbClr val="17364A"/>
+                </a:solidFill>
+                <a:latin typeface="Aptos" pitchFamily="34" charset="0"/>
+                <a:ea typeface="Aptos" pitchFamily="34" charset="-122"/>
+                <a:cs typeface="Aptos" pitchFamily="34" charset="-120"/>
+              </a:rPr>
+              <a:t>Confounding is one of the most important threats.</a:t>
+            </a:r>
+            <a:endParaRPr lang="en-US" sz="1700" dirty="0"/>
+          </a:p>
+        </p:txBody>
+      </p:sp>
+      <p:sp>
+        <p:nvSpPr>
+          <p:cNvPr id="11" name="Shape 9"/>
+          <p:cNvSpPr/>
+          <p:nvPr/>
+        </p:nvSpPr>
+        <p:spPr>
+          <a:xfrm>
+            <a:off x="7909560" y="1417320"/>
+            <a:ext cx="3154680" cy="1828800"/>
+          </a:xfrm>
+          <a:prstGeom prst="roundRect">
+            <a:avLst>
+              <a:gd name="adj" fmla="val 6000"/>
+            </a:avLst>
+          </a:prstGeom>
+          <a:solidFill>
+            <a:srgbClr val="EEF8ED"/>
+          </a:solidFill>
+          <a:ln w="12700">
+            <a:solidFill>
+              <a:srgbClr val="B9D7E6"/>
+            </a:solidFill>
+            <a:prstDash val="solid"/>
+          </a:ln>
+        </p:spPr>
+      </p:sp>
+      <p:sp>
+        <p:nvSpPr>
+          <p:cNvPr id="12" name="Text 10"/>
+          <p:cNvSpPr/>
+          <p:nvPr/>
+        </p:nvSpPr>
+        <p:spPr>
+          <a:xfrm>
+            <a:off x="8074152" y="1563624"/>
+            <a:ext cx="2825496" cy="201168"/>
+          </a:xfrm>
+          <a:prstGeom prst="rect">
+            <a:avLst/>
+          </a:prstGeom>
+          <a:noFill/>
+          <a:ln/>
+        </p:spPr>
+        <p:txBody>
+          <a:bodyPr wrap="square" lIns="0" tIns="0" rIns="0" bIns="0" rtlCol="0" anchor="ctr"/>
+          <a:lstStyle/>
+          <a:p>
             <a:pPr indent="0" marL="0">
               <a:buNone/>
             </a:pPr>
             <a:r>
-              <a:rPr lang="en-US" sz="1420" dirty="0">
+              <a:rPr lang="en-US" sz="950" b="1" dirty="0">
+                <a:solidFill>
+                  <a:srgbClr val="0068B7"/>
+                </a:solidFill>
+                <a:latin typeface="Aptos" pitchFamily="34" charset="0"/>
+                <a:ea typeface="Aptos" pitchFamily="34" charset="-122"/>
+                <a:cs typeface="Aptos" pitchFamily="34" charset="-120"/>
+              </a:rPr>
+              <a:t>Key idea</a:t>
+            </a:r>
+            <a:endParaRPr lang="en-US" sz="950" dirty="0"/>
+          </a:p>
+        </p:txBody>
+      </p:sp>
+      <p:sp>
+        <p:nvSpPr>
+          <p:cNvPr id="13" name="Text 11"/>
+          <p:cNvSpPr/>
+          <p:nvPr/>
+        </p:nvSpPr>
+        <p:spPr>
+          <a:xfrm>
+            <a:off x="8074152" y="1856232"/>
+            <a:ext cx="2825496" cy="1261872"/>
+          </a:xfrm>
+          <a:prstGeom prst="rect">
+            <a:avLst/>
+          </a:prstGeom>
+          <a:noFill/>
+          <a:ln/>
+        </p:spPr>
+        <p:txBody>
+          <a:bodyPr wrap="square" lIns="0" tIns="0" rIns="0" bIns="0" rtlCol="0" anchor="t">
+            <a:normAutofit/>
+          </a:bodyPr>
+          <a:lstStyle/>
+          <a:p>
+            <a:pPr indent="0" marL="0">
+              <a:buNone/>
+            </a:pPr>
+            <a:r>
+              <a:rPr lang="en-US" sz="1250" dirty="0">
                 <a:solidFill>
                   <a:srgbClr val="17364A"/>
                 </a:solidFill>
@@ -3316,9 +4081,116 @@
                 <a:ea typeface="Aptos" pitchFamily="34" charset="-122"/>
                 <a:cs typeface="Aptos" pitchFamily="34" charset="-120"/>
               </a:rPr>
-              <a:t>Predictive models can identify risk, but causal inference is needed to decide what action is likely to change that risk. Generative AI may help draft evaluation questions or summarize literature, but humans must verify methods and assumptions. AI-supported decision-making should label outputs clearly as prediction, association, causal evidence, or hypothesis.</a:t>
-            </a:r>
-            <a:endParaRPr lang="en-US" sz="1420" dirty="0"/>
+              <a:t>Causal inference begins with a clearly framed question.</a:t>
+            </a:r>
+            <a:endParaRPr lang="en-US" sz="1250" dirty="0"/>
+          </a:p>
+        </p:txBody>
+      </p:sp>
+      <p:sp>
+        <p:nvSpPr>
+          <p:cNvPr id="14" name="Shape 12"/>
+          <p:cNvSpPr/>
+          <p:nvPr/>
+        </p:nvSpPr>
+        <p:spPr>
+          <a:xfrm>
+            <a:off x="7909560" y="3520440"/>
+            <a:ext cx="3154680" cy="1737360"/>
+          </a:xfrm>
+          <a:prstGeom prst="roundRect">
+            <a:avLst>
+              <a:gd name="adj" fmla="val 6316"/>
+            </a:avLst>
+          </a:prstGeom>
+          <a:solidFill>
+            <a:srgbClr val="EAF6F8"/>
+          </a:solidFill>
+          <a:ln w="12700">
+            <a:solidFill>
+              <a:srgbClr val="B9D7E6"/>
+            </a:solidFill>
+            <a:prstDash val="solid"/>
+          </a:ln>
+        </p:spPr>
+      </p:sp>
+      <p:sp>
+        <p:nvSpPr>
+          <p:cNvPr id="15" name="Text 13"/>
+          <p:cNvSpPr/>
+          <p:nvPr/>
+        </p:nvSpPr>
+        <p:spPr>
+          <a:xfrm>
+            <a:off x="8074152" y="3666744"/>
+            <a:ext cx="2825496" cy="201168"/>
+          </a:xfrm>
+          <a:prstGeom prst="rect">
+            <a:avLst/>
+          </a:prstGeom>
+          <a:noFill/>
+          <a:ln/>
+        </p:spPr>
+        <p:txBody>
+          <a:bodyPr wrap="square" lIns="0" tIns="0" rIns="0" bIns="0" rtlCol="0" anchor="ctr"/>
+          <a:lstStyle/>
+          <a:p>
+            <a:pPr indent="0" marL="0">
+              <a:buNone/>
+            </a:pPr>
+            <a:r>
+              <a:rPr lang="en-US" sz="950" b="1" dirty="0">
+                <a:solidFill>
+                  <a:srgbClr val="0068B7"/>
+                </a:solidFill>
+                <a:latin typeface="Aptos" pitchFamily="34" charset="0"/>
+                <a:ea typeface="Aptos" pitchFamily="34" charset="-122"/>
+                <a:cs typeface="Aptos" pitchFamily="34" charset="-120"/>
+              </a:rPr>
+              <a:t>Use this for</a:t>
+            </a:r>
+            <a:endParaRPr lang="en-US" sz="950" dirty="0"/>
+          </a:p>
+        </p:txBody>
+      </p:sp>
+      <p:sp>
+        <p:nvSpPr>
+          <p:cNvPr id="16" name="Text 14"/>
+          <p:cNvSpPr/>
+          <p:nvPr/>
+        </p:nvSpPr>
+        <p:spPr>
+          <a:xfrm>
+            <a:off x="8074152" y="3959352"/>
+            <a:ext cx="2825496" cy="1170432"/>
+          </a:xfrm>
+          <a:prstGeom prst="rect">
+            <a:avLst/>
+          </a:prstGeom>
+          <a:noFill/>
+          <a:ln/>
+        </p:spPr>
+        <p:txBody>
+          <a:bodyPr wrap="square" lIns="0" tIns="0" rIns="0" bIns="0" rtlCol="0" anchor="t">
+            <a:normAutofit/>
+          </a:bodyPr>
+          <a:lstStyle/>
+          <a:p>
+            <a:pPr indent="0" marL="0">
+              <a:buNone/>
+            </a:pPr>
+            <a:r>
+              <a:rPr lang="en-US" sz="1250" dirty="0">
+                <a:solidFill>
+                  <a:srgbClr val="17364A"/>
+                </a:solidFill>
+                <a:latin typeface="Aptos" pitchFamily="34" charset="0"/>
+                <a:ea typeface="Aptos" pitchFamily="34" charset="-122"/>
+                <a:cs typeface="Aptos" pitchFamily="34" charset="-120"/>
+              </a:rPr>
+              <a:t>Connect the concept to public health decisions, safeguards, documentation, or implementation work.</a:t>
+            </a:r>
+            <a:endParaRPr lang="en-US" sz="1250" dirty="0"/>
           </a:p>
         </p:txBody>
       </p:sp>
@@ -3381,7 +4253,32 @@
       </p:sp>
       <p:sp>
         <p:nvSpPr>
-          <p:cNvPr id="3" name="Text 1"/>
+          <p:cNvPr id="3" name="Shape 1"/>
+          <p:cNvSpPr/>
+          <p:nvPr/>
+        </p:nvSpPr>
+        <p:spPr>
+          <a:xfrm>
+            <a:off x="0" y="164592"/>
+            <a:ext cx="146304" cy="6693408"/>
+          </a:xfrm>
+          <a:prstGeom prst="rect">
+            <a:avLst/>
+          </a:prstGeom>
+          <a:solidFill>
+            <a:srgbClr val="2F8A28"/>
+          </a:solidFill>
+          <a:ln w="12700">
+            <a:solidFill>
+              <a:srgbClr val="2F8A28"/>
+            </a:solidFill>
+            <a:prstDash val="solid"/>
+          </a:ln>
+        </p:spPr>
+      </p:sp>
+      <p:sp>
+        <p:nvSpPr>
+          <p:cNvPr id="4" name="Text 2"/>
           <p:cNvSpPr/>
           <p:nvPr/>
         </p:nvSpPr>
@@ -3420,7 +4317,7 @@
       </p:sp>
       <p:sp>
         <p:nvSpPr>
-          <p:cNvPr id="4" name="Text 2"/>
+          <p:cNvPr id="5" name="Text 3"/>
           <p:cNvSpPr/>
           <p:nvPr/>
         </p:nvSpPr>
@@ -3459,7 +4356,7 @@
       </p:sp>
       <p:sp>
         <p:nvSpPr>
-          <p:cNvPr id="5" name="Text 3"/>
+          <p:cNvPr id="6" name="Text 4"/>
           <p:cNvSpPr/>
           <p:nvPr/>
         </p:nvSpPr>
@@ -3498,13 +4395,77 @@
       </p:sp>
       <p:sp>
         <p:nvSpPr>
-          <p:cNvPr id="6" name="Text 4"/>
+          <p:cNvPr id="7" name="Shape 5"/>
           <p:cNvSpPr/>
           <p:nvPr/>
         </p:nvSpPr>
         <p:spPr>
           <a:xfrm>
             <a:off x="640080" y="658368"/>
+            <a:ext cx="420624" cy="420624"/>
+          </a:xfrm>
+          <a:prstGeom prst="ellipse">
+            <a:avLst/>
+          </a:prstGeom>
+          <a:solidFill>
+            <a:srgbClr val="0068B7"/>
+          </a:solidFill>
+          <a:ln w="12700">
+            <a:solidFill>
+              <a:srgbClr val="0068B7"/>
+            </a:solidFill>
+            <a:prstDash val="solid"/>
+          </a:ln>
+        </p:spPr>
+      </p:sp>
+      <p:sp>
+        <p:nvSpPr>
+          <p:cNvPr id="8" name="Text 6"/>
+          <p:cNvSpPr/>
+          <p:nvPr/>
+        </p:nvSpPr>
+        <p:spPr>
+          <a:xfrm>
+            <a:off x="640080" y="731520"/>
+            <a:ext cx="420624" cy="164592"/>
+          </a:xfrm>
+          <a:prstGeom prst="rect">
+            <a:avLst/>
+          </a:prstGeom>
+          <a:noFill/>
+          <a:ln/>
+        </p:spPr>
+        <p:txBody>
+          <a:bodyPr wrap="square" lIns="0" tIns="0" rIns="0" bIns="0" rtlCol="0" anchor="ctr"/>
+          <a:lstStyle/>
+          <a:p>
+            <a:pPr algn="ctr" indent="0" marL="0">
+              <a:buNone/>
+            </a:pPr>
+            <a:r>
+              <a:rPr lang="en-US" sz="1100" b="1" dirty="0">
+                <a:solidFill>
+                  <a:srgbClr val="FFFFFF"/>
+                </a:solidFill>
+                <a:latin typeface="Aptos" pitchFamily="34" charset="0"/>
+                <a:ea typeface="Aptos" pitchFamily="34" charset="-122"/>
+                <a:cs typeface="Aptos" pitchFamily="34" charset="-120"/>
+              </a:rPr>
+              <a:t>7</a:t>
+            </a:r>
+            <a:endParaRPr lang="en-US" sz="1100" dirty="0"/>
+          </a:p>
+        </p:txBody>
+      </p:sp>
+      <p:sp>
+        <p:nvSpPr>
+          <p:cNvPr id="9" name="Text 7"/>
+          <p:cNvSpPr/>
+          <p:nvPr/>
+        </p:nvSpPr>
+        <p:spPr>
+          <a:xfrm>
+            <a:off x="640080" y="621792"/>
             <a:ext cx="10881360" cy="566928"/>
           </a:xfrm>
           <a:prstGeom prst="rect">
@@ -3531,7 +4492,7 @@
                 <a:ea typeface="Aptos Display" pitchFamily="34" charset="-122"/>
                 <a:cs typeface="Aptos Display" pitchFamily="34" charset="-120"/>
               </a:rPr>
-              <a:t>Reflection Questions</a:t>
+              <a:t>Risks, Failure Modes, and Guardrails</a:t>
             </a:r>
             <a:endParaRPr lang="en-US" sz="2700" dirty="0"/>
           </a:p>
@@ -3539,32 +4500,178 @@
       </p:sp>
       <p:sp>
         <p:nvSpPr>
-          <p:cNvPr id="7" name="Text 5"/>
-          <p:cNvSpPr/>
-          <p:nvPr/>
-        </p:nvSpPr>
-        <p:spPr>
-          <a:xfrm>
-            <a:off x="822960" y="1325880"/>
-            <a:ext cx="10378440" cy="4800600"/>
-          </a:xfrm>
-          <a:prstGeom prst="rect">
-            <a:avLst/>
-          </a:prstGeom>
-          <a:noFill/>
-          <a:ln/>
-        </p:spPr>
-        <p:txBody>
-          <a:bodyPr wrap="square" lIns="1016" tIns="1016" rIns="1016" bIns="1016" rtlCol="0" anchor="t">
+          <p:cNvPr id="10" name="Text 8"/>
+          <p:cNvSpPr/>
+          <p:nvPr/>
+        </p:nvSpPr>
+        <p:spPr>
+          <a:xfrm>
+            <a:off x="868680" y="1417320"/>
+            <a:ext cx="6675120" cy="4434840"/>
+          </a:xfrm>
+          <a:prstGeom prst="rect">
+            <a:avLst/>
+          </a:prstGeom>
+          <a:noFill/>
+          <a:ln/>
+        </p:spPr>
+        <p:txBody>
+          <a:bodyPr wrap="square" lIns="635" tIns="635" rIns="635" bIns="635" rtlCol="0" anchor="t">
             <a:normAutofit/>
           </a:bodyPr>
           <a:lstStyle/>
           <a:p>
+            <a:r>
+              <a:rPr lang="en-US" sz="1700" dirty="0">
+                <a:solidFill>
+                  <a:srgbClr val="17364A"/>
+                </a:solidFill>
+                <a:latin typeface="Aptos" pitchFamily="34" charset="0"/>
+                <a:ea typeface="Aptos" pitchFamily="34" charset="-122"/>
+                <a:cs typeface="Aptos" pitchFamily="34" charset="-120"/>
+              </a:rPr>
+              <a:t>The main failure mode is causal overreach.</a:t>
+            </a:r>
+            <a:endParaRPr lang="en-US" sz="1700" dirty="0"/>
+          </a:p>
+          <a:p>
+            <a:r>
+              <a:rPr lang="en-US" sz="1700" dirty="0">
+                <a:solidFill>
+                  <a:srgbClr val="17364A"/>
+                </a:solidFill>
+                <a:latin typeface="Aptos" pitchFamily="34" charset="0"/>
+                <a:ea typeface="Aptos" pitchFamily="34" charset="-122"/>
+                <a:cs typeface="Aptos" pitchFamily="34" charset="-120"/>
+              </a:rPr>
+              <a:t>A dashboard or AI report may state that a program reduced disease, improved access, or changed behavior when the evidence.</a:t>
+            </a:r>
+            <a:endParaRPr lang="en-US" sz="1700" dirty="0"/>
+          </a:p>
+          <a:p>
+            <a:r>
+              <a:rPr lang="en-US" sz="1700" dirty="0">
+                <a:solidFill>
+                  <a:srgbClr val="17364A"/>
+                </a:solidFill>
+                <a:latin typeface="Aptos" pitchFamily="34" charset="0"/>
+                <a:ea typeface="Aptos" pitchFamily="34" charset="-122"/>
+                <a:cs typeface="Aptos" pitchFamily="34" charset="-120"/>
+              </a:rPr>
+              <a:t>A guardrail is to require causal language review before results are used in reports, funding decisions, policy.</a:t>
+            </a:r>
+            <a:endParaRPr lang="en-US" sz="1700" dirty="0"/>
+          </a:p>
+          <a:p>
+            <a:r>
+              <a:rPr lang="en-US" sz="1700" dirty="0">
+                <a:solidFill>
+                  <a:srgbClr val="17364A"/>
+                </a:solidFill>
+                <a:latin typeface="Aptos" pitchFamily="34" charset="0"/>
+                <a:ea typeface="Aptos" pitchFamily="34" charset="-122"/>
+                <a:cs typeface="Aptos" pitchFamily="34" charset="-120"/>
+              </a:rPr>
+              <a:t>Another risk is inequitable inference.</a:t>
+            </a:r>
+            <a:endParaRPr lang="en-US" sz="1700" dirty="0"/>
+          </a:p>
+        </p:txBody>
+      </p:sp>
+      <p:sp>
+        <p:nvSpPr>
+          <p:cNvPr id="11" name="Shape 9"/>
+          <p:cNvSpPr/>
+          <p:nvPr/>
+        </p:nvSpPr>
+        <p:spPr>
+          <a:xfrm>
+            <a:off x="7909560" y="1417320"/>
+            <a:ext cx="3154680" cy="1828800"/>
+          </a:xfrm>
+          <a:prstGeom prst="roundRect">
+            <a:avLst>
+              <a:gd name="adj" fmla="val 6000"/>
+            </a:avLst>
+          </a:prstGeom>
+          <a:solidFill>
+            <a:srgbClr val="EEF8ED"/>
+          </a:solidFill>
+          <a:ln w="12700">
+            <a:solidFill>
+              <a:srgbClr val="B9D7E6"/>
+            </a:solidFill>
+            <a:prstDash val="solid"/>
+          </a:ln>
+        </p:spPr>
+      </p:sp>
+      <p:sp>
+        <p:nvSpPr>
+          <p:cNvPr id="12" name="Text 10"/>
+          <p:cNvSpPr/>
+          <p:nvPr/>
+        </p:nvSpPr>
+        <p:spPr>
+          <a:xfrm>
+            <a:off x="8074152" y="1563624"/>
+            <a:ext cx="2825496" cy="201168"/>
+          </a:xfrm>
+          <a:prstGeom prst="rect">
+            <a:avLst/>
+          </a:prstGeom>
+          <a:noFill/>
+          <a:ln/>
+        </p:spPr>
+        <p:txBody>
+          <a:bodyPr wrap="square" lIns="0" tIns="0" rIns="0" bIns="0" rtlCol="0" anchor="ctr"/>
+          <a:lstStyle/>
+          <a:p>
             <a:pPr indent="0" marL="0">
               <a:buNone/>
             </a:pPr>
             <a:r>
-              <a:rPr lang="en-US" sz="1420" dirty="0">
+              <a:rPr lang="en-US" sz="950" b="1" dirty="0">
+                <a:solidFill>
+                  <a:srgbClr val="0068B7"/>
+                </a:solidFill>
+                <a:latin typeface="Aptos" pitchFamily="34" charset="0"/>
+                <a:ea typeface="Aptos" pitchFamily="34" charset="-122"/>
+                <a:cs typeface="Aptos" pitchFamily="34" charset="-120"/>
+              </a:rPr>
+              <a:t>Key idea</a:t>
+            </a:r>
+            <a:endParaRPr lang="en-US" sz="950" dirty="0"/>
+          </a:p>
+        </p:txBody>
+      </p:sp>
+      <p:sp>
+        <p:nvSpPr>
+          <p:cNvPr id="13" name="Text 11"/>
+          <p:cNvSpPr/>
+          <p:nvPr/>
+        </p:nvSpPr>
+        <p:spPr>
+          <a:xfrm>
+            <a:off x="8074152" y="1856232"/>
+            <a:ext cx="2825496" cy="1261872"/>
+          </a:xfrm>
+          <a:prstGeom prst="rect">
+            <a:avLst/>
+          </a:prstGeom>
+          <a:noFill/>
+          <a:ln/>
+        </p:spPr>
+        <p:txBody>
+          <a:bodyPr wrap="square" lIns="0" tIns="0" rIns="0" bIns="0" rtlCol="0" anchor="t">
+            <a:normAutofit/>
+          </a:bodyPr>
+          <a:lstStyle/>
+          <a:p>
+            <a:pPr indent="0" marL="0">
+              <a:buNone/>
+            </a:pPr>
+            <a:r>
+              <a:rPr lang="en-US" sz="1250" dirty="0">
                 <a:solidFill>
                   <a:srgbClr val="17364A"/>
                 </a:solidFill>
@@ -3572,9 +4679,116 @@
                 <a:ea typeface="Aptos" pitchFamily="34" charset="-122"/>
                 <a:cs typeface="Aptos" pitchFamily="34" charset="-120"/>
               </a:rPr>
-              <a:t>What AI outputs in your agency could be mistaken for causal evidence? Which decisions require knowing what intervention will change an outcome? What confounders are likely in your program area?</a:t>
-            </a:r>
-            <a:endParaRPr lang="en-US" sz="1420" dirty="0"/>
+              <a:t>The main failure mode is causal overreach.</a:t>
+            </a:r>
+            <a:endParaRPr lang="en-US" sz="1250" dirty="0"/>
+          </a:p>
+        </p:txBody>
+      </p:sp>
+      <p:sp>
+        <p:nvSpPr>
+          <p:cNvPr id="14" name="Shape 12"/>
+          <p:cNvSpPr/>
+          <p:nvPr/>
+        </p:nvSpPr>
+        <p:spPr>
+          <a:xfrm>
+            <a:off x="7909560" y="3520440"/>
+            <a:ext cx="3154680" cy="1737360"/>
+          </a:xfrm>
+          <a:prstGeom prst="roundRect">
+            <a:avLst>
+              <a:gd name="adj" fmla="val 6316"/>
+            </a:avLst>
+          </a:prstGeom>
+          <a:solidFill>
+            <a:srgbClr val="EAF6F8"/>
+          </a:solidFill>
+          <a:ln w="12700">
+            <a:solidFill>
+              <a:srgbClr val="B9D7E6"/>
+            </a:solidFill>
+            <a:prstDash val="solid"/>
+          </a:ln>
+        </p:spPr>
+      </p:sp>
+      <p:sp>
+        <p:nvSpPr>
+          <p:cNvPr id="15" name="Text 13"/>
+          <p:cNvSpPr/>
+          <p:nvPr/>
+        </p:nvSpPr>
+        <p:spPr>
+          <a:xfrm>
+            <a:off x="8074152" y="3666744"/>
+            <a:ext cx="2825496" cy="201168"/>
+          </a:xfrm>
+          <a:prstGeom prst="rect">
+            <a:avLst/>
+          </a:prstGeom>
+          <a:noFill/>
+          <a:ln/>
+        </p:spPr>
+        <p:txBody>
+          <a:bodyPr wrap="square" lIns="0" tIns="0" rIns="0" bIns="0" rtlCol="0" anchor="ctr"/>
+          <a:lstStyle/>
+          <a:p>
+            <a:pPr indent="0" marL="0">
+              <a:buNone/>
+            </a:pPr>
+            <a:r>
+              <a:rPr lang="en-US" sz="950" b="1" dirty="0">
+                <a:solidFill>
+                  <a:srgbClr val="0068B7"/>
+                </a:solidFill>
+                <a:latin typeface="Aptos" pitchFamily="34" charset="0"/>
+                <a:ea typeface="Aptos" pitchFamily="34" charset="-122"/>
+                <a:cs typeface="Aptos" pitchFamily="34" charset="-120"/>
+              </a:rPr>
+              <a:t>Use this for</a:t>
+            </a:r>
+            <a:endParaRPr lang="en-US" sz="950" dirty="0"/>
+          </a:p>
+        </p:txBody>
+      </p:sp>
+      <p:sp>
+        <p:nvSpPr>
+          <p:cNvPr id="16" name="Text 14"/>
+          <p:cNvSpPr/>
+          <p:nvPr/>
+        </p:nvSpPr>
+        <p:spPr>
+          <a:xfrm>
+            <a:off x="8074152" y="3959352"/>
+            <a:ext cx="2825496" cy="1170432"/>
+          </a:xfrm>
+          <a:prstGeom prst="rect">
+            <a:avLst/>
+          </a:prstGeom>
+          <a:noFill/>
+          <a:ln/>
+        </p:spPr>
+        <p:txBody>
+          <a:bodyPr wrap="square" lIns="0" tIns="0" rIns="0" bIns="0" rtlCol="0" anchor="t">
+            <a:normAutofit/>
+          </a:bodyPr>
+          <a:lstStyle/>
+          <a:p>
+            <a:pPr indent="0" marL="0">
+              <a:buNone/>
+            </a:pPr>
+            <a:r>
+              <a:rPr lang="en-US" sz="1250" dirty="0">
+                <a:solidFill>
+                  <a:srgbClr val="17364A"/>
+                </a:solidFill>
+                <a:latin typeface="Aptos" pitchFamily="34" charset="0"/>
+                <a:ea typeface="Aptos" pitchFamily="34" charset="-122"/>
+                <a:cs typeface="Aptos" pitchFamily="34" charset="-120"/>
+              </a:rPr>
+              <a:t>Connect the concept to public health decisions, safeguards, documentation, or implementation work.</a:t>
+            </a:r>
+            <a:endParaRPr lang="en-US" sz="1250" dirty="0"/>
           </a:p>
         </p:txBody>
       </p:sp>
@@ -3637,7 +4851,32 @@
       </p:sp>
       <p:sp>
         <p:nvSpPr>
-          <p:cNvPr id="3" name="Text 1"/>
+          <p:cNvPr id="3" name="Shape 1"/>
+          <p:cNvSpPr/>
+          <p:nvPr/>
+        </p:nvSpPr>
+        <p:spPr>
+          <a:xfrm>
+            <a:off x="0" y="164592"/>
+            <a:ext cx="146304" cy="6693408"/>
+          </a:xfrm>
+          <a:prstGeom prst="rect">
+            <a:avLst/>
+          </a:prstGeom>
+          <a:solidFill>
+            <a:srgbClr val="2F8A28"/>
+          </a:solidFill>
+          <a:ln w="12700">
+            <a:solidFill>
+              <a:srgbClr val="2F8A28"/>
+            </a:solidFill>
+            <a:prstDash val="solid"/>
+          </a:ln>
+        </p:spPr>
+      </p:sp>
+      <p:sp>
+        <p:nvSpPr>
+          <p:cNvPr id="4" name="Text 2"/>
           <p:cNvSpPr/>
           <p:nvPr/>
         </p:nvSpPr>
@@ -3676,7 +4915,7 @@
       </p:sp>
       <p:sp>
         <p:nvSpPr>
-          <p:cNvPr id="4" name="Text 2"/>
+          <p:cNvPr id="5" name="Text 3"/>
           <p:cNvSpPr/>
           <p:nvPr/>
         </p:nvSpPr>
@@ -3715,7 +4954,7 @@
       </p:sp>
       <p:sp>
         <p:nvSpPr>
-          <p:cNvPr id="5" name="Text 3"/>
+          <p:cNvPr id="6" name="Text 4"/>
           <p:cNvSpPr/>
           <p:nvPr/>
         </p:nvSpPr>
@@ -3754,13 +4993,77 @@
       </p:sp>
       <p:sp>
         <p:nvSpPr>
-          <p:cNvPr id="6" name="Text 4"/>
+          <p:cNvPr id="7" name="Shape 5"/>
           <p:cNvSpPr/>
           <p:nvPr/>
         </p:nvSpPr>
         <p:spPr>
           <a:xfrm>
             <a:off x="640080" y="658368"/>
+            <a:ext cx="420624" cy="420624"/>
+          </a:xfrm>
+          <a:prstGeom prst="ellipse">
+            <a:avLst/>
+          </a:prstGeom>
+          <a:solidFill>
+            <a:srgbClr val="0068B7"/>
+          </a:solidFill>
+          <a:ln w="12700">
+            <a:solidFill>
+              <a:srgbClr val="0068B7"/>
+            </a:solidFill>
+            <a:prstDash val="solid"/>
+          </a:ln>
+        </p:spPr>
+      </p:sp>
+      <p:sp>
+        <p:nvSpPr>
+          <p:cNvPr id="8" name="Text 6"/>
+          <p:cNvSpPr/>
+          <p:nvPr/>
+        </p:nvSpPr>
+        <p:spPr>
+          <a:xfrm>
+            <a:off x="640080" y="731520"/>
+            <a:ext cx="420624" cy="164592"/>
+          </a:xfrm>
+          <a:prstGeom prst="rect">
+            <a:avLst/>
+          </a:prstGeom>
+          <a:noFill/>
+          <a:ln/>
+        </p:spPr>
+        <p:txBody>
+          <a:bodyPr wrap="square" lIns="0" tIns="0" rIns="0" bIns="0" rtlCol="0" anchor="ctr"/>
+          <a:lstStyle/>
+          <a:p>
+            <a:pPr algn="ctr" indent="0" marL="0">
+              <a:buNone/>
+            </a:pPr>
+            <a:r>
+              <a:rPr lang="en-US" sz="1100" b="1" dirty="0">
+                <a:solidFill>
+                  <a:srgbClr val="FFFFFF"/>
+                </a:solidFill>
+                <a:latin typeface="Aptos" pitchFamily="34" charset="0"/>
+                <a:ea typeface="Aptos" pitchFamily="34" charset="-122"/>
+                <a:cs typeface="Aptos" pitchFamily="34" charset="-120"/>
+              </a:rPr>
+              <a:t>8</a:t>
+            </a:r>
+            <a:endParaRPr lang="en-US" sz="1100" dirty="0"/>
+          </a:p>
+        </p:txBody>
+      </p:sp>
+      <p:sp>
+        <p:nvSpPr>
+          <p:cNvPr id="9" name="Text 7"/>
+          <p:cNvSpPr/>
+          <p:nvPr/>
+        </p:nvSpPr>
+        <p:spPr>
+          <a:xfrm>
+            <a:off x="640080" y="621792"/>
             <a:ext cx="10881360" cy="566928"/>
           </a:xfrm>
           <a:prstGeom prst="rect">
@@ -3787,7 +5090,7 @@
                 <a:ea typeface="Aptos Display" pitchFamily="34" charset="-122"/>
                 <a:cs typeface="Aptos Display" pitchFamily="34" charset="-120"/>
               </a:rPr>
-              <a:t>Reflection Questions Continued</a:t>
+              <a:t>Application to AI-Supported Workflows</a:t>
             </a:r>
             <a:endParaRPr lang="en-US" sz="2700" dirty="0"/>
           </a:p>
@@ -3795,32 +5098,164 @@
       </p:sp>
       <p:sp>
         <p:nvSpPr>
-          <p:cNvPr id="7" name="Text 5"/>
-          <p:cNvSpPr/>
-          <p:nvPr/>
-        </p:nvSpPr>
-        <p:spPr>
-          <a:xfrm>
-            <a:off x="822960" y="1325880"/>
-            <a:ext cx="10378440" cy="4800600"/>
-          </a:xfrm>
-          <a:prstGeom prst="rect">
-            <a:avLst/>
-          </a:prstGeom>
-          <a:noFill/>
-          <a:ln/>
-        </p:spPr>
-        <p:txBody>
-          <a:bodyPr wrap="square" lIns="1016" tIns="1016" rIns="1016" bIns="1016" rtlCol="0" anchor="t">
+          <p:cNvPr id="10" name="Text 8"/>
+          <p:cNvSpPr/>
+          <p:nvPr/>
+        </p:nvSpPr>
+        <p:spPr>
+          <a:xfrm>
+            <a:off x="868680" y="1417320"/>
+            <a:ext cx="6675120" cy="4434840"/>
+          </a:xfrm>
+          <a:prstGeom prst="rect">
+            <a:avLst/>
+          </a:prstGeom>
+          <a:noFill/>
+          <a:ln/>
+        </p:spPr>
+        <p:txBody>
+          <a:bodyPr wrap="square" lIns="635" tIns="635" rIns="635" bIns="635" rtlCol="0" anchor="t">
             <a:normAutofit/>
           </a:bodyPr>
           <a:lstStyle/>
           <a:p>
+            <a:r>
+              <a:rPr lang="en-US" sz="1700" dirty="0">
+                <a:solidFill>
+                  <a:srgbClr val="17364A"/>
+                </a:solidFill>
+                <a:latin typeface="Aptos" pitchFamily="34" charset="0"/>
+                <a:ea typeface="Aptos" pitchFamily="34" charset="-122"/>
+                <a:cs typeface="Aptos" pitchFamily="34" charset="-120"/>
+              </a:rPr>
+              <a:t>Predictive models can identify risk, but causal inference is needed to decide what action is likely to change that risk.</a:t>
+            </a:r>
+            <a:endParaRPr lang="en-US" sz="1700" dirty="0"/>
+          </a:p>
+          <a:p>
+            <a:r>
+              <a:rPr lang="en-US" sz="1700" dirty="0">
+                <a:solidFill>
+                  <a:srgbClr val="17364A"/>
+                </a:solidFill>
+                <a:latin typeface="Aptos" pitchFamily="34" charset="0"/>
+                <a:ea typeface="Aptos" pitchFamily="34" charset="-122"/>
+                <a:cs typeface="Aptos" pitchFamily="34" charset="-120"/>
+              </a:rPr>
+              <a:t>Generative AI may help draft evaluation questions or summarize literature, but humans must verify methods and assumptions.</a:t>
+            </a:r>
+            <a:endParaRPr lang="en-US" sz="1700" dirty="0"/>
+          </a:p>
+          <a:p>
+            <a:r>
+              <a:rPr lang="en-US" sz="1700" dirty="0">
+                <a:solidFill>
+                  <a:srgbClr val="17364A"/>
+                </a:solidFill>
+                <a:latin typeface="Aptos" pitchFamily="34" charset="0"/>
+                <a:ea typeface="Aptos" pitchFamily="34" charset="-122"/>
+                <a:cs typeface="Aptos" pitchFamily="34" charset="-120"/>
+              </a:rPr>
+              <a:t>AI-supported decision-making should label outputs clearly as prediction, association, causal evidence, or hypothesis.</a:t>
+            </a:r>
+            <a:endParaRPr lang="en-US" sz="1700" dirty="0"/>
+          </a:p>
+        </p:txBody>
+      </p:sp>
+      <p:sp>
+        <p:nvSpPr>
+          <p:cNvPr id="11" name="Shape 9"/>
+          <p:cNvSpPr/>
+          <p:nvPr/>
+        </p:nvSpPr>
+        <p:spPr>
+          <a:xfrm>
+            <a:off x="7909560" y="1417320"/>
+            <a:ext cx="3154680" cy="1828800"/>
+          </a:xfrm>
+          <a:prstGeom prst="roundRect">
+            <a:avLst>
+              <a:gd name="adj" fmla="val 6000"/>
+            </a:avLst>
+          </a:prstGeom>
+          <a:solidFill>
+            <a:srgbClr val="EEF8ED"/>
+          </a:solidFill>
+          <a:ln w="12700">
+            <a:solidFill>
+              <a:srgbClr val="B9D7E6"/>
+            </a:solidFill>
+            <a:prstDash val="solid"/>
+          </a:ln>
+        </p:spPr>
+      </p:sp>
+      <p:sp>
+        <p:nvSpPr>
+          <p:cNvPr id="12" name="Text 10"/>
+          <p:cNvSpPr/>
+          <p:nvPr/>
+        </p:nvSpPr>
+        <p:spPr>
+          <a:xfrm>
+            <a:off x="8074152" y="1563624"/>
+            <a:ext cx="2825496" cy="201168"/>
+          </a:xfrm>
+          <a:prstGeom prst="rect">
+            <a:avLst/>
+          </a:prstGeom>
+          <a:noFill/>
+          <a:ln/>
+        </p:spPr>
+        <p:txBody>
+          <a:bodyPr wrap="square" lIns="0" tIns="0" rIns="0" bIns="0" rtlCol="0" anchor="ctr"/>
+          <a:lstStyle/>
+          <a:p>
             <a:pPr indent="0" marL="0">
               <a:buNone/>
             </a:pPr>
             <a:r>
-              <a:rPr lang="en-US" sz="1420" dirty="0">
+              <a:rPr lang="en-US" sz="950" b="1" dirty="0">
+                <a:solidFill>
+                  <a:srgbClr val="0068B7"/>
+                </a:solidFill>
+                <a:latin typeface="Aptos" pitchFamily="34" charset="0"/>
+                <a:ea typeface="Aptos" pitchFamily="34" charset="-122"/>
+                <a:cs typeface="Aptos" pitchFamily="34" charset="-120"/>
+              </a:rPr>
+              <a:t>Key idea</a:t>
+            </a:r>
+            <a:endParaRPr lang="en-US" sz="950" dirty="0"/>
+          </a:p>
+        </p:txBody>
+      </p:sp>
+      <p:sp>
+        <p:nvSpPr>
+          <p:cNvPr id="13" name="Text 11"/>
+          <p:cNvSpPr/>
+          <p:nvPr/>
+        </p:nvSpPr>
+        <p:spPr>
+          <a:xfrm>
+            <a:off x="8074152" y="1856232"/>
+            <a:ext cx="2825496" cy="1261872"/>
+          </a:xfrm>
+          <a:prstGeom prst="rect">
+            <a:avLst/>
+          </a:prstGeom>
+          <a:noFill/>
+          <a:ln/>
+        </p:spPr>
+        <p:txBody>
+          <a:bodyPr wrap="square" lIns="0" tIns="0" rIns="0" bIns="0" rtlCol="0" anchor="t">
+            <a:normAutofit/>
+          </a:bodyPr>
+          <a:lstStyle/>
+          <a:p>
+            <a:pPr indent="0" marL="0">
+              <a:buNone/>
+            </a:pPr>
+            <a:r>
+              <a:rPr lang="en-US" sz="1250" dirty="0">
                 <a:solidFill>
                   <a:srgbClr val="17364A"/>
                 </a:solidFill>
@@ -3828,9 +5263,116 @@
                 <a:ea typeface="Aptos" pitchFamily="34" charset="-122"/>
                 <a:cs typeface="Aptos" pitchFamily="34" charset="-120"/>
               </a:rPr>
-              <a:t>What comparison group could support evaluation? Who should review causal claims before public release?</a:t>
-            </a:r>
-            <a:endParaRPr lang="en-US" sz="1420" dirty="0"/>
+              <a:t>Predictive models can identify risk, but causal inference is needed to decide what action is likely to change that risk.</a:t>
+            </a:r>
+            <a:endParaRPr lang="en-US" sz="1250" dirty="0"/>
+          </a:p>
+        </p:txBody>
+      </p:sp>
+      <p:sp>
+        <p:nvSpPr>
+          <p:cNvPr id="14" name="Shape 12"/>
+          <p:cNvSpPr/>
+          <p:nvPr/>
+        </p:nvSpPr>
+        <p:spPr>
+          <a:xfrm>
+            <a:off x="7909560" y="3520440"/>
+            <a:ext cx="3154680" cy="1737360"/>
+          </a:xfrm>
+          <a:prstGeom prst="roundRect">
+            <a:avLst>
+              <a:gd name="adj" fmla="val 6316"/>
+            </a:avLst>
+          </a:prstGeom>
+          <a:solidFill>
+            <a:srgbClr val="EAF6F8"/>
+          </a:solidFill>
+          <a:ln w="12700">
+            <a:solidFill>
+              <a:srgbClr val="B9D7E6"/>
+            </a:solidFill>
+            <a:prstDash val="solid"/>
+          </a:ln>
+        </p:spPr>
+      </p:sp>
+      <p:sp>
+        <p:nvSpPr>
+          <p:cNvPr id="15" name="Text 13"/>
+          <p:cNvSpPr/>
+          <p:nvPr/>
+        </p:nvSpPr>
+        <p:spPr>
+          <a:xfrm>
+            <a:off x="8074152" y="3666744"/>
+            <a:ext cx="2825496" cy="201168"/>
+          </a:xfrm>
+          <a:prstGeom prst="rect">
+            <a:avLst/>
+          </a:prstGeom>
+          <a:noFill/>
+          <a:ln/>
+        </p:spPr>
+        <p:txBody>
+          <a:bodyPr wrap="square" lIns="0" tIns="0" rIns="0" bIns="0" rtlCol="0" anchor="ctr"/>
+          <a:lstStyle/>
+          <a:p>
+            <a:pPr indent="0" marL="0">
+              <a:buNone/>
+            </a:pPr>
+            <a:r>
+              <a:rPr lang="en-US" sz="950" b="1" dirty="0">
+                <a:solidFill>
+                  <a:srgbClr val="0068B7"/>
+                </a:solidFill>
+                <a:latin typeface="Aptos" pitchFamily="34" charset="0"/>
+                <a:ea typeface="Aptos" pitchFamily="34" charset="-122"/>
+                <a:cs typeface="Aptos" pitchFamily="34" charset="-120"/>
+              </a:rPr>
+              <a:t>Use this for</a:t>
+            </a:r>
+            <a:endParaRPr lang="en-US" sz="950" dirty="0"/>
+          </a:p>
+        </p:txBody>
+      </p:sp>
+      <p:sp>
+        <p:nvSpPr>
+          <p:cNvPr id="16" name="Text 14"/>
+          <p:cNvSpPr/>
+          <p:nvPr/>
+        </p:nvSpPr>
+        <p:spPr>
+          <a:xfrm>
+            <a:off x="8074152" y="3959352"/>
+            <a:ext cx="2825496" cy="1170432"/>
+          </a:xfrm>
+          <a:prstGeom prst="rect">
+            <a:avLst/>
+          </a:prstGeom>
+          <a:noFill/>
+          <a:ln/>
+        </p:spPr>
+        <p:txBody>
+          <a:bodyPr wrap="square" lIns="0" tIns="0" rIns="0" bIns="0" rtlCol="0" anchor="t">
+            <a:normAutofit/>
+          </a:bodyPr>
+          <a:lstStyle/>
+          <a:p>
+            <a:pPr indent="0" marL="0">
+              <a:buNone/>
+            </a:pPr>
+            <a:r>
+              <a:rPr lang="en-US" sz="1250" dirty="0">
+                <a:solidFill>
+                  <a:srgbClr val="17364A"/>
+                </a:solidFill>
+                <a:latin typeface="Aptos" pitchFamily="34" charset="0"/>
+                <a:ea typeface="Aptos" pitchFamily="34" charset="-122"/>
+                <a:cs typeface="Aptos" pitchFamily="34" charset="-120"/>
+              </a:rPr>
+              <a:t>Connect the concept to public health decisions, safeguards, documentation, or implementation work.</a:t>
+            </a:r>
+            <a:endParaRPr lang="en-US" sz="1250" dirty="0"/>
           </a:p>
         </p:txBody>
       </p:sp>
@@ -3893,7 +5435,32 @@
       </p:sp>
       <p:sp>
         <p:nvSpPr>
-          <p:cNvPr id="3" name="Text 1"/>
+          <p:cNvPr id="3" name="Shape 1"/>
+          <p:cNvSpPr/>
+          <p:nvPr/>
+        </p:nvSpPr>
+        <p:spPr>
+          <a:xfrm>
+            <a:off x="0" y="164592"/>
+            <a:ext cx="146304" cy="6693408"/>
+          </a:xfrm>
+          <a:prstGeom prst="rect">
+            <a:avLst/>
+          </a:prstGeom>
+          <a:solidFill>
+            <a:srgbClr val="2F8A28"/>
+          </a:solidFill>
+          <a:ln w="12700">
+            <a:solidFill>
+              <a:srgbClr val="2F8A28"/>
+            </a:solidFill>
+            <a:prstDash val="solid"/>
+          </a:ln>
+        </p:spPr>
+      </p:sp>
+      <p:sp>
+        <p:nvSpPr>
+          <p:cNvPr id="4" name="Text 2"/>
           <p:cNvSpPr/>
           <p:nvPr/>
         </p:nvSpPr>
@@ -3932,7 +5499,7 @@
       </p:sp>
       <p:sp>
         <p:nvSpPr>
-          <p:cNvPr id="4" name="Text 2"/>
+          <p:cNvPr id="5" name="Text 3"/>
           <p:cNvSpPr/>
           <p:nvPr/>
         </p:nvSpPr>
@@ -3971,7 +5538,7 @@
       </p:sp>
       <p:sp>
         <p:nvSpPr>
-          <p:cNvPr id="5" name="Text 3"/>
+          <p:cNvPr id="6" name="Text 4"/>
           <p:cNvSpPr/>
           <p:nvPr/>
         </p:nvSpPr>
@@ -4010,13 +5577,77 @@
       </p:sp>
       <p:sp>
         <p:nvSpPr>
-          <p:cNvPr id="6" name="Text 4"/>
+          <p:cNvPr id="7" name="Shape 5"/>
           <p:cNvSpPr/>
           <p:nvPr/>
         </p:nvSpPr>
         <p:spPr>
           <a:xfrm>
             <a:off x="640080" y="658368"/>
+            <a:ext cx="420624" cy="420624"/>
+          </a:xfrm>
+          <a:prstGeom prst="ellipse">
+            <a:avLst/>
+          </a:prstGeom>
+          <a:solidFill>
+            <a:srgbClr val="0068B7"/>
+          </a:solidFill>
+          <a:ln w="12700">
+            <a:solidFill>
+              <a:srgbClr val="0068B7"/>
+            </a:solidFill>
+            <a:prstDash val="solid"/>
+          </a:ln>
+        </p:spPr>
+      </p:sp>
+      <p:sp>
+        <p:nvSpPr>
+          <p:cNvPr id="8" name="Text 6"/>
+          <p:cNvSpPr/>
+          <p:nvPr/>
+        </p:nvSpPr>
+        <p:spPr>
+          <a:xfrm>
+            <a:off x="640080" y="731520"/>
+            <a:ext cx="420624" cy="164592"/>
+          </a:xfrm>
+          <a:prstGeom prst="rect">
+            <a:avLst/>
+          </a:prstGeom>
+          <a:noFill/>
+          <a:ln/>
+        </p:spPr>
+        <p:txBody>
+          <a:bodyPr wrap="square" lIns="0" tIns="0" rIns="0" bIns="0" rtlCol="0" anchor="ctr"/>
+          <a:lstStyle/>
+          <a:p>
+            <a:pPr algn="ctr" indent="0" marL="0">
+              <a:buNone/>
+            </a:pPr>
+            <a:r>
+              <a:rPr lang="en-US" sz="1100" b="1" dirty="0">
+                <a:solidFill>
+                  <a:srgbClr val="FFFFFF"/>
+                </a:solidFill>
+                <a:latin typeface="Aptos" pitchFamily="34" charset="0"/>
+                <a:ea typeface="Aptos" pitchFamily="34" charset="-122"/>
+                <a:cs typeface="Aptos" pitchFamily="34" charset="-120"/>
+              </a:rPr>
+              <a:t>9</a:t>
+            </a:r>
+            <a:endParaRPr lang="en-US" sz="1100" dirty="0"/>
+          </a:p>
+        </p:txBody>
+      </p:sp>
+      <p:sp>
+        <p:nvSpPr>
+          <p:cNvPr id="9" name="Text 7"/>
+          <p:cNvSpPr/>
+          <p:nvPr/>
+        </p:nvSpPr>
+        <p:spPr>
+          <a:xfrm>
+            <a:off x="640080" y="621792"/>
             <a:ext cx="10881360" cy="566928"/>
           </a:xfrm>
           <a:prstGeom prst="rect">
@@ -4043,7 +5674,7 @@
                 <a:ea typeface="Aptos Display" pitchFamily="34" charset="-122"/>
                 <a:cs typeface="Aptos Display" pitchFamily="34" charset="-120"/>
               </a:rPr>
-              <a:t>Practical Exercise</a:t>
+              <a:t>Reflection Questions</a:t>
             </a:r>
             <a:endParaRPr lang="en-US" sz="2700" dirty="0"/>
           </a:p>
@@ -4051,32 +5682,164 @@
       </p:sp>
       <p:sp>
         <p:nvSpPr>
-          <p:cNvPr id="7" name="Text 5"/>
-          <p:cNvSpPr/>
-          <p:nvPr/>
-        </p:nvSpPr>
-        <p:spPr>
-          <a:xfrm>
-            <a:off x="822960" y="1325880"/>
-            <a:ext cx="10378440" cy="4800600"/>
-          </a:xfrm>
-          <a:prstGeom prst="rect">
-            <a:avLst/>
-          </a:prstGeom>
-          <a:noFill/>
-          <a:ln/>
-        </p:spPr>
-        <p:txBody>
-          <a:bodyPr wrap="square" lIns="1016" tIns="1016" rIns="1016" bIns="1016" rtlCol="0" anchor="t">
+          <p:cNvPr id="10" name="Text 8"/>
+          <p:cNvSpPr/>
+          <p:nvPr/>
+        </p:nvSpPr>
+        <p:spPr>
+          <a:xfrm>
+            <a:off x="868680" y="1417320"/>
+            <a:ext cx="6675120" cy="4434840"/>
+          </a:xfrm>
+          <a:prstGeom prst="rect">
+            <a:avLst/>
+          </a:prstGeom>
+          <a:noFill/>
+          <a:ln/>
+        </p:spPr>
+        <p:txBody>
+          <a:bodyPr wrap="square" lIns="635" tIns="635" rIns="635" bIns="635" rtlCol="0" anchor="t">
             <a:normAutofit/>
           </a:bodyPr>
           <a:lstStyle/>
           <a:p>
+            <a:r>
+              <a:rPr lang="en-US" sz="1700" dirty="0">
+                <a:solidFill>
+                  <a:srgbClr val="17364A"/>
+                </a:solidFill>
+                <a:latin typeface="Aptos" pitchFamily="34" charset="0"/>
+                <a:ea typeface="Aptos" pitchFamily="34" charset="-122"/>
+                <a:cs typeface="Aptos" pitchFamily="34" charset="-120"/>
+              </a:rPr>
+              <a:t>What AI outputs in your agency could be mistaken for causal evidence?</a:t>
+            </a:r>
+            <a:endParaRPr lang="en-US" sz="1700" dirty="0"/>
+          </a:p>
+          <a:p>
+            <a:r>
+              <a:rPr lang="en-US" sz="1700" dirty="0">
+                <a:solidFill>
+                  <a:srgbClr val="17364A"/>
+                </a:solidFill>
+                <a:latin typeface="Aptos" pitchFamily="34" charset="0"/>
+                <a:ea typeface="Aptos" pitchFamily="34" charset="-122"/>
+                <a:cs typeface="Aptos" pitchFamily="34" charset="-120"/>
+              </a:rPr>
+              <a:t>Which decisions require knowing what intervention will change an outcome?</a:t>
+            </a:r>
+            <a:endParaRPr lang="en-US" sz="1700" dirty="0"/>
+          </a:p>
+          <a:p>
+            <a:r>
+              <a:rPr lang="en-US" sz="1700" dirty="0">
+                <a:solidFill>
+                  <a:srgbClr val="17364A"/>
+                </a:solidFill>
+                <a:latin typeface="Aptos" pitchFamily="34" charset="0"/>
+                <a:ea typeface="Aptos" pitchFamily="34" charset="-122"/>
+                <a:cs typeface="Aptos" pitchFamily="34" charset="-120"/>
+              </a:rPr>
+              <a:t>What confounders are likely in your program area?</a:t>
+            </a:r>
+            <a:endParaRPr lang="en-US" sz="1700" dirty="0"/>
+          </a:p>
+        </p:txBody>
+      </p:sp>
+      <p:sp>
+        <p:nvSpPr>
+          <p:cNvPr id="11" name="Shape 9"/>
+          <p:cNvSpPr/>
+          <p:nvPr/>
+        </p:nvSpPr>
+        <p:spPr>
+          <a:xfrm>
+            <a:off x="7909560" y="1417320"/>
+            <a:ext cx="3154680" cy="1828800"/>
+          </a:xfrm>
+          <a:prstGeom prst="roundRect">
+            <a:avLst>
+              <a:gd name="adj" fmla="val 6000"/>
+            </a:avLst>
+          </a:prstGeom>
+          <a:solidFill>
+            <a:srgbClr val="EEF8ED"/>
+          </a:solidFill>
+          <a:ln w="12700">
+            <a:solidFill>
+              <a:srgbClr val="B9D7E6"/>
+            </a:solidFill>
+            <a:prstDash val="solid"/>
+          </a:ln>
+        </p:spPr>
+      </p:sp>
+      <p:sp>
+        <p:nvSpPr>
+          <p:cNvPr id="12" name="Text 10"/>
+          <p:cNvSpPr/>
+          <p:nvPr/>
+        </p:nvSpPr>
+        <p:spPr>
+          <a:xfrm>
+            <a:off x="8074152" y="1563624"/>
+            <a:ext cx="2825496" cy="201168"/>
+          </a:xfrm>
+          <a:prstGeom prst="rect">
+            <a:avLst/>
+          </a:prstGeom>
+          <a:noFill/>
+          <a:ln/>
+        </p:spPr>
+        <p:txBody>
+          <a:bodyPr wrap="square" lIns="0" tIns="0" rIns="0" bIns="0" rtlCol="0" anchor="ctr"/>
+          <a:lstStyle/>
+          <a:p>
             <a:pPr indent="0" marL="0">
               <a:buNone/>
             </a:pPr>
             <a:r>
-              <a:rPr lang="en-US" sz="1420" dirty="0">
+              <a:rPr lang="en-US" sz="950" b="1" dirty="0">
+                <a:solidFill>
+                  <a:srgbClr val="0068B7"/>
+                </a:solidFill>
+                <a:latin typeface="Aptos" pitchFamily="34" charset="0"/>
+                <a:ea typeface="Aptos" pitchFamily="34" charset="-122"/>
+                <a:cs typeface="Aptos" pitchFamily="34" charset="-120"/>
+              </a:rPr>
+              <a:t>Key idea</a:t>
+            </a:r>
+            <a:endParaRPr lang="en-US" sz="950" dirty="0"/>
+          </a:p>
+        </p:txBody>
+      </p:sp>
+      <p:sp>
+        <p:nvSpPr>
+          <p:cNvPr id="13" name="Text 11"/>
+          <p:cNvSpPr/>
+          <p:nvPr/>
+        </p:nvSpPr>
+        <p:spPr>
+          <a:xfrm>
+            <a:off x="8074152" y="1856232"/>
+            <a:ext cx="2825496" cy="1261872"/>
+          </a:xfrm>
+          <a:prstGeom prst="rect">
+            <a:avLst/>
+          </a:prstGeom>
+          <a:noFill/>
+          <a:ln/>
+        </p:spPr>
+        <p:txBody>
+          <a:bodyPr wrap="square" lIns="0" tIns="0" rIns="0" bIns="0" rtlCol="0" anchor="t">
+            <a:normAutofit/>
+          </a:bodyPr>
+          <a:lstStyle/>
+          <a:p>
+            <a:pPr indent="0" marL="0">
+              <a:buNone/>
+            </a:pPr>
+            <a:r>
+              <a:rPr lang="en-US" sz="1250" dirty="0">
                 <a:solidFill>
                   <a:srgbClr val="17364A"/>
                 </a:solidFill>
@@ -4084,9 +5847,116 @@
                 <a:ea typeface="Aptos" pitchFamily="34" charset="-122"/>
                 <a:cs typeface="Aptos" pitchFamily="34" charset="-120"/>
               </a:rPr>
-              <a:t>Create a causal question framing worksheet for an AI-supported decision. Identify the population, intervention or exposure, comparison, outcome, time period, likely confounders, data limitations, and what evidence would be needed before making a causal claim.</a:t>
-            </a:r>
-            <a:endParaRPr lang="en-US" sz="1420" dirty="0"/>
+              <a:t>What AI outputs in your agency could be mistaken for causal evidence?</a:t>
+            </a:r>
+            <a:endParaRPr lang="en-US" sz="1250" dirty="0"/>
+          </a:p>
+        </p:txBody>
+      </p:sp>
+      <p:sp>
+        <p:nvSpPr>
+          <p:cNvPr id="14" name="Shape 12"/>
+          <p:cNvSpPr/>
+          <p:nvPr/>
+        </p:nvSpPr>
+        <p:spPr>
+          <a:xfrm>
+            <a:off x="7909560" y="3520440"/>
+            <a:ext cx="3154680" cy="1737360"/>
+          </a:xfrm>
+          <a:prstGeom prst="roundRect">
+            <a:avLst>
+              <a:gd name="adj" fmla="val 6316"/>
+            </a:avLst>
+          </a:prstGeom>
+          <a:solidFill>
+            <a:srgbClr val="EAF6F8"/>
+          </a:solidFill>
+          <a:ln w="12700">
+            <a:solidFill>
+              <a:srgbClr val="B9D7E6"/>
+            </a:solidFill>
+            <a:prstDash val="solid"/>
+          </a:ln>
+        </p:spPr>
+      </p:sp>
+      <p:sp>
+        <p:nvSpPr>
+          <p:cNvPr id="15" name="Text 13"/>
+          <p:cNvSpPr/>
+          <p:nvPr/>
+        </p:nvSpPr>
+        <p:spPr>
+          <a:xfrm>
+            <a:off x="8074152" y="3666744"/>
+            <a:ext cx="2825496" cy="201168"/>
+          </a:xfrm>
+          <a:prstGeom prst="rect">
+            <a:avLst/>
+          </a:prstGeom>
+          <a:noFill/>
+          <a:ln/>
+        </p:spPr>
+        <p:txBody>
+          <a:bodyPr wrap="square" lIns="0" tIns="0" rIns="0" bIns="0" rtlCol="0" anchor="ctr"/>
+          <a:lstStyle/>
+          <a:p>
+            <a:pPr indent="0" marL="0">
+              <a:buNone/>
+            </a:pPr>
+            <a:r>
+              <a:rPr lang="en-US" sz="950" b="1" dirty="0">
+                <a:solidFill>
+                  <a:srgbClr val="0068B7"/>
+                </a:solidFill>
+                <a:latin typeface="Aptos" pitchFamily="34" charset="0"/>
+                <a:ea typeface="Aptos" pitchFamily="34" charset="-122"/>
+                <a:cs typeface="Aptos" pitchFamily="34" charset="-120"/>
+              </a:rPr>
+              <a:t>Use this for</a:t>
+            </a:r>
+            <a:endParaRPr lang="en-US" sz="950" dirty="0"/>
+          </a:p>
+        </p:txBody>
+      </p:sp>
+      <p:sp>
+        <p:nvSpPr>
+          <p:cNvPr id="16" name="Text 14"/>
+          <p:cNvSpPr/>
+          <p:nvPr/>
+        </p:nvSpPr>
+        <p:spPr>
+          <a:xfrm>
+            <a:off x="8074152" y="3959352"/>
+            <a:ext cx="2825496" cy="1170432"/>
+          </a:xfrm>
+          <a:prstGeom prst="rect">
+            <a:avLst/>
+          </a:prstGeom>
+          <a:noFill/>
+          <a:ln/>
+        </p:spPr>
+        <p:txBody>
+          <a:bodyPr wrap="square" lIns="0" tIns="0" rIns="0" bIns="0" rtlCol="0" anchor="t">
+            <a:normAutofit/>
+          </a:bodyPr>
+          <a:lstStyle/>
+          <a:p>
+            <a:pPr indent="0" marL="0">
+              <a:buNone/>
+            </a:pPr>
+            <a:r>
+              <a:rPr lang="en-US" sz="1250" dirty="0">
+                <a:solidFill>
+                  <a:srgbClr val="17364A"/>
+                </a:solidFill>
+                <a:latin typeface="Aptos" pitchFamily="34" charset="0"/>
+                <a:ea typeface="Aptos" pitchFamily="34" charset="-122"/>
+                <a:cs typeface="Aptos" pitchFamily="34" charset="-120"/>
+              </a:rPr>
+              <a:t>Connect the concept to public health decisions, safeguards, documentation, or implementation work.</a:t>
+            </a:r>
+            <a:endParaRPr lang="en-US" sz="1250" dirty="0"/>
           </a:p>
         </p:txBody>
       </p:sp>
@@ -4149,7 +6019,32 @@
       </p:sp>
       <p:sp>
         <p:nvSpPr>
-          <p:cNvPr id="3" name="Text 1"/>
+          <p:cNvPr id="3" name="Shape 1"/>
+          <p:cNvSpPr/>
+          <p:nvPr/>
+        </p:nvSpPr>
+        <p:spPr>
+          <a:xfrm>
+            <a:off x="0" y="164592"/>
+            <a:ext cx="146304" cy="6693408"/>
+          </a:xfrm>
+          <a:prstGeom prst="rect">
+            <a:avLst/>
+          </a:prstGeom>
+          <a:solidFill>
+            <a:srgbClr val="2F8A28"/>
+          </a:solidFill>
+          <a:ln w="12700">
+            <a:solidFill>
+              <a:srgbClr val="2F8A28"/>
+            </a:solidFill>
+            <a:prstDash val="solid"/>
+          </a:ln>
+        </p:spPr>
+      </p:sp>
+      <p:sp>
+        <p:nvSpPr>
+          <p:cNvPr id="4" name="Text 2"/>
           <p:cNvSpPr/>
           <p:nvPr/>
         </p:nvSpPr>
@@ -4188,7 +6083,7 @@
       </p:sp>
       <p:sp>
         <p:nvSpPr>
-          <p:cNvPr id="4" name="Text 2"/>
+          <p:cNvPr id="5" name="Text 3"/>
           <p:cNvSpPr/>
           <p:nvPr/>
         </p:nvSpPr>
@@ -4227,7 +6122,7 @@
       </p:sp>
       <p:sp>
         <p:nvSpPr>
-          <p:cNvPr id="5" name="Text 3"/>
+          <p:cNvPr id="6" name="Text 4"/>
           <p:cNvSpPr/>
           <p:nvPr/>
         </p:nvSpPr>
@@ -4266,7 +6161,7 @@
       </p:sp>
       <p:sp>
         <p:nvSpPr>
-          <p:cNvPr id="6" name="Text 4"/>
+          <p:cNvPr id="7" name="Text 5"/>
           <p:cNvSpPr/>
           <p:nvPr/>
         </p:nvSpPr>
@@ -4299,7 +6194,7 @@
                 <a:ea typeface="Aptos Display" pitchFamily="34" charset="-122"/>
                 <a:cs typeface="Aptos Display" pitchFamily="34" charset="-120"/>
               </a:rPr>
-              <a:t>Expected Artifact or Evidence</a:t>
+              <a:t>Reflection Questions Continued</a:t>
             </a:r>
             <a:endParaRPr lang="en-US" sz="2700" dirty="0"/>
           </a:p>
@@ -4307,32 +6202,150 @@
       </p:sp>
       <p:sp>
         <p:nvSpPr>
-          <p:cNvPr id="7" name="Text 5"/>
-          <p:cNvSpPr/>
-          <p:nvPr/>
-        </p:nvSpPr>
-        <p:spPr>
-          <a:xfrm>
-            <a:off x="822960" y="1325880"/>
-            <a:ext cx="10378440" cy="4800600"/>
-          </a:xfrm>
-          <a:prstGeom prst="rect">
-            <a:avLst/>
-          </a:prstGeom>
-          <a:noFill/>
-          <a:ln/>
-        </p:spPr>
-        <p:txBody>
-          <a:bodyPr wrap="square" lIns="1016" tIns="1016" rIns="1016" bIns="1016" rtlCol="0" anchor="t">
+          <p:cNvPr id="8" name="Text 6"/>
+          <p:cNvSpPr/>
+          <p:nvPr/>
+        </p:nvSpPr>
+        <p:spPr>
+          <a:xfrm>
+            <a:off x="868680" y="1417320"/>
+            <a:ext cx="6675120" cy="4434840"/>
+          </a:xfrm>
+          <a:prstGeom prst="rect">
+            <a:avLst/>
+          </a:prstGeom>
+          <a:noFill/>
+          <a:ln/>
+        </p:spPr>
+        <p:txBody>
+          <a:bodyPr wrap="square" lIns="635" tIns="635" rIns="635" bIns="635" rtlCol="0" anchor="t">
             <a:normAutofit/>
           </a:bodyPr>
           <a:lstStyle/>
           <a:p>
+            <a:r>
+              <a:rPr lang="en-US" sz="1700" dirty="0">
+                <a:solidFill>
+                  <a:srgbClr val="17364A"/>
+                </a:solidFill>
+                <a:latin typeface="Aptos" pitchFamily="34" charset="0"/>
+                <a:ea typeface="Aptos" pitchFamily="34" charset="-122"/>
+                <a:cs typeface="Aptos" pitchFamily="34" charset="-120"/>
+              </a:rPr>
+              <a:t>What comparison group could support evaluation?</a:t>
+            </a:r>
+            <a:endParaRPr lang="en-US" sz="1700" dirty="0"/>
+          </a:p>
+          <a:p>
+            <a:r>
+              <a:rPr lang="en-US" sz="1700" dirty="0">
+                <a:solidFill>
+                  <a:srgbClr val="17364A"/>
+                </a:solidFill>
+                <a:latin typeface="Aptos" pitchFamily="34" charset="0"/>
+                <a:ea typeface="Aptos" pitchFamily="34" charset="-122"/>
+                <a:cs typeface="Aptos" pitchFamily="34" charset="-120"/>
+              </a:rPr>
+              <a:t>Who should review causal claims before public release?</a:t>
+            </a:r>
+            <a:endParaRPr lang="en-US" sz="1700" dirty="0"/>
+          </a:p>
+        </p:txBody>
+      </p:sp>
+      <p:sp>
+        <p:nvSpPr>
+          <p:cNvPr id="9" name="Shape 7"/>
+          <p:cNvSpPr/>
+          <p:nvPr/>
+        </p:nvSpPr>
+        <p:spPr>
+          <a:xfrm>
+            <a:off x="7909560" y="1417320"/>
+            <a:ext cx="3154680" cy="1828800"/>
+          </a:xfrm>
+          <a:prstGeom prst="roundRect">
+            <a:avLst>
+              <a:gd name="adj" fmla="val 6000"/>
+            </a:avLst>
+          </a:prstGeom>
+          <a:solidFill>
+            <a:srgbClr val="EEF8ED"/>
+          </a:solidFill>
+          <a:ln w="12700">
+            <a:solidFill>
+              <a:srgbClr val="B9D7E6"/>
+            </a:solidFill>
+            <a:prstDash val="solid"/>
+          </a:ln>
+        </p:spPr>
+      </p:sp>
+      <p:sp>
+        <p:nvSpPr>
+          <p:cNvPr id="10" name="Text 8"/>
+          <p:cNvSpPr/>
+          <p:nvPr/>
+        </p:nvSpPr>
+        <p:spPr>
+          <a:xfrm>
+            <a:off x="8074152" y="1563624"/>
+            <a:ext cx="2825496" cy="201168"/>
+          </a:xfrm>
+          <a:prstGeom prst="rect">
+            <a:avLst/>
+          </a:prstGeom>
+          <a:noFill/>
+          <a:ln/>
+        </p:spPr>
+        <p:txBody>
+          <a:bodyPr wrap="square" lIns="0" tIns="0" rIns="0" bIns="0" rtlCol="0" anchor="ctr"/>
+          <a:lstStyle/>
+          <a:p>
             <a:pPr indent="0" marL="0">
               <a:buNone/>
             </a:pPr>
             <a:r>
-              <a:rPr lang="en-US" sz="1420" dirty="0">
+              <a:rPr lang="en-US" sz="950" b="1" dirty="0">
+                <a:solidFill>
+                  <a:srgbClr val="0068B7"/>
+                </a:solidFill>
+                <a:latin typeface="Aptos" pitchFamily="34" charset="0"/>
+                <a:ea typeface="Aptos" pitchFamily="34" charset="-122"/>
+                <a:cs typeface="Aptos" pitchFamily="34" charset="-120"/>
+              </a:rPr>
+              <a:t>Key idea</a:t>
+            </a:r>
+            <a:endParaRPr lang="en-US" sz="950" dirty="0"/>
+          </a:p>
+        </p:txBody>
+      </p:sp>
+      <p:sp>
+        <p:nvSpPr>
+          <p:cNvPr id="11" name="Text 9"/>
+          <p:cNvSpPr/>
+          <p:nvPr/>
+        </p:nvSpPr>
+        <p:spPr>
+          <a:xfrm>
+            <a:off x="8074152" y="1856232"/>
+            <a:ext cx="2825496" cy="1261872"/>
+          </a:xfrm>
+          <a:prstGeom prst="rect">
+            <a:avLst/>
+          </a:prstGeom>
+          <a:noFill/>
+          <a:ln/>
+        </p:spPr>
+        <p:txBody>
+          <a:bodyPr wrap="square" lIns="0" tIns="0" rIns="0" bIns="0" rtlCol="0" anchor="t">
+            <a:normAutofit/>
+          </a:bodyPr>
+          <a:lstStyle/>
+          <a:p>
+            <a:pPr indent="0" marL="0">
+              <a:buNone/>
+            </a:pPr>
+            <a:r>
+              <a:rPr lang="en-US" sz="1250" dirty="0">
                 <a:solidFill>
                   <a:srgbClr val="17364A"/>
                 </a:solidFill>
@@ -4340,9 +6353,116 @@
                 <a:ea typeface="Aptos" pitchFamily="34" charset="-122"/>
                 <a:cs typeface="Aptos" pitchFamily="34" charset="-120"/>
               </a:rPr>
-              <a:t>Causal question framing worksheet List of assumptions and likely confounders Recommended evaluation design or expert consultation need</a:t>
-            </a:r>
-            <a:endParaRPr lang="en-US" sz="1420" dirty="0"/>
+              <a:t>What comparison group could support evaluation?</a:t>
+            </a:r>
+            <a:endParaRPr lang="en-US" sz="1250" dirty="0"/>
+          </a:p>
+        </p:txBody>
+      </p:sp>
+      <p:sp>
+        <p:nvSpPr>
+          <p:cNvPr id="12" name="Shape 10"/>
+          <p:cNvSpPr/>
+          <p:nvPr/>
+        </p:nvSpPr>
+        <p:spPr>
+          <a:xfrm>
+            <a:off x="7909560" y="3520440"/>
+            <a:ext cx="3154680" cy="1737360"/>
+          </a:xfrm>
+          <a:prstGeom prst="roundRect">
+            <a:avLst>
+              <a:gd name="adj" fmla="val 6316"/>
+            </a:avLst>
+          </a:prstGeom>
+          <a:solidFill>
+            <a:srgbClr val="EAF6F8"/>
+          </a:solidFill>
+          <a:ln w="12700">
+            <a:solidFill>
+              <a:srgbClr val="B9D7E6"/>
+            </a:solidFill>
+            <a:prstDash val="solid"/>
+          </a:ln>
+        </p:spPr>
+      </p:sp>
+      <p:sp>
+        <p:nvSpPr>
+          <p:cNvPr id="13" name="Text 11"/>
+          <p:cNvSpPr/>
+          <p:nvPr/>
+        </p:nvSpPr>
+        <p:spPr>
+          <a:xfrm>
+            <a:off x="8074152" y="3666744"/>
+            <a:ext cx="2825496" cy="201168"/>
+          </a:xfrm>
+          <a:prstGeom prst="rect">
+            <a:avLst/>
+          </a:prstGeom>
+          <a:noFill/>
+          <a:ln/>
+        </p:spPr>
+        <p:txBody>
+          <a:bodyPr wrap="square" lIns="0" tIns="0" rIns="0" bIns="0" rtlCol="0" anchor="ctr"/>
+          <a:lstStyle/>
+          <a:p>
+            <a:pPr indent="0" marL="0">
+              <a:buNone/>
+            </a:pPr>
+            <a:r>
+              <a:rPr lang="en-US" sz="950" b="1" dirty="0">
+                <a:solidFill>
+                  <a:srgbClr val="0068B7"/>
+                </a:solidFill>
+                <a:latin typeface="Aptos" pitchFamily="34" charset="0"/>
+                <a:ea typeface="Aptos" pitchFamily="34" charset="-122"/>
+                <a:cs typeface="Aptos" pitchFamily="34" charset="-120"/>
+              </a:rPr>
+              <a:t>Use this for</a:t>
+            </a:r>
+            <a:endParaRPr lang="en-US" sz="950" dirty="0"/>
+          </a:p>
+        </p:txBody>
+      </p:sp>
+      <p:sp>
+        <p:nvSpPr>
+          <p:cNvPr id="14" name="Text 12"/>
+          <p:cNvSpPr/>
+          <p:nvPr/>
+        </p:nvSpPr>
+        <p:spPr>
+          <a:xfrm>
+            <a:off x="8074152" y="3959352"/>
+            <a:ext cx="2825496" cy="1170432"/>
+          </a:xfrm>
+          <a:prstGeom prst="rect">
+            <a:avLst/>
+          </a:prstGeom>
+          <a:noFill/>
+          <a:ln/>
+        </p:spPr>
+        <p:txBody>
+          <a:bodyPr wrap="square" lIns="0" tIns="0" rIns="0" bIns="0" rtlCol="0" anchor="t">
+            <a:normAutofit/>
+          </a:bodyPr>
+          <a:lstStyle/>
+          <a:p>
+            <a:pPr indent="0" marL="0">
+              <a:buNone/>
+            </a:pPr>
+            <a:r>
+              <a:rPr lang="en-US" sz="1250" dirty="0">
+                <a:solidFill>
+                  <a:srgbClr val="17364A"/>
+                </a:solidFill>
+                <a:latin typeface="Aptos" pitchFamily="34" charset="0"/>
+                <a:ea typeface="Aptos" pitchFamily="34" charset="-122"/>
+                <a:cs typeface="Aptos" pitchFamily="34" charset="-120"/>
+              </a:rPr>
+              <a:t>Connect the concept to public health decisions, safeguards, documentation, or implementation work.</a:t>
+            </a:r>
+            <a:endParaRPr lang="en-US" sz="1250" dirty="0"/>
           </a:p>
         </p:txBody>
       </p:sp>
@@ -4405,7 +6525,32 @@
       </p:sp>
       <p:sp>
         <p:nvSpPr>
-          <p:cNvPr id="3" name="Text 1"/>
+          <p:cNvPr id="3" name="Shape 1"/>
+          <p:cNvSpPr/>
+          <p:nvPr/>
+        </p:nvSpPr>
+        <p:spPr>
+          <a:xfrm>
+            <a:off x="0" y="164592"/>
+            <a:ext cx="146304" cy="6693408"/>
+          </a:xfrm>
+          <a:prstGeom prst="rect">
+            <a:avLst/>
+          </a:prstGeom>
+          <a:solidFill>
+            <a:srgbClr val="2F8A28"/>
+          </a:solidFill>
+          <a:ln w="12700">
+            <a:solidFill>
+              <a:srgbClr val="2F8A28"/>
+            </a:solidFill>
+            <a:prstDash val="solid"/>
+          </a:ln>
+        </p:spPr>
+      </p:sp>
+      <p:sp>
+        <p:nvSpPr>
+          <p:cNvPr id="4" name="Text 2"/>
           <p:cNvSpPr/>
           <p:nvPr/>
         </p:nvSpPr>
@@ -4444,7 +6589,7 @@
       </p:sp>
       <p:sp>
         <p:nvSpPr>
-          <p:cNvPr id="4" name="Text 2"/>
+          <p:cNvPr id="5" name="Text 3"/>
           <p:cNvSpPr/>
           <p:nvPr/>
         </p:nvSpPr>
@@ -4483,7 +6628,7 @@
       </p:sp>
       <p:sp>
         <p:nvSpPr>
-          <p:cNvPr id="5" name="Text 3"/>
+          <p:cNvPr id="6" name="Text 4"/>
           <p:cNvSpPr/>
           <p:nvPr/>
         </p:nvSpPr>
@@ -4522,13 +6667,77 @@
       </p:sp>
       <p:sp>
         <p:nvSpPr>
-          <p:cNvPr id="6" name="Text 4"/>
+          <p:cNvPr id="7" name="Shape 5"/>
           <p:cNvSpPr/>
           <p:nvPr/>
         </p:nvSpPr>
         <p:spPr>
           <a:xfrm>
             <a:off x="640080" y="658368"/>
+            <a:ext cx="420624" cy="420624"/>
+          </a:xfrm>
+          <a:prstGeom prst="ellipse">
+            <a:avLst/>
+          </a:prstGeom>
+          <a:solidFill>
+            <a:srgbClr val="0068B7"/>
+          </a:solidFill>
+          <a:ln w="12700">
+            <a:solidFill>
+              <a:srgbClr val="0068B7"/>
+            </a:solidFill>
+            <a:prstDash val="solid"/>
+          </a:ln>
+        </p:spPr>
+      </p:sp>
+      <p:sp>
+        <p:nvSpPr>
+          <p:cNvPr id="8" name="Text 6"/>
+          <p:cNvSpPr/>
+          <p:nvPr/>
+        </p:nvSpPr>
+        <p:spPr>
+          <a:xfrm>
+            <a:off x="640080" y="731520"/>
+            <a:ext cx="420624" cy="164592"/>
+          </a:xfrm>
+          <a:prstGeom prst="rect">
+            <a:avLst/>
+          </a:prstGeom>
+          <a:noFill/>
+          <a:ln/>
+        </p:spPr>
+        <p:txBody>
+          <a:bodyPr wrap="square" lIns="0" tIns="0" rIns="0" bIns="0" rtlCol="0" anchor="ctr"/>
+          <a:lstStyle/>
+          <a:p>
+            <a:pPr algn="ctr" indent="0" marL="0">
+              <a:buNone/>
+            </a:pPr>
+            <a:r>
+              <a:rPr lang="en-US" sz="1100" b="1" dirty="0">
+                <a:solidFill>
+                  <a:srgbClr val="FFFFFF"/>
+                </a:solidFill>
+                <a:latin typeface="Aptos" pitchFamily="34" charset="0"/>
+                <a:ea typeface="Aptos" pitchFamily="34" charset="-122"/>
+                <a:cs typeface="Aptos" pitchFamily="34" charset="-120"/>
+              </a:rPr>
+              <a:t>10</a:t>
+            </a:r>
+            <a:endParaRPr lang="en-US" sz="1100" dirty="0"/>
+          </a:p>
+        </p:txBody>
+      </p:sp>
+      <p:sp>
+        <p:nvSpPr>
+          <p:cNvPr id="9" name="Text 7"/>
+          <p:cNvSpPr/>
+          <p:nvPr/>
+        </p:nvSpPr>
+        <p:spPr>
+          <a:xfrm>
+            <a:off x="640080" y="621792"/>
             <a:ext cx="10881360" cy="566928"/>
           </a:xfrm>
           <a:prstGeom prst="rect">
@@ -4555,7 +6764,7 @@
                 <a:ea typeface="Aptos Display" pitchFamily="34" charset="-122"/>
                 <a:cs typeface="Aptos Display" pitchFamily="34" charset="-120"/>
               </a:rPr>
-              <a:t>Expected Artifact or Evidence Continued</a:t>
+              <a:t>Practical Exercise</a:t>
             </a:r>
             <a:endParaRPr lang="en-US" sz="2700" dirty="0"/>
           </a:p>
@@ -4563,32 +6772,150 @@
       </p:sp>
       <p:sp>
         <p:nvSpPr>
-          <p:cNvPr id="7" name="Text 5"/>
-          <p:cNvSpPr/>
-          <p:nvPr/>
-        </p:nvSpPr>
-        <p:spPr>
-          <a:xfrm>
-            <a:off x="822960" y="1325880"/>
-            <a:ext cx="10378440" cy="4800600"/>
-          </a:xfrm>
-          <a:prstGeom prst="rect">
-            <a:avLst/>
-          </a:prstGeom>
-          <a:noFill/>
-          <a:ln/>
-        </p:spPr>
-        <p:txBody>
-          <a:bodyPr wrap="square" lIns="1016" tIns="1016" rIns="1016" bIns="1016" rtlCol="0" anchor="t">
+          <p:cNvPr id="10" name="Text 8"/>
+          <p:cNvSpPr/>
+          <p:nvPr/>
+        </p:nvSpPr>
+        <p:spPr>
+          <a:xfrm>
+            <a:off x="868680" y="1417320"/>
+            <a:ext cx="6675120" cy="4434840"/>
+          </a:xfrm>
+          <a:prstGeom prst="rect">
+            <a:avLst/>
+          </a:prstGeom>
+          <a:noFill/>
+          <a:ln/>
+        </p:spPr>
+        <p:txBody>
+          <a:bodyPr wrap="square" lIns="635" tIns="635" rIns="635" bIns="635" rtlCol="0" anchor="t">
             <a:normAutofit/>
           </a:bodyPr>
           <a:lstStyle/>
           <a:p>
+            <a:r>
+              <a:rPr lang="en-US" sz="1700" dirty="0">
+                <a:solidFill>
+                  <a:srgbClr val="17364A"/>
+                </a:solidFill>
+                <a:latin typeface="Aptos" pitchFamily="34" charset="0"/>
+                <a:ea typeface="Aptos" pitchFamily="34" charset="-122"/>
+                <a:cs typeface="Aptos" pitchFamily="34" charset="-120"/>
+              </a:rPr>
+              <a:t>Create a causal question framing worksheet for an AI-supported decision.</a:t>
+            </a:r>
+            <a:endParaRPr lang="en-US" sz="1700" dirty="0"/>
+          </a:p>
+          <a:p>
+            <a:r>
+              <a:rPr lang="en-US" sz="1700" dirty="0">
+                <a:solidFill>
+                  <a:srgbClr val="17364A"/>
+                </a:solidFill>
+                <a:latin typeface="Aptos" pitchFamily="34" charset="0"/>
+                <a:ea typeface="Aptos" pitchFamily="34" charset="-122"/>
+                <a:cs typeface="Aptos" pitchFamily="34" charset="-120"/>
+              </a:rPr>
+              <a:t>Identify the population, intervention or exposure, comparison, outcome, time period, likely confounders, data limitations,.</a:t>
+            </a:r>
+            <a:endParaRPr lang="en-US" sz="1700" dirty="0"/>
+          </a:p>
+        </p:txBody>
+      </p:sp>
+      <p:sp>
+        <p:nvSpPr>
+          <p:cNvPr id="11" name="Shape 9"/>
+          <p:cNvSpPr/>
+          <p:nvPr/>
+        </p:nvSpPr>
+        <p:spPr>
+          <a:xfrm>
+            <a:off x="7909560" y="1417320"/>
+            <a:ext cx="3154680" cy="1828800"/>
+          </a:xfrm>
+          <a:prstGeom prst="roundRect">
+            <a:avLst>
+              <a:gd name="adj" fmla="val 6000"/>
+            </a:avLst>
+          </a:prstGeom>
+          <a:solidFill>
+            <a:srgbClr val="EEF8ED"/>
+          </a:solidFill>
+          <a:ln w="12700">
+            <a:solidFill>
+              <a:srgbClr val="B9D7E6"/>
+            </a:solidFill>
+            <a:prstDash val="solid"/>
+          </a:ln>
+        </p:spPr>
+      </p:sp>
+      <p:sp>
+        <p:nvSpPr>
+          <p:cNvPr id="12" name="Text 10"/>
+          <p:cNvSpPr/>
+          <p:nvPr/>
+        </p:nvSpPr>
+        <p:spPr>
+          <a:xfrm>
+            <a:off x="8074152" y="1563624"/>
+            <a:ext cx="2825496" cy="201168"/>
+          </a:xfrm>
+          <a:prstGeom prst="rect">
+            <a:avLst/>
+          </a:prstGeom>
+          <a:noFill/>
+          <a:ln/>
+        </p:spPr>
+        <p:txBody>
+          <a:bodyPr wrap="square" lIns="0" tIns="0" rIns="0" bIns="0" rtlCol="0" anchor="ctr"/>
+          <a:lstStyle/>
+          <a:p>
             <a:pPr indent="0" marL="0">
               <a:buNone/>
             </a:pPr>
             <a:r>
-              <a:rPr lang="en-US" sz="1420" dirty="0">
+              <a:rPr lang="en-US" sz="950" b="1" dirty="0">
+                <a:solidFill>
+                  <a:srgbClr val="0068B7"/>
+                </a:solidFill>
+                <a:latin typeface="Aptos" pitchFamily="34" charset="0"/>
+                <a:ea typeface="Aptos" pitchFamily="34" charset="-122"/>
+                <a:cs typeface="Aptos" pitchFamily="34" charset="-120"/>
+              </a:rPr>
+              <a:t>Key idea</a:t>
+            </a:r>
+            <a:endParaRPr lang="en-US" sz="950" dirty="0"/>
+          </a:p>
+        </p:txBody>
+      </p:sp>
+      <p:sp>
+        <p:nvSpPr>
+          <p:cNvPr id="13" name="Text 11"/>
+          <p:cNvSpPr/>
+          <p:nvPr/>
+        </p:nvSpPr>
+        <p:spPr>
+          <a:xfrm>
+            <a:off x="8074152" y="1856232"/>
+            <a:ext cx="2825496" cy="1261872"/>
+          </a:xfrm>
+          <a:prstGeom prst="rect">
+            <a:avLst/>
+          </a:prstGeom>
+          <a:noFill/>
+          <a:ln/>
+        </p:spPr>
+        <p:txBody>
+          <a:bodyPr wrap="square" lIns="0" tIns="0" rIns="0" bIns="0" rtlCol="0" anchor="t">
+            <a:normAutofit/>
+          </a:bodyPr>
+          <a:lstStyle/>
+          <a:p>
+            <a:pPr indent="0" marL="0">
+              <a:buNone/>
+            </a:pPr>
+            <a:r>
+              <a:rPr lang="en-US" sz="1250" dirty="0">
                 <a:solidFill>
                   <a:srgbClr val="17364A"/>
                 </a:solidFill>
@@ -4596,9 +6923,116 @@
                 <a:ea typeface="Aptos" pitchFamily="34" charset="-122"/>
                 <a:cs typeface="Aptos" pitchFamily="34" charset="-120"/>
               </a:rPr>
-              <a:t>Plain-language statement distinguishing prediction from causation</a:t>
-            </a:r>
-            <a:endParaRPr lang="en-US" sz="1420" dirty="0"/>
+              <a:t>Create a causal question framing worksheet for an AI-supported decision.</a:t>
+            </a:r>
+            <a:endParaRPr lang="en-US" sz="1250" dirty="0"/>
+          </a:p>
+        </p:txBody>
+      </p:sp>
+      <p:sp>
+        <p:nvSpPr>
+          <p:cNvPr id="14" name="Shape 12"/>
+          <p:cNvSpPr/>
+          <p:nvPr/>
+        </p:nvSpPr>
+        <p:spPr>
+          <a:xfrm>
+            <a:off x="7909560" y="3520440"/>
+            <a:ext cx="3154680" cy="1737360"/>
+          </a:xfrm>
+          <a:prstGeom prst="roundRect">
+            <a:avLst>
+              <a:gd name="adj" fmla="val 6316"/>
+            </a:avLst>
+          </a:prstGeom>
+          <a:solidFill>
+            <a:srgbClr val="EAF6F8"/>
+          </a:solidFill>
+          <a:ln w="12700">
+            <a:solidFill>
+              <a:srgbClr val="B9D7E6"/>
+            </a:solidFill>
+            <a:prstDash val="solid"/>
+          </a:ln>
+        </p:spPr>
+      </p:sp>
+      <p:sp>
+        <p:nvSpPr>
+          <p:cNvPr id="15" name="Text 13"/>
+          <p:cNvSpPr/>
+          <p:nvPr/>
+        </p:nvSpPr>
+        <p:spPr>
+          <a:xfrm>
+            <a:off x="8074152" y="3666744"/>
+            <a:ext cx="2825496" cy="201168"/>
+          </a:xfrm>
+          <a:prstGeom prst="rect">
+            <a:avLst/>
+          </a:prstGeom>
+          <a:noFill/>
+          <a:ln/>
+        </p:spPr>
+        <p:txBody>
+          <a:bodyPr wrap="square" lIns="0" tIns="0" rIns="0" bIns="0" rtlCol="0" anchor="ctr"/>
+          <a:lstStyle/>
+          <a:p>
+            <a:pPr indent="0" marL="0">
+              <a:buNone/>
+            </a:pPr>
+            <a:r>
+              <a:rPr lang="en-US" sz="950" b="1" dirty="0">
+                <a:solidFill>
+                  <a:srgbClr val="0068B7"/>
+                </a:solidFill>
+                <a:latin typeface="Aptos" pitchFamily="34" charset="0"/>
+                <a:ea typeface="Aptos" pitchFamily="34" charset="-122"/>
+                <a:cs typeface="Aptos" pitchFamily="34" charset="-120"/>
+              </a:rPr>
+              <a:t>Use this for</a:t>
+            </a:r>
+            <a:endParaRPr lang="en-US" sz="950" dirty="0"/>
+          </a:p>
+        </p:txBody>
+      </p:sp>
+      <p:sp>
+        <p:nvSpPr>
+          <p:cNvPr id="16" name="Text 14"/>
+          <p:cNvSpPr/>
+          <p:nvPr/>
+        </p:nvSpPr>
+        <p:spPr>
+          <a:xfrm>
+            <a:off x="8074152" y="3959352"/>
+            <a:ext cx="2825496" cy="1170432"/>
+          </a:xfrm>
+          <a:prstGeom prst="rect">
+            <a:avLst/>
+          </a:prstGeom>
+          <a:noFill/>
+          <a:ln/>
+        </p:spPr>
+        <p:txBody>
+          <a:bodyPr wrap="square" lIns="0" tIns="0" rIns="0" bIns="0" rtlCol="0" anchor="t">
+            <a:normAutofit/>
+          </a:bodyPr>
+          <a:lstStyle/>
+          <a:p>
+            <a:pPr indent="0" marL="0">
+              <a:buNone/>
+            </a:pPr>
+            <a:r>
+              <a:rPr lang="en-US" sz="1250" dirty="0">
+                <a:solidFill>
+                  <a:srgbClr val="17364A"/>
+                </a:solidFill>
+                <a:latin typeface="Aptos" pitchFamily="34" charset="0"/>
+                <a:ea typeface="Aptos" pitchFamily="34" charset="-122"/>
+                <a:cs typeface="Aptos" pitchFamily="34" charset="-120"/>
+              </a:rPr>
+              <a:t>Connect the concept to public health decisions, safeguards, documentation, or implementation work.</a:t>
+            </a:r>
+            <a:endParaRPr lang="en-US" sz="1250" dirty="0"/>
           </a:p>
         </p:txBody>
       </p:sp>
@@ -4661,7 +7095,32 @@
       </p:sp>
       <p:sp>
         <p:nvSpPr>
-          <p:cNvPr id="3" name="Text 1"/>
+          <p:cNvPr id="3" name="Shape 1"/>
+          <p:cNvSpPr/>
+          <p:nvPr/>
+        </p:nvSpPr>
+        <p:spPr>
+          <a:xfrm>
+            <a:off x="0" y="164592"/>
+            <a:ext cx="146304" cy="6693408"/>
+          </a:xfrm>
+          <a:prstGeom prst="rect">
+            <a:avLst/>
+          </a:prstGeom>
+          <a:solidFill>
+            <a:srgbClr val="2F8A28"/>
+          </a:solidFill>
+          <a:ln w="12700">
+            <a:solidFill>
+              <a:srgbClr val="2F8A28"/>
+            </a:solidFill>
+            <a:prstDash val="solid"/>
+          </a:ln>
+        </p:spPr>
+      </p:sp>
+      <p:sp>
+        <p:nvSpPr>
+          <p:cNvPr id="4" name="Text 2"/>
           <p:cNvSpPr/>
           <p:nvPr/>
         </p:nvSpPr>
@@ -4700,7 +7159,7 @@
       </p:sp>
       <p:sp>
         <p:nvSpPr>
-          <p:cNvPr id="4" name="Text 2"/>
+          <p:cNvPr id="5" name="Text 3"/>
           <p:cNvSpPr/>
           <p:nvPr/>
         </p:nvSpPr>
@@ -4739,7 +7198,7 @@
       </p:sp>
       <p:sp>
         <p:nvSpPr>
-          <p:cNvPr id="5" name="Text 3"/>
+          <p:cNvPr id="6" name="Text 4"/>
           <p:cNvSpPr/>
           <p:nvPr/>
         </p:nvSpPr>
@@ -4778,13 +7237,77 @@
       </p:sp>
       <p:sp>
         <p:nvSpPr>
-          <p:cNvPr id="6" name="Text 4"/>
+          <p:cNvPr id="7" name="Shape 5"/>
           <p:cNvSpPr/>
           <p:nvPr/>
         </p:nvSpPr>
         <p:spPr>
           <a:xfrm>
             <a:off x="640080" y="658368"/>
+            <a:ext cx="420624" cy="420624"/>
+          </a:xfrm>
+          <a:prstGeom prst="ellipse">
+            <a:avLst/>
+          </a:prstGeom>
+          <a:solidFill>
+            <a:srgbClr val="0068B7"/>
+          </a:solidFill>
+          <a:ln w="12700">
+            <a:solidFill>
+              <a:srgbClr val="0068B7"/>
+            </a:solidFill>
+            <a:prstDash val="solid"/>
+          </a:ln>
+        </p:spPr>
+      </p:sp>
+      <p:sp>
+        <p:nvSpPr>
+          <p:cNvPr id="8" name="Text 6"/>
+          <p:cNvSpPr/>
+          <p:nvPr/>
+        </p:nvSpPr>
+        <p:spPr>
+          <a:xfrm>
+            <a:off x="640080" y="731520"/>
+            <a:ext cx="420624" cy="164592"/>
+          </a:xfrm>
+          <a:prstGeom prst="rect">
+            <a:avLst/>
+          </a:prstGeom>
+          <a:noFill/>
+          <a:ln/>
+        </p:spPr>
+        <p:txBody>
+          <a:bodyPr wrap="square" lIns="0" tIns="0" rIns="0" bIns="0" rtlCol="0" anchor="ctr"/>
+          <a:lstStyle/>
+          <a:p>
+            <a:pPr algn="ctr" indent="0" marL="0">
+              <a:buNone/>
+            </a:pPr>
+            <a:r>
+              <a:rPr lang="en-US" sz="1100" b="1" dirty="0">
+                <a:solidFill>
+                  <a:srgbClr val="FFFFFF"/>
+                </a:solidFill>
+                <a:latin typeface="Aptos" pitchFamily="34" charset="0"/>
+                <a:ea typeface="Aptos" pitchFamily="34" charset="-122"/>
+                <a:cs typeface="Aptos" pitchFamily="34" charset="-120"/>
+              </a:rPr>
+              <a:t>11</a:t>
+            </a:r>
+            <a:endParaRPr lang="en-US" sz="1100" dirty="0"/>
+          </a:p>
+        </p:txBody>
+      </p:sp>
+      <p:sp>
+        <p:nvSpPr>
+          <p:cNvPr id="9" name="Text 7"/>
+          <p:cNvSpPr/>
+          <p:nvPr/>
+        </p:nvSpPr>
+        <p:spPr>
+          <a:xfrm>
+            <a:off x="640080" y="621792"/>
             <a:ext cx="10881360" cy="566928"/>
           </a:xfrm>
           <a:prstGeom prst="rect">
@@ -4811,7 +7334,7 @@
                 <a:ea typeface="Aptos Display" pitchFamily="34" charset="-122"/>
                 <a:cs typeface="Aptos Display" pitchFamily="34" charset="-120"/>
               </a:rPr>
-              <a:t>Expected Assignment</a:t>
+              <a:t>Expected Artifact or Evidence</a:t>
             </a:r>
             <a:endParaRPr lang="en-US" sz="2700" dirty="0"/>
           </a:p>
@@ -4819,14 +7342,14 @@
       </p:sp>
       <p:sp>
         <p:nvSpPr>
-          <p:cNvPr id="7" name="Text 5"/>
-          <p:cNvSpPr/>
-          <p:nvPr/>
-        </p:nvSpPr>
-        <p:spPr>
-          <a:xfrm>
-            <a:off x="822960" y="1325880"/>
-            <a:ext cx="10378440" cy="4800600"/>
+          <p:cNvPr id="10" name="Text 8"/>
+          <p:cNvSpPr/>
+          <p:nvPr/>
+        </p:nvSpPr>
+        <p:spPr>
+          <a:xfrm>
+            <a:off x="868680" y="1417320"/>
+            <a:ext cx="6675120" cy="4434840"/>
           </a:xfrm>
           <a:prstGeom prst="rect">
             <a:avLst/>
@@ -4841,7 +7364,7 @@
           <a:lstStyle/>
           <a:p>
             <a:r>
-              <a:rPr lang="en-US" sz="1450" dirty="0">
+              <a:rPr lang="en-US" sz="1700" dirty="0">
                 <a:solidFill>
                   <a:srgbClr val="17364A"/>
                 </a:solidFill>
@@ -4851,11 +7374,11 @@
               </a:rPr>
               <a:t>Causal question framing worksheet</a:t>
             </a:r>
-            <a:endParaRPr lang="en-US" sz="1450" dirty="0"/>
-          </a:p>
-          <a:p>
-            <a:r>
-              <a:rPr lang="en-US" sz="1450" dirty="0">
+            <a:endParaRPr lang="en-US" sz="1700" dirty="0"/>
+          </a:p>
+          <a:p>
+            <a:r>
+              <a:rPr lang="en-US" sz="1700" dirty="0">
                 <a:solidFill>
                   <a:srgbClr val="17364A"/>
                 </a:solidFill>
@@ -4865,11 +7388,11 @@
               </a:rPr>
               <a:t>List of assumptions and likely confounders</a:t>
             </a:r>
-            <a:endParaRPr lang="en-US" sz="1450" dirty="0"/>
-          </a:p>
-          <a:p>
-            <a:r>
-              <a:rPr lang="en-US" sz="1450" dirty="0">
+            <a:endParaRPr lang="en-US" sz="1700" dirty="0"/>
+          </a:p>
+          <a:p>
+            <a:r>
+              <a:rPr lang="en-US" sz="1700" dirty="0">
                 <a:solidFill>
                   <a:srgbClr val="17364A"/>
                 </a:solidFill>
@@ -4879,11 +7402,104 @@
               </a:rPr>
               <a:t>Recommended evaluation design or expert consultation need</a:t>
             </a:r>
-            <a:endParaRPr lang="en-US" sz="1450" dirty="0"/>
-          </a:p>
-          <a:p>
-            <a:r>
-              <a:rPr lang="en-US" sz="1450" dirty="0">
+            <a:endParaRPr lang="en-US" sz="1700" dirty="0"/>
+          </a:p>
+        </p:txBody>
+      </p:sp>
+      <p:sp>
+        <p:nvSpPr>
+          <p:cNvPr id="11" name="Shape 9"/>
+          <p:cNvSpPr/>
+          <p:nvPr/>
+        </p:nvSpPr>
+        <p:spPr>
+          <a:xfrm>
+            <a:off x="7909560" y="1417320"/>
+            <a:ext cx="3154680" cy="1828800"/>
+          </a:xfrm>
+          <a:prstGeom prst="roundRect">
+            <a:avLst>
+              <a:gd name="adj" fmla="val 6000"/>
+            </a:avLst>
+          </a:prstGeom>
+          <a:solidFill>
+            <a:srgbClr val="EEF8ED"/>
+          </a:solidFill>
+          <a:ln w="12700">
+            <a:solidFill>
+              <a:srgbClr val="B9D7E6"/>
+            </a:solidFill>
+            <a:prstDash val="solid"/>
+          </a:ln>
+        </p:spPr>
+      </p:sp>
+      <p:sp>
+        <p:nvSpPr>
+          <p:cNvPr id="12" name="Text 10"/>
+          <p:cNvSpPr/>
+          <p:nvPr/>
+        </p:nvSpPr>
+        <p:spPr>
+          <a:xfrm>
+            <a:off x="8074152" y="1563624"/>
+            <a:ext cx="2825496" cy="201168"/>
+          </a:xfrm>
+          <a:prstGeom prst="rect">
+            <a:avLst/>
+          </a:prstGeom>
+          <a:noFill/>
+          <a:ln/>
+        </p:spPr>
+        <p:txBody>
+          <a:bodyPr wrap="square" lIns="0" tIns="0" rIns="0" bIns="0" rtlCol="0" anchor="ctr"/>
+          <a:lstStyle/>
+          <a:p>
+            <a:pPr indent="0" marL="0">
+              <a:buNone/>
+            </a:pPr>
+            <a:r>
+              <a:rPr lang="en-US" sz="950" b="1" dirty="0">
+                <a:solidFill>
+                  <a:srgbClr val="0068B7"/>
+                </a:solidFill>
+                <a:latin typeface="Aptos" pitchFamily="34" charset="0"/>
+                <a:ea typeface="Aptos" pitchFamily="34" charset="-122"/>
+                <a:cs typeface="Aptos" pitchFamily="34" charset="-120"/>
+              </a:rPr>
+              <a:t>Key idea</a:t>
+            </a:r>
+            <a:endParaRPr lang="en-US" sz="950" dirty="0"/>
+          </a:p>
+        </p:txBody>
+      </p:sp>
+      <p:sp>
+        <p:nvSpPr>
+          <p:cNvPr id="13" name="Text 11"/>
+          <p:cNvSpPr/>
+          <p:nvPr/>
+        </p:nvSpPr>
+        <p:spPr>
+          <a:xfrm>
+            <a:off x="8074152" y="1856232"/>
+            <a:ext cx="2825496" cy="1261872"/>
+          </a:xfrm>
+          <a:prstGeom prst="rect">
+            <a:avLst/>
+          </a:prstGeom>
+          <a:noFill/>
+          <a:ln/>
+        </p:spPr>
+        <p:txBody>
+          <a:bodyPr wrap="square" lIns="0" tIns="0" rIns="0" bIns="0" rtlCol="0" anchor="t">
+            <a:normAutofit/>
+          </a:bodyPr>
+          <a:lstStyle/>
+          <a:p>
+            <a:pPr indent="0" marL="0">
+              <a:buNone/>
+            </a:pPr>
+            <a:r>
+              <a:rPr lang="en-US" sz="1250" dirty="0">
                 <a:solidFill>
                   <a:srgbClr val="17364A"/>
                 </a:solidFill>
@@ -4891,9 +7507,116 @@
                 <a:ea typeface="Aptos" pitchFamily="34" charset="-122"/>
                 <a:cs typeface="Aptos" pitchFamily="34" charset="-120"/>
               </a:rPr>
-              <a:t>Plain-language statement distinguishing prediction from causation</a:t>
-            </a:r>
-            <a:endParaRPr lang="en-US" sz="1450" dirty="0"/>
+              <a:t>Causal question framing worksheet</a:t>
+            </a:r>
+            <a:endParaRPr lang="en-US" sz="1250" dirty="0"/>
+          </a:p>
+        </p:txBody>
+      </p:sp>
+      <p:sp>
+        <p:nvSpPr>
+          <p:cNvPr id="14" name="Shape 12"/>
+          <p:cNvSpPr/>
+          <p:nvPr/>
+        </p:nvSpPr>
+        <p:spPr>
+          <a:xfrm>
+            <a:off x="7909560" y="3520440"/>
+            <a:ext cx="3154680" cy="1737360"/>
+          </a:xfrm>
+          <a:prstGeom prst="roundRect">
+            <a:avLst>
+              <a:gd name="adj" fmla="val 6316"/>
+            </a:avLst>
+          </a:prstGeom>
+          <a:solidFill>
+            <a:srgbClr val="EAF6F8"/>
+          </a:solidFill>
+          <a:ln w="12700">
+            <a:solidFill>
+              <a:srgbClr val="B9D7E6"/>
+            </a:solidFill>
+            <a:prstDash val="solid"/>
+          </a:ln>
+        </p:spPr>
+      </p:sp>
+      <p:sp>
+        <p:nvSpPr>
+          <p:cNvPr id="15" name="Text 13"/>
+          <p:cNvSpPr/>
+          <p:nvPr/>
+        </p:nvSpPr>
+        <p:spPr>
+          <a:xfrm>
+            <a:off x="8074152" y="3666744"/>
+            <a:ext cx="2825496" cy="201168"/>
+          </a:xfrm>
+          <a:prstGeom prst="rect">
+            <a:avLst/>
+          </a:prstGeom>
+          <a:noFill/>
+          <a:ln/>
+        </p:spPr>
+        <p:txBody>
+          <a:bodyPr wrap="square" lIns="0" tIns="0" rIns="0" bIns="0" rtlCol="0" anchor="ctr"/>
+          <a:lstStyle/>
+          <a:p>
+            <a:pPr indent="0" marL="0">
+              <a:buNone/>
+            </a:pPr>
+            <a:r>
+              <a:rPr lang="en-US" sz="950" b="1" dirty="0">
+                <a:solidFill>
+                  <a:srgbClr val="0068B7"/>
+                </a:solidFill>
+                <a:latin typeface="Aptos" pitchFamily="34" charset="0"/>
+                <a:ea typeface="Aptos" pitchFamily="34" charset="-122"/>
+                <a:cs typeface="Aptos" pitchFamily="34" charset="-120"/>
+              </a:rPr>
+              <a:t>Use this for</a:t>
+            </a:r>
+            <a:endParaRPr lang="en-US" sz="950" dirty="0"/>
+          </a:p>
+        </p:txBody>
+      </p:sp>
+      <p:sp>
+        <p:nvSpPr>
+          <p:cNvPr id="16" name="Text 14"/>
+          <p:cNvSpPr/>
+          <p:nvPr/>
+        </p:nvSpPr>
+        <p:spPr>
+          <a:xfrm>
+            <a:off x="8074152" y="3959352"/>
+            <a:ext cx="2825496" cy="1170432"/>
+          </a:xfrm>
+          <a:prstGeom prst="rect">
+            <a:avLst/>
+          </a:prstGeom>
+          <a:noFill/>
+          <a:ln/>
+        </p:spPr>
+        <p:txBody>
+          <a:bodyPr wrap="square" lIns="0" tIns="0" rIns="0" bIns="0" rtlCol="0" anchor="t">
+            <a:normAutofit/>
+          </a:bodyPr>
+          <a:lstStyle/>
+          <a:p>
+            <a:pPr indent="0" marL="0">
+              <a:buNone/>
+            </a:pPr>
+            <a:r>
+              <a:rPr lang="en-US" sz="1250" dirty="0">
+                <a:solidFill>
+                  <a:srgbClr val="17364A"/>
+                </a:solidFill>
+                <a:latin typeface="Aptos" pitchFamily="34" charset="0"/>
+                <a:ea typeface="Aptos" pitchFamily="34" charset="-122"/>
+                <a:cs typeface="Aptos" pitchFamily="34" charset="-120"/>
+              </a:rPr>
+              <a:t>Connect the concept to public health decisions, safeguards, documentation, or implementation work.</a:t>
+            </a:r>
+            <a:endParaRPr lang="en-US" sz="1250" dirty="0"/>
           </a:p>
         </p:txBody>
       </p:sp>
@@ -4956,7 +7679,32 @@
       </p:sp>
       <p:sp>
         <p:nvSpPr>
-          <p:cNvPr id="3" name="Text 1"/>
+          <p:cNvPr id="3" name="Shape 1"/>
+          <p:cNvSpPr/>
+          <p:nvPr/>
+        </p:nvSpPr>
+        <p:spPr>
+          <a:xfrm>
+            <a:off x="0" y="164592"/>
+            <a:ext cx="146304" cy="6693408"/>
+          </a:xfrm>
+          <a:prstGeom prst="rect">
+            <a:avLst/>
+          </a:prstGeom>
+          <a:solidFill>
+            <a:srgbClr val="2F8A28"/>
+          </a:solidFill>
+          <a:ln w="12700">
+            <a:solidFill>
+              <a:srgbClr val="2F8A28"/>
+            </a:solidFill>
+            <a:prstDash val="solid"/>
+          </a:ln>
+        </p:spPr>
+      </p:sp>
+      <p:sp>
+        <p:nvSpPr>
+          <p:cNvPr id="4" name="Text 2"/>
           <p:cNvSpPr/>
           <p:nvPr/>
         </p:nvSpPr>
@@ -4995,7 +7743,7 @@
       </p:sp>
       <p:sp>
         <p:nvSpPr>
-          <p:cNvPr id="4" name="Text 2"/>
+          <p:cNvPr id="5" name="Text 3"/>
           <p:cNvSpPr/>
           <p:nvPr/>
         </p:nvSpPr>
@@ -5034,7 +7782,7 @@
       </p:sp>
       <p:sp>
         <p:nvSpPr>
-          <p:cNvPr id="5" name="Text 3"/>
+          <p:cNvPr id="6" name="Text 4"/>
           <p:cNvSpPr/>
           <p:nvPr/>
         </p:nvSpPr>
@@ -5073,7 +7821,7 @@
       </p:sp>
       <p:sp>
         <p:nvSpPr>
-          <p:cNvPr id="6" name="Text 4"/>
+          <p:cNvPr id="7" name="Text 5"/>
           <p:cNvSpPr/>
           <p:nvPr/>
         </p:nvSpPr>
@@ -5106,7 +7854,7 @@
                 <a:ea typeface="Aptos Display" pitchFamily="34" charset="-122"/>
                 <a:cs typeface="Aptos Display" pitchFamily="34" charset="-120"/>
               </a:rPr>
-              <a:t>Knowledge Check</a:t>
+              <a:t>Expected Artifact or Evidence Continued</a:t>
             </a:r>
             <a:endParaRPr lang="en-US" sz="2700" dirty="0"/>
           </a:p>
@@ -5114,14 +7862,14 @@
       </p:sp>
       <p:sp>
         <p:nvSpPr>
-          <p:cNvPr id="7" name="Text 5"/>
-          <p:cNvSpPr/>
-          <p:nvPr/>
-        </p:nvSpPr>
-        <p:spPr>
-          <a:xfrm>
-            <a:off x="822960" y="1325880"/>
-            <a:ext cx="10378440" cy="4800600"/>
+          <p:cNvPr id="8" name="Text 6"/>
+          <p:cNvSpPr/>
+          <p:nvPr/>
+        </p:nvSpPr>
+        <p:spPr>
+          <a:xfrm>
+            <a:off x="868680" y="1417320"/>
+            <a:ext cx="6675120" cy="4434840"/>
           </a:xfrm>
           <a:prstGeom prst="rect">
             <a:avLst/>
@@ -5136,7 +7884,7 @@
           <a:lstStyle/>
           <a:p>
             <a:r>
-              <a:rPr lang="en-US" sz="1450" dirty="0">
+              <a:rPr lang="en-US" sz="1700" dirty="0">
                 <a:solidFill>
                   <a:srgbClr val="17364A"/>
                 </a:solidFill>
@@ -5144,13 +7892,106 @@
                 <a:ea typeface="Aptos" pitchFamily="34" charset="-122"/>
                 <a:cs typeface="Aptos" pitchFamily="34" charset="-120"/>
               </a:rPr>
-              <a:t>1. Which statement best distinguishes prediction from causal inference?</a:t>
-            </a:r>
-            <a:endParaRPr lang="en-US" sz="1450" dirty="0"/>
-          </a:p>
-          <a:p>
-            <a:r>
-              <a:rPr lang="en-US" sz="1450" dirty="0">
+              <a:t>Plain-language statement distinguishing prediction from causation</a:t>
+            </a:r>
+            <a:endParaRPr lang="en-US" sz="1700" dirty="0"/>
+          </a:p>
+        </p:txBody>
+      </p:sp>
+      <p:sp>
+        <p:nvSpPr>
+          <p:cNvPr id="9" name="Shape 7"/>
+          <p:cNvSpPr/>
+          <p:nvPr/>
+        </p:nvSpPr>
+        <p:spPr>
+          <a:xfrm>
+            <a:off x="7909560" y="1417320"/>
+            <a:ext cx="3154680" cy="1828800"/>
+          </a:xfrm>
+          <a:prstGeom prst="roundRect">
+            <a:avLst>
+              <a:gd name="adj" fmla="val 6000"/>
+            </a:avLst>
+          </a:prstGeom>
+          <a:solidFill>
+            <a:srgbClr val="EEF8ED"/>
+          </a:solidFill>
+          <a:ln w="12700">
+            <a:solidFill>
+              <a:srgbClr val="B9D7E6"/>
+            </a:solidFill>
+            <a:prstDash val="solid"/>
+          </a:ln>
+        </p:spPr>
+      </p:sp>
+      <p:sp>
+        <p:nvSpPr>
+          <p:cNvPr id="10" name="Text 8"/>
+          <p:cNvSpPr/>
+          <p:nvPr/>
+        </p:nvSpPr>
+        <p:spPr>
+          <a:xfrm>
+            <a:off x="8074152" y="1563624"/>
+            <a:ext cx="2825496" cy="201168"/>
+          </a:xfrm>
+          <a:prstGeom prst="rect">
+            <a:avLst/>
+          </a:prstGeom>
+          <a:noFill/>
+          <a:ln/>
+        </p:spPr>
+        <p:txBody>
+          <a:bodyPr wrap="square" lIns="0" tIns="0" rIns="0" bIns="0" rtlCol="0" anchor="ctr"/>
+          <a:lstStyle/>
+          <a:p>
+            <a:pPr indent="0" marL="0">
+              <a:buNone/>
+            </a:pPr>
+            <a:r>
+              <a:rPr lang="en-US" sz="950" b="1" dirty="0">
+                <a:solidFill>
+                  <a:srgbClr val="0068B7"/>
+                </a:solidFill>
+                <a:latin typeface="Aptos" pitchFamily="34" charset="0"/>
+                <a:ea typeface="Aptos" pitchFamily="34" charset="-122"/>
+                <a:cs typeface="Aptos" pitchFamily="34" charset="-120"/>
+              </a:rPr>
+              <a:t>Key idea</a:t>
+            </a:r>
+            <a:endParaRPr lang="en-US" sz="950" dirty="0"/>
+          </a:p>
+        </p:txBody>
+      </p:sp>
+      <p:sp>
+        <p:nvSpPr>
+          <p:cNvPr id="11" name="Text 9"/>
+          <p:cNvSpPr/>
+          <p:nvPr/>
+        </p:nvSpPr>
+        <p:spPr>
+          <a:xfrm>
+            <a:off x="8074152" y="1856232"/>
+            <a:ext cx="2825496" cy="1261872"/>
+          </a:xfrm>
+          <a:prstGeom prst="rect">
+            <a:avLst/>
+          </a:prstGeom>
+          <a:noFill/>
+          <a:ln/>
+        </p:spPr>
+        <p:txBody>
+          <a:bodyPr wrap="square" lIns="0" tIns="0" rIns="0" bIns="0" rtlCol="0" anchor="t">
+            <a:normAutofit/>
+          </a:bodyPr>
+          <a:lstStyle/>
+          <a:p>
+            <a:pPr indent="0" marL="0">
+              <a:buNone/>
+            </a:pPr>
+            <a:r>
+              <a:rPr lang="en-US" sz="1250" dirty="0">
                 <a:solidFill>
                   <a:srgbClr val="17364A"/>
                 </a:solidFill>
@@ -5158,13 +7999,106 @@
                 <a:ea typeface="Aptos" pitchFamily="34" charset="-122"/>
                 <a:cs typeface="Aptos" pitchFamily="34" charset="-120"/>
               </a:rPr>
-              <a:t>2. What is the best reason to assign an accountability owner?</a:t>
-            </a:r>
-            <a:endParaRPr lang="en-US" sz="1450" dirty="0"/>
-          </a:p>
-          <a:p>
-            <a:r>
-              <a:rPr lang="en-US" sz="1450" dirty="0">
+              <a:t>Plain-language statement distinguishing prediction from causation</a:t>
+            </a:r>
+            <a:endParaRPr lang="en-US" sz="1250" dirty="0"/>
+          </a:p>
+        </p:txBody>
+      </p:sp>
+      <p:sp>
+        <p:nvSpPr>
+          <p:cNvPr id="12" name="Shape 10"/>
+          <p:cNvSpPr/>
+          <p:nvPr/>
+        </p:nvSpPr>
+        <p:spPr>
+          <a:xfrm>
+            <a:off x="7909560" y="3520440"/>
+            <a:ext cx="3154680" cy="1737360"/>
+          </a:xfrm>
+          <a:prstGeom prst="roundRect">
+            <a:avLst>
+              <a:gd name="adj" fmla="val 6316"/>
+            </a:avLst>
+          </a:prstGeom>
+          <a:solidFill>
+            <a:srgbClr val="EAF6F8"/>
+          </a:solidFill>
+          <a:ln w="12700">
+            <a:solidFill>
+              <a:srgbClr val="B9D7E6"/>
+            </a:solidFill>
+            <a:prstDash val="solid"/>
+          </a:ln>
+        </p:spPr>
+      </p:sp>
+      <p:sp>
+        <p:nvSpPr>
+          <p:cNvPr id="13" name="Text 11"/>
+          <p:cNvSpPr/>
+          <p:nvPr/>
+        </p:nvSpPr>
+        <p:spPr>
+          <a:xfrm>
+            <a:off x="8074152" y="3666744"/>
+            <a:ext cx="2825496" cy="201168"/>
+          </a:xfrm>
+          <a:prstGeom prst="rect">
+            <a:avLst/>
+          </a:prstGeom>
+          <a:noFill/>
+          <a:ln/>
+        </p:spPr>
+        <p:txBody>
+          <a:bodyPr wrap="square" lIns="0" tIns="0" rIns="0" bIns="0" rtlCol="0" anchor="ctr"/>
+          <a:lstStyle/>
+          <a:p>
+            <a:pPr indent="0" marL="0">
+              <a:buNone/>
+            </a:pPr>
+            <a:r>
+              <a:rPr lang="en-US" sz="950" b="1" dirty="0">
+                <a:solidFill>
+                  <a:srgbClr val="0068B7"/>
+                </a:solidFill>
+                <a:latin typeface="Aptos" pitchFamily="34" charset="0"/>
+                <a:ea typeface="Aptos" pitchFamily="34" charset="-122"/>
+                <a:cs typeface="Aptos" pitchFamily="34" charset="-120"/>
+              </a:rPr>
+              <a:t>Use this for</a:t>
+            </a:r>
+            <a:endParaRPr lang="en-US" sz="950" dirty="0"/>
+          </a:p>
+        </p:txBody>
+      </p:sp>
+      <p:sp>
+        <p:nvSpPr>
+          <p:cNvPr id="14" name="Text 12"/>
+          <p:cNvSpPr/>
+          <p:nvPr/>
+        </p:nvSpPr>
+        <p:spPr>
+          <a:xfrm>
+            <a:off x="8074152" y="3959352"/>
+            <a:ext cx="2825496" cy="1170432"/>
+          </a:xfrm>
+          <a:prstGeom prst="rect">
+            <a:avLst/>
+          </a:prstGeom>
+          <a:noFill/>
+          <a:ln/>
+        </p:spPr>
+        <p:txBody>
+          <a:bodyPr wrap="square" lIns="0" tIns="0" rIns="0" bIns="0" rtlCol="0" anchor="t">
+            <a:normAutofit/>
+          </a:bodyPr>
+          <a:lstStyle/>
+          <a:p>
+            <a:pPr indent="0" marL="0">
+              <a:buNone/>
+            </a:pPr>
+            <a:r>
+              <a:rPr lang="en-US" sz="1250" dirty="0">
                 <a:solidFill>
                   <a:srgbClr val="17364A"/>
                 </a:solidFill>
@@ -5172,37 +8106,9 @@
                 <a:ea typeface="Aptos" pitchFamily="34" charset="-122"/>
                 <a:cs typeface="Aptos" pitchFamily="34" charset="-120"/>
               </a:rPr>
-              <a:t>3. When should an AI-supported workflow be escalated for review?</a:t>
-            </a:r>
-            <a:endParaRPr lang="en-US" sz="1450" dirty="0"/>
-          </a:p>
-          <a:p>
-            <a:r>
-              <a:rPr lang="en-US" sz="1450" dirty="0">
-                <a:solidFill>
-                  <a:srgbClr val="17364A"/>
-                </a:solidFill>
-                <a:latin typeface="Aptos" pitchFamily="34" charset="0"/>
-                <a:ea typeface="Aptos" pitchFamily="34" charset="-122"/>
-                <a:cs typeface="Aptos" pitchFamily="34" charset="-120"/>
-              </a:rPr>
-              <a:t>4. Which practice best supports public accountability?</a:t>
-            </a:r>
-            <a:endParaRPr lang="en-US" sz="1450" dirty="0"/>
-          </a:p>
-          <a:p>
-            <a:r>
-              <a:rPr lang="en-US" sz="1450" dirty="0">
-                <a:solidFill>
-                  <a:srgbClr val="17364A"/>
-                </a:solidFill>
-                <a:latin typeface="Aptos" pitchFamily="34" charset="0"/>
-                <a:ea typeface="Aptos" pitchFamily="34" charset="-122"/>
-                <a:cs typeface="Aptos" pitchFamily="34" charset="-120"/>
-              </a:rPr>
-              <a:t>5. What should happen when data sources, policy, vendor configuration, or workflow use changes?</a:t>
-            </a:r>
-            <a:endParaRPr lang="en-US" sz="1450" dirty="0"/>
+              <a:t>Connect the concept to public health decisions, safeguards, documentation, or implementation work.</a:t>
+            </a:r>
+            <a:endParaRPr lang="en-US" sz="1250" dirty="0"/>
           </a:p>
         </p:txBody>
       </p:sp>
@@ -5265,7 +8171,32 @@
       </p:sp>
       <p:sp>
         <p:nvSpPr>
-          <p:cNvPr id="3" name="Text 1"/>
+          <p:cNvPr id="3" name="Shape 1"/>
+          <p:cNvSpPr/>
+          <p:nvPr/>
+        </p:nvSpPr>
+        <p:spPr>
+          <a:xfrm>
+            <a:off x="0" y="164592"/>
+            <a:ext cx="146304" cy="6693408"/>
+          </a:xfrm>
+          <a:prstGeom prst="rect">
+            <a:avLst/>
+          </a:prstGeom>
+          <a:solidFill>
+            <a:srgbClr val="2F8A28"/>
+          </a:solidFill>
+          <a:ln w="12700">
+            <a:solidFill>
+              <a:srgbClr val="2F8A28"/>
+            </a:solidFill>
+            <a:prstDash val="solid"/>
+          </a:ln>
+        </p:spPr>
+      </p:sp>
+      <p:sp>
+        <p:nvSpPr>
+          <p:cNvPr id="4" name="Text 2"/>
           <p:cNvSpPr/>
           <p:nvPr/>
         </p:nvSpPr>
@@ -5304,7 +8235,7 @@
       </p:sp>
       <p:sp>
         <p:nvSpPr>
-          <p:cNvPr id="4" name="Text 2"/>
+          <p:cNvPr id="5" name="Text 3"/>
           <p:cNvSpPr/>
           <p:nvPr/>
         </p:nvSpPr>
@@ -5343,7 +8274,7 @@
       </p:sp>
       <p:sp>
         <p:nvSpPr>
-          <p:cNvPr id="5" name="Text 3"/>
+          <p:cNvPr id="6" name="Text 4"/>
           <p:cNvSpPr/>
           <p:nvPr/>
         </p:nvSpPr>
@@ -5382,13 +8313,77 @@
       </p:sp>
       <p:sp>
         <p:nvSpPr>
-          <p:cNvPr id="6" name="Text 4"/>
+          <p:cNvPr id="7" name="Shape 5"/>
           <p:cNvSpPr/>
           <p:nvPr/>
         </p:nvSpPr>
         <p:spPr>
           <a:xfrm>
             <a:off x="640080" y="658368"/>
+            <a:ext cx="420624" cy="420624"/>
+          </a:xfrm>
+          <a:prstGeom prst="ellipse">
+            <a:avLst/>
+          </a:prstGeom>
+          <a:solidFill>
+            <a:srgbClr val="0068B7"/>
+          </a:solidFill>
+          <a:ln w="12700">
+            <a:solidFill>
+              <a:srgbClr val="0068B7"/>
+            </a:solidFill>
+            <a:prstDash val="solid"/>
+          </a:ln>
+        </p:spPr>
+      </p:sp>
+      <p:sp>
+        <p:nvSpPr>
+          <p:cNvPr id="8" name="Text 6"/>
+          <p:cNvSpPr/>
+          <p:nvPr/>
+        </p:nvSpPr>
+        <p:spPr>
+          <a:xfrm>
+            <a:off x="640080" y="731520"/>
+            <a:ext cx="420624" cy="164592"/>
+          </a:xfrm>
+          <a:prstGeom prst="rect">
+            <a:avLst/>
+          </a:prstGeom>
+          <a:noFill/>
+          <a:ln/>
+        </p:spPr>
+        <p:txBody>
+          <a:bodyPr wrap="square" lIns="0" tIns="0" rIns="0" bIns="0" rtlCol="0" anchor="ctr"/>
+          <a:lstStyle/>
+          <a:p>
+            <a:pPr algn="ctr" indent="0" marL="0">
+              <a:buNone/>
+            </a:pPr>
+            <a:r>
+              <a:rPr lang="en-US" sz="1100" b="1" dirty="0">
+                <a:solidFill>
+                  <a:srgbClr val="FFFFFF"/>
+                </a:solidFill>
+                <a:latin typeface="Aptos" pitchFamily="34" charset="0"/>
+                <a:ea typeface="Aptos" pitchFamily="34" charset="-122"/>
+                <a:cs typeface="Aptos" pitchFamily="34" charset="-120"/>
+              </a:rPr>
+              <a:t>12</a:t>
+            </a:r>
+            <a:endParaRPr lang="en-US" sz="1100" dirty="0"/>
+          </a:p>
+        </p:txBody>
+      </p:sp>
+      <p:sp>
+        <p:nvSpPr>
+          <p:cNvPr id="9" name="Text 7"/>
+          <p:cNvSpPr/>
+          <p:nvPr/>
+        </p:nvSpPr>
+        <p:spPr>
+          <a:xfrm>
+            <a:off x="640080" y="621792"/>
             <a:ext cx="10881360" cy="566928"/>
           </a:xfrm>
           <a:prstGeom prst="rect">
@@ -5415,7 +8410,7 @@
                 <a:ea typeface="Aptos Display" pitchFamily="34" charset="-122"/>
                 <a:cs typeface="Aptos Display" pitchFamily="34" charset="-120"/>
               </a:rPr>
-              <a:t>References and Resources</a:t>
+              <a:t>Expected Assignment</a:t>
             </a:r>
             <a:endParaRPr lang="en-US" sz="2700" dirty="0"/>
           </a:p>
@@ -5423,14 +8418,14 @@
       </p:sp>
       <p:sp>
         <p:nvSpPr>
-          <p:cNvPr id="7" name="Text 5"/>
-          <p:cNvSpPr/>
-          <p:nvPr/>
-        </p:nvSpPr>
-        <p:spPr>
-          <a:xfrm>
-            <a:off x="822960" y="1325880"/>
-            <a:ext cx="10378440" cy="4800600"/>
+          <p:cNvPr id="10" name="Text 8"/>
+          <p:cNvSpPr/>
+          <p:nvPr/>
+        </p:nvSpPr>
+        <p:spPr>
+          <a:xfrm>
+            <a:off x="868680" y="1417320"/>
+            <a:ext cx="6675120" cy="4434840"/>
           </a:xfrm>
           <a:prstGeom prst="rect">
             <a:avLst/>
@@ -5445,7 +8440,7 @@
           <a:lstStyle/>
           <a:p>
             <a:r>
-              <a:rPr lang="en-US" sz="1450" dirty="0">
+              <a:rPr lang="en-US" sz="1700" dirty="0">
                 <a:solidFill>
                   <a:srgbClr val="17364A"/>
                 </a:solidFill>
@@ -5453,13 +8448,13 @@
                 <a:ea typeface="Aptos" pitchFamily="34" charset="-122"/>
                 <a:cs typeface="Aptos" pitchFamily="34" charset="-120"/>
               </a:rPr>
-              <a:t>CDC Public Health Data Strategy and Data Modernization resources: https://www.cdc.gov/public-health-data-strategy/php/about/index.html</a:t>
-            </a:r>
-            <a:endParaRPr lang="en-US" sz="1450" dirty="0"/>
-          </a:p>
-          <a:p>
-            <a:r>
-              <a:rPr lang="en-US" sz="1450" dirty="0">
+              <a:t>Causal question framing worksheet</a:t>
+            </a:r>
+            <a:endParaRPr lang="en-US" sz="1700" dirty="0"/>
+          </a:p>
+          <a:p>
+            <a:r>
+              <a:rPr lang="en-US" sz="1700" dirty="0">
                 <a:solidFill>
                   <a:srgbClr val="17364A"/>
                 </a:solidFill>
@@ -5467,13 +8462,13 @@
                 <a:ea typeface="Aptos" pitchFamily="34" charset="-122"/>
                 <a:cs typeface="Aptos" pitchFamily="34" charset="-120"/>
               </a:rPr>
-              <a:t>NIST Artificial Intelligence Risk Management Framework and NIST Generative AI Profile: https://www.nist.gov/publications/artificial-intelligence-risk-management-framework-generative-artificial-intelligence</a:t>
-            </a:r>
-            <a:endParaRPr lang="en-US" sz="1450" dirty="0"/>
-          </a:p>
-          <a:p>
-            <a:r>
-              <a:rPr lang="en-US" sz="1450" dirty="0">
+              <a:t>List of assumptions and likely confounders</a:t>
+            </a:r>
+            <a:endParaRPr lang="en-US" sz="1700" dirty="0"/>
+          </a:p>
+          <a:p>
+            <a:r>
+              <a:rPr lang="en-US" sz="1700" dirty="0">
                 <a:solidFill>
                   <a:srgbClr val="17364A"/>
                 </a:solidFill>
@@ -5481,13 +8476,13 @@
                 <a:ea typeface="Aptos" pitchFamily="34" charset="-122"/>
                 <a:cs typeface="Aptos" pitchFamily="34" charset="-120"/>
               </a:rPr>
-              <a:t>WHO Ethics and Governance of Artificial Intelligence for Health guidance: https://www.who.int/publications/i/item/9789240029200</a:t>
-            </a:r>
-            <a:endParaRPr lang="en-US" sz="1450" dirty="0"/>
-          </a:p>
-          <a:p>
-            <a:r>
-              <a:rPr lang="en-US" sz="1450" dirty="0">
+              <a:t>Recommended evaluation design or expert consultation need</a:t>
+            </a:r>
+            <a:endParaRPr lang="en-US" sz="1700" dirty="0"/>
+          </a:p>
+          <a:p>
+            <a:r>
+              <a:rPr lang="en-US" sz="1700" dirty="0">
                 <a:solidFill>
                   <a:srgbClr val="17364A"/>
                 </a:solidFill>
@@ -5495,13 +8490,106 @@
                 <a:ea typeface="Aptos" pitchFamily="34" charset="-122"/>
                 <a:cs typeface="Aptos" pitchFamily="34" charset="-120"/>
               </a:rPr>
-              <a:t>OWASP Top 10 for Large Language Model Applications: https://owasp.org/www-project-top-10-for-large-language-model-applications/</a:t>
-            </a:r>
-            <a:endParaRPr lang="en-US" sz="1450" dirty="0"/>
-          </a:p>
-          <a:p>
-            <a:r>
-              <a:rPr lang="en-US" sz="1450" dirty="0">
+              <a:t>Plain-language statement distinguishing prediction from causation</a:t>
+            </a:r>
+            <a:endParaRPr lang="en-US" sz="1700" dirty="0"/>
+          </a:p>
+        </p:txBody>
+      </p:sp>
+      <p:sp>
+        <p:nvSpPr>
+          <p:cNvPr id="11" name="Shape 9"/>
+          <p:cNvSpPr/>
+          <p:nvPr/>
+        </p:nvSpPr>
+        <p:spPr>
+          <a:xfrm>
+            <a:off x="7909560" y="1417320"/>
+            <a:ext cx="3154680" cy="1828800"/>
+          </a:xfrm>
+          <a:prstGeom prst="roundRect">
+            <a:avLst>
+              <a:gd name="adj" fmla="val 6000"/>
+            </a:avLst>
+          </a:prstGeom>
+          <a:solidFill>
+            <a:srgbClr val="EEF8ED"/>
+          </a:solidFill>
+          <a:ln w="12700">
+            <a:solidFill>
+              <a:srgbClr val="B9D7E6"/>
+            </a:solidFill>
+            <a:prstDash val="solid"/>
+          </a:ln>
+        </p:spPr>
+      </p:sp>
+      <p:sp>
+        <p:nvSpPr>
+          <p:cNvPr id="12" name="Text 10"/>
+          <p:cNvSpPr/>
+          <p:nvPr/>
+        </p:nvSpPr>
+        <p:spPr>
+          <a:xfrm>
+            <a:off x="8074152" y="1563624"/>
+            <a:ext cx="2825496" cy="201168"/>
+          </a:xfrm>
+          <a:prstGeom prst="rect">
+            <a:avLst/>
+          </a:prstGeom>
+          <a:noFill/>
+          <a:ln/>
+        </p:spPr>
+        <p:txBody>
+          <a:bodyPr wrap="square" lIns="0" tIns="0" rIns="0" bIns="0" rtlCol="0" anchor="ctr"/>
+          <a:lstStyle/>
+          <a:p>
+            <a:pPr indent="0" marL="0">
+              <a:buNone/>
+            </a:pPr>
+            <a:r>
+              <a:rPr lang="en-US" sz="950" b="1" dirty="0">
+                <a:solidFill>
+                  <a:srgbClr val="0068B7"/>
+                </a:solidFill>
+                <a:latin typeface="Aptos" pitchFamily="34" charset="0"/>
+                <a:ea typeface="Aptos" pitchFamily="34" charset="-122"/>
+                <a:cs typeface="Aptos" pitchFamily="34" charset="-120"/>
+              </a:rPr>
+              <a:t>Key idea</a:t>
+            </a:r>
+            <a:endParaRPr lang="en-US" sz="950" dirty="0"/>
+          </a:p>
+        </p:txBody>
+      </p:sp>
+      <p:sp>
+        <p:nvSpPr>
+          <p:cNvPr id="13" name="Text 11"/>
+          <p:cNvSpPr/>
+          <p:nvPr/>
+        </p:nvSpPr>
+        <p:spPr>
+          <a:xfrm>
+            <a:off x="8074152" y="1856232"/>
+            <a:ext cx="2825496" cy="1261872"/>
+          </a:xfrm>
+          <a:prstGeom prst="rect">
+            <a:avLst/>
+          </a:prstGeom>
+          <a:noFill/>
+          <a:ln/>
+        </p:spPr>
+        <p:txBody>
+          <a:bodyPr wrap="square" lIns="0" tIns="0" rIns="0" bIns="0" rtlCol="0" anchor="t">
+            <a:normAutofit/>
+          </a:bodyPr>
+          <a:lstStyle/>
+          <a:p>
+            <a:pPr indent="0" marL="0">
+              <a:buNone/>
+            </a:pPr>
+            <a:r>
+              <a:rPr lang="en-US" sz="1250" dirty="0">
                 <a:solidFill>
                   <a:srgbClr val="17364A"/>
                 </a:solidFill>
@@ -5509,9 +8597,116 @@
                 <a:ea typeface="Aptos" pitchFamily="34" charset="-122"/>
                 <a:cs typeface="Aptos" pitchFamily="34" charset="-120"/>
               </a:rPr>
-              <a:t>ONC health IT, interoperability, and information blocking resources: https://www.healthit.gov/</a:t>
-            </a:r>
-            <a:endParaRPr lang="en-US" sz="1450" dirty="0"/>
+              <a:t>Causal question framing worksheet</a:t>
+            </a:r>
+            <a:endParaRPr lang="en-US" sz="1250" dirty="0"/>
+          </a:p>
+        </p:txBody>
+      </p:sp>
+      <p:sp>
+        <p:nvSpPr>
+          <p:cNvPr id="14" name="Shape 12"/>
+          <p:cNvSpPr/>
+          <p:nvPr/>
+        </p:nvSpPr>
+        <p:spPr>
+          <a:xfrm>
+            <a:off x="7909560" y="3520440"/>
+            <a:ext cx="3154680" cy="1737360"/>
+          </a:xfrm>
+          <a:prstGeom prst="roundRect">
+            <a:avLst>
+              <a:gd name="adj" fmla="val 6316"/>
+            </a:avLst>
+          </a:prstGeom>
+          <a:solidFill>
+            <a:srgbClr val="EAF6F8"/>
+          </a:solidFill>
+          <a:ln w="12700">
+            <a:solidFill>
+              <a:srgbClr val="B9D7E6"/>
+            </a:solidFill>
+            <a:prstDash val="solid"/>
+          </a:ln>
+        </p:spPr>
+      </p:sp>
+      <p:sp>
+        <p:nvSpPr>
+          <p:cNvPr id="15" name="Text 13"/>
+          <p:cNvSpPr/>
+          <p:nvPr/>
+        </p:nvSpPr>
+        <p:spPr>
+          <a:xfrm>
+            <a:off x="8074152" y="3666744"/>
+            <a:ext cx="2825496" cy="201168"/>
+          </a:xfrm>
+          <a:prstGeom prst="rect">
+            <a:avLst/>
+          </a:prstGeom>
+          <a:noFill/>
+          <a:ln/>
+        </p:spPr>
+        <p:txBody>
+          <a:bodyPr wrap="square" lIns="0" tIns="0" rIns="0" bIns="0" rtlCol="0" anchor="ctr"/>
+          <a:lstStyle/>
+          <a:p>
+            <a:pPr indent="0" marL="0">
+              <a:buNone/>
+            </a:pPr>
+            <a:r>
+              <a:rPr lang="en-US" sz="950" b="1" dirty="0">
+                <a:solidFill>
+                  <a:srgbClr val="0068B7"/>
+                </a:solidFill>
+                <a:latin typeface="Aptos" pitchFamily="34" charset="0"/>
+                <a:ea typeface="Aptos" pitchFamily="34" charset="-122"/>
+                <a:cs typeface="Aptos" pitchFamily="34" charset="-120"/>
+              </a:rPr>
+              <a:t>Use this for</a:t>
+            </a:r>
+            <a:endParaRPr lang="en-US" sz="950" dirty="0"/>
+          </a:p>
+        </p:txBody>
+      </p:sp>
+      <p:sp>
+        <p:nvSpPr>
+          <p:cNvPr id="16" name="Text 14"/>
+          <p:cNvSpPr/>
+          <p:nvPr/>
+        </p:nvSpPr>
+        <p:spPr>
+          <a:xfrm>
+            <a:off x="8074152" y="3959352"/>
+            <a:ext cx="2825496" cy="1170432"/>
+          </a:xfrm>
+          <a:prstGeom prst="rect">
+            <a:avLst/>
+          </a:prstGeom>
+          <a:noFill/>
+          <a:ln/>
+        </p:spPr>
+        <p:txBody>
+          <a:bodyPr wrap="square" lIns="0" tIns="0" rIns="0" bIns="0" rtlCol="0" anchor="t">
+            <a:normAutofit/>
+          </a:bodyPr>
+          <a:lstStyle/>
+          <a:p>
+            <a:pPr indent="0" marL="0">
+              <a:buNone/>
+            </a:pPr>
+            <a:r>
+              <a:rPr lang="en-US" sz="1250" dirty="0">
+                <a:solidFill>
+                  <a:srgbClr val="17364A"/>
+                </a:solidFill>
+                <a:latin typeface="Aptos" pitchFamily="34" charset="0"/>
+                <a:ea typeface="Aptos" pitchFamily="34" charset="-122"/>
+                <a:cs typeface="Aptos" pitchFamily="34" charset="-120"/>
+              </a:rPr>
+              <a:t>Connect the concept to public health decisions, safeguards, documentation, or implementation work.</a:t>
+            </a:r>
+            <a:endParaRPr lang="en-US" sz="1250" dirty="0"/>
           </a:p>
         </p:txBody>
       </p:sp>
@@ -5574,7 +8769,32 @@
       </p:sp>
       <p:sp>
         <p:nvSpPr>
-          <p:cNvPr id="3" name="Text 1"/>
+          <p:cNvPr id="3" name="Shape 1"/>
+          <p:cNvSpPr/>
+          <p:nvPr/>
+        </p:nvSpPr>
+        <p:spPr>
+          <a:xfrm>
+            <a:off x="0" y="164592"/>
+            <a:ext cx="146304" cy="6693408"/>
+          </a:xfrm>
+          <a:prstGeom prst="rect">
+            <a:avLst/>
+          </a:prstGeom>
+          <a:solidFill>
+            <a:srgbClr val="2F8A28"/>
+          </a:solidFill>
+          <a:ln w="12700">
+            <a:solidFill>
+              <a:srgbClr val="2F8A28"/>
+            </a:solidFill>
+            <a:prstDash val="solid"/>
+          </a:ln>
+        </p:spPr>
+      </p:sp>
+      <p:sp>
+        <p:nvSpPr>
+          <p:cNvPr id="4" name="Text 2"/>
           <p:cNvSpPr/>
           <p:nvPr/>
         </p:nvSpPr>
@@ -5613,7 +8833,7 @@
       </p:sp>
       <p:sp>
         <p:nvSpPr>
-          <p:cNvPr id="4" name="Text 2"/>
+          <p:cNvPr id="5" name="Text 3"/>
           <p:cNvSpPr/>
           <p:nvPr/>
         </p:nvSpPr>
@@ -5652,7 +8872,7 @@
       </p:sp>
       <p:sp>
         <p:nvSpPr>
-          <p:cNvPr id="5" name="Text 3"/>
+          <p:cNvPr id="6" name="Text 4"/>
           <p:cNvSpPr/>
           <p:nvPr/>
         </p:nvSpPr>
@@ -5691,7 +8911,7 @@
       </p:sp>
       <p:sp>
         <p:nvSpPr>
-          <p:cNvPr id="6" name="Text 4"/>
+          <p:cNvPr id="7" name="Text 5"/>
           <p:cNvSpPr/>
           <p:nvPr/>
         </p:nvSpPr>
@@ -5724,7 +8944,7 @@
                 <a:ea typeface="Aptos Display" pitchFamily="34" charset="-122"/>
                 <a:cs typeface="Aptos Display" pitchFamily="34" charset="-120"/>
               </a:rPr>
-              <a:t>Module Context</a:t>
+              <a:t>What this module helps you do</a:t>
             </a:r>
             <a:endParaRPr lang="en-US" sz="2700" dirty="0"/>
           </a:p>
@@ -5732,14 +8952,14 @@
       </p:sp>
       <p:sp>
         <p:nvSpPr>
-          <p:cNvPr id="7" name="Text 5"/>
-          <p:cNvSpPr/>
-          <p:nvPr/>
-        </p:nvSpPr>
-        <p:spPr>
-          <a:xfrm>
-            <a:off x="822960" y="1325880"/>
-            <a:ext cx="10378440" cy="1371600"/>
+          <p:cNvPr id="8" name="Text 6"/>
+          <p:cNvSpPr/>
+          <p:nvPr/>
+        </p:nvSpPr>
+        <p:spPr>
+          <a:xfrm>
+            <a:off x="868680" y="1417320"/>
+            <a:ext cx="6675120" cy="3291840"/>
           </a:xfrm>
           <a:prstGeom prst="rect">
             <a:avLst/>
@@ -5754,7 +8974,7 @@
           <a:lstStyle/>
           <a:p>
             <a:r>
-              <a:rPr lang="en-US" sz="1600" dirty="0">
+              <a:rPr lang="en-US" sz="1700" dirty="0">
                 <a:solidFill>
                   <a:srgbClr val="17364A"/>
                 </a:solidFill>
@@ -5762,13 +8982,13 @@
                 <a:ea typeface="Aptos" pitchFamily="34" charset="-122"/>
                 <a:cs typeface="Aptos" pitchFamily="34" charset="-120"/>
               </a:rPr>
-              <a:t>Level: intermediate/practitioner</a:t>
-            </a:r>
-            <a:endParaRPr lang="en-US" sz="1600" dirty="0"/>
-          </a:p>
-          <a:p>
-            <a:r>
-              <a:rPr lang="en-US" sz="1600" dirty="0">
+              <a:t>AI models often predict what is likely to happen, but public health leaders frequently need to know what action will change an outcome.</a:t>
+            </a:r>
+            <a:endParaRPr lang="en-US" sz="1700" dirty="0"/>
+          </a:p>
+          <a:p>
+            <a:r>
+              <a:rPr lang="en-US" sz="1700" dirty="0">
                 <a:solidFill>
                   <a:srgbClr val="17364A"/>
                 </a:solidFill>
@@ -5776,13 +8996,13 @@
                 <a:ea typeface="Aptos" pitchFamily="34" charset="-122"/>
                 <a:cs typeface="Aptos" pitchFamily="34" charset="-120"/>
               </a:rPr>
-              <a:t>Primary track: Analytics and Modeling Track</a:t>
-            </a:r>
-            <a:endParaRPr lang="en-US" sz="1600" dirty="0"/>
-          </a:p>
-          <a:p>
-            <a:r>
-              <a:rPr lang="en-US" sz="1600" dirty="0">
+              <a:t>This module helps learners distinguish prediction from causal inference so AI outputs are not misused as evidence that a program, policy, or.</a:t>
+            </a:r>
+            <a:endParaRPr lang="en-US" sz="1700" dirty="0"/>
+          </a:p>
+          <a:p>
+            <a:r>
+              <a:rPr lang="en-US" sz="1700" dirty="0">
                 <a:solidFill>
                   <a:srgbClr val="17364A"/>
                 </a:solidFill>
@@ -5790,31 +9010,111 @@
                 <a:ea typeface="Aptos" pitchFamily="34" charset="-122"/>
                 <a:cs typeface="Aptos" pitchFamily="34" charset="-120"/>
               </a:rPr>
-              <a:t>Appears in tracks: analytics-modeling, epidemiology, policy, governance-security</a:t>
-            </a:r>
-            <a:endParaRPr lang="en-US" sz="1600" dirty="0"/>
-          </a:p>
-        </p:txBody>
-      </p:sp>
-      <p:sp>
-        <p:nvSpPr>
-          <p:cNvPr id="8" name="Text 6"/>
-          <p:cNvSpPr/>
-          <p:nvPr/>
-        </p:nvSpPr>
-        <p:spPr>
-          <a:xfrm>
-            <a:off x="822960" y="2743200"/>
-            <a:ext cx="10378440" cy="2834640"/>
-          </a:xfrm>
-          <a:prstGeom prst="rect">
-            <a:avLst/>
-          </a:prstGeom>
-          <a:noFill/>
-          <a:ln/>
-        </p:spPr>
-        <p:txBody>
-          <a:bodyPr wrap="square" lIns="1016" tIns="1016" rIns="1016" bIns="1016" rtlCol="0" anchor="t">
+              <a:t>Learners examine confounding, bias, comparison groups, counterfactual reasoning, directed acyclic graphs, and quasi-experimental designs at a.</a:t>
+            </a:r>
+            <a:endParaRPr lang="en-US" sz="1700" dirty="0"/>
+          </a:p>
+          <a:p>
+            <a:r>
+              <a:rPr lang="en-US" sz="1700" dirty="0">
+                <a:solidFill>
+                  <a:srgbClr val="17364A"/>
+                </a:solidFill>
+                <a:latin typeface="Aptos" pitchFamily="34" charset="0"/>
+                <a:ea typeface="Aptos" pitchFamily="34" charset="-122"/>
+                <a:cs typeface="Aptos" pitchFamily="34" charset="-120"/>
+              </a:rPr>
+              <a:t>The purpose is not to turn every learner into a causal methods expert.</a:t>
+            </a:r>
+            <a:endParaRPr lang="en-US" sz="1700" dirty="0"/>
+          </a:p>
+        </p:txBody>
+      </p:sp>
+      <p:sp>
+        <p:nvSpPr>
+          <p:cNvPr id="9" name="Shape 7"/>
+          <p:cNvSpPr/>
+          <p:nvPr/>
+        </p:nvSpPr>
+        <p:spPr>
+          <a:xfrm>
+            <a:off x="7909560" y="1417320"/>
+            <a:ext cx="3154680" cy="1920240"/>
+          </a:xfrm>
+          <a:prstGeom prst="roundRect">
+            <a:avLst>
+              <a:gd name="adj" fmla="val 5714"/>
+            </a:avLst>
+          </a:prstGeom>
+          <a:solidFill>
+            <a:srgbClr val="EAF6F8"/>
+          </a:solidFill>
+          <a:ln w="12700">
+            <a:solidFill>
+              <a:srgbClr val="B9D7E6"/>
+            </a:solidFill>
+            <a:prstDash val="solid"/>
+          </a:ln>
+        </p:spPr>
+      </p:sp>
+      <p:sp>
+        <p:nvSpPr>
+          <p:cNvPr id="10" name="Text 8"/>
+          <p:cNvSpPr/>
+          <p:nvPr/>
+        </p:nvSpPr>
+        <p:spPr>
+          <a:xfrm>
+            <a:off x="8074152" y="1563624"/>
+            <a:ext cx="2825496" cy="201168"/>
+          </a:xfrm>
+          <a:prstGeom prst="rect">
+            <a:avLst/>
+          </a:prstGeom>
+          <a:noFill/>
+          <a:ln/>
+        </p:spPr>
+        <p:txBody>
+          <a:bodyPr wrap="square" lIns="0" tIns="0" rIns="0" bIns="0" rtlCol="0" anchor="ctr"/>
+          <a:lstStyle/>
+          <a:p>
+            <a:pPr indent="0" marL="0">
+              <a:buNone/>
+            </a:pPr>
+            <a:r>
+              <a:rPr lang="en-US" sz="950" b="1" dirty="0">
+                <a:solidFill>
+                  <a:srgbClr val="0068B7"/>
+                </a:solidFill>
+                <a:latin typeface="Aptos" pitchFamily="34" charset="0"/>
+                <a:ea typeface="Aptos" pitchFamily="34" charset="-122"/>
+                <a:cs typeface="Aptos" pitchFamily="34" charset="-120"/>
+              </a:rPr>
+              <a:t>Module details</a:t>
+            </a:r>
+            <a:endParaRPr lang="en-US" sz="950" dirty="0"/>
+          </a:p>
+        </p:txBody>
+      </p:sp>
+      <p:sp>
+        <p:nvSpPr>
+          <p:cNvPr id="11" name="Text 9"/>
+          <p:cNvSpPr/>
+          <p:nvPr/>
+        </p:nvSpPr>
+        <p:spPr>
+          <a:xfrm>
+            <a:off x="8074152" y="1856232"/>
+            <a:ext cx="2825496" cy="1353312"/>
+          </a:xfrm>
+          <a:prstGeom prst="rect">
+            <a:avLst/>
+          </a:prstGeom>
+          <a:noFill/>
+          <a:ln/>
+        </p:spPr>
+        <p:txBody>
+          <a:bodyPr wrap="square" lIns="0" tIns="0" rIns="0" bIns="0" rtlCol="0" anchor="t">
             <a:normAutofit/>
           </a:bodyPr>
           <a:lstStyle/>
@@ -5823,7 +9123,7 @@
               <a:buNone/>
             </a:pPr>
             <a:r>
-              <a:rPr lang="en-US" sz="1400" dirty="0">
+              <a:rPr lang="en-US" sz="1250" dirty="0">
                 <a:solidFill>
                   <a:srgbClr val="17364A"/>
                 </a:solidFill>
@@ -5831,9 +9131,150 @@
                 <a:ea typeface="Aptos" pitchFamily="34" charset="-122"/>
                 <a:cs typeface="Aptos" pitchFamily="34" charset="-120"/>
               </a:rPr>
-              <a:t>AI models often predict what is likely to happen, but public health leaders frequently need to know what action will change an outcome. This module helps learners distinguish prediction from causal inference so AI outputs are not misused as evidence that a program, policy, or intervention caused an observed effect. Learners examine confounding, bias, comparison groups, counterfactual reasoning, directed acyclic graphs, and quasi-experimental designs at a practical level. The purpose is not to turn every learner into a causal methods expert. The purpose is to help public health teams recognize when causal claims require stronger evidence than a predictive model can provide.</a:t>
-            </a:r>
-            <a:endParaRPr lang="en-US" sz="1400" dirty="0"/>
+              <a:t>Level: intermediate/practitioner</a:t>
+            </a:r>
+            <a:endParaRPr lang="en-US" sz="1250" dirty="0"/>
+          </a:p>
+          <a:p>
+            <a:pPr indent="0" marL="0">
+              <a:buNone/>
+            </a:pPr>
+            <a:r>
+              <a:rPr lang="en-US" sz="1250" dirty="0">
+                <a:solidFill>
+                  <a:srgbClr val="17364A"/>
+                </a:solidFill>
+                <a:latin typeface="Aptos" pitchFamily="34" charset="0"/>
+                <a:ea typeface="Aptos" pitchFamily="34" charset="-122"/>
+                <a:cs typeface="Aptos" pitchFamily="34" charset="-120"/>
+              </a:rPr>
+              <a:t>Primary track: Analytics and Modeling Track</a:t>
+            </a:r>
+            <a:endParaRPr lang="en-US" sz="1250" dirty="0"/>
+          </a:p>
+          <a:p>
+            <a:pPr indent="0" marL="0">
+              <a:buNone/>
+            </a:pPr>
+            <a:r>
+              <a:rPr lang="en-US" sz="1250" dirty="0">
+                <a:solidFill>
+                  <a:srgbClr val="17364A"/>
+                </a:solidFill>
+                <a:latin typeface="Aptos" pitchFamily="34" charset="0"/>
+                <a:ea typeface="Aptos" pitchFamily="34" charset="-122"/>
+                <a:cs typeface="Aptos" pitchFamily="34" charset="-120"/>
+              </a:rPr>
+              <a:t>Appears in tracks: analytics-modeling, epidemiology, policy, governance-security</a:t>
+            </a:r>
+            <a:endParaRPr lang="en-US" sz="1250" dirty="0"/>
+          </a:p>
+        </p:txBody>
+      </p:sp>
+      <p:sp>
+        <p:nvSpPr>
+          <p:cNvPr id="12" name="Shape 10"/>
+          <p:cNvSpPr/>
+          <p:nvPr/>
+        </p:nvSpPr>
+        <p:spPr>
+          <a:xfrm>
+            <a:off x="7909560" y="3611880"/>
+            <a:ext cx="3154680" cy="1783080"/>
+          </a:xfrm>
+          <a:prstGeom prst="roundRect">
+            <a:avLst>
+              <a:gd name="adj" fmla="val 6154"/>
+            </a:avLst>
+          </a:prstGeom>
+          <a:solidFill>
+            <a:srgbClr val="EEF8ED"/>
+          </a:solidFill>
+          <a:ln w="12700">
+            <a:solidFill>
+              <a:srgbClr val="B9D7E6"/>
+            </a:solidFill>
+            <a:prstDash val="solid"/>
+          </a:ln>
+        </p:spPr>
+      </p:sp>
+      <p:sp>
+        <p:nvSpPr>
+          <p:cNvPr id="13" name="Text 11"/>
+          <p:cNvSpPr/>
+          <p:nvPr/>
+        </p:nvSpPr>
+        <p:spPr>
+          <a:xfrm>
+            <a:off x="8074152" y="3758184"/>
+            <a:ext cx="2825496" cy="201168"/>
+          </a:xfrm>
+          <a:prstGeom prst="rect">
+            <a:avLst/>
+          </a:prstGeom>
+          <a:noFill/>
+          <a:ln/>
+        </p:spPr>
+        <p:txBody>
+          <a:bodyPr wrap="square" lIns="0" tIns="0" rIns="0" bIns="0" rtlCol="0" anchor="ctr"/>
+          <a:lstStyle/>
+          <a:p>
+            <a:pPr indent="0" marL="0">
+              <a:buNone/>
+            </a:pPr>
+            <a:r>
+              <a:rPr lang="en-US" sz="950" b="1" dirty="0">
+                <a:solidFill>
+                  <a:srgbClr val="0068B7"/>
+                </a:solidFill>
+                <a:latin typeface="Aptos" pitchFamily="34" charset="0"/>
+                <a:ea typeface="Aptos" pitchFamily="34" charset="-122"/>
+                <a:cs typeface="Aptos" pitchFamily="34" charset="-120"/>
+              </a:rPr>
+              <a:t>Learning approach</a:t>
+            </a:r>
+            <a:endParaRPr lang="en-US" sz="950" dirty="0"/>
+          </a:p>
+        </p:txBody>
+      </p:sp>
+      <p:sp>
+        <p:nvSpPr>
+          <p:cNvPr id="14" name="Text 12"/>
+          <p:cNvSpPr/>
+          <p:nvPr/>
+        </p:nvSpPr>
+        <p:spPr>
+          <a:xfrm>
+            <a:off x="8074152" y="4050792"/>
+            <a:ext cx="2825496" cy="1216152"/>
+          </a:xfrm>
+          <a:prstGeom prst="rect">
+            <a:avLst/>
+          </a:prstGeom>
+          <a:noFill/>
+          <a:ln/>
+        </p:spPr>
+        <p:txBody>
+          <a:bodyPr wrap="square" lIns="0" tIns="0" rIns="0" bIns="0" rtlCol="0" anchor="t">
+            <a:normAutofit/>
+          </a:bodyPr>
+          <a:lstStyle/>
+          <a:p>
+            <a:pPr indent="0" marL="0">
+              <a:buNone/>
+            </a:pPr>
+            <a:r>
+              <a:rPr lang="en-US" sz="1250" dirty="0">
+                <a:solidFill>
+                  <a:srgbClr val="17364A"/>
+                </a:solidFill>
+                <a:latin typeface="Aptos" pitchFamily="34" charset="0"/>
+                <a:ea typeface="Aptos" pitchFamily="34" charset="-122"/>
+                <a:cs typeface="Aptos" pitchFamily="34" charset="-120"/>
+              </a:rPr>
+              <a:t>Review the core ideas, complete the practical exercise, check your understanding, and use the related plays and tools to apply the lesson.</a:t>
+            </a:r>
+            <a:endParaRPr lang="en-US" sz="1250" dirty="0"/>
           </a:p>
         </p:txBody>
       </p:sp>
@@ -5896,7 +9337,32 @@
       </p:sp>
       <p:sp>
         <p:nvSpPr>
-          <p:cNvPr id="3" name="Text 1"/>
+          <p:cNvPr id="3" name="Shape 1"/>
+          <p:cNvSpPr/>
+          <p:nvPr/>
+        </p:nvSpPr>
+        <p:spPr>
+          <a:xfrm>
+            <a:off x="0" y="164592"/>
+            <a:ext cx="146304" cy="6693408"/>
+          </a:xfrm>
+          <a:prstGeom prst="rect">
+            <a:avLst/>
+          </a:prstGeom>
+          <a:solidFill>
+            <a:srgbClr val="2F8A28"/>
+          </a:solidFill>
+          <a:ln w="12700">
+            <a:solidFill>
+              <a:srgbClr val="2F8A28"/>
+            </a:solidFill>
+            <a:prstDash val="solid"/>
+          </a:ln>
+        </p:spPr>
+      </p:sp>
+      <p:sp>
+        <p:nvSpPr>
+          <p:cNvPr id="4" name="Text 2"/>
           <p:cNvSpPr/>
           <p:nvPr/>
         </p:nvSpPr>
@@ -5935,7 +9401,7 @@
       </p:sp>
       <p:sp>
         <p:nvSpPr>
-          <p:cNvPr id="4" name="Text 2"/>
+          <p:cNvPr id="5" name="Text 3"/>
           <p:cNvSpPr/>
           <p:nvPr/>
         </p:nvSpPr>
@@ -5974,7 +9440,7 @@
       </p:sp>
       <p:sp>
         <p:nvSpPr>
-          <p:cNvPr id="5" name="Text 3"/>
+          <p:cNvPr id="6" name="Text 4"/>
           <p:cNvSpPr/>
           <p:nvPr/>
         </p:nvSpPr>
@@ -6013,13 +9479,77 @@
       </p:sp>
       <p:sp>
         <p:nvSpPr>
-          <p:cNvPr id="6" name="Text 4"/>
+          <p:cNvPr id="7" name="Shape 5"/>
           <p:cNvSpPr/>
           <p:nvPr/>
         </p:nvSpPr>
         <p:spPr>
           <a:xfrm>
             <a:off x="640080" y="658368"/>
+            <a:ext cx="420624" cy="420624"/>
+          </a:xfrm>
+          <a:prstGeom prst="ellipse">
+            <a:avLst/>
+          </a:prstGeom>
+          <a:solidFill>
+            <a:srgbClr val="0068B7"/>
+          </a:solidFill>
+          <a:ln w="12700">
+            <a:solidFill>
+              <a:srgbClr val="0068B7"/>
+            </a:solidFill>
+            <a:prstDash val="solid"/>
+          </a:ln>
+        </p:spPr>
+      </p:sp>
+      <p:sp>
+        <p:nvSpPr>
+          <p:cNvPr id="8" name="Text 6"/>
+          <p:cNvSpPr/>
+          <p:nvPr/>
+        </p:nvSpPr>
+        <p:spPr>
+          <a:xfrm>
+            <a:off x="640080" y="731520"/>
+            <a:ext cx="420624" cy="164592"/>
+          </a:xfrm>
+          <a:prstGeom prst="rect">
+            <a:avLst/>
+          </a:prstGeom>
+          <a:noFill/>
+          <a:ln/>
+        </p:spPr>
+        <p:txBody>
+          <a:bodyPr wrap="square" lIns="0" tIns="0" rIns="0" bIns="0" rtlCol="0" anchor="ctr"/>
+          <a:lstStyle/>
+          <a:p>
+            <a:pPr algn="ctr" indent="0" marL="0">
+              <a:buNone/>
+            </a:pPr>
+            <a:r>
+              <a:rPr lang="en-US" sz="1100" b="1" dirty="0">
+                <a:solidFill>
+                  <a:srgbClr val="FFFFFF"/>
+                </a:solidFill>
+                <a:latin typeface="Aptos" pitchFamily="34" charset="0"/>
+                <a:ea typeface="Aptos" pitchFamily="34" charset="-122"/>
+                <a:cs typeface="Aptos" pitchFamily="34" charset="-120"/>
+              </a:rPr>
+              <a:t>13</a:t>
+            </a:r>
+            <a:endParaRPr lang="en-US" sz="1100" dirty="0"/>
+          </a:p>
+        </p:txBody>
+      </p:sp>
+      <p:sp>
+        <p:nvSpPr>
+          <p:cNvPr id="9" name="Text 7"/>
+          <p:cNvSpPr/>
+          <p:nvPr/>
+        </p:nvSpPr>
+        <p:spPr>
+          <a:xfrm>
+            <a:off x="640080" y="621792"/>
             <a:ext cx="10881360" cy="566928"/>
           </a:xfrm>
           <a:prstGeom prst="rect">
@@ -6046,7 +9576,7 @@
                 <a:ea typeface="Aptos Display" pitchFamily="34" charset="-122"/>
                 <a:cs typeface="Aptos Display" pitchFamily="34" charset="-120"/>
               </a:rPr>
-              <a:t>References and Resources Continued</a:t>
+              <a:t>Knowledge Check</a:t>
             </a:r>
             <a:endParaRPr lang="en-US" sz="2700" dirty="0"/>
           </a:p>
@@ -6054,14 +9584,14 @@
       </p:sp>
       <p:sp>
         <p:nvSpPr>
-          <p:cNvPr id="7" name="Text 5"/>
-          <p:cNvSpPr/>
-          <p:nvPr/>
-        </p:nvSpPr>
-        <p:spPr>
-          <a:xfrm>
-            <a:off x="822960" y="1325880"/>
-            <a:ext cx="10378440" cy="4800600"/>
+          <p:cNvPr id="10" name="Text 8"/>
+          <p:cNvSpPr/>
+          <p:nvPr/>
+        </p:nvSpPr>
+        <p:spPr>
+          <a:xfrm>
+            <a:off x="868680" y="1417320"/>
+            <a:ext cx="6675120" cy="4434840"/>
           </a:xfrm>
           <a:prstGeom prst="rect">
             <a:avLst/>
@@ -6076,7 +9606,7 @@
           <a:lstStyle/>
           <a:p>
             <a:r>
-              <a:rPr lang="en-US" sz="1450" dirty="0">
+              <a:rPr lang="en-US" sz="1700" dirty="0">
                 <a:solidFill>
                   <a:srgbClr val="17364A"/>
                 </a:solidFill>
@@ -6084,9 +9614,1355 @@
                 <a:ea typeface="Aptos" pitchFamily="34" charset="-122"/>
                 <a:cs typeface="Aptos" pitchFamily="34" charset="-120"/>
               </a:rPr>
-              <a:t>Agency policies for privacy, public records, cybersecurity, procurement, civil rights, accessibility, language access, and emergency communications</a:t>
-            </a:r>
-            <a:endParaRPr lang="en-US" sz="1450" dirty="0"/>
+              <a:t>1. Which statement best distinguishes prediction from causal inference?</a:t>
+            </a:r>
+            <a:endParaRPr lang="en-US" sz="1700" dirty="0"/>
+          </a:p>
+          <a:p>
+            <a:r>
+              <a:rPr lang="en-US" sz="1700" dirty="0">
+                <a:solidFill>
+                  <a:srgbClr val="17364A"/>
+                </a:solidFill>
+                <a:latin typeface="Aptos" pitchFamily="34" charset="0"/>
+                <a:ea typeface="Aptos" pitchFamily="34" charset="-122"/>
+                <a:cs typeface="Aptos" pitchFamily="34" charset="-120"/>
+              </a:rPr>
+              <a:t>2. What is the best reason to assign an accountability owner?</a:t>
+            </a:r>
+            <a:endParaRPr lang="en-US" sz="1700" dirty="0"/>
+          </a:p>
+          <a:p>
+            <a:r>
+              <a:rPr lang="en-US" sz="1700" dirty="0">
+                <a:solidFill>
+                  <a:srgbClr val="17364A"/>
+                </a:solidFill>
+                <a:latin typeface="Aptos" pitchFamily="34" charset="0"/>
+                <a:ea typeface="Aptos" pitchFamily="34" charset="-122"/>
+                <a:cs typeface="Aptos" pitchFamily="34" charset="-120"/>
+              </a:rPr>
+              <a:t>3. When should an AI-supported workflow be escalated for review?</a:t>
+            </a:r>
+            <a:endParaRPr lang="en-US" sz="1700" dirty="0"/>
+          </a:p>
+          <a:p>
+            <a:r>
+              <a:rPr lang="en-US" sz="1700" dirty="0">
+                <a:solidFill>
+                  <a:srgbClr val="17364A"/>
+                </a:solidFill>
+                <a:latin typeface="Aptos" pitchFamily="34" charset="0"/>
+                <a:ea typeface="Aptos" pitchFamily="34" charset="-122"/>
+                <a:cs typeface="Aptos" pitchFamily="34" charset="-120"/>
+              </a:rPr>
+              <a:t>4. Which practice best supports public accountability?</a:t>
+            </a:r>
+            <a:endParaRPr lang="en-US" sz="1700" dirty="0"/>
+          </a:p>
+        </p:txBody>
+      </p:sp>
+      <p:sp>
+        <p:nvSpPr>
+          <p:cNvPr id="11" name="Shape 9"/>
+          <p:cNvSpPr/>
+          <p:nvPr/>
+        </p:nvSpPr>
+        <p:spPr>
+          <a:xfrm>
+            <a:off x="7909560" y="1417320"/>
+            <a:ext cx="3154680" cy="1828800"/>
+          </a:xfrm>
+          <a:prstGeom prst="roundRect">
+            <a:avLst>
+              <a:gd name="adj" fmla="val 6000"/>
+            </a:avLst>
+          </a:prstGeom>
+          <a:solidFill>
+            <a:srgbClr val="EEF8ED"/>
+          </a:solidFill>
+          <a:ln w="12700">
+            <a:solidFill>
+              <a:srgbClr val="B9D7E6"/>
+            </a:solidFill>
+            <a:prstDash val="solid"/>
+          </a:ln>
+        </p:spPr>
+      </p:sp>
+      <p:sp>
+        <p:nvSpPr>
+          <p:cNvPr id="12" name="Text 10"/>
+          <p:cNvSpPr/>
+          <p:nvPr/>
+        </p:nvSpPr>
+        <p:spPr>
+          <a:xfrm>
+            <a:off x="8074152" y="1563624"/>
+            <a:ext cx="2825496" cy="201168"/>
+          </a:xfrm>
+          <a:prstGeom prst="rect">
+            <a:avLst/>
+          </a:prstGeom>
+          <a:noFill/>
+          <a:ln/>
+        </p:spPr>
+        <p:txBody>
+          <a:bodyPr wrap="square" lIns="0" tIns="0" rIns="0" bIns="0" rtlCol="0" anchor="ctr"/>
+          <a:lstStyle/>
+          <a:p>
+            <a:pPr indent="0" marL="0">
+              <a:buNone/>
+            </a:pPr>
+            <a:r>
+              <a:rPr lang="en-US" sz="950" b="1" dirty="0">
+                <a:solidFill>
+                  <a:srgbClr val="0068B7"/>
+                </a:solidFill>
+                <a:latin typeface="Aptos" pitchFamily="34" charset="0"/>
+                <a:ea typeface="Aptos" pitchFamily="34" charset="-122"/>
+                <a:cs typeface="Aptos" pitchFamily="34" charset="-120"/>
+              </a:rPr>
+              <a:t>Key idea</a:t>
+            </a:r>
+            <a:endParaRPr lang="en-US" sz="950" dirty="0"/>
+          </a:p>
+        </p:txBody>
+      </p:sp>
+      <p:sp>
+        <p:nvSpPr>
+          <p:cNvPr id="13" name="Text 11"/>
+          <p:cNvSpPr/>
+          <p:nvPr/>
+        </p:nvSpPr>
+        <p:spPr>
+          <a:xfrm>
+            <a:off x="8074152" y="1856232"/>
+            <a:ext cx="2825496" cy="1261872"/>
+          </a:xfrm>
+          <a:prstGeom prst="rect">
+            <a:avLst/>
+          </a:prstGeom>
+          <a:noFill/>
+          <a:ln/>
+        </p:spPr>
+        <p:txBody>
+          <a:bodyPr wrap="square" lIns="0" tIns="0" rIns="0" bIns="0" rtlCol="0" anchor="t">
+            <a:normAutofit/>
+          </a:bodyPr>
+          <a:lstStyle/>
+          <a:p>
+            <a:pPr indent="0" marL="0">
+              <a:buNone/>
+            </a:pPr>
+            <a:r>
+              <a:rPr lang="en-US" sz="1250" dirty="0">
+                <a:solidFill>
+                  <a:srgbClr val="17364A"/>
+                </a:solidFill>
+                <a:latin typeface="Aptos" pitchFamily="34" charset="0"/>
+                <a:ea typeface="Aptos" pitchFamily="34" charset="-122"/>
+                <a:cs typeface="Aptos" pitchFamily="34" charset="-120"/>
+              </a:rPr>
+              <a:t>1. Which statement best distinguishes prediction from causal inference?</a:t>
+            </a:r>
+            <a:endParaRPr lang="en-US" sz="1250" dirty="0"/>
+          </a:p>
+        </p:txBody>
+      </p:sp>
+      <p:sp>
+        <p:nvSpPr>
+          <p:cNvPr id="14" name="Shape 12"/>
+          <p:cNvSpPr/>
+          <p:nvPr/>
+        </p:nvSpPr>
+        <p:spPr>
+          <a:xfrm>
+            <a:off x="7909560" y="3520440"/>
+            <a:ext cx="3154680" cy="1737360"/>
+          </a:xfrm>
+          <a:prstGeom prst="roundRect">
+            <a:avLst>
+              <a:gd name="adj" fmla="val 6316"/>
+            </a:avLst>
+          </a:prstGeom>
+          <a:solidFill>
+            <a:srgbClr val="EAF6F8"/>
+          </a:solidFill>
+          <a:ln w="12700">
+            <a:solidFill>
+              <a:srgbClr val="B9D7E6"/>
+            </a:solidFill>
+            <a:prstDash val="solid"/>
+          </a:ln>
+        </p:spPr>
+      </p:sp>
+      <p:sp>
+        <p:nvSpPr>
+          <p:cNvPr id="15" name="Text 13"/>
+          <p:cNvSpPr/>
+          <p:nvPr/>
+        </p:nvSpPr>
+        <p:spPr>
+          <a:xfrm>
+            <a:off x="8074152" y="3666744"/>
+            <a:ext cx="2825496" cy="201168"/>
+          </a:xfrm>
+          <a:prstGeom prst="rect">
+            <a:avLst/>
+          </a:prstGeom>
+          <a:noFill/>
+          <a:ln/>
+        </p:spPr>
+        <p:txBody>
+          <a:bodyPr wrap="square" lIns="0" tIns="0" rIns="0" bIns="0" rtlCol="0" anchor="ctr"/>
+          <a:lstStyle/>
+          <a:p>
+            <a:pPr indent="0" marL="0">
+              <a:buNone/>
+            </a:pPr>
+            <a:r>
+              <a:rPr lang="en-US" sz="950" b="1" dirty="0">
+                <a:solidFill>
+                  <a:srgbClr val="0068B7"/>
+                </a:solidFill>
+                <a:latin typeface="Aptos" pitchFamily="34" charset="0"/>
+                <a:ea typeface="Aptos" pitchFamily="34" charset="-122"/>
+                <a:cs typeface="Aptos" pitchFamily="34" charset="-120"/>
+              </a:rPr>
+              <a:t>Use this for</a:t>
+            </a:r>
+            <a:endParaRPr lang="en-US" sz="950" dirty="0"/>
+          </a:p>
+        </p:txBody>
+      </p:sp>
+      <p:sp>
+        <p:nvSpPr>
+          <p:cNvPr id="16" name="Text 14"/>
+          <p:cNvSpPr/>
+          <p:nvPr/>
+        </p:nvSpPr>
+        <p:spPr>
+          <a:xfrm>
+            <a:off x="8074152" y="3959352"/>
+            <a:ext cx="2825496" cy="1170432"/>
+          </a:xfrm>
+          <a:prstGeom prst="rect">
+            <a:avLst/>
+          </a:prstGeom>
+          <a:noFill/>
+          <a:ln/>
+        </p:spPr>
+        <p:txBody>
+          <a:bodyPr wrap="square" lIns="0" tIns="0" rIns="0" bIns="0" rtlCol="0" anchor="t">
+            <a:normAutofit/>
+          </a:bodyPr>
+          <a:lstStyle/>
+          <a:p>
+            <a:pPr indent="0" marL="0">
+              <a:buNone/>
+            </a:pPr>
+            <a:r>
+              <a:rPr lang="en-US" sz="1250" dirty="0">
+                <a:solidFill>
+                  <a:srgbClr val="17364A"/>
+                </a:solidFill>
+                <a:latin typeface="Aptos" pitchFamily="34" charset="0"/>
+                <a:ea typeface="Aptos" pitchFamily="34" charset="-122"/>
+                <a:cs typeface="Aptos" pitchFamily="34" charset="-120"/>
+              </a:rPr>
+              <a:t>Connect the concept to public health decisions, safeguards, documentation, or implementation work.</a:t>
+            </a:r>
+            <a:endParaRPr lang="en-US" sz="1250" dirty="0"/>
+          </a:p>
+        </p:txBody>
+      </p:sp>
+    </p:spTree>
+  </p:cSld>
+  <p:clrMapOvr>
+    <a:masterClrMapping/>
+  </p:clrMapOvr>
+</p:sld>
+</file>
+
+<file path=ppt/slides/slide21.xml><?xml version="1.0" encoding="utf-8"?>
+<p:sld xmlns:a="http://schemas.openxmlformats.org/drawingml/2006/main" xmlns:r="http://schemas.openxmlformats.org/officeDocument/2006/relationships" xmlns:p="http://schemas.openxmlformats.org/presentationml/2006/main">
+  <p:cSld name="Slide 21">
+    <p:bg>
+      <p:bgPr>
+        <a:solidFill>
+          <a:srgbClr val="F7FBFD"/>
+        </a:solidFill>
+      </p:bgPr>
+    </p:bg>
+    <p:spTree>
+      <p:nvGrpSpPr>
+        <p:cNvPr id="1" name=""/>
+        <p:cNvGrpSpPr/>
+        <p:nvPr/>
+      </p:nvGrpSpPr>
+      <p:grpSpPr>
+        <a:xfrm>
+          <a:off x="0" y="0"/>
+          <a:ext cx="0" cy="0"/>
+          <a:chOff x="0" y="0"/>
+          <a:chExt cx="0" cy="0"/>
+        </a:xfrm>
+      </p:grpSpPr>
+      <p:sp>
+        <p:nvSpPr>
+          <p:cNvPr id="2" name="Shape 0"/>
+          <p:cNvSpPr/>
+          <p:nvPr/>
+        </p:nvSpPr>
+        <p:spPr>
+          <a:xfrm>
+            <a:off x="0" y="0"/>
+            <a:ext cx="12191695" cy="164592"/>
+          </a:xfrm>
+          <a:prstGeom prst="rect">
+            <a:avLst/>
+          </a:prstGeom>
+          <a:solidFill>
+            <a:srgbClr val="0068B7"/>
+          </a:solidFill>
+          <a:ln w="12700">
+            <a:solidFill>
+              <a:srgbClr val="0068B7"/>
+            </a:solidFill>
+            <a:prstDash val="solid"/>
+          </a:ln>
+        </p:spPr>
+      </p:sp>
+      <p:sp>
+        <p:nvSpPr>
+          <p:cNvPr id="3" name="Shape 1"/>
+          <p:cNvSpPr/>
+          <p:nvPr/>
+        </p:nvSpPr>
+        <p:spPr>
+          <a:xfrm>
+            <a:off x="0" y="164592"/>
+            <a:ext cx="146304" cy="6693408"/>
+          </a:xfrm>
+          <a:prstGeom prst="rect">
+            <a:avLst/>
+          </a:prstGeom>
+          <a:solidFill>
+            <a:srgbClr val="2F8A28"/>
+          </a:solidFill>
+          <a:ln w="12700">
+            <a:solidFill>
+              <a:srgbClr val="2F8A28"/>
+            </a:solidFill>
+            <a:prstDash val="solid"/>
+          </a:ln>
+        </p:spPr>
+      </p:sp>
+      <p:sp>
+        <p:nvSpPr>
+          <p:cNvPr id="4" name="Text 2"/>
+          <p:cNvSpPr/>
+          <p:nvPr/>
+        </p:nvSpPr>
+        <p:spPr>
+          <a:xfrm>
+            <a:off x="502920" y="292608"/>
+            <a:ext cx="10149840" cy="256032"/>
+          </a:xfrm>
+          <a:prstGeom prst="rect">
+            <a:avLst/>
+          </a:prstGeom>
+          <a:noFill/>
+          <a:ln/>
+        </p:spPr>
+        <p:txBody>
+          <a:bodyPr wrap="square" lIns="0" tIns="0" rIns="0" bIns="0" rtlCol="0" anchor="ctr"/>
+          <a:lstStyle/>
+          <a:p>
+            <a:pPr indent="0" marL="0">
+              <a:buNone/>
+            </a:pPr>
+            <a:r>
+              <a:rPr lang="en-US" sz="900" b="1" dirty="0">
+                <a:solidFill>
+                  <a:srgbClr val="5F7181"/>
+                </a:solidFill>
+                <a:latin typeface="Aptos" pitchFamily="34" charset="0"/>
+                <a:ea typeface="Aptos" pitchFamily="34" charset="-122"/>
+                <a:cs typeface="Aptos" pitchFamily="34" charset="-120"/>
+              </a:rPr>
+              <a:t>Causal Inference and AI in Public Health Decision-Making</a:t>
+            </a:r>
+            <a:endParaRPr lang="en-US" sz="900" dirty="0"/>
+          </a:p>
+        </p:txBody>
+      </p:sp>
+      <p:sp>
+        <p:nvSpPr>
+          <p:cNvPr id="5" name="Text 3"/>
+          <p:cNvSpPr/>
+          <p:nvPr/>
+        </p:nvSpPr>
+        <p:spPr>
+          <a:xfrm>
+            <a:off x="502920" y="6537960"/>
+            <a:ext cx="7772400" cy="201168"/>
+          </a:xfrm>
+          <a:prstGeom prst="rect">
+            <a:avLst/>
+          </a:prstGeom>
+          <a:noFill/>
+          <a:ln/>
+        </p:spPr>
+        <p:txBody>
+          <a:bodyPr wrap="square" lIns="0" tIns="0" rIns="0" bIns="0" rtlCol="0" anchor="ctr"/>
+          <a:lstStyle/>
+          <a:p>
+            <a:pPr indent="0" marL="0">
+              <a:buNone/>
+            </a:pPr>
+            <a:r>
+              <a:rPr lang="en-US" sz="800" dirty="0">
+                <a:solidFill>
+                  <a:srgbClr val="5F7181"/>
+                </a:solidFill>
+                <a:latin typeface="Aptos" pitchFamily="34" charset="0"/>
+                <a:ea typeface="Aptos" pitchFamily="34" charset="-122"/>
+                <a:cs typeface="Aptos" pitchFamily="34" charset="-120"/>
+              </a:rPr>
+              <a:t>AI Playbook and Toolkit for Public Health Departments</a:t>
+            </a:r>
+            <a:endParaRPr lang="en-US" sz="800" dirty="0"/>
+          </a:p>
+        </p:txBody>
+      </p:sp>
+      <p:sp>
+        <p:nvSpPr>
+          <p:cNvPr id="6" name="Text 4"/>
+          <p:cNvSpPr/>
+          <p:nvPr/>
+        </p:nvSpPr>
+        <p:spPr>
+          <a:xfrm>
+            <a:off x="9966960" y="6537960"/>
+            <a:ext cx="1645920" cy="201168"/>
+          </a:xfrm>
+          <a:prstGeom prst="rect">
+            <a:avLst/>
+          </a:prstGeom>
+          <a:noFill/>
+          <a:ln/>
+        </p:spPr>
+        <p:txBody>
+          <a:bodyPr wrap="square" lIns="0" tIns="0" rIns="0" bIns="0" rtlCol="0" anchor="ctr"/>
+          <a:lstStyle/>
+          <a:p>
+            <a:pPr algn="r" indent="0" marL="0">
+              <a:buNone/>
+            </a:pPr>
+            <a:r>
+              <a:rPr lang="en-US" sz="800" dirty="0">
+                <a:solidFill>
+                  <a:srgbClr val="5F7181"/>
+                </a:solidFill>
+                <a:latin typeface="Aptos" pitchFamily="34" charset="0"/>
+                <a:ea typeface="Aptos" pitchFamily="34" charset="-122"/>
+                <a:cs typeface="Aptos" pitchFamily="34" charset="-120"/>
+              </a:rPr>
+              <a:t>© Paula Soper</a:t>
+            </a:r>
+            <a:endParaRPr lang="en-US" sz="800" dirty="0"/>
+          </a:p>
+        </p:txBody>
+      </p:sp>
+      <p:sp>
+        <p:nvSpPr>
+          <p:cNvPr id="7" name="Shape 5"/>
+          <p:cNvSpPr/>
+          <p:nvPr/>
+        </p:nvSpPr>
+        <p:spPr>
+          <a:xfrm>
+            <a:off x="640080" y="658368"/>
+            <a:ext cx="420624" cy="420624"/>
+          </a:xfrm>
+          <a:prstGeom prst="ellipse">
+            <a:avLst/>
+          </a:prstGeom>
+          <a:solidFill>
+            <a:srgbClr val="0068B7"/>
+          </a:solidFill>
+          <a:ln w="12700">
+            <a:solidFill>
+              <a:srgbClr val="0068B7"/>
+            </a:solidFill>
+            <a:prstDash val="solid"/>
+          </a:ln>
+        </p:spPr>
+      </p:sp>
+      <p:sp>
+        <p:nvSpPr>
+          <p:cNvPr id="8" name="Text 6"/>
+          <p:cNvSpPr/>
+          <p:nvPr/>
+        </p:nvSpPr>
+        <p:spPr>
+          <a:xfrm>
+            <a:off x="640080" y="731520"/>
+            <a:ext cx="420624" cy="164592"/>
+          </a:xfrm>
+          <a:prstGeom prst="rect">
+            <a:avLst/>
+          </a:prstGeom>
+          <a:noFill/>
+          <a:ln/>
+        </p:spPr>
+        <p:txBody>
+          <a:bodyPr wrap="square" lIns="0" tIns="0" rIns="0" bIns="0" rtlCol="0" anchor="ctr"/>
+          <a:lstStyle/>
+          <a:p>
+            <a:pPr algn="ctr" indent="0" marL="0">
+              <a:buNone/>
+            </a:pPr>
+            <a:r>
+              <a:rPr lang="en-US" sz="1100" b="1" dirty="0">
+                <a:solidFill>
+                  <a:srgbClr val="FFFFFF"/>
+                </a:solidFill>
+                <a:latin typeface="Aptos" pitchFamily="34" charset="0"/>
+                <a:ea typeface="Aptos" pitchFamily="34" charset="-122"/>
+                <a:cs typeface="Aptos" pitchFamily="34" charset="-120"/>
+              </a:rPr>
+              <a:t>14</a:t>
+            </a:r>
+            <a:endParaRPr lang="en-US" sz="1100" dirty="0"/>
+          </a:p>
+        </p:txBody>
+      </p:sp>
+      <p:sp>
+        <p:nvSpPr>
+          <p:cNvPr id="9" name="Text 7"/>
+          <p:cNvSpPr/>
+          <p:nvPr/>
+        </p:nvSpPr>
+        <p:spPr>
+          <a:xfrm>
+            <a:off x="640080" y="621792"/>
+            <a:ext cx="10881360" cy="566928"/>
+          </a:xfrm>
+          <a:prstGeom prst="rect">
+            <a:avLst/>
+          </a:prstGeom>
+          <a:noFill/>
+          <a:ln/>
+        </p:spPr>
+        <p:txBody>
+          <a:bodyPr wrap="square" lIns="0" tIns="0" rIns="0" bIns="0" rtlCol="0" anchor="ctr">
+            <a:normAutofit/>
+          </a:bodyPr>
+          <a:lstStyle/>
+          <a:p>
+            <a:pPr indent="0" marL="0">
+              <a:buNone/>
+            </a:pPr>
+            <a:r>
+              <a:rPr lang="en-US" sz="2700" b="1" dirty="0">
+                <a:solidFill>
+                  <a:srgbClr val="003A63"/>
+                </a:solidFill>
+                <a:latin typeface="Aptos Display" pitchFamily="34" charset="0"/>
+                <a:ea typeface="Aptos Display" pitchFamily="34" charset="-122"/>
+                <a:cs typeface="Aptos Display" pitchFamily="34" charset="-120"/>
+              </a:rPr>
+              <a:t>References and Resources</a:t>
+            </a:r>
+            <a:endParaRPr lang="en-US" sz="2700" dirty="0"/>
+          </a:p>
+        </p:txBody>
+      </p:sp>
+      <p:sp>
+        <p:nvSpPr>
+          <p:cNvPr id="10" name="Text 8"/>
+          <p:cNvSpPr/>
+          <p:nvPr/>
+        </p:nvSpPr>
+        <p:spPr>
+          <a:xfrm>
+            <a:off x="868680" y="1417320"/>
+            <a:ext cx="6675120" cy="4434840"/>
+          </a:xfrm>
+          <a:prstGeom prst="rect">
+            <a:avLst/>
+          </a:prstGeom>
+          <a:noFill/>
+          <a:ln/>
+        </p:spPr>
+        <p:txBody>
+          <a:bodyPr wrap="square" lIns="635" tIns="635" rIns="635" bIns="635" rtlCol="0" anchor="t">
+            <a:normAutofit/>
+          </a:bodyPr>
+          <a:lstStyle/>
+          <a:p>
+            <a:r>
+              <a:rPr lang="en-US" sz="1700" dirty="0">
+                <a:solidFill>
+                  <a:srgbClr val="17364A"/>
+                </a:solidFill>
+                <a:latin typeface="Aptos" pitchFamily="34" charset="0"/>
+                <a:ea typeface="Aptos" pitchFamily="34" charset="-122"/>
+                <a:cs typeface="Aptos" pitchFamily="34" charset="-120"/>
+              </a:rPr>
+              <a:t>CDC Public Health Data Strategy and Data Modernization resources:.</a:t>
+            </a:r>
+            <a:endParaRPr lang="en-US" sz="1700" dirty="0"/>
+          </a:p>
+          <a:p>
+            <a:r>
+              <a:rPr lang="en-US" sz="1700" dirty="0">
+                <a:solidFill>
+                  <a:srgbClr val="17364A"/>
+                </a:solidFill>
+                <a:latin typeface="Aptos" pitchFamily="34" charset="0"/>
+                <a:ea typeface="Aptos" pitchFamily="34" charset="-122"/>
+                <a:cs typeface="Aptos" pitchFamily="34" charset="-120"/>
+              </a:rPr>
+              <a:t>NIST Artificial Intelligence Risk Management Framework and NIST Generative AI Profile:.</a:t>
+            </a:r>
+            <a:endParaRPr lang="en-US" sz="1700" dirty="0"/>
+          </a:p>
+          <a:p>
+            <a:r>
+              <a:rPr lang="en-US" sz="1700" dirty="0">
+                <a:solidFill>
+                  <a:srgbClr val="17364A"/>
+                </a:solidFill>
+                <a:latin typeface="Aptos" pitchFamily="34" charset="0"/>
+                <a:ea typeface="Aptos" pitchFamily="34" charset="-122"/>
+                <a:cs typeface="Aptos" pitchFamily="34" charset="-120"/>
+              </a:rPr>
+              <a:t>WHO Ethics and Governance of Artificial Intelligence for Health guidance: https://www.who.int/publications/i/item/9789240029200</a:t>
+            </a:r>
+            <a:endParaRPr lang="en-US" sz="1700" dirty="0"/>
+          </a:p>
+          <a:p>
+            <a:r>
+              <a:rPr lang="en-US" sz="1700" dirty="0">
+                <a:solidFill>
+                  <a:srgbClr val="17364A"/>
+                </a:solidFill>
+                <a:latin typeface="Aptos" pitchFamily="34" charset="0"/>
+                <a:ea typeface="Aptos" pitchFamily="34" charset="-122"/>
+                <a:cs typeface="Aptos" pitchFamily="34" charset="-120"/>
+              </a:rPr>
+              <a:t>OWASP Top 10 for Large Language Model Applications: https://owasp.org/www-project-top-10-for-large-language-model-applications/</a:t>
+            </a:r>
+            <a:endParaRPr lang="en-US" sz="1700" dirty="0"/>
+          </a:p>
+        </p:txBody>
+      </p:sp>
+      <p:sp>
+        <p:nvSpPr>
+          <p:cNvPr id="11" name="Shape 9"/>
+          <p:cNvSpPr/>
+          <p:nvPr/>
+        </p:nvSpPr>
+        <p:spPr>
+          <a:xfrm>
+            <a:off x="7909560" y="1417320"/>
+            <a:ext cx="3154680" cy="1828800"/>
+          </a:xfrm>
+          <a:prstGeom prst="roundRect">
+            <a:avLst>
+              <a:gd name="adj" fmla="val 6000"/>
+            </a:avLst>
+          </a:prstGeom>
+          <a:solidFill>
+            <a:srgbClr val="EEF8ED"/>
+          </a:solidFill>
+          <a:ln w="12700">
+            <a:solidFill>
+              <a:srgbClr val="B9D7E6"/>
+            </a:solidFill>
+            <a:prstDash val="solid"/>
+          </a:ln>
+        </p:spPr>
+      </p:sp>
+      <p:sp>
+        <p:nvSpPr>
+          <p:cNvPr id="12" name="Text 10"/>
+          <p:cNvSpPr/>
+          <p:nvPr/>
+        </p:nvSpPr>
+        <p:spPr>
+          <a:xfrm>
+            <a:off x="8074152" y="1563624"/>
+            <a:ext cx="2825496" cy="201168"/>
+          </a:xfrm>
+          <a:prstGeom prst="rect">
+            <a:avLst/>
+          </a:prstGeom>
+          <a:noFill/>
+          <a:ln/>
+        </p:spPr>
+        <p:txBody>
+          <a:bodyPr wrap="square" lIns="0" tIns="0" rIns="0" bIns="0" rtlCol="0" anchor="ctr"/>
+          <a:lstStyle/>
+          <a:p>
+            <a:pPr indent="0" marL="0">
+              <a:buNone/>
+            </a:pPr>
+            <a:r>
+              <a:rPr lang="en-US" sz="950" b="1" dirty="0">
+                <a:solidFill>
+                  <a:srgbClr val="0068B7"/>
+                </a:solidFill>
+                <a:latin typeface="Aptos" pitchFamily="34" charset="0"/>
+                <a:ea typeface="Aptos" pitchFamily="34" charset="-122"/>
+                <a:cs typeface="Aptos" pitchFamily="34" charset="-120"/>
+              </a:rPr>
+              <a:t>Key idea</a:t>
+            </a:r>
+            <a:endParaRPr lang="en-US" sz="950" dirty="0"/>
+          </a:p>
+        </p:txBody>
+      </p:sp>
+      <p:sp>
+        <p:nvSpPr>
+          <p:cNvPr id="13" name="Text 11"/>
+          <p:cNvSpPr/>
+          <p:nvPr/>
+        </p:nvSpPr>
+        <p:spPr>
+          <a:xfrm>
+            <a:off x="8074152" y="1856232"/>
+            <a:ext cx="2825496" cy="1261872"/>
+          </a:xfrm>
+          <a:prstGeom prst="rect">
+            <a:avLst/>
+          </a:prstGeom>
+          <a:noFill/>
+          <a:ln/>
+        </p:spPr>
+        <p:txBody>
+          <a:bodyPr wrap="square" lIns="0" tIns="0" rIns="0" bIns="0" rtlCol="0" anchor="t">
+            <a:normAutofit/>
+          </a:bodyPr>
+          <a:lstStyle/>
+          <a:p>
+            <a:pPr indent="0" marL="0">
+              <a:buNone/>
+            </a:pPr>
+            <a:r>
+              <a:rPr lang="en-US" sz="1250" dirty="0">
+                <a:solidFill>
+                  <a:srgbClr val="17364A"/>
+                </a:solidFill>
+                <a:latin typeface="Aptos" pitchFamily="34" charset="0"/>
+                <a:ea typeface="Aptos" pitchFamily="34" charset="-122"/>
+                <a:cs typeface="Aptos" pitchFamily="34" charset="-120"/>
+              </a:rPr>
+              <a:t>CDC Public Health Data Strategy and Data Modernization resources:.</a:t>
+            </a:r>
+            <a:endParaRPr lang="en-US" sz="1250" dirty="0"/>
+          </a:p>
+        </p:txBody>
+      </p:sp>
+      <p:sp>
+        <p:nvSpPr>
+          <p:cNvPr id="14" name="Shape 12"/>
+          <p:cNvSpPr/>
+          <p:nvPr/>
+        </p:nvSpPr>
+        <p:spPr>
+          <a:xfrm>
+            <a:off x="7909560" y="3520440"/>
+            <a:ext cx="3154680" cy="1737360"/>
+          </a:xfrm>
+          <a:prstGeom prst="roundRect">
+            <a:avLst>
+              <a:gd name="adj" fmla="val 6316"/>
+            </a:avLst>
+          </a:prstGeom>
+          <a:solidFill>
+            <a:srgbClr val="EAF6F8"/>
+          </a:solidFill>
+          <a:ln w="12700">
+            <a:solidFill>
+              <a:srgbClr val="B9D7E6"/>
+            </a:solidFill>
+            <a:prstDash val="solid"/>
+          </a:ln>
+        </p:spPr>
+      </p:sp>
+      <p:sp>
+        <p:nvSpPr>
+          <p:cNvPr id="15" name="Text 13"/>
+          <p:cNvSpPr/>
+          <p:nvPr/>
+        </p:nvSpPr>
+        <p:spPr>
+          <a:xfrm>
+            <a:off x="8074152" y="3666744"/>
+            <a:ext cx="2825496" cy="201168"/>
+          </a:xfrm>
+          <a:prstGeom prst="rect">
+            <a:avLst/>
+          </a:prstGeom>
+          <a:noFill/>
+          <a:ln/>
+        </p:spPr>
+        <p:txBody>
+          <a:bodyPr wrap="square" lIns="0" tIns="0" rIns="0" bIns="0" rtlCol="0" anchor="ctr"/>
+          <a:lstStyle/>
+          <a:p>
+            <a:pPr indent="0" marL="0">
+              <a:buNone/>
+            </a:pPr>
+            <a:r>
+              <a:rPr lang="en-US" sz="950" b="1" dirty="0">
+                <a:solidFill>
+                  <a:srgbClr val="0068B7"/>
+                </a:solidFill>
+                <a:latin typeface="Aptos" pitchFamily="34" charset="0"/>
+                <a:ea typeface="Aptos" pitchFamily="34" charset="-122"/>
+                <a:cs typeface="Aptos" pitchFamily="34" charset="-120"/>
+              </a:rPr>
+              <a:t>Use this for</a:t>
+            </a:r>
+            <a:endParaRPr lang="en-US" sz="950" dirty="0"/>
+          </a:p>
+        </p:txBody>
+      </p:sp>
+      <p:sp>
+        <p:nvSpPr>
+          <p:cNvPr id="16" name="Text 14"/>
+          <p:cNvSpPr/>
+          <p:nvPr/>
+        </p:nvSpPr>
+        <p:spPr>
+          <a:xfrm>
+            <a:off x="8074152" y="3959352"/>
+            <a:ext cx="2825496" cy="1170432"/>
+          </a:xfrm>
+          <a:prstGeom prst="rect">
+            <a:avLst/>
+          </a:prstGeom>
+          <a:noFill/>
+          <a:ln/>
+        </p:spPr>
+        <p:txBody>
+          <a:bodyPr wrap="square" lIns="0" tIns="0" rIns="0" bIns="0" rtlCol="0" anchor="t">
+            <a:normAutofit/>
+          </a:bodyPr>
+          <a:lstStyle/>
+          <a:p>
+            <a:pPr indent="0" marL="0">
+              <a:buNone/>
+            </a:pPr>
+            <a:r>
+              <a:rPr lang="en-US" sz="1250" dirty="0">
+                <a:solidFill>
+                  <a:srgbClr val="17364A"/>
+                </a:solidFill>
+                <a:latin typeface="Aptos" pitchFamily="34" charset="0"/>
+                <a:ea typeface="Aptos" pitchFamily="34" charset="-122"/>
+                <a:cs typeface="Aptos" pitchFamily="34" charset="-120"/>
+              </a:rPr>
+              <a:t>Connect the concept to public health decisions, safeguards, documentation, or implementation work.</a:t>
+            </a:r>
+            <a:endParaRPr lang="en-US" sz="1250" dirty="0"/>
+          </a:p>
+        </p:txBody>
+      </p:sp>
+    </p:spTree>
+  </p:cSld>
+  <p:clrMapOvr>
+    <a:masterClrMapping/>
+  </p:clrMapOvr>
+</p:sld>
+</file>
+
+<file path=ppt/slides/slide22.xml><?xml version="1.0" encoding="utf-8"?>
+<p:sld xmlns:a="http://schemas.openxmlformats.org/drawingml/2006/main" xmlns:r="http://schemas.openxmlformats.org/officeDocument/2006/relationships" xmlns:p="http://schemas.openxmlformats.org/presentationml/2006/main">
+  <p:cSld name="Slide 22">
+    <p:bg>
+      <p:bgPr>
+        <a:solidFill>
+          <a:srgbClr val="F7FBFD"/>
+        </a:solidFill>
+      </p:bgPr>
+    </p:bg>
+    <p:spTree>
+      <p:nvGrpSpPr>
+        <p:cNvPr id="1" name=""/>
+        <p:cNvGrpSpPr/>
+        <p:nvPr/>
+      </p:nvGrpSpPr>
+      <p:grpSpPr>
+        <a:xfrm>
+          <a:off x="0" y="0"/>
+          <a:ext cx="0" cy="0"/>
+          <a:chOff x="0" y="0"/>
+          <a:chExt cx="0" cy="0"/>
+        </a:xfrm>
+      </p:grpSpPr>
+      <p:sp>
+        <p:nvSpPr>
+          <p:cNvPr id="2" name="Shape 0"/>
+          <p:cNvSpPr/>
+          <p:nvPr/>
+        </p:nvSpPr>
+        <p:spPr>
+          <a:xfrm>
+            <a:off x="0" y="0"/>
+            <a:ext cx="12191695" cy="164592"/>
+          </a:xfrm>
+          <a:prstGeom prst="rect">
+            <a:avLst/>
+          </a:prstGeom>
+          <a:solidFill>
+            <a:srgbClr val="0068B7"/>
+          </a:solidFill>
+          <a:ln w="12700">
+            <a:solidFill>
+              <a:srgbClr val="0068B7"/>
+            </a:solidFill>
+            <a:prstDash val="solid"/>
+          </a:ln>
+        </p:spPr>
+      </p:sp>
+      <p:sp>
+        <p:nvSpPr>
+          <p:cNvPr id="3" name="Shape 1"/>
+          <p:cNvSpPr/>
+          <p:nvPr/>
+        </p:nvSpPr>
+        <p:spPr>
+          <a:xfrm>
+            <a:off x="0" y="164592"/>
+            <a:ext cx="146304" cy="6693408"/>
+          </a:xfrm>
+          <a:prstGeom prst="rect">
+            <a:avLst/>
+          </a:prstGeom>
+          <a:solidFill>
+            <a:srgbClr val="2F8A28"/>
+          </a:solidFill>
+          <a:ln w="12700">
+            <a:solidFill>
+              <a:srgbClr val="2F8A28"/>
+            </a:solidFill>
+            <a:prstDash val="solid"/>
+          </a:ln>
+        </p:spPr>
+      </p:sp>
+      <p:sp>
+        <p:nvSpPr>
+          <p:cNvPr id="4" name="Text 2"/>
+          <p:cNvSpPr/>
+          <p:nvPr/>
+        </p:nvSpPr>
+        <p:spPr>
+          <a:xfrm>
+            <a:off x="502920" y="292608"/>
+            <a:ext cx="10149840" cy="256032"/>
+          </a:xfrm>
+          <a:prstGeom prst="rect">
+            <a:avLst/>
+          </a:prstGeom>
+          <a:noFill/>
+          <a:ln/>
+        </p:spPr>
+        <p:txBody>
+          <a:bodyPr wrap="square" lIns="0" tIns="0" rIns="0" bIns="0" rtlCol="0" anchor="ctr"/>
+          <a:lstStyle/>
+          <a:p>
+            <a:pPr indent="0" marL="0">
+              <a:buNone/>
+            </a:pPr>
+            <a:r>
+              <a:rPr lang="en-US" sz="900" b="1" dirty="0">
+                <a:solidFill>
+                  <a:srgbClr val="5F7181"/>
+                </a:solidFill>
+                <a:latin typeface="Aptos" pitchFamily="34" charset="0"/>
+                <a:ea typeface="Aptos" pitchFamily="34" charset="-122"/>
+                <a:cs typeface="Aptos" pitchFamily="34" charset="-120"/>
+              </a:rPr>
+              <a:t>Causal Inference and AI in Public Health Decision-Making</a:t>
+            </a:r>
+            <a:endParaRPr lang="en-US" sz="900" dirty="0"/>
+          </a:p>
+        </p:txBody>
+      </p:sp>
+      <p:sp>
+        <p:nvSpPr>
+          <p:cNvPr id="5" name="Text 3"/>
+          <p:cNvSpPr/>
+          <p:nvPr/>
+        </p:nvSpPr>
+        <p:spPr>
+          <a:xfrm>
+            <a:off x="502920" y="6537960"/>
+            <a:ext cx="7772400" cy="201168"/>
+          </a:xfrm>
+          <a:prstGeom prst="rect">
+            <a:avLst/>
+          </a:prstGeom>
+          <a:noFill/>
+          <a:ln/>
+        </p:spPr>
+        <p:txBody>
+          <a:bodyPr wrap="square" lIns="0" tIns="0" rIns="0" bIns="0" rtlCol="0" anchor="ctr"/>
+          <a:lstStyle/>
+          <a:p>
+            <a:pPr indent="0" marL="0">
+              <a:buNone/>
+            </a:pPr>
+            <a:r>
+              <a:rPr lang="en-US" sz="800" dirty="0">
+                <a:solidFill>
+                  <a:srgbClr val="5F7181"/>
+                </a:solidFill>
+                <a:latin typeface="Aptos" pitchFamily="34" charset="0"/>
+                <a:ea typeface="Aptos" pitchFamily="34" charset="-122"/>
+                <a:cs typeface="Aptos" pitchFamily="34" charset="-120"/>
+              </a:rPr>
+              <a:t>AI Playbook and Toolkit for Public Health Departments</a:t>
+            </a:r>
+            <a:endParaRPr lang="en-US" sz="800" dirty="0"/>
+          </a:p>
+        </p:txBody>
+      </p:sp>
+      <p:sp>
+        <p:nvSpPr>
+          <p:cNvPr id="6" name="Text 4"/>
+          <p:cNvSpPr/>
+          <p:nvPr/>
+        </p:nvSpPr>
+        <p:spPr>
+          <a:xfrm>
+            <a:off x="9966960" y="6537960"/>
+            <a:ext cx="1645920" cy="201168"/>
+          </a:xfrm>
+          <a:prstGeom prst="rect">
+            <a:avLst/>
+          </a:prstGeom>
+          <a:noFill/>
+          <a:ln/>
+        </p:spPr>
+        <p:txBody>
+          <a:bodyPr wrap="square" lIns="0" tIns="0" rIns="0" bIns="0" rtlCol="0" anchor="ctr"/>
+          <a:lstStyle/>
+          <a:p>
+            <a:pPr algn="r" indent="0" marL="0">
+              <a:buNone/>
+            </a:pPr>
+            <a:r>
+              <a:rPr lang="en-US" sz="800" dirty="0">
+                <a:solidFill>
+                  <a:srgbClr val="5F7181"/>
+                </a:solidFill>
+                <a:latin typeface="Aptos" pitchFamily="34" charset="0"/>
+                <a:ea typeface="Aptos" pitchFamily="34" charset="-122"/>
+                <a:cs typeface="Aptos" pitchFamily="34" charset="-120"/>
+              </a:rPr>
+              <a:t>© Paula Soper</a:t>
+            </a:r>
+            <a:endParaRPr lang="en-US" sz="800" dirty="0"/>
+          </a:p>
+        </p:txBody>
+      </p:sp>
+      <p:sp>
+        <p:nvSpPr>
+          <p:cNvPr id="7" name="Text 5"/>
+          <p:cNvSpPr/>
+          <p:nvPr/>
+        </p:nvSpPr>
+        <p:spPr>
+          <a:xfrm>
+            <a:off x="640080" y="658368"/>
+            <a:ext cx="10881360" cy="566928"/>
+          </a:xfrm>
+          <a:prstGeom prst="rect">
+            <a:avLst/>
+          </a:prstGeom>
+          <a:noFill/>
+          <a:ln/>
+        </p:spPr>
+        <p:txBody>
+          <a:bodyPr wrap="square" lIns="0" tIns="0" rIns="0" bIns="0" rtlCol="0" anchor="ctr">
+            <a:normAutofit/>
+          </a:bodyPr>
+          <a:lstStyle/>
+          <a:p>
+            <a:pPr indent="0" marL="0">
+              <a:buNone/>
+            </a:pPr>
+            <a:r>
+              <a:rPr lang="en-US" sz="2700" b="1" dirty="0">
+                <a:solidFill>
+                  <a:srgbClr val="003A63"/>
+                </a:solidFill>
+                <a:latin typeface="Aptos Display" pitchFamily="34" charset="0"/>
+                <a:ea typeface="Aptos Display" pitchFamily="34" charset="-122"/>
+                <a:cs typeface="Aptos Display" pitchFamily="34" charset="-120"/>
+              </a:rPr>
+              <a:t>References and Resources Continued</a:t>
+            </a:r>
+            <a:endParaRPr lang="en-US" sz="2700" dirty="0"/>
+          </a:p>
+        </p:txBody>
+      </p:sp>
+      <p:sp>
+        <p:nvSpPr>
+          <p:cNvPr id="8" name="Text 6"/>
+          <p:cNvSpPr/>
+          <p:nvPr/>
+        </p:nvSpPr>
+        <p:spPr>
+          <a:xfrm>
+            <a:off x="868680" y="1417320"/>
+            <a:ext cx="6675120" cy="4434840"/>
+          </a:xfrm>
+          <a:prstGeom prst="rect">
+            <a:avLst/>
+          </a:prstGeom>
+          <a:noFill/>
+          <a:ln/>
+        </p:spPr>
+        <p:txBody>
+          <a:bodyPr wrap="square" lIns="635" tIns="635" rIns="635" bIns="635" rtlCol="0" anchor="t">
+            <a:normAutofit/>
+          </a:bodyPr>
+          <a:lstStyle/>
+          <a:p>
+            <a:r>
+              <a:rPr lang="en-US" sz="1700" dirty="0">
+                <a:solidFill>
+                  <a:srgbClr val="17364A"/>
+                </a:solidFill>
+                <a:latin typeface="Aptos" pitchFamily="34" charset="0"/>
+                <a:ea typeface="Aptos" pitchFamily="34" charset="-122"/>
+                <a:cs typeface="Aptos" pitchFamily="34" charset="-120"/>
+              </a:rPr>
+              <a:t>Agency policies for privacy, public records, cybersecurity, procurement, civil rights, accessibility, language access, and.</a:t>
+            </a:r>
+            <a:endParaRPr lang="en-US" sz="1700" dirty="0"/>
+          </a:p>
+        </p:txBody>
+      </p:sp>
+      <p:sp>
+        <p:nvSpPr>
+          <p:cNvPr id="9" name="Shape 7"/>
+          <p:cNvSpPr/>
+          <p:nvPr/>
+        </p:nvSpPr>
+        <p:spPr>
+          <a:xfrm>
+            <a:off x="7909560" y="1417320"/>
+            <a:ext cx="3154680" cy="1828800"/>
+          </a:xfrm>
+          <a:prstGeom prst="roundRect">
+            <a:avLst>
+              <a:gd name="adj" fmla="val 6000"/>
+            </a:avLst>
+          </a:prstGeom>
+          <a:solidFill>
+            <a:srgbClr val="EEF8ED"/>
+          </a:solidFill>
+          <a:ln w="12700">
+            <a:solidFill>
+              <a:srgbClr val="B9D7E6"/>
+            </a:solidFill>
+            <a:prstDash val="solid"/>
+          </a:ln>
+        </p:spPr>
+      </p:sp>
+      <p:sp>
+        <p:nvSpPr>
+          <p:cNvPr id="10" name="Text 8"/>
+          <p:cNvSpPr/>
+          <p:nvPr/>
+        </p:nvSpPr>
+        <p:spPr>
+          <a:xfrm>
+            <a:off x="8074152" y="1563624"/>
+            <a:ext cx="2825496" cy="201168"/>
+          </a:xfrm>
+          <a:prstGeom prst="rect">
+            <a:avLst/>
+          </a:prstGeom>
+          <a:noFill/>
+          <a:ln/>
+        </p:spPr>
+        <p:txBody>
+          <a:bodyPr wrap="square" lIns="0" tIns="0" rIns="0" bIns="0" rtlCol="0" anchor="ctr"/>
+          <a:lstStyle/>
+          <a:p>
+            <a:pPr indent="0" marL="0">
+              <a:buNone/>
+            </a:pPr>
+            <a:r>
+              <a:rPr lang="en-US" sz="950" b="1" dirty="0">
+                <a:solidFill>
+                  <a:srgbClr val="0068B7"/>
+                </a:solidFill>
+                <a:latin typeface="Aptos" pitchFamily="34" charset="0"/>
+                <a:ea typeface="Aptos" pitchFamily="34" charset="-122"/>
+                <a:cs typeface="Aptos" pitchFamily="34" charset="-120"/>
+              </a:rPr>
+              <a:t>Key idea</a:t>
+            </a:r>
+            <a:endParaRPr lang="en-US" sz="950" dirty="0"/>
+          </a:p>
+        </p:txBody>
+      </p:sp>
+      <p:sp>
+        <p:nvSpPr>
+          <p:cNvPr id="11" name="Text 9"/>
+          <p:cNvSpPr/>
+          <p:nvPr/>
+        </p:nvSpPr>
+        <p:spPr>
+          <a:xfrm>
+            <a:off x="8074152" y="1856232"/>
+            <a:ext cx="2825496" cy="1261872"/>
+          </a:xfrm>
+          <a:prstGeom prst="rect">
+            <a:avLst/>
+          </a:prstGeom>
+          <a:noFill/>
+          <a:ln/>
+        </p:spPr>
+        <p:txBody>
+          <a:bodyPr wrap="square" lIns="0" tIns="0" rIns="0" bIns="0" rtlCol="0" anchor="t">
+            <a:normAutofit/>
+          </a:bodyPr>
+          <a:lstStyle/>
+          <a:p>
+            <a:pPr indent="0" marL="0">
+              <a:buNone/>
+            </a:pPr>
+            <a:r>
+              <a:rPr lang="en-US" sz="1250" dirty="0">
+                <a:solidFill>
+                  <a:srgbClr val="17364A"/>
+                </a:solidFill>
+                <a:latin typeface="Aptos" pitchFamily="34" charset="0"/>
+                <a:ea typeface="Aptos" pitchFamily="34" charset="-122"/>
+                <a:cs typeface="Aptos" pitchFamily="34" charset="-120"/>
+              </a:rPr>
+              <a:t>Agency policies for privacy, public records, cybersecurity, procurement, civil rights, accessibility, language access, and.</a:t>
+            </a:r>
+            <a:endParaRPr lang="en-US" sz="1250" dirty="0"/>
+          </a:p>
+        </p:txBody>
+      </p:sp>
+      <p:sp>
+        <p:nvSpPr>
+          <p:cNvPr id="12" name="Shape 10"/>
+          <p:cNvSpPr/>
+          <p:nvPr/>
+        </p:nvSpPr>
+        <p:spPr>
+          <a:xfrm>
+            <a:off x="7909560" y="3520440"/>
+            <a:ext cx="3154680" cy="1737360"/>
+          </a:xfrm>
+          <a:prstGeom prst="roundRect">
+            <a:avLst>
+              <a:gd name="adj" fmla="val 6316"/>
+            </a:avLst>
+          </a:prstGeom>
+          <a:solidFill>
+            <a:srgbClr val="EAF6F8"/>
+          </a:solidFill>
+          <a:ln w="12700">
+            <a:solidFill>
+              <a:srgbClr val="B9D7E6"/>
+            </a:solidFill>
+            <a:prstDash val="solid"/>
+          </a:ln>
+        </p:spPr>
+      </p:sp>
+      <p:sp>
+        <p:nvSpPr>
+          <p:cNvPr id="13" name="Text 11"/>
+          <p:cNvSpPr/>
+          <p:nvPr/>
+        </p:nvSpPr>
+        <p:spPr>
+          <a:xfrm>
+            <a:off x="8074152" y="3666744"/>
+            <a:ext cx="2825496" cy="201168"/>
+          </a:xfrm>
+          <a:prstGeom prst="rect">
+            <a:avLst/>
+          </a:prstGeom>
+          <a:noFill/>
+          <a:ln/>
+        </p:spPr>
+        <p:txBody>
+          <a:bodyPr wrap="square" lIns="0" tIns="0" rIns="0" bIns="0" rtlCol="0" anchor="ctr"/>
+          <a:lstStyle/>
+          <a:p>
+            <a:pPr indent="0" marL="0">
+              <a:buNone/>
+            </a:pPr>
+            <a:r>
+              <a:rPr lang="en-US" sz="950" b="1" dirty="0">
+                <a:solidFill>
+                  <a:srgbClr val="0068B7"/>
+                </a:solidFill>
+                <a:latin typeface="Aptos" pitchFamily="34" charset="0"/>
+                <a:ea typeface="Aptos" pitchFamily="34" charset="-122"/>
+                <a:cs typeface="Aptos" pitchFamily="34" charset="-120"/>
+              </a:rPr>
+              <a:t>Use this for</a:t>
+            </a:r>
+            <a:endParaRPr lang="en-US" sz="950" dirty="0"/>
+          </a:p>
+        </p:txBody>
+      </p:sp>
+      <p:sp>
+        <p:nvSpPr>
+          <p:cNvPr id="14" name="Text 12"/>
+          <p:cNvSpPr/>
+          <p:nvPr/>
+        </p:nvSpPr>
+        <p:spPr>
+          <a:xfrm>
+            <a:off x="8074152" y="3959352"/>
+            <a:ext cx="2825496" cy="1170432"/>
+          </a:xfrm>
+          <a:prstGeom prst="rect">
+            <a:avLst/>
+          </a:prstGeom>
+          <a:noFill/>
+          <a:ln/>
+        </p:spPr>
+        <p:txBody>
+          <a:bodyPr wrap="square" lIns="0" tIns="0" rIns="0" bIns="0" rtlCol="0" anchor="t">
+            <a:normAutofit/>
+          </a:bodyPr>
+          <a:lstStyle/>
+          <a:p>
+            <a:pPr indent="0" marL="0">
+              <a:buNone/>
+            </a:pPr>
+            <a:r>
+              <a:rPr lang="en-US" sz="1250" dirty="0">
+                <a:solidFill>
+                  <a:srgbClr val="17364A"/>
+                </a:solidFill>
+                <a:latin typeface="Aptos" pitchFamily="34" charset="0"/>
+                <a:ea typeface="Aptos" pitchFamily="34" charset="-122"/>
+                <a:cs typeface="Aptos" pitchFamily="34" charset="-120"/>
+              </a:rPr>
+              <a:t>Connect the concept to public health decisions, safeguards, documentation, or implementation work.</a:t>
+            </a:r>
+            <a:endParaRPr lang="en-US" sz="1250" dirty="0"/>
           </a:p>
         </p:txBody>
       </p:sp>
@@ -6149,7 +11025,32 @@
       </p:sp>
       <p:sp>
         <p:nvSpPr>
-          <p:cNvPr id="3" name="Text 1"/>
+          <p:cNvPr id="3" name="Shape 1"/>
+          <p:cNvSpPr/>
+          <p:nvPr/>
+        </p:nvSpPr>
+        <p:spPr>
+          <a:xfrm>
+            <a:off x="0" y="164592"/>
+            <a:ext cx="146304" cy="6693408"/>
+          </a:xfrm>
+          <a:prstGeom prst="rect">
+            <a:avLst/>
+          </a:prstGeom>
+          <a:solidFill>
+            <a:srgbClr val="2F8A28"/>
+          </a:solidFill>
+          <a:ln w="12700">
+            <a:solidFill>
+              <a:srgbClr val="2F8A28"/>
+            </a:solidFill>
+            <a:prstDash val="solid"/>
+          </a:ln>
+        </p:spPr>
+      </p:sp>
+      <p:sp>
+        <p:nvSpPr>
+          <p:cNvPr id="4" name="Text 2"/>
           <p:cNvSpPr/>
           <p:nvPr/>
         </p:nvSpPr>
@@ -6188,7 +11089,7 @@
       </p:sp>
       <p:sp>
         <p:nvSpPr>
-          <p:cNvPr id="4" name="Text 2"/>
+          <p:cNvPr id="5" name="Text 3"/>
           <p:cNvSpPr/>
           <p:nvPr/>
         </p:nvSpPr>
@@ -6227,7 +11128,7 @@
       </p:sp>
       <p:sp>
         <p:nvSpPr>
-          <p:cNvPr id="5" name="Text 3"/>
+          <p:cNvPr id="6" name="Text 4"/>
           <p:cNvSpPr/>
           <p:nvPr/>
         </p:nvSpPr>
@@ -6266,7 +11167,7 @@
       </p:sp>
       <p:sp>
         <p:nvSpPr>
-          <p:cNvPr id="6" name="Text 4"/>
+          <p:cNvPr id="7" name="Text 5"/>
           <p:cNvSpPr/>
           <p:nvPr/>
         </p:nvSpPr>
@@ -6299,7 +11200,7 @@
                 <a:ea typeface="Aptos Display" pitchFamily="34" charset="-122"/>
                 <a:cs typeface="Aptos Display" pitchFamily="34" charset="-120"/>
               </a:rPr>
-              <a:t>Learning Objectives</a:t>
+              <a:t>How this module connects to the playbook</a:t>
             </a:r>
             <a:endParaRPr lang="en-US" sz="2700" dirty="0"/>
           </a:p>
@@ -6307,14 +11208,14 @@
       </p:sp>
       <p:sp>
         <p:nvSpPr>
-          <p:cNvPr id="7" name="Text 5"/>
-          <p:cNvSpPr/>
-          <p:nvPr/>
-        </p:nvSpPr>
-        <p:spPr>
-          <a:xfrm>
-            <a:off x="822960" y="1325880"/>
-            <a:ext cx="10378440" cy="4800600"/>
+          <p:cNvPr id="8" name="Text 6"/>
+          <p:cNvSpPr/>
+          <p:nvPr/>
+        </p:nvSpPr>
+        <p:spPr>
+          <a:xfrm>
+            <a:off x="868680" y="1417320"/>
+            <a:ext cx="6903720" cy="4480560"/>
           </a:xfrm>
           <a:prstGeom prst="rect">
             <a:avLst/>
@@ -6329,7 +11230,7 @@
           <a:lstStyle/>
           <a:p>
             <a:r>
-              <a:rPr lang="en-US" sz="1450" dirty="0">
+              <a:rPr lang="en-US" sz="1540" dirty="0">
                 <a:solidFill>
                   <a:srgbClr val="17364A"/>
                 </a:solidFill>
@@ -6337,13 +11238,13 @@
                 <a:ea typeface="Aptos" pitchFamily="34" charset="-122"/>
                 <a:cs typeface="Aptos" pitchFamily="34" charset="-120"/>
               </a:rPr>
-              <a:t>Distinguish prediction from causal inference in public health AI.</a:t>
-            </a:r>
-            <a:endParaRPr lang="en-US" sz="1450" dirty="0"/>
-          </a:p>
-          <a:p>
-            <a:r>
-              <a:rPr lang="en-US" sz="1450" dirty="0">
+              <a:t>Play 11: Build and Deploy AI Solutions - This lesson informs Play 11 by helping learners connect the lesson topic to build and deploy.</a:t>
+            </a:r>
+            <a:endParaRPr lang="en-US" sz="1540" dirty="0"/>
+          </a:p>
+          <a:p>
+            <a:r>
+              <a:rPr lang="en-US" sz="1540" dirty="0">
                 <a:solidFill>
                   <a:srgbClr val="17364A"/>
                 </a:solidFill>
@@ -6351,13 +11252,13 @@
                 <a:ea typeface="Aptos" pitchFamily="34" charset="-122"/>
                 <a:cs typeface="Aptos" pitchFamily="34" charset="-120"/>
               </a:rPr>
-              <a:t>Explain why correlation and prediction do not establish causation.</a:t>
-            </a:r>
-            <a:endParaRPr lang="en-US" sz="1450" dirty="0"/>
-          </a:p>
-          <a:p>
-            <a:r>
-              <a:rPr lang="en-US" sz="1450" dirty="0">
+              <a:t>Play 7: Prioritize Use Cases - This lesson informs Play 7 by helping learners connect the lesson topic to prioritize use cases work.</a:t>
+            </a:r>
+            <a:endParaRPr lang="en-US" sz="1540" dirty="0"/>
+          </a:p>
+          <a:p>
+            <a:r>
+              <a:rPr lang="en-US" sz="1540" dirty="0">
                 <a:solidFill>
                   <a:srgbClr val="17364A"/>
                 </a:solidFill>
@@ -6365,13 +11266,13 @@
                 <a:ea typeface="Aptos" pitchFamily="34" charset="-122"/>
                 <a:cs typeface="Aptos" pitchFamily="34" charset="-120"/>
               </a:rPr>
-              <a:t>Identify confounding, selection bias, collider bias, and temporal ambiguity in public health data.</a:t>
-            </a:r>
-            <a:endParaRPr lang="en-US" sz="1450" dirty="0"/>
-          </a:p>
-          <a:p>
-            <a:r>
-              <a:rPr lang="en-US" sz="1450" dirty="0">
+              <a:t>Play 1: Vision &amp; Guardrails - This lesson informs Play 1 by helping learners connect the lesson topic to vision &amp; guardrails work in.</a:t>
+            </a:r>
+            <a:endParaRPr lang="en-US" sz="1540" dirty="0"/>
+          </a:p>
+          <a:p>
+            <a:r>
+              <a:rPr lang="en-US" sz="1540" dirty="0">
                 <a:solidFill>
                   <a:srgbClr val="17364A"/>
                 </a:solidFill>
@@ -6379,13 +11280,106 @@
                 <a:ea typeface="Aptos" pitchFamily="34" charset="-122"/>
                 <a:cs typeface="Aptos" pitchFamily="34" charset="-120"/>
               </a:rPr>
-              <a:t>Recognize when a decision requires causal evidence rather than risk prediction alone.</a:t>
-            </a:r>
-            <a:endParaRPr lang="en-US" sz="1450" dirty="0"/>
-          </a:p>
-          <a:p>
-            <a:r>
-              <a:rPr lang="en-US" sz="1450" dirty="0">
+              <a:t>Play 2: Readiness Assessment - This lesson informs Play 2 by helping learners connect the lesson topic to readiness assessment work.</a:t>
+            </a:r>
+            <a:endParaRPr lang="en-US" sz="1540" dirty="0"/>
+          </a:p>
+        </p:txBody>
+      </p:sp>
+      <p:sp>
+        <p:nvSpPr>
+          <p:cNvPr id="9" name="Shape 7"/>
+          <p:cNvSpPr/>
+          <p:nvPr/>
+        </p:nvSpPr>
+        <p:spPr>
+          <a:xfrm>
+            <a:off x="8046720" y="1417320"/>
+            <a:ext cx="3063240" cy="2103120"/>
+          </a:xfrm>
+          <a:prstGeom prst="roundRect">
+            <a:avLst>
+              <a:gd name="adj" fmla="val 5217"/>
+            </a:avLst>
+          </a:prstGeom>
+          <a:solidFill>
+            <a:srgbClr val="EEF8ED"/>
+          </a:solidFill>
+          <a:ln w="12700">
+            <a:solidFill>
+              <a:srgbClr val="B9D7E6"/>
+            </a:solidFill>
+            <a:prstDash val="solid"/>
+          </a:ln>
+        </p:spPr>
+      </p:sp>
+      <p:sp>
+        <p:nvSpPr>
+          <p:cNvPr id="10" name="Text 8"/>
+          <p:cNvSpPr/>
+          <p:nvPr/>
+        </p:nvSpPr>
+        <p:spPr>
+          <a:xfrm>
+            <a:off x="8211312" y="1563624"/>
+            <a:ext cx="2734056" cy="201168"/>
+          </a:xfrm>
+          <a:prstGeom prst="rect">
+            <a:avLst/>
+          </a:prstGeom>
+          <a:noFill/>
+          <a:ln/>
+        </p:spPr>
+        <p:txBody>
+          <a:bodyPr wrap="square" lIns="0" tIns="0" rIns="0" bIns="0" rtlCol="0" anchor="ctr"/>
+          <a:lstStyle/>
+          <a:p>
+            <a:pPr indent="0" marL="0">
+              <a:buNone/>
+            </a:pPr>
+            <a:r>
+              <a:rPr lang="en-US" sz="950" b="1" dirty="0">
+                <a:solidFill>
+                  <a:srgbClr val="0068B7"/>
+                </a:solidFill>
+                <a:latin typeface="Aptos" pitchFamily="34" charset="0"/>
+                <a:ea typeface="Aptos" pitchFamily="34" charset="-122"/>
+                <a:cs typeface="Aptos" pitchFamily="34" charset="-120"/>
+              </a:rPr>
+              <a:t>Apply the lesson</a:t>
+            </a:r>
+            <a:endParaRPr lang="en-US" sz="950" dirty="0"/>
+          </a:p>
+        </p:txBody>
+      </p:sp>
+      <p:sp>
+        <p:nvSpPr>
+          <p:cNvPr id="11" name="Text 9"/>
+          <p:cNvSpPr/>
+          <p:nvPr/>
+        </p:nvSpPr>
+        <p:spPr>
+          <a:xfrm>
+            <a:off x="8211312" y="1856232"/>
+            <a:ext cx="2734056" cy="1536192"/>
+          </a:xfrm>
+          <a:prstGeom prst="rect">
+            <a:avLst/>
+          </a:prstGeom>
+          <a:noFill/>
+          <a:ln/>
+        </p:spPr>
+        <p:txBody>
+          <a:bodyPr wrap="square" lIns="0" tIns="0" rIns="0" bIns="0" rtlCol="0" anchor="t">
+            <a:normAutofit/>
+          </a:bodyPr>
+          <a:lstStyle/>
+          <a:p>
+            <a:pPr indent="0" marL="0">
+              <a:buNone/>
+            </a:pPr>
+            <a:r>
+              <a:rPr lang="en-US" sz="1250" dirty="0">
                 <a:solidFill>
                   <a:srgbClr val="17364A"/>
                 </a:solidFill>
@@ -6393,9 +11387,116 @@
                 <a:ea typeface="Aptos" pitchFamily="34" charset="-122"/>
                 <a:cs typeface="Aptos" pitchFamily="34" charset="-120"/>
               </a:rPr>
-              <a:t>Identify appropriate evidence sources for evaluating interventions or policy effects.</a:t>
-            </a:r>
-            <a:endParaRPr lang="en-US" sz="1450" dirty="0"/>
+              <a:t>Use the related plays to identify decisions, participants, timing, approvals, and documentation needed for responsible implementation.</a:t>
+            </a:r>
+            <a:endParaRPr lang="en-US" sz="1250" dirty="0"/>
+          </a:p>
+        </p:txBody>
+      </p:sp>
+      <p:sp>
+        <p:nvSpPr>
+          <p:cNvPr id="12" name="Shape 10"/>
+          <p:cNvSpPr/>
+          <p:nvPr/>
+        </p:nvSpPr>
+        <p:spPr>
+          <a:xfrm>
+            <a:off x="8046720" y="3794760"/>
+            <a:ext cx="3063240" cy="1508760"/>
+          </a:xfrm>
+          <a:prstGeom prst="roundRect">
+            <a:avLst>
+              <a:gd name="adj" fmla="val 7273"/>
+            </a:avLst>
+          </a:prstGeom>
+          <a:solidFill>
+            <a:srgbClr val="FFF4D9"/>
+          </a:solidFill>
+          <a:ln w="12700">
+            <a:solidFill>
+              <a:srgbClr val="B9D7E6"/>
+            </a:solidFill>
+            <a:prstDash val="solid"/>
+          </a:ln>
+        </p:spPr>
+      </p:sp>
+      <p:sp>
+        <p:nvSpPr>
+          <p:cNvPr id="13" name="Text 11"/>
+          <p:cNvSpPr/>
+          <p:nvPr/>
+        </p:nvSpPr>
+        <p:spPr>
+          <a:xfrm>
+            <a:off x="8211312" y="3941064"/>
+            <a:ext cx="2734056" cy="201168"/>
+          </a:xfrm>
+          <a:prstGeom prst="rect">
+            <a:avLst/>
+          </a:prstGeom>
+          <a:noFill/>
+          <a:ln/>
+        </p:spPr>
+        <p:txBody>
+          <a:bodyPr wrap="square" lIns="0" tIns="0" rIns="0" bIns="0" rtlCol="0" anchor="ctr"/>
+          <a:lstStyle/>
+          <a:p>
+            <a:pPr indent="0" marL="0">
+              <a:buNone/>
+            </a:pPr>
+            <a:r>
+              <a:rPr lang="en-US" sz="950" b="1" dirty="0">
+                <a:solidFill>
+                  <a:srgbClr val="0068B7"/>
+                </a:solidFill>
+                <a:latin typeface="Aptos" pitchFamily="34" charset="0"/>
+                <a:ea typeface="Aptos" pitchFamily="34" charset="-122"/>
+                <a:cs typeface="Aptos" pitchFamily="34" charset="-120"/>
+              </a:rPr>
+              <a:t>Keep in mind</a:t>
+            </a:r>
+            <a:endParaRPr lang="en-US" sz="950" dirty="0"/>
+          </a:p>
+        </p:txBody>
+      </p:sp>
+      <p:sp>
+        <p:nvSpPr>
+          <p:cNvPr id="14" name="Text 12"/>
+          <p:cNvSpPr/>
+          <p:nvPr/>
+        </p:nvSpPr>
+        <p:spPr>
+          <a:xfrm>
+            <a:off x="8211312" y="4233672"/>
+            <a:ext cx="2734056" cy="941832"/>
+          </a:xfrm>
+          <a:prstGeom prst="rect">
+            <a:avLst/>
+          </a:prstGeom>
+          <a:noFill/>
+          <a:ln/>
+        </p:spPr>
+        <p:txBody>
+          <a:bodyPr wrap="square" lIns="0" tIns="0" rIns="0" bIns="0" rtlCol="0" anchor="t">
+            <a:normAutofit/>
+          </a:bodyPr>
+          <a:lstStyle/>
+          <a:p>
+            <a:pPr indent="0" marL="0">
+              <a:buNone/>
+            </a:pPr>
+            <a:r>
+              <a:rPr lang="en-US" sz="1250" dirty="0">
+                <a:solidFill>
+                  <a:srgbClr val="17364A"/>
+                </a:solidFill>
+                <a:latin typeface="Aptos" pitchFamily="34" charset="0"/>
+                <a:ea typeface="Aptos" pitchFamily="34" charset="-122"/>
+                <a:cs typeface="Aptos" pitchFamily="34" charset="-120"/>
+              </a:rPr>
+              <a:t>The playbook connection helps turn training into agency work, not just individual knowledge.</a:t>
+            </a:r>
+            <a:endParaRPr lang="en-US" sz="1250" dirty="0"/>
           </a:p>
         </p:txBody>
       </p:sp>
@@ -6458,7 +11559,32 @@
       </p:sp>
       <p:sp>
         <p:nvSpPr>
-          <p:cNvPr id="3" name="Text 1"/>
+          <p:cNvPr id="3" name="Shape 1"/>
+          <p:cNvSpPr/>
+          <p:nvPr/>
+        </p:nvSpPr>
+        <p:spPr>
+          <a:xfrm>
+            <a:off x="0" y="164592"/>
+            <a:ext cx="146304" cy="6693408"/>
+          </a:xfrm>
+          <a:prstGeom prst="rect">
+            <a:avLst/>
+          </a:prstGeom>
+          <a:solidFill>
+            <a:srgbClr val="2F8A28"/>
+          </a:solidFill>
+          <a:ln w="12700">
+            <a:solidFill>
+              <a:srgbClr val="2F8A28"/>
+            </a:solidFill>
+            <a:prstDash val="solid"/>
+          </a:ln>
+        </p:spPr>
+      </p:sp>
+      <p:sp>
+        <p:nvSpPr>
+          <p:cNvPr id="4" name="Text 2"/>
           <p:cNvSpPr/>
           <p:nvPr/>
         </p:nvSpPr>
@@ -6497,7 +11623,7 @@
       </p:sp>
       <p:sp>
         <p:nvSpPr>
-          <p:cNvPr id="4" name="Text 2"/>
+          <p:cNvPr id="5" name="Text 3"/>
           <p:cNvSpPr/>
           <p:nvPr/>
         </p:nvSpPr>
@@ -6536,7 +11662,7 @@
       </p:sp>
       <p:sp>
         <p:nvSpPr>
-          <p:cNvPr id="5" name="Text 3"/>
+          <p:cNvPr id="6" name="Text 4"/>
           <p:cNvSpPr/>
           <p:nvPr/>
         </p:nvSpPr>
@@ -6575,7 +11701,7 @@
       </p:sp>
       <p:sp>
         <p:nvSpPr>
-          <p:cNvPr id="6" name="Text 4"/>
+          <p:cNvPr id="7" name="Text 5"/>
           <p:cNvSpPr/>
           <p:nvPr/>
         </p:nvSpPr>
@@ -6608,7 +11734,7 @@
                 <a:ea typeface="Aptos Display" pitchFamily="34" charset="-122"/>
                 <a:cs typeface="Aptos Display" pitchFamily="34" charset="-120"/>
               </a:rPr>
-              <a:t>Learning Objectives Continued</a:t>
+              <a:t>Related toolkit resources</a:t>
             </a:r>
             <a:endParaRPr lang="en-US" sz="2700" dirty="0"/>
           </a:p>
@@ -6616,14 +11742,14 @@
       </p:sp>
       <p:sp>
         <p:nvSpPr>
-          <p:cNvPr id="7" name="Text 5"/>
-          <p:cNvSpPr/>
-          <p:nvPr/>
-        </p:nvSpPr>
-        <p:spPr>
-          <a:xfrm>
-            <a:off x="822960" y="1325880"/>
-            <a:ext cx="10378440" cy="4800600"/>
+          <p:cNvPr id="8" name="Text 6"/>
+          <p:cNvSpPr/>
+          <p:nvPr/>
+        </p:nvSpPr>
+        <p:spPr>
+          <a:xfrm>
+            <a:off x="868680" y="1417320"/>
+            <a:ext cx="6903720" cy="4480560"/>
           </a:xfrm>
           <a:prstGeom prst="rect">
             <a:avLst/>
@@ -6638,7 +11764,7 @@
           <a:lstStyle/>
           <a:p>
             <a:r>
-              <a:rPr lang="en-US" sz="1450" dirty="0">
+              <a:rPr lang="en-US" sz="1460" dirty="0">
                 <a:solidFill>
                   <a:srgbClr val="17364A"/>
                 </a:solidFill>
@@ -6646,9 +11772,279 @@
                 <a:ea typeface="Aptos" pitchFamily="34" charset="-122"/>
                 <a:cs typeface="Aptos" pitchFamily="34" charset="-120"/>
               </a:rPr>
-              <a:t>Create a causal question framing worksheet for an AI-supported decision.</a:t>
-            </a:r>
-            <a:endParaRPr lang="en-US" sz="1450" dirty="0"/>
+              <a:t>Tool 3: Equity Impact Assessment Checklist (Checklist) - Use this tool to complete or strengthen the practical exercise for the.</a:t>
+            </a:r>
+            <a:endParaRPr lang="en-US" sz="1460" dirty="0"/>
+          </a:p>
+          <a:p>
+            <a:r>
+              <a:rPr lang="en-US" sz="1460" dirty="0">
+                <a:solidFill>
+                  <a:srgbClr val="17364A"/>
+                </a:solidFill>
+                <a:latin typeface="Aptos" pitchFamily="34" charset="0"/>
+                <a:ea typeface="Aptos" pitchFamily="34" charset="-122"/>
+                <a:cs typeface="Aptos" pitchFamily="34" charset="-120"/>
+              </a:rPr>
+              <a:t>Tool 4: AI Policy Landscape Scan (Worksheet) - Use AI Policy Landscape Scan to translate this lesson into a documented public health.</a:t>
+            </a:r>
+            <a:endParaRPr lang="en-US" sz="1460" dirty="0"/>
+          </a:p>
+          <a:p>
+            <a:r>
+              <a:rPr lang="en-US" sz="1460" dirty="0">
+                <a:solidFill>
+                  <a:srgbClr val="17364A"/>
+                </a:solidFill>
+                <a:latin typeface="Aptos" pitchFamily="34" charset="0"/>
+                <a:ea typeface="Aptos" pitchFamily="34" charset="-122"/>
+                <a:cs typeface="Aptos" pitchFamily="34" charset="-120"/>
+              </a:rPr>
+              <a:t>Tool 5: AI Environmental and Resource Impact Review (Checklist) - Use AI Environmental and Resource Impact Review to translate this.</a:t>
+            </a:r>
+            <a:endParaRPr lang="en-US" sz="1460" dirty="0"/>
+          </a:p>
+          <a:p>
+            <a:r>
+              <a:rPr lang="en-US" sz="1460" dirty="0">
+                <a:solidFill>
+                  <a:srgbClr val="17364A"/>
+                </a:solidFill>
+                <a:latin typeface="Aptos" pitchFamily="34" charset="0"/>
+                <a:ea typeface="Aptos" pitchFamily="34" charset="-122"/>
+                <a:cs typeface="Aptos" pitchFamily="34" charset="-120"/>
+              </a:rPr>
+              <a:t>Tool 6: Human-Centered AI Decision Rule Checklist (Checklist) - Use Human-Centered AI Decision Rule Checklist to translate this.</a:t>
+            </a:r>
+            <a:endParaRPr lang="en-US" sz="1460" dirty="0"/>
+          </a:p>
+          <a:p>
+            <a:r>
+              <a:rPr lang="en-US" sz="1460" dirty="0">
+                <a:solidFill>
+                  <a:srgbClr val="17364A"/>
+                </a:solidFill>
+                <a:latin typeface="Aptos" pitchFamily="34" charset="0"/>
+                <a:ea typeface="Aptos" pitchFamily="34" charset="-122"/>
+                <a:cs typeface="Aptos" pitchFamily="34" charset="-120"/>
+              </a:rPr>
+              <a:t>Tool 8: AI Project Charter (Planning) - Use AI Project Charter to translate this lesson into a documented public health AI planning,.</a:t>
+            </a:r>
+            <a:endParaRPr lang="en-US" sz="1460" dirty="0"/>
+          </a:p>
+        </p:txBody>
+      </p:sp>
+      <p:sp>
+        <p:nvSpPr>
+          <p:cNvPr id="9" name="Shape 7"/>
+          <p:cNvSpPr/>
+          <p:nvPr/>
+        </p:nvSpPr>
+        <p:spPr>
+          <a:xfrm>
+            <a:off x="8046720" y="1417320"/>
+            <a:ext cx="3063240" cy="2103120"/>
+          </a:xfrm>
+          <a:prstGeom prst="roundRect">
+            <a:avLst>
+              <a:gd name="adj" fmla="val 5217"/>
+            </a:avLst>
+          </a:prstGeom>
+          <a:solidFill>
+            <a:srgbClr val="EAF6F8"/>
+          </a:solidFill>
+          <a:ln w="12700">
+            <a:solidFill>
+              <a:srgbClr val="B9D7E6"/>
+            </a:solidFill>
+            <a:prstDash val="solid"/>
+          </a:ln>
+        </p:spPr>
+      </p:sp>
+      <p:sp>
+        <p:nvSpPr>
+          <p:cNvPr id="10" name="Text 8"/>
+          <p:cNvSpPr/>
+          <p:nvPr/>
+        </p:nvSpPr>
+        <p:spPr>
+          <a:xfrm>
+            <a:off x="8211312" y="1563624"/>
+            <a:ext cx="2734056" cy="201168"/>
+          </a:xfrm>
+          <a:prstGeom prst="rect">
+            <a:avLst/>
+          </a:prstGeom>
+          <a:noFill/>
+          <a:ln/>
+        </p:spPr>
+        <p:txBody>
+          <a:bodyPr wrap="square" lIns="0" tIns="0" rIns="0" bIns="0" rtlCol="0" anchor="ctr"/>
+          <a:lstStyle/>
+          <a:p>
+            <a:pPr indent="0" marL="0">
+              <a:buNone/>
+            </a:pPr>
+            <a:r>
+              <a:rPr lang="en-US" sz="950" b="1" dirty="0">
+                <a:solidFill>
+                  <a:srgbClr val="0068B7"/>
+                </a:solidFill>
+                <a:latin typeface="Aptos" pitchFamily="34" charset="0"/>
+                <a:ea typeface="Aptos" pitchFamily="34" charset="-122"/>
+                <a:cs typeface="Aptos" pitchFamily="34" charset="-120"/>
+              </a:rPr>
+              <a:t>Use the tools</a:t>
+            </a:r>
+            <a:endParaRPr lang="en-US" sz="950" dirty="0"/>
+          </a:p>
+        </p:txBody>
+      </p:sp>
+      <p:sp>
+        <p:nvSpPr>
+          <p:cNvPr id="11" name="Text 9"/>
+          <p:cNvSpPr/>
+          <p:nvPr/>
+        </p:nvSpPr>
+        <p:spPr>
+          <a:xfrm>
+            <a:off x="8211312" y="1856232"/>
+            <a:ext cx="2734056" cy="1536192"/>
+          </a:xfrm>
+          <a:prstGeom prst="rect">
+            <a:avLst/>
+          </a:prstGeom>
+          <a:noFill/>
+          <a:ln/>
+        </p:spPr>
+        <p:txBody>
+          <a:bodyPr wrap="square" lIns="0" tIns="0" rIns="0" bIns="0" rtlCol="0" anchor="t">
+            <a:normAutofit/>
+          </a:bodyPr>
+          <a:lstStyle/>
+          <a:p>
+            <a:pPr indent="0" marL="0">
+              <a:buNone/>
+            </a:pPr>
+            <a:r>
+              <a:rPr lang="en-US" sz="1250" dirty="0">
+                <a:solidFill>
+                  <a:srgbClr val="17364A"/>
+                </a:solidFill>
+                <a:latin typeface="Aptos" pitchFamily="34" charset="0"/>
+                <a:ea typeface="Aptos" pitchFamily="34" charset="-122"/>
+                <a:cs typeface="Aptos" pitchFamily="34" charset="-120"/>
+              </a:rPr>
+              <a:t>Use linked tools when your department needs a structured worksheet, template, checklist, review process, or documentation artifact.</a:t>
+            </a:r>
+            <a:endParaRPr lang="en-US" sz="1250" dirty="0"/>
+          </a:p>
+        </p:txBody>
+      </p:sp>
+      <p:sp>
+        <p:nvSpPr>
+          <p:cNvPr id="12" name="Shape 10"/>
+          <p:cNvSpPr/>
+          <p:nvPr/>
+        </p:nvSpPr>
+        <p:spPr>
+          <a:xfrm>
+            <a:off x="8046720" y="3794760"/>
+            <a:ext cx="3063240" cy="1508760"/>
+          </a:xfrm>
+          <a:prstGeom prst="roundRect">
+            <a:avLst>
+              <a:gd name="adj" fmla="val 7273"/>
+            </a:avLst>
+          </a:prstGeom>
+          <a:solidFill>
+            <a:srgbClr val="EEF8ED"/>
+          </a:solidFill>
+          <a:ln w="12700">
+            <a:solidFill>
+              <a:srgbClr val="B9D7E6"/>
+            </a:solidFill>
+            <a:prstDash val="solid"/>
+          </a:ln>
+        </p:spPr>
+      </p:sp>
+      <p:sp>
+        <p:nvSpPr>
+          <p:cNvPr id="13" name="Text 11"/>
+          <p:cNvSpPr/>
+          <p:nvPr/>
+        </p:nvSpPr>
+        <p:spPr>
+          <a:xfrm>
+            <a:off x="8211312" y="3941064"/>
+            <a:ext cx="2734056" cy="201168"/>
+          </a:xfrm>
+          <a:prstGeom prst="rect">
+            <a:avLst/>
+          </a:prstGeom>
+          <a:noFill/>
+          <a:ln/>
+        </p:spPr>
+        <p:txBody>
+          <a:bodyPr wrap="square" lIns="0" tIns="0" rIns="0" bIns="0" rtlCol="0" anchor="ctr"/>
+          <a:lstStyle/>
+          <a:p>
+            <a:pPr indent="0" marL="0">
+              <a:buNone/>
+            </a:pPr>
+            <a:r>
+              <a:rPr lang="en-US" sz="950" b="1" dirty="0">
+                <a:solidFill>
+                  <a:srgbClr val="0068B7"/>
+                </a:solidFill>
+                <a:latin typeface="Aptos" pitchFamily="34" charset="0"/>
+                <a:ea typeface="Aptos" pitchFamily="34" charset="-122"/>
+                <a:cs typeface="Aptos" pitchFamily="34" charset="-120"/>
+              </a:rPr>
+              <a:t>Avoid duplication</a:t>
+            </a:r>
+            <a:endParaRPr lang="en-US" sz="950" dirty="0"/>
+          </a:p>
+        </p:txBody>
+      </p:sp>
+      <p:sp>
+        <p:nvSpPr>
+          <p:cNvPr id="14" name="Text 12"/>
+          <p:cNvSpPr/>
+          <p:nvPr/>
+        </p:nvSpPr>
+        <p:spPr>
+          <a:xfrm>
+            <a:off x="8211312" y="4233672"/>
+            <a:ext cx="2734056" cy="941832"/>
+          </a:xfrm>
+          <a:prstGeom prst="rect">
+            <a:avLst/>
+          </a:prstGeom>
+          <a:noFill/>
+          <a:ln/>
+        </p:spPr>
+        <p:txBody>
+          <a:bodyPr wrap="square" lIns="0" tIns="0" rIns="0" bIns="0" rtlCol="0" anchor="t">
+            <a:normAutofit/>
+          </a:bodyPr>
+          <a:lstStyle/>
+          <a:p>
+            <a:pPr indent="0" marL="0">
+              <a:buNone/>
+            </a:pPr>
+            <a:r>
+              <a:rPr lang="en-US" sz="1250" dirty="0">
+                <a:solidFill>
+                  <a:srgbClr val="17364A"/>
+                </a:solidFill>
+                <a:latin typeface="Aptos" pitchFamily="34" charset="0"/>
+                <a:ea typeface="Aptos" pitchFamily="34" charset="-122"/>
+                <a:cs typeface="Aptos" pitchFamily="34" charset="-120"/>
+              </a:rPr>
+              <a:t>If your department already has a strong equivalent tool, adapt or use the existing process instead of recreating it.</a:t>
+            </a:r>
+            <a:endParaRPr lang="en-US" sz="1250" dirty="0"/>
           </a:p>
         </p:txBody>
       </p:sp>
@@ -6711,7 +12107,32 @@
       </p:sp>
       <p:sp>
         <p:nvSpPr>
-          <p:cNvPr id="3" name="Text 1"/>
+          <p:cNvPr id="3" name="Shape 1"/>
+          <p:cNvSpPr/>
+          <p:nvPr/>
+        </p:nvSpPr>
+        <p:spPr>
+          <a:xfrm>
+            <a:off x="0" y="164592"/>
+            <a:ext cx="146304" cy="6693408"/>
+          </a:xfrm>
+          <a:prstGeom prst="rect">
+            <a:avLst/>
+          </a:prstGeom>
+          <a:solidFill>
+            <a:srgbClr val="2F8A28"/>
+          </a:solidFill>
+          <a:ln w="12700">
+            <a:solidFill>
+              <a:srgbClr val="2F8A28"/>
+            </a:solidFill>
+            <a:prstDash val="solid"/>
+          </a:ln>
+        </p:spPr>
+      </p:sp>
+      <p:sp>
+        <p:nvSpPr>
+          <p:cNvPr id="4" name="Text 2"/>
           <p:cNvSpPr/>
           <p:nvPr/>
         </p:nvSpPr>
@@ -6750,7 +12171,7 @@
       </p:sp>
       <p:sp>
         <p:nvSpPr>
-          <p:cNvPr id="4" name="Text 2"/>
+          <p:cNvPr id="5" name="Text 3"/>
           <p:cNvSpPr/>
           <p:nvPr/>
         </p:nvSpPr>
@@ -6789,7 +12210,7 @@
       </p:sp>
       <p:sp>
         <p:nvSpPr>
-          <p:cNvPr id="5" name="Text 3"/>
+          <p:cNvPr id="6" name="Text 4"/>
           <p:cNvSpPr/>
           <p:nvPr/>
         </p:nvSpPr>
@@ -6828,13 +12249,77 @@
       </p:sp>
       <p:sp>
         <p:nvSpPr>
-          <p:cNvPr id="6" name="Text 4"/>
+          <p:cNvPr id="7" name="Shape 5"/>
           <p:cNvSpPr/>
           <p:nvPr/>
         </p:nvSpPr>
         <p:spPr>
           <a:xfrm>
             <a:off x="640080" y="658368"/>
+            <a:ext cx="420624" cy="420624"/>
+          </a:xfrm>
+          <a:prstGeom prst="ellipse">
+            <a:avLst/>
+          </a:prstGeom>
+          <a:solidFill>
+            <a:srgbClr val="0068B7"/>
+          </a:solidFill>
+          <a:ln w="12700">
+            <a:solidFill>
+              <a:srgbClr val="0068B7"/>
+            </a:solidFill>
+            <a:prstDash val="solid"/>
+          </a:ln>
+        </p:spPr>
+      </p:sp>
+      <p:sp>
+        <p:nvSpPr>
+          <p:cNvPr id="8" name="Text 6"/>
+          <p:cNvSpPr/>
+          <p:nvPr/>
+        </p:nvSpPr>
+        <p:spPr>
+          <a:xfrm>
+            <a:off x="640080" y="731520"/>
+            <a:ext cx="420624" cy="164592"/>
+          </a:xfrm>
+          <a:prstGeom prst="rect">
+            <a:avLst/>
+          </a:prstGeom>
+          <a:noFill/>
+          <a:ln/>
+        </p:spPr>
+        <p:txBody>
+          <a:bodyPr wrap="square" lIns="0" tIns="0" rIns="0" bIns="0" rtlCol="0" anchor="ctr"/>
+          <a:lstStyle/>
+          <a:p>
+            <a:pPr algn="ctr" indent="0" marL="0">
+              <a:buNone/>
+            </a:pPr>
+            <a:r>
+              <a:rPr lang="en-US" sz="1100" b="1" dirty="0">
+                <a:solidFill>
+                  <a:srgbClr val="FFFFFF"/>
+                </a:solidFill>
+                <a:latin typeface="Aptos" pitchFamily="34" charset="0"/>
+                <a:ea typeface="Aptos" pitchFamily="34" charset="-122"/>
+                <a:cs typeface="Aptos" pitchFamily="34" charset="-120"/>
+              </a:rPr>
+              <a:t>1</a:t>
+            </a:r>
+            <a:endParaRPr lang="en-US" sz="1100" dirty="0"/>
+          </a:p>
+        </p:txBody>
+      </p:sp>
+      <p:sp>
+        <p:nvSpPr>
+          <p:cNvPr id="9" name="Text 7"/>
+          <p:cNvSpPr/>
+          <p:nvPr/>
+        </p:nvSpPr>
+        <p:spPr>
+          <a:xfrm>
+            <a:off x="640080" y="621792"/>
             <a:ext cx="10881360" cy="566928"/>
           </a:xfrm>
           <a:prstGeom prst="rect">
@@ -6861,7 +12346,7 @@
                 <a:ea typeface="Aptos Display" pitchFamily="34" charset="-122"/>
                 <a:cs typeface="Aptos Display" pitchFamily="34" charset="-120"/>
               </a:rPr>
-              <a:t>Module Overview</a:t>
+              <a:t>Learning Objectives</a:t>
             </a:r>
             <a:endParaRPr lang="en-US" sz="2700" dirty="0"/>
           </a:p>
@@ -6869,32 +12354,178 @@
       </p:sp>
       <p:sp>
         <p:nvSpPr>
-          <p:cNvPr id="7" name="Text 5"/>
-          <p:cNvSpPr/>
-          <p:nvPr/>
-        </p:nvSpPr>
-        <p:spPr>
-          <a:xfrm>
-            <a:off x="822960" y="1325880"/>
-            <a:ext cx="10378440" cy="4800600"/>
-          </a:xfrm>
-          <a:prstGeom prst="rect">
-            <a:avLst/>
-          </a:prstGeom>
-          <a:noFill/>
-          <a:ln/>
-        </p:spPr>
-        <p:txBody>
-          <a:bodyPr wrap="square" lIns="1016" tIns="1016" rIns="1016" bIns="1016" rtlCol="0" anchor="t">
+          <p:cNvPr id="10" name="Text 8"/>
+          <p:cNvSpPr/>
+          <p:nvPr/>
+        </p:nvSpPr>
+        <p:spPr>
+          <a:xfrm>
+            <a:off x="868680" y="1417320"/>
+            <a:ext cx="6675120" cy="4434840"/>
+          </a:xfrm>
+          <a:prstGeom prst="rect">
+            <a:avLst/>
+          </a:prstGeom>
+          <a:noFill/>
+          <a:ln/>
+        </p:spPr>
+        <p:txBody>
+          <a:bodyPr wrap="square" lIns="635" tIns="635" rIns="635" bIns="635" rtlCol="0" anchor="t">
             <a:normAutofit/>
           </a:bodyPr>
           <a:lstStyle/>
           <a:p>
+            <a:r>
+              <a:rPr lang="en-US" sz="1700" dirty="0">
+                <a:solidFill>
+                  <a:srgbClr val="17364A"/>
+                </a:solidFill>
+                <a:latin typeface="Aptos" pitchFamily="34" charset="0"/>
+                <a:ea typeface="Aptos" pitchFamily="34" charset="-122"/>
+                <a:cs typeface="Aptos" pitchFamily="34" charset="-120"/>
+              </a:rPr>
+              <a:t>Distinguish prediction from causal inference in public health AI.</a:t>
+            </a:r>
+            <a:endParaRPr lang="en-US" sz="1700" dirty="0"/>
+          </a:p>
+          <a:p>
+            <a:r>
+              <a:rPr lang="en-US" sz="1700" dirty="0">
+                <a:solidFill>
+                  <a:srgbClr val="17364A"/>
+                </a:solidFill>
+                <a:latin typeface="Aptos" pitchFamily="34" charset="0"/>
+                <a:ea typeface="Aptos" pitchFamily="34" charset="-122"/>
+                <a:cs typeface="Aptos" pitchFamily="34" charset="-120"/>
+              </a:rPr>
+              <a:t>Explain why correlation and prediction do not establish causation.</a:t>
+            </a:r>
+            <a:endParaRPr lang="en-US" sz="1700" dirty="0"/>
+          </a:p>
+          <a:p>
+            <a:r>
+              <a:rPr lang="en-US" sz="1700" dirty="0">
+                <a:solidFill>
+                  <a:srgbClr val="17364A"/>
+                </a:solidFill>
+                <a:latin typeface="Aptos" pitchFamily="34" charset="0"/>
+                <a:ea typeface="Aptos" pitchFamily="34" charset="-122"/>
+                <a:cs typeface="Aptos" pitchFamily="34" charset="-120"/>
+              </a:rPr>
+              <a:t>Identify confounding, selection bias, collider bias, and temporal ambiguity in public health data.</a:t>
+            </a:r>
+            <a:endParaRPr lang="en-US" sz="1700" dirty="0"/>
+          </a:p>
+          <a:p>
+            <a:r>
+              <a:rPr lang="en-US" sz="1700" dirty="0">
+                <a:solidFill>
+                  <a:srgbClr val="17364A"/>
+                </a:solidFill>
+                <a:latin typeface="Aptos" pitchFamily="34" charset="0"/>
+                <a:ea typeface="Aptos" pitchFamily="34" charset="-122"/>
+                <a:cs typeface="Aptos" pitchFamily="34" charset="-120"/>
+              </a:rPr>
+              <a:t>Recognize when a decision requires causal evidence rather than risk prediction alone.</a:t>
+            </a:r>
+            <a:endParaRPr lang="en-US" sz="1700" dirty="0"/>
+          </a:p>
+        </p:txBody>
+      </p:sp>
+      <p:sp>
+        <p:nvSpPr>
+          <p:cNvPr id="11" name="Shape 9"/>
+          <p:cNvSpPr/>
+          <p:nvPr/>
+        </p:nvSpPr>
+        <p:spPr>
+          <a:xfrm>
+            <a:off x="7909560" y="1417320"/>
+            <a:ext cx="3154680" cy="1828800"/>
+          </a:xfrm>
+          <a:prstGeom prst="roundRect">
+            <a:avLst>
+              <a:gd name="adj" fmla="val 6000"/>
+            </a:avLst>
+          </a:prstGeom>
+          <a:solidFill>
+            <a:srgbClr val="EEF8ED"/>
+          </a:solidFill>
+          <a:ln w="12700">
+            <a:solidFill>
+              <a:srgbClr val="B9D7E6"/>
+            </a:solidFill>
+            <a:prstDash val="solid"/>
+          </a:ln>
+        </p:spPr>
+      </p:sp>
+      <p:sp>
+        <p:nvSpPr>
+          <p:cNvPr id="12" name="Text 10"/>
+          <p:cNvSpPr/>
+          <p:nvPr/>
+        </p:nvSpPr>
+        <p:spPr>
+          <a:xfrm>
+            <a:off x="8074152" y="1563624"/>
+            <a:ext cx="2825496" cy="201168"/>
+          </a:xfrm>
+          <a:prstGeom prst="rect">
+            <a:avLst/>
+          </a:prstGeom>
+          <a:noFill/>
+          <a:ln/>
+        </p:spPr>
+        <p:txBody>
+          <a:bodyPr wrap="square" lIns="0" tIns="0" rIns="0" bIns="0" rtlCol="0" anchor="ctr"/>
+          <a:lstStyle/>
+          <a:p>
             <a:pPr indent="0" marL="0">
               <a:buNone/>
             </a:pPr>
             <a:r>
-              <a:rPr lang="en-US" sz="1420" dirty="0">
+              <a:rPr lang="en-US" sz="950" b="1" dirty="0">
+                <a:solidFill>
+                  <a:srgbClr val="0068B7"/>
+                </a:solidFill>
+                <a:latin typeface="Aptos" pitchFamily="34" charset="0"/>
+                <a:ea typeface="Aptos" pitchFamily="34" charset="-122"/>
+                <a:cs typeface="Aptos" pitchFamily="34" charset="-120"/>
+              </a:rPr>
+              <a:t>Key idea</a:t>
+            </a:r>
+            <a:endParaRPr lang="en-US" sz="950" dirty="0"/>
+          </a:p>
+        </p:txBody>
+      </p:sp>
+      <p:sp>
+        <p:nvSpPr>
+          <p:cNvPr id="13" name="Text 11"/>
+          <p:cNvSpPr/>
+          <p:nvPr/>
+        </p:nvSpPr>
+        <p:spPr>
+          <a:xfrm>
+            <a:off x="8074152" y="1856232"/>
+            <a:ext cx="2825496" cy="1261872"/>
+          </a:xfrm>
+          <a:prstGeom prst="rect">
+            <a:avLst/>
+          </a:prstGeom>
+          <a:noFill/>
+          <a:ln/>
+        </p:spPr>
+        <p:txBody>
+          <a:bodyPr wrap="square" lIns="0" tIns="0" rIns="0" bIns="0" rtlCol="0" anchor="t">
+            <a:normAutofit/>
+          </a:bodyPr>
+          <a:lstStyle/>
+          <a:p>
+            <a:pPr indent="0" marL="0">
+              <a:buNone/>
+            </a:pPr>
+            <a:r>
+              <a:rPr lang="en-US" sz="1250" dirty="0">
                 <a:solidFill>
                   <a:srgbClr val="17364A"/>
                 </a:solidFill>
@@ -6902,9 +12533,116 @@
                 <a:ea typeface="Aptos" pitchFamily="34" charset="-122"/>
                 <a:cs typeface="Aptos" pitchFamily="34" charset="-120"/>
               </a:rPr>
-              <a:t>AI models often predict what is likely to happen, but public health leaders frequently need to know what action will change an outcome. This module helps learners distinguish prediction from causal inference so AI outputs are not misused as evidence that a program, policy, or intervention caused an observed effect. Learners examine confounding, bias, comparison groups, counterfactual reasoning, directed acyclic graphs, and quasi-experimental designs at a practical level. The purpose is not to turn every learner into a causal methods expert. The purpose is to help public health teams recognize when causal claims require stronger evidence than a predictive model can provide.</a:t>
-            </a:r>
-            <a:endParaRPr lang="en-US" sz="1420" dirty="0"/>
+              <a:t>Distinguish prediction from causal inference in public health AI.</a:t>
+            </a:r>
+            <a:endParaRPr lang="en-US" sz="1250" dirty="0"/>
+          </a:p>
+        </p:txBody>
+      </p:sp>
+      <p:sp>
+        <p:nvSpPr>
+          <p:cNvPr id="14" name="Shape 12"/>
+          <p:cNvSpPr/>
+          <p:nvPr/>
+        </p:nvSpPr>
+        <p:spPr>
+          <a:xfrm>
+            <a:off x="7909560" y="3520440"/>
+            <a:ext cx="3154680" cy="1737360"/>
+          </a:xfrm>
+          <a:prstGeom prst="roundRect">
+            <a:avLst>
+              <a:gd name="adj" fmla="val 6316"/>
+            </a:avLst>
+          </a:prstGeom>
+          <a:solidFill>
+            <a:srgbClr val="EAF6F8"/>
+          </a:solidFill>
+          <a:ln w="12700">
+            <a:solidFill>
+              <a:srgbClr val="B9D7E6"/>
+            </a:solidFill>
+            <a:prstDash val="solid"/>
+          </a:ln>
+        </p:spPr>
+      </p:sp>
+      <p:sp>
+        <p:nvSpPr>
+          <p:cNvPr id="15" name="Text 13"/>
+          <p:cNvSpPr/>
+          <p:nvPr/>
+        </p:nvSpPr>
+        <p:spPr>
+          <a:xfrm>
+            <a:off x="8074152" y="3666744"/>
+            <a:ext cx="2825496" cy="201168"/>
+          </a:xfrm>
+          <a:prstGeom prst="rect">
+            <a:avLst/>
+          </a:prstGeom>
+          <a:noFill/>
+          <a:ln/>
+        </p:spPr>
+        <p:txBody>
+          <a:bodyPr wrap="square" lIns="0" tIns="0" rIns="0" bIns="0" rtlCol="0" anchor="ctr"/>
+          <a:lstStyle/>
+          <a:p>
+            <a:pPr indent="0" marL="0">
+              <a:buNone/>
+            </a:pPr>
+            <a:r>
+              <a:rPr lang="en-US" sz="950" b="1" dirty="0">
+                <a:solidFill>
+                  <a:srgbClr val="0068B7"/>
+                </a:solidFill>
+                <a:latin typeface="Aptos" pitchFamily="34" charset="0"/>
+                <a:ea typeface="Aptos" pitchFamily="34" charset="-122"/>
+                <a:cs typeface="Aptos" pitchFamily="34" charset="-120"/>
+              </a:rPr>
+              <a:t>Use this for</a:t>
+            </a:r>
+            <a:endParaRPr lang="en-US" sz="950" dirty="0"/>
+          </a:p>
+        </p:txBody>
+      </p:sp>
+      <p:sp>
+        <p:nvSpPr>
+          <p:cNvPr id="16" name="Text 14"/>
+          <p:cNvSpPr/>
+          <p:nvPr/>
+        </p:nvSpPr>
+        <p:spPr>
+          <a:xfrm>
+            <a:off x="8074152" y="3959352"/>
+            <a:ext cx="2825496" cy="1170432"/>
+          </a:xfrm>
+          <a:prstGeom prst="rect">
+            <a:avLst/>
+          </a:prstGeom>
+          <a:noFill/>
+          <a:ln/>
+        </p:spPr>
+        <p:txBody>
+          <a:bodyPr wrap="square" lIns="0" tIns="0" rIns="0" bIns="0" rtlCol="0" anchor="t">
+            <a:normAutofit/>
+          </a:bodyPr>
+          <a:lstStyle/>
+          <a:p>
+            <a:pPr indent="0" marL="0">
+              <a:buNone/>
+            </a:pPr>
+            <a:r>
+              <a:rPr lang="en-US" sz="1250" dirty="0">
+                <a:solidFill>
+                  <a:srgbClr val="17364A"/>
+                </a:solidFill>
+                <a:latin typeface="Aptos" pitchFamily="34" charset="0"/>
+                <a:ea typeface="Aptos" pitchFamily="34" charset="-122"/>
+                <a:cs typeface="Aptos" pitchFamily="34" charset="-120"/>
+              </a:rPr>
+              <a:t>Connect the concept to public health decisions, safeguards, documentation, or implementation work.</a:t>
+            </a:r>
+            <a:endParaRPr lang="en-US" sz="1250" dirty="0"/>
           </a:p>
         </p:txBody>
       </p:sp>
@@ -6967,7 +12705,32 @@
       </p:sp>
       <p:sp>
         <p:nvSpPr>
-          <p:cNvPr id="3" name="Text 1"/>
+          <p:cNvPr id="3" name="Shape 1"/>
+          <p:cNvSpPr/>
+          <p:nvPr/>
+        </p:nvSpPr>
+        <p:spPr>
+          <a:xfrm>
+            <a:off x="0" y="164592"/>
+            <a:ext cx="146304" cy="6693408"/>
+          </a:xfrm>
+          <a:prstGeom prst="rect">
+            <a:avLst/>
+          </a:prstGeom>
+          <a:solidFill>
+            <a:srgbClr val="2F8A28"/>
+          </a:solidFill>
+          <a:ln w="12700">
+            <a:solidFill>
+              <a:srgbClr val="2F8A28"/>
+            </a:solidFill>
+            <a:prstDash val="solid"/>
+          </a:ln>
+        </p:spPr>
+      </p:sp>
+      <p:sp>
+        <p:nvSpPr>
+          <p:cNvPr id="4" name="Text 2"/>
           <p:cNvSpPr/>
           <p:nvPr/>
         </p:nvSpPr>
@@ -7006,7 +12769,7 @@
       </p:sp>
       <p:sp>
         <p:nvSpPr>
-          <p:cNvPr id="4" name="Text 2"/>
+          <p:cNvPr id="5" name="Text 3"/>
           <p:cNvSpPr/>
           <p:nvPr/>
         </p:nvSpPr>
@@ -7045,7 +12808,7 @@
       </p:sp>
       <p:sp>
         <p:nvSpPr>
-          <p:cNvPr id="5" name="Text 3"/>
+          <p:cNvPr id="6" name="Text 4"/>
           <p:cNvSpPr/>
           <p:nvPr/>
         </p:nvSpPr>
@@ -7084,7 +12847,7 @@
       </p:sp>
       <p:sp>
         <p:nvSpPr>
-          <p:cNvPr id="6" name="Text 4"/>
+          <p:cNvPr id="7" name="Text 5"/>
           <p:cNvSpPr/>
           <p:nvPr/>
         </p:nvSpPr>
@@ -7117,7 +12880,7 @@
                 <a:ea typeface="Aptos Display" pitchFamily="34" charset="-122"/>
                 <a:cs typeface="Aptos Display" pitchFamily="34" charset="-120"/>
               </a:rPr>
-              <a:t>Definitions</a:t>
+              <a:t>Learning Objectives Continued</a:t>
             </a:r>
             <a:endParaRPr lang="en-US" sz="2700" dirty="0"/>
           </a:p>
@@ -7125,14 +12888,14 @@
       </p:sp>
       <p:sp>
         <p:nvSpPr>
-          <p:cNvPr id="7" name="Text 5"/>
-          <p:cNvSpPr/>
-          <p:nvPr/>
-        </p:nvSpPr>
-        <p:spPr>
-          <a:xfrm>
-            <a:off x="822960" y="1325880"/>
-            <a:ext cx="10378440" cy="4800600"/>
+          <p:cNvPr id="8" name="Text 6"/>
+          <p:cNvSpPr/>
+          <p:nvPr/>
+        </p:nvSpPr>
+        <p:spPr>
+          <a:xfrm>
+            <a:off x="868680" y="1417320"/>
+            <a:ext cx="6675120" cy="4434840"/>
           </a:xfrm>
           <a:prstGeom prst="rect">
             <a:avLst/>
@@ -7147,7 +12910,7 @@
           <a:lstStyle/>
           <a:p>
             <a:r>
-              <a:rPr lang="en-US" sz="1450" dirty="0">
+              <a:rPr lang="en-US" sz="1700" dirty="0">
                 <a:solidFill>
                   <a:srgbClr val="17364A"/>
                 </a:solidFill>
@@ -7155,13 +12918,106 @@
                 <a:ea typeface="Aptos" pitchFamily="34" charset="-122"/>
                 <a:cs typeface="Aptos" pitchFamily="34" charset="-120"/>
               </a:rPr>
-              <a:t>Prediction: An estimate of what is likely to happen based on observed patterns.</a:t>
-            </a:r>
-            <a:endParaRPr lang="en-US" sz="1450" dirty="0"/>
-          </a:p>
-          <a:p>
-            <a:r>
-              <a:rPr lang="en-US" sz="1450" dirty="0">
+              <a:t>Create a causal question framing worksheet for an AI-supported decision.</a:t>
+            </a:r>
+            <a:endParaRPr lang="en-US" sz="1700" dirty="0"/>
+          </a:p>
+        </p:txBody>
+      </p:sp>
+      <p:sp>
+        <p:nvSpPr>
+          <p:cNvPr id="9" name="Shape 7"/>
+          <p:cNvSpPr/>
+          <p:nvPr/>
+        </p:nvSpPr>
+        <p:spPr>
+          <a:xfrm>
+            <a:off x="7909560" y="1417320"/>
+            <a:ext cx="3154680" cy="1828800"/>
+          </a:xfrm>
+          <a:prstGeom prst="roundRect">
+            <a:avLst>
+              <a:gd name="adj" fmla="val 6000"/>
+            </a:avLst>
+          </a:prstGeom>
+          <a:solidFill>
+            <a:srgbClr val="EEF8ED"/>
+          </a:solidFill>
+          <a:ln w="12700">
+            <a:solidFill>
+              <a:srgbClr val="B9D7E6"/>
+            </a:solidFill>
+            <a:prstDash val="solid"/>
+          </a:ln>
+        </p:spPr>
+      </p:sp>
+      <p:sp>
+        <p:nvSpPr>
+          <p:cNvPr id="10" name="Text 8"/>
+          <p:cNvSpPr/>
+          <p:nvPr/>
+        </p:nvSpPr>
+        <p:spPr>
+          <a:xfrm>
+            <a:off x="8074152" y="1563624"/>
+            <a:ext cx="2825496" cy="201168"/>
+          </a:xfrm>
+          <a:prstGeom prst="rect">
+            <a:avLst/>
+          </a:prstGeom>
+          <a:noFill/>
+          <a:ln/>
+        </p:spPr>
+        <p:txBody>
+          <a:bodyPr wrap="square" lIns="0" tIns="0" rIns="0" bIns="0" rtlCol="0" anchor="ctr"/>
+          <a:lstStyle/>
+          <a:p>
+            <a:pPr indent="0" marL="0">
+              <a:buNone/>
+            </a:pPr>
+            <a:r>
+              <a:rPr lang="en-US" sz="950" b="1" dirty="0">
+                <a:solidFill>
+                  <a:srgbClr val="0068B7"/>
+                </a:solidFill>
+                <a:latin typeface="Aptos" pitchFamily="34" charset="0"/>
+                <a:ea typeface="Aptos" pitchFamily="34" charset="-122"/>
+                <a:cs typeface="Aptos" pitchFamily="34" charset="-120"/>
+              </a:rPr>
+              <a:t>Key idea</a:t>
+            </a:r>
+            <a:endParaRPr lang="en-US" sz="950" dirty="0"/>
+          </a:p>
+        </p:txBody>
+      </p:sp>
+      <p:sp>
+        <p:nvSpPr>
+          <p:cNvPr id="11" name="Text 9"/>
+          <p:cNvSpPr/>
+          <p:nvPr/>
+        </p:nvSpPr>
+        <p:spPr>
+          <a:xfrm>
+            <a:off x="8074152" y="1856232"/>
+            <a:ext cx="2825496" cy="1261872"/>
+          </a:xfrm>
+          <a:prstGeom prst="rect">
+            <a:avLst/>
+          </a:prstGeom>
+          <a:noFill/>
+          <a:ln/>
+        </p:spPr>
+        <p:txBody>
+          <a:bodyPr wrap="square" lIns="0" tIns="0" rIns="0" bIns="0" rtlCol="0" anchor="t">
+            <a:normAutofit/>
+          </a:bodyPr>
+          <a:lstStyle/>
+          <a:p>
+            <a:pPr indent="0" marL="0">
+              <a:buNone/>
+            </a:pPr>
+            <a:r>
+              <a:rPr lang="en-US" sz="1250" dirty="0">
                 <a:solidFill>
                   <a:srgbClr val="17364A"/>
                 </a:solidFill>
@@ -7169,13 +13025,106 @@
                 <a:ea typeface="Aptos" pitchFamily="34" charset="-122"/>
                 <a:cs typeface="Aptos" pitchFamily="34" charset="-120"/>
               </a:rPr>
-              <a:t>Causal inference: The process of estimating whether and how an exposure, policy, program, or intervention changes an outcome.</a:t>
-            </a:r>
-            <a:endParaRPr lang="en-US" sz="1450" dirty="0"/>
-          </a:p>
-          <a:p>
-            <a:r>
-              <a:rPr lang="en-US" sz="1450" dirty="0">
+              <a:t>Create a causal question framing worksheet for an AI-supported decision.</a:t>
+            </a:r>
+            <a:endParaRPr lang="en-US" sz="1250" dirty="0"/>
+          </a:p>
+        </p:txBody>
+      </p:sp>
+      <p:sp>
+        <p:nvSpPr>
+          <p:cNvPr id="12" name="Shape 10"/>
+          <p:cNvSpPr/>
+          <p:nvPr/>
+        </p:nvSpPr>
+        <p:spPr>
+          <a:xfrm>
+            <a:off x="7909560" y="3520440"/>
+            <a:ext cx="3154680" cy="1737360"/>
+          </a:xfrm>
+          <a:prstGeom prst="roundRect">
+            <a:avLst>
+              <a:gd name="adj" fmla="val 6316"/>
+            </a:avLst>
+          </a:prstGeom>
+          <a:solidFill>
+            <a:srgbClr val="EAF6F8"/>
+          </a:solidFill>
+          <a:ln w="12700">
+            <a:solidFill>
+              <a:srgbClr val="B9D7E6"/>
+            </a:solidFill>
+            <a:prstDash val="solid"/>
+          </a:ln>
+        </p:spPr>
+      </p:sp>
+      <p:sp>
+        <p:nvSpPr>
+          <p:cNvPr id="13" name="Text 11"/>
+          <p:cNvSpPr/>
+          <p:nvPr/>
+        </p:nvSpPr>
+        <p:spPr>
+          <a:xfrm>
+            <a:off x="8074152" y="3666744"/>
+            <a:ext cx="2825496" cy="201168"/>
+          </a:xfrm>
+          <a:prstGeom prst="rect">
+            <a:avLst/>
+          </a:prstGeom>
+          <a:noFill/>
+          <a:ln/>
+        </p:spPr>
+        <p:txBody>
+          <a:bodyPr wrap="square" lIns="0" tIns="0" rIns="0" bIns="0" rtlCol="0" anchor="ctr"/>
+          <a:lstStyle/>
+          <a:p>
+            <a:pPr indent="0" marL="0">
+              <a:buNone/>
+            </a:pPr>
+            <a:r>
+              <a:rPr lang="en-US" sz="950" b="1" dirty="0">
+                <a:solidFill>
+                  <a:srgbClr val="0068B7"/>
+                </a:solidFill>
+                <a:latin typeface="Aptos" pitchFamily="34" charset="0"/>
+                <a:ea typeface="Aptos" pitchFamily="34" charset="-122"/>
+                <a:cs typeface="Aptos" pitchFamily="34" charset="-120"/>
+              </a:rPr>
+              <a:t>Use this for</a:t>
+            </a:r>
+            <a:endParaRPr lang="en-US" sz="950" dirty="0"/>
+          </a:p>
+        </p:txBody>
+      </p:sp>
+      <p:sp>
+        <p:nvSpPr>
+          <p:cNvPr id="14" name="Text 12"/>
+          <p:cNvSpPr/>
+          <p:nvPr/>
+        </p:nvSpPr>
+        <p:spPr>
+          <a:xfrm>
+            <a:off x="8074152" y="3959352"/>
+            <a:ext cx="2825496" cy="1170432"/>
+          </a:xfrm>
+          <a:prstGeom prst="rect">
+            <a:avLst/>
+          </a:prstGeom>
+          <a:noFill/>
+          <a:ln/>
+        </p:spPr>
+        <p:txBody>
+          <a:bodyPr wrap="square" lIns="0" tIns="0" rIns="0" bIns="0" rtlCol="0" anchor="t">
+            <a:normAutofit/>
+          </a:bodyPr>
+          <a:lstStyle/>
+          <a:p>
+            <a:pPr indent="0" marL="0">
+              <a:buNone/>
+            </a:pPr>
+            <a:r>
+              <a:rPr lang="en-US" sz="1250" dirty="0">
                 <a:solidFill>
                   <a:srgbClr val="17364A"/>
                 </a:solidFill>
@@ -7183,37 +13132,9 @@
                 <a:ea typeface="Aptos" pitchFamily="34" charset="-122"/>
                 <a:cs typeface="Aptos" pitchFamily="34" charset="-120"/>
               </a:rPr>
-              <a:t>Confounding: A distortion that occurs when another factor is related to both the exposure and the outcome.</a:t>
-            </a:r>
-            <a:endParaRPr lang="en-US" sz="1450" dirty="0"/>
-          </a:p>
-          <a:p>
-            <a:r>
-              <a:rPr lang="en-US" sz="1450" dirty="0">
-                <a:solidFill>
-                  <a:srgbClr val="17364A"/>
-                </a:solidFill>
-                <a:latin typeface="Aptos" pitchFamily="34" charset="0"/>
-                <a:ea typeface="Aptos" pitchFamily="34" charset="-122"/>
-                <a:cs typeface="Aptos" pitchFamily="34" charset="-120"/>
-              </a:rPr>
-              <a:t>Counterfactual: The outcome that would have occurred under a different condition or intervention.</a:t>
-            </a:r>
-            <a:endParaRPr lang="en-US" sz="1450" dirty="0"/>
-          </a:p>
-          <a:p>
-            <a:r>
-              <a:rPr lang="en-US" sz="1450" dirty="0">
-                <a:solidFill>
-                  <a:srgbClr val="17364A"/>
-                </a:solidFill>
-                <a:latin typeface="Aptos" pitchFamily="34" charset="0"/>
-                <a:ea typeface="Aptos" pitchFamily="34" charset="-122"/>
-                <a:cs typeface="Aptos" pitchFamily="34" charset="-120"/>
-              </a:rPr>
-              <a:t>Quasi-experimental design: An evaluation approach that estimates causal effects without random assignment.</a:t>
-            </a:r>
-            <a:endParaRPr lang="en-US" sz="1450" dirty="0"/>
+              <a:t>Connect the concept to public health decisions, safeguards, documentation, or implementation work.</a:t>
+            </a:r>
+            <a:endParaRPr lang="en-US" sz="1250" dirty="0"/>
           </a:p>
         </p:txBody>
       </p:sp>
@@ -7276,7 +13197,32 @@
       </p:sp>
       <p:sp>
         <p:nvSpPr>
-          <p:cNvPr id="3" name="Text 1"/>
+          <p:cNvPr id="3" name="Shape 1"/>
+          <p:cNvSpPr/>
+          <p:nvPr/>
+        </p:nvSpPr>
+        <p:spPr>
+          <a:xfrm>
+            <a:off x="0" y="164592"/>
+            <a:ext cx="146304" cy="6693408"/>
+          </a:xfrm>
+          <a:prstGeom prst="rect">
+            <a:avLst/>
+          </a:prstGeom>
+          <a:solidFill>
+            <a:srgbClr val="2F8A28"/>
+          </a:solidFill>
+          <a:ln w="12700">
+            <a:solidFill>
+              <a:srgbClr val="2F8A28"/>
+            </a:solidFill>
+            <a:prstDash val="solid"/>
+          </a:ln>
+        </p:spPr>
+      </p:sp>
+      <p:sp>
+        <p:nvSpPr>
+          <p:cNvPr id="4" name="Text 2"/>
           <p:cNvSpPr/>
           <p:nvPr/>
         </p:nvSpPr>
@@ -7315,7 +13261,7 @@
       </p:sp>
       <p:sp>
         <p:nvSpPr>
-          <p:cNvPr id="4" name="Text 2"/>
+          <p:cNvPr id="5" name="Text 3"/>
           <p:cNvSpPr/>
           <p:nvPr/>
         </p:nvSpPr>
@@ -7354,7 +13300,7 @@
       </p:sp>
       <p:sp>
         <p:nvSpPr>
-          <p:cNvPr id="5" name="Text 3"/>
+          <p:cNvPr id="6" name="Text 4"/>
           <p:cNvSpPr/>
           <p:nvPr/>
         </p:nvSpPr>
@@ -7393,13 +13339,77 @@
       </p:sp>
       <p:sp>
         <p:nvSpPr>
-          <p:cNvPr id="6" name="Text 4"/>
+          <p:cNvPr id="7" name="Shape 5"/>
           <p:cNvSpPr/>
           <p:nvPr/>
         </p:nvSpPr>
         <p:spPr>
           <a:xfrm>
             <a:off x="640080" y="658368"/>
+            <a:ext cx="420624" cy="420624"/>
+          </a:xfrm>
+          <a:prstGeom prst="ellipse">
+            <a:avLst/>
+          </a:prstGeom>
+          <a:solidFill>
+            <a:srgbClr val="0068B7"/>
+          </a:solidFill>
+          <a:ln w="12700">
+            <a:solidFill>
+              <a:srgbClr val="0068B7"/>
+            </a:solidFill>
+            <a:prstDash val="solid"/>
+          </a:ln>
+        </p:spPr>
+      </p:sp>
+      <p:sp>
+        <p:nvSpPr>
+          <p:cNvPr id="8" name="Text 6"/>
+          <p:cNvSpPr/>
+          <p:nvPr/>
+        </p:nvSpPr>
+        <p:spPr>
+          <a:xfrm>
+            <a:off x="640080" y="731520"/>
+            <a:ext cx="420624" cy="164592"/>
+          </a:xfrm>
+          <a:prstGeom prst="rect">
+            <a:avLst/>
+          </a:prstGeom>
+          <a:noFill/>
+          <a:ln/>
+        </p:spPr>
+        <p:txBody>
+          <a:bodyPr wrap="square" lIns="0" tIns="0" rIns="0" bIns="0" rtlCol="0" anchor="ctr"/>
+          <a:lstStyle/>
+          <a:p>
+            <a:pPr algn="ctr" indent="0" marL="0">
+              <a:buNone/>
+            </a:pPr>
+            <a:r>
+              <a:rPr lang="en-US" sz="1100" b="1" dirty="0">
+                <a:solidFill>
+                  <a:srgbClr val="FFFFFF"/>
+                </a:solidFill>
+                <a:latin typeface="Aptos" pitchFamily="34" charset="0"/>
+                <a:ea typeface="Aptos" pitchFamily="34" charset="-122"/>
+                <a:cs typeface="Aptos" pitchFamily="34" charset="-120"/>
+              </a:rPr>
+              <a:t>2</a:t>
+            </a:r>
+            <a:endParaRPr lang="en-US" sz="1100" dirty="0"/>
+          </a:p>
+        </p:txBody>
+      </p:sp>
+      <p:sp>
+        <p:nvSpPr>
+          <p:cNvPr id="9" name="Text 7"/>
+          <p:cNvSpPr/>
+          <p:nvPr/>
+        </p:nvSpPr>
+        <p:spPr>
+          <a:xfrm>
+            <a:off x="640080" y="621792"/>
             <a:ext cx="10881360" cy="566928"/>
           </a:xfrm>
           <a:prstGeom prst="rect">
@@ -7426,7 +13436,7 @@
                 <a:ea typeface="Aptos Display" pitchFamily="34" charset="-122"/>
                 <a:cs typeface="Aptos Display" pitchFamily="34" charset="-120"/>
               </a:rPr>
-              <a:t>Why This Topic Matters for Public Health AI</a:t>
+              <a:t>Module Overview</a:t>
             </a:r>
             <a:endParaRPr lang="en-US" sz="2700" dirty="0"/>
           </a:p>
@@ -7434,32 +13444,178 @@
       </p:sp>
       <p:sp>
         <p:nvSpPr>
-          <p:cNvPr id="7" name="Text 5"/>
-          <p:cNvSpPr/>
-          <p:nvPr/>
-        </p:nvSpPr>
-        <p:spPr>
-          <a:xfrm>
-            <a:off x="822960" y="1325880"/>
-            <a:ext cx="10378440" cy="4800600"/>
-          </a:xfrm>
-          <a:prstGeom prst="rect">
-            <a:avLst/>
-          </a:prstGeom>
-          <a:noFill/>
-          <a:ln/>
-        </p:spPr>
-        <p:txBody>
-          <a:bodyPr wrap="square" lIns="1016" tIns="1016" rIns="1016" bIns="1016" rtlCol="0" anchor="t">
+          <p:cNvPr id="10" name="Text 8"/>
+          <p:cNvSpPr/>
+          <p:nvPr/>
+        </p:nvSpPr>
+        <p:spPr>
+          <a:xfrm>
+            <a:off x="868680" y="1417320"/>
+            <a:ext cx="6675120" cy="4434840"/>
+          </a:xfrm>
+          <a:prstGeom prst="rect">
+            <a:avLst/>
+          </a:prstGeom>
+          <a:noFill/>
+          <a:ln/>
+        </p:spPr>
+        <p:txBody>
+          <a:bodyPr wrap="square" lIns="635" tIns="635" rIns="635" bIns="635" rtlCol="0" anchor="t">
             <a:normAutofit/>
           </a:bodyPr>
           <a:lstStyle/>
           <a:p>
+            <a:r>
+              <a:rPr lang="en-US" sz="1700" dirty="0">
+                <a:solidFill>
+                  <a:srgbClr val="17364A"/>
+                </a:solidFill>
+                <a:latin typeface="Aptos" pitchFamily="34" charset="0"/>
+                <a:ea typeface="Aptos" pitchFamily="34" charset="-122"/>
+                <a:cs typeface="Aptos" pitchFamily="34" charset="-120"/>
+              </a:rPr>
+              <a:t>AI models often predict what is likely to happen, but public health leaders frequently need to know what action will change.</a:t>
+            </a:r>
+            <a:endParaRPr lang="en-US" sz="1700" dirty="0"/>
+          </a:p>
+          <a:p>
+            <a:r>
+              <a:rPr lang="en-US" sz="1700" dirty="0">
+                <a:solidFill>
+                  <a:srgbClr val="17364A"/>
+                </a:solidFill>
+                <a:latin typeface="Aptos" pitchFamily="34" charset="0"/>
+                <a:ea typeface="Aptos" pitchFamily="34" charset="-122"/>
+                <a:cs typeface="Aptos" pitchFamily="34" charset="-120"/>
+              </a:rPr>
+              <a:t>This module helps learners distinguish prediction from causal inference so AI outputs are not misused as evidence that a.</a:t>
+            </a:r>
+            <a:endParaRPr lang="en-US" sz="1700" dirty="0"/>
+          </a:p>
+          <a:p>
+            <a:r>
+              <a:rPr lang="en-US" sz="1700" dirty="0">
+                <a:solidFill>
+                  <a:srgbClr val="17364A"/>
+                </a:solidFill>
+                <a:latin typeface="Aptos" pitchFamily="34" charset="0"/>
+                <a:ea typeface="Aptos" pitchFamily="34" charset="-122"/>
+                <a:cs typeface="Aptos" pitchFamily="34" charset="-120"/>
+              </a:rPr>
+              <a:t>Learners examine confounding, bias, comparison groups, counterfactual reasoning, directed acyclic graphs, and.</a:t>
+            </a:r>
+            <a:endParaRPr lang="en-US" sz="1700" dirty="0"/>
+          </a:p>
+          <a:p>
+            <a:r>
+              <a:rPr lang="en-US" sz="1700" dirty="0">
+                <a:solidFill>
+                  <a:srgbClr val="17364A"/>
+                </a:solidFill>
+                <a:latin typeface="Aptos" pitchFamily="34" charset="0"/>
+                <a:ea typeface="Aptos" pitchFamily="34" charset="-122"/>
+                <a:cs typeface="Aptos" pitchFamily="34" charset="-120"/>
+              </a:rPr>
+              <a:t>The purpose is not to turn every learner into a causal methods expert.</a:t>
+            </a:r>
+            <a:endParaRPr lang="en-US" sz="1700" dirty="0"/>
+          </a:p>
+        </p:txBody>
+      </p:sp>
+      <p:sp>
+        <p:nvSpPr>
+          <p:cNvPr id="11" name="Shape 9"/>
+          <p:cNvSpPr/>
+          <p:nvPr/>
+        </p:nvSpPr>
+        <p:spPr>
+          <a:xfrm>
+            <a:off x="7909560" y="1417320"/>
+            <a:ext cx="3154680" cy="1828800"/>
+          </a:xfrm>
+          <a:prstGeom prst="roundRect">
+            <a:avLst>
+              <a:gd name="adj" fmla="val 6000"/>
+            </a:avLst>
+          </a:prstGeom>
+          <a:solidFill>
+            <a:srgbClr val="EEF8ED"/>
+          </a:solidFill>
+          <a:ln w="12700">
+            <a:solidFill>
+              <a:srgbClr val="B9D7E6"/>
+            </a:solidFill>
+            <a:prstDash val="solid"/>
+          </a:ln>
+        </p:spPr>
+      </p:sp>
+      <p:sp>
+        <p:nvSpPr>
+          <p:cNvPr id="12" name="Text 10"/>
+          <p:cNvSpPr/>
+          <p:nvPr/>
+        </p:nvSpPr>
+        <p:spPr>
+          <a:xfrm>
+            <a:off x="8074152" y="1563624"/>
+            <a:ext cx="2825496" cy="201168"/>
+          </a:xfrm>
+          <a:prstGeom prst="rect">
+            <a:avLst/>
+          </a:prstGeom>
+          <a:noFill/>
+          <a:ln/>
+        </p:spPr>
+        <p:txBody>
+          <a:bodyPr wrap="square" lIns="0" tIns="0" rIns="0" bIns="0" rtlCol="0" anchor="ctr"/>
+          <a:lstStyle/>
+          <a:p>
             <a:pPr indent="0" marL="0">
               <a:buNone/>
             </a:pPr>
             <a:r>
-              <a:rPr lang="en-US" sz="1420" dirty="0">
+              <a:rPr lang="en-US" sz="950" b="1" dirty="0">
+                <a:solidFill>
+                  <a:srgbClr val="0068B7"/>
+                </a:solidFill>
+                <a:latin typeface="Aptos" pitchFamily="34" charset="0"/>
+                <a:ea typeface="Aptos" pitchFamily="34" charset="-122"/>
+                <a:cs typeface="Aptos" pitchFamily="34" charset="-120"/>
+              </a:rPr>
+              <a:t>Key idea</a:t>
+            </a:r>
+            <a:endParaRPr lang="en-US" sz="950" dirty="0"/>
+          </a:p>
+        </p:txBody>
+      </p:sp>
+      <p:sp>
+        <p:nvSpPr>
+          <p:cNvPr id="13" name="Text 11"/>
+          <p:cNvSpPr/>
+          <p:nvPr/>
+        </p:nvSpPr>
+        <p:spPr>
+          <a:xfrm>
+            <a:off x="8074152" y="1856232"/>
+            <a:ext cx="2825496" cy="1261872"/>
+          </a:xfrm>
+          <a:prstGeom prst="rect">
+            <a:avLst/>
+          </a:prstGeom>
+          <a:noFill/>
+          <a:ln/>
+        </p:spPr>
+        <p:txBody>
+          <a:bodyPr wrap="square" lIns="0" tIns="0" rIns="0" bIns="0" rtlCol="0" anchor="t">
+            <a:normAutofit/>
+          </a:bodyPr>
+          <a:lstStyle/>
+          <a:p>
+            <a:pPr indent="0" marL="0">
+              <a:buNone/>
+            </a:pPr>
+            <a:r>
+              <a:rPr lang="en-US" sz="1250" dirty="0">
                 <a:solidFill>
                   <a:srgbClr val="17364A"/>
                 </a:solidFill>
@@ -7467,9 +13623,116 @@
                 <a:ea typeface="Aptos" pitchFamily="34" charset="-122"/>
                 <a:cs typeface="Aptos" pitchFamily="34" charset="-120"/>
               </a:rPr>
-              <a:t>AI can make weak evidence appear stronger than it is. A model may predict which communities have higher hospitalization risk, but that does not prove which intervention will reduce hospitalization. A model may find that people who receive a service have better outcomes, but that pattern may reflect who was able to access the service rather than the effect of the service itself. Public health decisions often involve resource allocation, program design, policy evaluation, and equity tradeoffs. These decisions require clarity about whether the agency is asking a prediction question, an explanation question, or an intervention question. Causal inference helps agencies avoid treating AI-generated associations as proof of program effectiveness.</a:t>
-            </a:r>
-            <a:endParaRPr lang="en-US" sz="1420" dirty="0"/>
+              <a:t>AI models often predict what is likely to happen, but public health leaders frequently need to know what action will change.</a:t>
+            </a:r>
+            <a:endParaRPr lang="en-US" sz="1250" dirty="0"/>
+          </a:p>
+        </p:txBody>
+      </p:sp>
+      <p:sp>
+        <p:nvSpPr>
+          <p:cNvPr id="14" name="Shape 12"/>
+          <p:cNvSpPr/>
+          <p:nvPr/>
+        </p:nvSpPr>
+        <p:spPr>
+          <a:xfrm>
+            <a:off x="7909560" y="3520440"/>
+            <a:ext cx="3154680" cy="1737360"/>
+          </a:xfrm>
+          <a:prstGeom prst="roundRect">
+            <a:avLst>
+              <a:gd name="adj" fmla="val 6316"/>
+            </a:avLst>
+          </a:prstGeom>
+          <a:solidFill>
+            <a:srgbClr val="EAF6F8"/>
+          </a:solidFill>
+          <a:ln w="12700">
+            <a:solidFill>
+              <a:srgbClr val="B9D7E6"/>
+            </a:solidFill>
+            <a:prstDash val="solid"/>
+          </a:ln>
+        </p:spPr>
+      </p:sp>
+      <p:sp>
+        <p:nvSpPr>
+          <p:cNvPr id="15" name="Text 13"/>
+          <p:cNvSpPr/>
+          <p:nvPr/>
+        </p:nvSpPr>
+        <p:spPr>
+          <a:xfrm>
+            <a:off x="8074152" y="3666744"/>
+            <a:ext cx="2825496" cy="201168"/>
+          </a:xfrm>
+          <a:prstGeom prst="rect">
+            <a:avLst/>
+          </a:prstGeom>
+          <a:noFill/>
+          <a:ln/>
+        </p:spPr>
+        <p:txBody>
+          <a:bodyPr wrap="square" lIns="0" tIns="0" rIns="0" bIns="0" rtlCol="0" anchor="ctr"/>
+          <a:lstStyle/>
+          <a:p>
+            <a:pPr indent="0" marL="0">
+              <a:buNone/>
+            </a:pPr>
+            <a:r>
+              <a:rPr lang="en-US" sz="950" b="1" dirty="0">
+                <a:solidFill>
+                  <a:srgbClr val="0068B7"/>
+                </a:solidFill>
+                <a:latin typeface="Aptos" pitchFamily="34" charset="0"/>
+                <a:ea typeface="Aptos" pitchFamily="34" charset="-122"/>
+                <a:cs typeface="Aptos" pitchFamily="34" charset="-120"/>
+              </a:rPr>
+              <a:t>Use this for</a:t>
+            </a:r>
+            <a:endParaRPr lang="en-US" sz="950" dirty="0"/>
+          </a:p>
+        </p:txBody>
+      </p:sp>
+      <p:sp>
+        <p:nvSpPr>
+          <p:cNvPr id="16" name="Text 14"/>
+          <p:cNvSpPr/>
+          <p:nvPr/>
+        </p:nvSpPr>
+        <p:spPr>
+          <a:xfrm>
+            <a:off x="8074152" y="3959352"/>
+            <a:ext cx="2825496" cy="1170432"/>
+          </a:xfrm>
+          <a:prstGeom prst="rect">
+            <a:avLst/>
+          </a:prstGeom>
+          <a:noFill/>
+          <a:ln/>
+        </p:spPr>
+        <p:txBody>
+          <a:bodyPr wrap="square" lIns="0" tIns="0" rIns="0" bIns="0" rtlCol="0" anchor="t">
+            <a:normAutofit/>
+          </a:bodyPr>
+          <a:lstStyle/>
+          <a:p>
+            <a:pPr indent="0" marL="0">
+              <a:buNone/>
+            </a:pPr>
+            <a:r>
+              <a:rPr lang="en-US" sz="1250" dirty="0">
+                <a:solidFill>
+                  <a:srgbClr val="17364A"/>
+                </a:solidFill>
+                <a:latin typeface="Aptos" pitchFamily="34" charset="0"/>
+                <a:ea typeface="Aptos" pitchFamily="34" charset="-122"/>
+                <a:cs typeface="Aptos" pitchFamily="34" charset="-120"/>
+              </a:rPr>
+              <a:t>Connect the concept to public health decisions, safeguards, documentation, or implementation work.</a:t>
+            </a:r>
+            <a:endParaRPr lang="en-US" sz="1250" dirty="0"/>
           </a:p>
         </p:txBody>
       </p:sp>
@@ -7532,7 +13795,32 @@
       </p:sp>
       <p:sp>
         <p:nvSpPr>
-          <p:cNvPr id="3" name="Text 1"/>
+          <p:cNvPr id="3" name="Shape 1"/>
+          <p:cNvSpPr/>
+          <p:nvPr/>
+        </p:nvSpPr>
+        <p:spPr>
+          <a:xfrm>
+            <a:off x="0" y="164592"/>
+            <a:ext cx="146304" cy="6693408"/>
+          </a:xfrm>
+          <a:prstGeom prst="rect">
+            <a:avLst/>
+          </a:prstGeom>
+          <a:solidFill>
+            <a:srgbClr val="2F8A28"/>
+          </a:solidFill>
+          <a:ln w="12700">
+            <a:solidFill>
+              <a:srgbClr val="2F8A28"/>
+            </a:solidFill>
+            <a:prstDash val="solid"/>
+          </a:ln>
+        </p:spPr>
+      </p:sp>
+      <p:sp>
+        <p:nvSpPr>
+          <p:cNvPr id="4" name="Text 2"/>
           <p:cNvSpPr/>
           <p:nvPr/>
         </p:nvSpPr>
@@ -7571,7 +13859,7 @@
       </p:sp>
       <p:sp>
         <p:nvSpPr>
-          <p:cNvPr id="4" name="Text 2"/>
+          <p:cNvPr id="5" name="Text 3"/>
           <p:cNvSpPr/>
           <p:nvPr/>
         </p:nvSpPr>
@@ -7610,7 +13898,7 @@
       </p:sp>
       <p:sp>
         <p:nvSpPr>
-          <p:cNvPr id="5" name="Text 3"/>
+          <p:cNvPr id="6" name="Text 4"/>
           <p:cNvSpPr/>
           <p:nvPr/>
         </p:nvSpPr>
@@ -7649,13 +13937,77 @@
       </p:sp>
       <p:sp>
         <p:nvSpPr>
-          <p:cNvPr id="6" name="Text 4"/>
+          <p:cNvPr id="7" name="Shape 5"/>
           <p:cNvSpPr/>
           <p:nvPr/>
         </p:nvSpPr>
         <p:spPr>
           <a:xfrm>
             <a:off x="640080" y="658368"/>
+            <a:ext cx="420624" cy="420624"/>
+          </a:xfrm>
+          <a:prstGeom prst="ellipse">
+            <a:avLst/>
+          </a:prstGeom>
+          <a:solidFill>
+            <a:srgbClr val="0068B7"/>
+          </a:solidFill>
+          <a:ln w="12700">
+            <a:solidFill>
+              <a:srgbClr val="0068B7"/>
+            </a:solidFill>
+            <a:prstDash val="solid"/>
+          </a:ln>
+        </p:spPr>
+      </p:sp>
+      <p:sp>
+        <p:nvSpPr>
+          <p:cNvPr id="8" name="Text 6"/>
+          <p:cNvSpPr/>
+          <p:nvPr/>
+        </p:nvSpPr>
+        <p:spPr>
+          <a:xfrm>
+            <a:off x="640080" y="731520"/>
+            <a:ext cx="420624" cy="164592"/>
+          </a:xfrm>
+          <a:prstGeom prst="rect">
+            <a:avLst/>
+          </a:prstGeom>
+          <a:noFill/>
+          <a:ln/>
+        </p:spPr>
+        <p:txBody>
+          <a:bodyPr wrap="square" lIns="0" tIns="0" rIns="0" bIns="0" rtlCol="0" anchor="ctr"/>
+          <a:lstStyle/>
+          <a:p>
+            <a:pPr algn="ctr" indent="0" marL="0">
+              <a:buNone/>
+            </a:pPr>
+            <a:r>
+              <a:rPr lang="en-US" sz="1100" b="1" dirty="0">
+                <a:solidFill>
+                  <a:srgbClr val="FFFFFF"/>
+                </a:solidFill>
+                <a:latin typeface="Aptos" pitchFamily="34" charset="0"/>
+                <a:ea typeface="Aptos" pitchFamily="34" charset="-122"/>
+                <a:cs typeface="Aptos" pitchFamily="34" charset="-120"/>
+              </a:rPr>
+              <a:t>3</a:t>
+            </a:r>
+            <a:endParaRPr lang="en-US" sz="1100" dirty="0"/>
+          </a:p>
+        </p:txBody>
+      </p:sp>
+      <p:sp>
+        <p:nvSpPr>
+          <p:cNvPr id="9" name="Text 7"/>
+          <p:cNvSpPr/>
+          <p:nvPr/>
+        </p:nvSpPr>
+        <p:spPr>
+          <a:xfrm>
+            <a:off x="640080" y="621792"/>
             <a:ext cx="10881360" cy="566928"/>
           </a:xfrm>
           <a:prstGeom prst="rect">
@@ -7682,7 +14034,7 @@
                 <a:ea typeface="Aptos Display" pitchFamily="34" charset="-122"/>
                 <a:cs typeface="Aptos Display" pitchFamily="34" charset="-120"/>
               </a:rPr>
-              <a:t>Public Health Example</a:t>
+              <a:t>Definitions</a:t>
             </a:r>
             <a:endParaRPr lang="en-US" sz="2700" dirty="0"/>
           </a:p>
@@ -7690,32 +14042,178 @@
       </p:sp>
       <p:sp>
         <p:nvSpPr>
-          <p:cNvPr id="7" name="Text 5"/>
-          <p:cNvSpPr/>
-          <p:nvPr/>
-        </p:nvSpPr>
-        <p:spPr>
-          <a:xfrm>
-            <a:off x="822960" y="1325880"/>
-            <a:ext cx="10378440" cy="4800600"/>
-          </a:xfrm>
-          <a:prstGeom prst="rect">
-            <a:avLst/>
-          </a:prstGeom>
-          <a:noFill/>
-          <a:ln/>
-        </p:spPr>
-        <p:txBody>
-          <a:bodyPr wrap="square" lIns="1016" tIns="1016" rIns="1016" bIns="1016" rtlCol="0" anchor="t">
+          <p:cNvPr id="10" name="Text 8"/>
+          <p:cNvSpPr/>
+          <p:nvPr/>
+        </p:nvSpPr>
+        <p:spPr>
+          <a:xfrm>
+            <a:off x="868680" y="1417320"/>
+            <a:ext cx="6675120" cy="4434840"/>
+          </a:xfrm>
+          <a:prstGeom prst="rect">
+            <a:avLst/>
+          </a:prstGeom>
+          <a:noFill/>
+          <a:ln/>
+        </p:spPr>
+        <p:txBody>
+          <a:bodyPr wrap="square" lIns="635" tIns="635" rIns="635" bIns="635" rtlCol="0" anchor="t">
             <a:normAutofit/>
           </a:bodyPr>
           <a:lstStyle/>
           <a:p>
+            <a:r>
+              <a:rPr lang="en-US" sz="1700" dirty="0">
+                <a:solidFill>
+                  <a:srgbClr val="17364A"/>
+                </a:solidFill>
+                <a:latin typeface="Aptos" pitchFamily="34" charset="0"/>
+                <a:ea typeface="Aptos" pitchFamily="34" charset="-122"/>
+                <a:cs typeface="Aptos" pitchFamily="34" charset="-120"/>
+              </a:rPr>
+              <a:t>Prediction: An estimate of what is likely to happen based on observed patterns.</a:t>
+            </a:r>
+            <a:endParaRPr lang="en-US" sz="1700" dirty="0"/>
+          </a:p>
+          <a:p>
+            <a:r>
+              <a:rPr lang="en-US" sz="1700" dirty="0">
+                <a:solidFill>
+                  <a:srgbClr val="17364A"/>
+                </a:solidFill>
+                <a:latin typeface="Aptos" pitchFamily="34" charset="0"/>
+                <a:ea typeface="Aptos" pitchFamily="34" charset="-122"/>
+                <a:cs typeface="Aptos" pitchFamily="34" charset="-120"/>
+              </a:rPr>
+              <a:t>Causal inference: The process of estimating whether and how an exposure, policy, program, or intervention changes an outcome.</a:t>
+            </a:r>
+            <a:endParaRPr lang="en-US" sz="1700" dirty="0"/>
+          </a:p>
+          <a:p>
+            <a:r>
+              <a:rPr lang="en-US" sz="1700" dirty="0">
+                <a:solidFill>
+                  <a:srgbClr val="17364A"/>
+                </a:solidFill>
+                <a:latin typeface="Aptos" pitchFamily="34" charset="0"/>
+                <a:ea typeface="Aptos" pitchFamily="34" charset="-122"/>
+                <a:cs typeface="Aptos" pitchFamily="34" charset="-120"/>
+              </a:rPr>
+              <a:t>Confounding: A distortion that occurs when another factor is related to both the exposure and the outcome.</a:t>
+            </a:r>
+            <a:endParaRPr lang="en-US" sz="1700" dirty="0"/>
+          </a:p>
+          <a:p>
+            <a:r>
+              <a:rPr lang="en-US" sz="1700" dirty="0">
+                <a:solidFill>
+                  <a:srgbClr val="17364A"/>
+                </a:solidFill>
+                <a:latin typeface="Aptos" pitchFamily="34" charset="0"/>
+                <a:ea typeface="Aptos" pitchFamily="34" charset="-122"/>
+                <a:cs typeface="Aptos" pitchFamily="34" charset="-120"/>
+              </a:rPr>
+              <a:t>Counterfactual: The outcome that would have occurred under a different condition or intervention.</a:t>
+            </a:r>
+            <a:endParaRPr lang="en-US" sz="1700" dirty="0"/>
+          </a:p>
+        </p:txBody>
+      </p:sp>
+      <p:sp>
+        <p:nvSpPr>
+          <p:cNvPr id="11" name="Shape 9"/>
+          <p:cNvSpPr/>
+          <p:nvPr/>
+        </p:nvSpPr>
+        <p:spPr>
+          <a:xfrm>
+            <a:off x="7909560" y="1417320"/>
+            <a:ext cx="3154680" cy="1828800"/>
+          </a:xfrm>
+          <a:prstGeom prst="roundRect">
+            <a:avLst>
+              <a:gd name="adj" fmla="val 6000"/>
+            </a:avLst>
+          </a:prstGeom>
+          <a:solidFill>
+            <a:srgbClr val="EEF8ED"/>
+          </a:solidFill>
+          <a:ln w="12700">
+            <a:solidFill>
+              <a:srgbClr val="B9D7E6"/>
+            </a:solidFill>
+            <a:prstDash val="solid"/>
+          </a:ln>
+        </p:spPr>
+      </p:sp>
+      <p:sp>
+        <p:nvSpPr>
+          <p:cNvPr id="12" name="Text 10"/>
+          <p:cNvSpPr/>
+          <p:nvPr/>
+        </p:nvSpPr>
+        <p:spPr>
+          <a:xfrm>
+            <a:off x="8074152" y="1563624"/>
+            <a:ext cx="2825496" cy="201168"/>
+          </a:xfrm>
+          <a:prstGeom prst="rect">
+            <a:avLst/>
+          </a:prstGeom>
+          <a:noFill/>
+          <a:ln/>
+        </p:spPr>
+        <p:txBody>
+          <a:bodyPr wrap="square" lIns="0" tIns="0" rIns="0" bIns="0" rtlCol="0" anchor="ctr"/>
+          <a:lstStyle/>
+          <a:p>
             <a:pPr indent="0" marL="0">
               <a:buNone/>
             </a:pPr>
             <a:r>
-              <a:rPr lang="en-US" sz="1420" dirty="0">
+              <a:rPr lang="en-US" sz="950" b="1" dirty="0">
+                <a:solidFill>
+                  <a:srgbClr val="0068B7"/>
+                </a:solidFill>
+                <a:latin typeface="Aptos" pitchFamily="34" charset="0"/>
+                <a:ea typeface="Aptos" pitchFamily="34" charset="-122"/>
+                <a:cs typeface="Aptos" pitchFamily="34" charset="-120"/>
+              </a:rPr>
+              <a:t>Key idea</a:t>
+            </a:r>
+            <a:endParaRPr lang="en-US" sz="950" dirty="0"/>
+          </a:p>
+        </p:txBody>
+      </p:sp>
+      <p:sp>
+        <p:nvSpPr>
+          <p:cNvPr id="13" name="Text 11"/>
+          <p:cNvSpPr/>
+          <p:nvPr/>
+        </p:nvSpPr>
+        <p:spPr>
+          <a:xfrm>
+            <a:off x="8074152" y="1856232"/>
+            <a:ext cx="2825496" cy="1261872"/>
+          </a:xfrm>
+          <a:prstGeom prst="rect">
+            <a:avLst/>
+          </a:prstGeom>
+          <a:noFill/>
+          <a:ln/>
+        </p:spPr>
+        <p:txBody>
+          <a:bodyPr wrap="square" lIns="0" tIns="0" rIns="0" bIns="0" rtlCol="0" anchor="t">
+            <a:normAutofit/>
+          </a:bodyPr>
+          <a:lstStyle/>
+          <a:p>
+            <a:pPr indent="0" marL="0">
+              <a:buNone/>
+            </a:pPr>
+            <a:r>
+              <a:rPr lang="en-US" sz="1250" dirty="0">
                 <a:solidFill>
                   <a:srgbClr val="17364A"/>
                 </a:solidFill>
@@ -7723,9 +14221,116 @@
                 <a:ea typeface="Aptos" pitchFamily="34" charset="-122"/>
                 <a:cs typeface="Aptos" pitchFamily="34" charset="-120"/>
               </a:rPr>
-              <a:t>A local health department uses an AI model to predict which neighborhoods are likely to experience low vaccination coverage. The model may help target outreach, but it does not prove why coverage is low or which outreach strategy will work. If leaders want to know whether mobile clinics, reminder messages, school partnerships, or community health workers caused an improvement, they need an evaluation design that supports causal inference. This distinction prevents overclaiming. The AI model can support prioritization and hypothesis generation, while causal methods can support evaluation of the chosen intervention. Both are valuable, but they answer different questions.</a:t>
-            </a:r>
-            <a:endParaRPr lang="en-US" sz="1420" dirty="0"/>
+              <a:t>Prediction: An estimate of what is likely to happen based on observed patterns.</a:t>
+            </a:r>
+            <a:endParaRPr lang="en-US" sz="1250" dirty="0"/>
+          </a:p>
+        </p:txBody>
+      </p:sp>
+      <p:sp>
+        <p:nvSpPr>
+          <p:cNvPr id="14" name="Shape 12"/>
+          <p:cNvSpPr/>
+          <p:nvPr/>
+        </p:nvSpPr>
+        <p:spPr>
+          <a:xfrm>
+            <a:off x="7909560" y="3520440"/>
+            <a:ext cx="3154680" cy="1737360"/>
+          </a:xfrm>
+          <a:prstGeom prst="roundRect">
+            <a:avLst>
+              <a:gd name="adj" fmla="val 6316"/>
+            </a:avLst>
+          </a:prstGeom>
+          <a:solidFill>
+            <a:srgbClr val="EAF6F8"/>
+          </a:solidFill>
+          <a:ln w="12700">
+            <a:solidFill>
+              <a:srgbClr val="B9D7E6"/>
+            </a:solidFill>
+            <a:prstDash val="solid"/>
+          </a:ln>
+        </p:spPr>
+      </p:sp>
+      <p:sp>
+        <p:nvSpPr>
+          <p:cNvPr id="15" name="Text 13"/>
+          <p:cNvSpPr/>
+          <p:nvPr/>
+        </p:nvSpPr>
+        <p:spPr>
+          <a:xfrm>
+            <a:off x="8074152" y="3666744"/>
+            <a:ext cx="2825496" cy="201168"/>
+          </a:xfrm>
+          <a:prstGeom prst="rect">
+            <a:avLst/>
+          </a:prstGeom>
+          <a:noFill/>
+          <a:ln/>
+        </p:spPr>
+        <p:txBody>
+          <a:bodyPr wrap="square" lIns="0" tIns="0" rIns="0" bIns="0" rtlCol="0" anchor="ctr"/>
+          <a:lstStyle/>
+          <a:p>
+            <a:pPr indent="0" marL="0">
+              <a:buNone/>
+            </a:pPr>
+            <a:r>
+              <a:rPr lang="en-US" sz="950" b="1" dirty="0">
+                <a:solidFill>
+                  <a:srgbClr val="0068B7"/>
+                </a:solidFill>
+                <a:latin typeface="Aptos" pitchFamily="34" charset="0"/>
+                <a:ea typeface="Aptos" pitchFamily="34" charset="-122"/>
+                <a:cs typeface="Aptos" pitchFamily="34" charset="-120"/>
+              </a:rPr>
+              <a:t>Use this for</a:t>
+            </a:r>
+            <a:endParaRPr lang="en-US" sz="950" dirty="0"/>
+          </a:p>
+        </p:txBody>
+      </p:sp>
+      <p:sp>
+        <p:nvSpPr>
+          <p:cNvPr id="16" name="Text 14"/>
+          <p:cNvSpPr/>
+          <p:nvPr/>
+        </p:nvSpPr>
+        <p:spPr>
+          <a:xfrm>
+            <a:off x="8074152" y="3959352"/>
+            <a:ext cx="2825496" cy="1170432"/>
+          </a:xfrm>
+          <a:prstGeom prst="rect">
+            <a:avLst/>
+          </a:prstGeom>
+          <a:noFill/>
+          <a:ln/>
+        </p:spPr>
+        <p:txBody>
+          <a:bodyPr wrap="square" lIns="0" tIns="0" rIns="0" bIns="0" rtlCol="0" anchor="t">
+            <a:normAutofit/>
+          </a:bodyPr>
+          <a:lstStyle/>
+          <a:p>
+            <a:pPr indent="0" marL="0">
+              <a:buNone/>
+            </a:pPr>
+            <a:r>
+              <a:rPr lang="en-US" sz="1250" dirty="0">
+                <a:solidFill>
+                  <a:srgbClr val="17364A"/>
+                </a:solidFill>
+                <a:latin typeface="Aptos" pitchFamily="34" charset="0"/>
+                <a:ea typeface="Aptos" pitchFamily="34" charset="-122"/>
+                <a:cs typeface="Aptos" pitchFamily="34" charset="-120"/>
+              </a:rPr>
+              <a:t>Connect the concept to public health decisions, safeguards, documentation, or implementation work.</a:t>
+            </a:r>
+            <a:endParaRPr lang="en-US" sz="1250" dirty="0"/>
           </a:p>
         </p:txBody>
       </p:sp>
@@ -7788,7 +14393,32 @@
       </p:sp>
       <p:sp>
         <p:nvSpPr>
-          <p:cNvPr id="3" name="Text 1"/>
+          <p:cNvPr id="3" name="Shape 1"/>
+          <p:cNvSpPr/>
+          <p:nvPr/>
+        </p:nvSpPr>
+        <p:spPr>
+          <a:xfrm>
+            <a:off x="0" y="164592"/>
+            <a:ext cx="146304" cy="6693408"/>
+          </a:xfrm>
+          <a:prstGeom prst="rect">
+            <a:avLst/>
+          </a:prstGeom>
+          <a:solidFill>
+            <a:srgbClr val="2F8A28"/>
+          </a:solidFill>
+          <a:ln w="12700">
+            <a:solidFill>
+              <a:srgbClr val="2F8A28"/>
+            </a:solidFill>
+            <a:prstDash val="solid"/>
+          </a:ln>
+        </p:spPr>
+      </p:sp>
+      <p:sp>
+        <p:nvSpPr>
+          <p:cNvPr id="4" name="Text 2"/>
           <p:cNvSpPr/>
           <p:nvPr/>
         </p:nvSpPr>
@@ -7827,7 +14457,7 @@
       </p:sp>
       <p:sp>
         <p:nvSpPr>
-          <p:cNvPr id="4" name="Text 2"/>
+          <p:cNvPr id="5" name="Text 3"/>
           <p:cNvSpPr/>
           <p:nvPr/>
         </p:nvSpPr>
@@ -7866,7 +14496,7 @@
       </p:sp>
       <p:sp>
         <p:nvSpPr>
-          <p:cNvPr id="5" name="Text 3"/>
+          <p:cNvPr id="6" name="Text 4"/>
           <p:cNvSpPr/>
           <p:nvPr/>
         </p:nvSpPr>
@@ -7905,13 +14535,77 @@
       </p:sp>
       <p:sp>
         <p:nvSpPr>
-          <p:cNvPr id="6" name="Text 4"/>
+          <p:cNvPr id="7" name="Shape 5"/>
           <p:cNvSpPr/>
           <p:nvPr/>
         </p:nvSpPr>
         <p:spPr>
           <a:xfrm>
             <a:off x="640080" y="658368"/>
+            <a:ext cx="420624" cy="420624"/>
+          </a:xfrm>
+          <a:prstGeom prst="ellipse">
+            <a:avLst/>
+          </a:prstGeom>
+          <a:solidFill>
+            <a:srgbClr val="0068B7"/>
+          </a:solidFill>
+          <a:ln w="12700">
+            <a:solidFill>
+              <a:srgbClr val="0068B7"/>
+            </a:solidFill>
+            <a:prstDash val="solid"/>
+          </a:ln>
+        </p:spPr>
+      </p:sp>
+      <p:sp>
+        <p:nvSpPr>
+          <p:cNvPr id="8" name="Text 6"/>
+          <p:cNvSpPr/>
+          <p:nvPr/>
+        </p:nvSpPr>
+        <p:spPr>
+          <a:xfrm>
+            <a:off x="640080" y="731520"/>
+            <a:ext cx="420624" cy="164592"/>
+          </a:xfrm>
+          <a:prstGeom prst="rect">
+            <a:avLst/>
+          </a:prstGeom>
+          <a:noFill/>
+          <a:ln/>
+        </p:spPr>
+        <p:txBody>
+          <a:bodyPr wrap="square" lIns="0" tIns="0" rIns="0" bIns="0" rtlCol="0" anchor="ctr"/>
+          <a:lstStyle/>
+          <a:p>
+            <a:pPr algn="ctr" indent="0" marL="0">
+              <a:buNone/>
+            </a:pPr>
+            <a:r>
+              <a:rPr lang="en-US" sz="1100" b="1" dirty="0">
+                <a:solidFill>
+                  <a:srgbClr val="FFFFFF"/>
+                </a:solidFill>
+                <a:latin typeface="Aptos" pitchFamily="34" charset="0"/>
+                <a:ea typeface="Aptos" pitchFamily="34" charset="-122"/>
+                <a:cs typeface="Aptos" pitchFamily="34" charset="-120"/>
+              </a:rPr>
+              <a:t>4</a:t>
+            </a:r>
+            <a:endParaRPr lang="en-US" sz="1100" dirty="0"/>
+          </a:p>
+        </p:txBody>
+      </p:sp>
+      <p:sp>
+        <p:nvSpPr>
+          <p:cNvPr id="9" name="Text 7"/>
+          <p:cNvSpPr/>
+          <p:nvPr/>
+        </p:nvSpPr>
+        <p:spPr>
+          <a:xfrm>
+            <a:off x="640080" y="621792"/>
             <a:ext cx="10881360" cy="566928"/>
           </a:xfrm>
           <a:prstGeom prst="rect">
@@ -7938,7 +14632,7 @@
                 <a:ea typeface="Aptos Display" pitchFamily="34" charset="-122"/>
                 <a:cs typeface="Aptos Display" pitchFamily="34" charset="-120"/>
               </a:rPr>
-              <a:t>Technical and Operational Deep Dive</a:t>
+              <a:t>Why This Topic Matters for Public Health AI</a:t>
             </a:r>
             <a:endParaRPr lang="en-US" sz="2700" dirty="0"/>
           </a:p>
@@ -7946,32 +14640,178 @@
       </p:sp>
       <p:sp>
         <p:nvSpPr>
-          <p:cNvPr id="7" name="Text 5"/>
-          <p:cNvSpPr/>
-          <p:nvPr/>
-        </p:nvSpPr>
-        <p:spPr>
-          <a:xfrm>
-            <a:off x="822960" y="1325880"/>
-            <a:ext cx="10378440" cy="4800600"/>
-          </a:xfrm>
-          <a:prstGeom prst="rect">
-            <a:avLst/>
-          </a:prstGeom>
-          <a:noFill/>
-          <a:ln/>
-        </p:spPr>
-        <p:txBody>
-          <a:bodyPr wrap="square" lIns="1016" tIns="1016" rIns="1016" bIns="1016" rtlCol="0" anchor="t">
+          <p:cNvPr id="10" name="Text 8"/>
+          <p:cNvSpPr/>
+          <p:nvPr/>
+        </p:nvSpPr>
+        <p:spPr>
+          <a:xfrm>
+            <a:off x="868680" y="1417320"/>
+            <a:ext cx="6675120" cy="4434840"/>
+          </a:xfrm>
+          <a:prstGeom prst="rect">
+            <a:avLst/>
+          </a:prstGeom>
+          <a:noFill/>
+          <a:ln/>
+        </p:spPr>
+        <p:txBody>
+          <a:bodyPr wrap="square" lIns="635" tIns="635" rIns="635" bIns="635" rtlCol="0" anchor="t">
             <a:normAutofit/>
           </a:bodyPr>
           <a:lstStyle/>
           <a:p>
+            <a:r>
+              <a:rPr lang="en-US" sz="1700" dirty="0">
+                <a:solidFill>
+                  <a:srgbClr val="17364A"/>
+                </a:solidFill>
+                <a:latin typeface="Aptos" pitchFamily="34" charset="0"/>
+                <a:ea typeface="Aptos" pitchFamily="34" charset="-122"/>
+                <a:cs typeface="Aptos" pitchFamily="34" charset="-120"/>
+              </a:rPr>
+              <a:t>AI can make weak evidence appear stronger than it is.</a:t>
+            </a:r>
+            <a:endParaRPr lang="en-US" sz="1700" dirty="0"/>
+          </a:p>
+          <a:p>
+            <a:r>
+              <a:rPr lang="en-US" sz="1700" dirty="0">
+                <a:solidFill>
+                  <a:srgbClr val="17364A"/>
+                </a:solidFill>
+                <a:latin typeface="Aptos" pitchFamily="34" charset="0"/>
+                <a:ea typeface="Aptos" pitchFamily="34" charset="-122"/>
+                <a:cs typeface="Aptos" pitchFamily="34" charset="-120"/>
+              </a:rPr>
+              <a:t>A model may predict which communities have higher hospitalization risk, but that does not prove which intervention will.</a:t>
+            </a:r>
+            <a:endParaRPr lang="en-US" sz="1700" dirty="0"/>
+          </a:p>
+          <a:p>
+            <a:r>
+              <a:rPr lang="en-US" sz="1700" dirty="0">
+                <a:solidFill>
+                  <a:srgbClr val="17364A"/>
+                </a:solidFill>
+                <a:latin typeface="Aptos" pitchFamily="34" charset="0"/>
+                <a:ea typeface="Aptos" pitchFamily="34" charset="-122"/>
+                <a:cs typeface="Aptos" pitchFamily="34" charset="-120"/>
+              </a:rPr>
+              <a:t>A model may find that people who receive a service have better outcomes, but that pattern may reflect who was able to.</a:t>
+            </a:r>
+            <a:endParaRPr lang="en-US" sz="1700" dirty="0"/>
+          </a:p>
+          <a:p>
+            <a:r>
+              <a:rPr lang="en-US" sz="1700" dirty="0">
+                <a:solidFill>
+                  <a:srgbClr val="17364A"/>
+                </a:solidFill>
+                <a:latin typeface="Aptos" pitchFamily="34" charset="0"/>
+                <a:ea typeface="Aptos" pitchFamily="34" charset="-122"/>
+                <a:cs typeface="Aptos" pitchFamily="34" charset="-120"/>
+              </a:rPr>
+              <a:t>Public health decisions often involve resource allocation, program design, policy evaluation, and equity tradeoffs.</a:t>
+            </a:r>
+            <a:endParaRPr lang="en-US" sz="1700" dirty="0"/>
+          </a:p>
+        </p:txBody>
+      </p:sp>
+      <p:sp>
+        <p:nvSpPr>
+          <p:cNvPr id="11" name="Shape 9"/>
+          <p:cNvSpPr/>
+          <p:nvPr/>
+        </p:nvSpPr>
+        <p:spPr>
+          <a:xfrm>
+            <a:off x="7909560" y="1417320"/>
+            <a:ext cx="3154680" cy="1828800"/>
+          </a:xfrm>
+          <a:prstGeom prst="roundRect">
+            <a:avLst>
+              <a:gd name="adj" fmla="val 6000"/>
+            </a:avLst>
+          </a:prstGeom>
+          <a:solidFill>
+            <a:srgbClr val="EEF8ED"/>
+          </a:solidFill>
+          <a:ln w="12700">
+            <a:solidFill>
+              <a:srgbClr val="B9D7E6"/>
+            </a:solidFill>
+            <a:prstDash val="solid"/>
+          </a:ln>
+        </p:spPr>
+      </p:sp>
+      <p:sp>
+        <p:nvSpPr>
+          <p:cNvPr id="12" name="Text 10"/>
+          <p:cNvSpPr/>
+          <p:nvPr/>
+        </p:nvSpPr>
+        <p:spPr>
+          <a:xfrm>
+            <a:off x="8074152" y="1563624"/>
+            <a:ext cx="2825496" cy="201168"/>
+          </a:xfrm>
+          <a:prstGeom prst="rect">
+            <a:avLst/>
+          </a:prstGeom>
+          <a:noFill/>
+          <a:ln/>
+        </p:spPr>
+        <p:txBody>
+          <a:bodyPr wrap="square" lIns="0" tIns="0" rIns="0" bIns="0" rtlCol="0" anchor="ctr"/>
+          <a:lstStyle/>
+          <a:p>
             <a:pPr indent="0" marL="0">
               <a:buNone/>
             </a:pPr>
             <a:r>
-              <a:rPr lang="en-US" sz="1420" dirty="0">
+              <a:rPr lang="en-US" sz="950" b="1" dirty="0">
+                <a:solidFill>
+                  <a:srgbClr val="0068B7"/>
+                </a:solidFill>
+                <a:latin typeface="Aptos" pitchFamily="34" charset="0"/>
+                <a:ea typeface="Aptos" pitchFamily="34" charset="-122"/>
+                <a:cs typeface="Aptos" pitchFamily="34" charset="-120"/>
+              </a:rPr>
+              <a:t>Key idea</a:t>
+            </a:r>
+            <a:endParaRPr lang="en-US" sz="950" dirty="0"/>
+          </a:p>
+        </p:txBody>
+      </p:sp>
+      <p:sp>
+        <p:nvSpPr>
+          <p:cNvPr id="13" name="Text 11"/>
+          <p:cNvSpPr/>
+          <p:nvPr/>
+        </p:nvSpPr>
+        <p:spPr>
+          <a:xfrm>
+            <a:off x="8074152" y="1856232"/>
+            <a:ext cx="2825496" cy="1261872"/>
+          </a:xfrm>
+          <a:prstGeom prst="rect">
+            <a:avLst/>
+          </a:prstGeom>
+          <a:noFill/>
+          <a:ln/>
+        </p:spPr>
+        <p:txBody>
+          <a:bodyPr wrap="square" lIns="0" tIns="0" rIns="0" bIns="0" rtlCol="0" anchor="t">
+            <a:normAutofit/>
+          </a:bodyPr>
+          <a:lstStyle/>
+          <a:p>
+            <a:pPr indent="0" marL="0">
+              <a:buNone/>
+            </a:pPr>
+            <a:r>
+              <a:rPr lang="en-US" sz="1250" dirty="0">
                 <a:solidFill>
                   <a:srgbClr val="17364A"/>
                 </a:solidFill>
@@ -7979,9 +14819,116 @@
                 <a:ea typeface="Aptos" pitchFamily="34" charset="-122"/>
                 <a:cs typeface="Aptos" pitchFamily="34" charset="-120"/>
               </a:rPr>
-              <a:t>Causal inference begins with a clearly framed question. A useful structure is: among which population, what is the intervention or exposure, what is the comparison, what outcome is measured, and over what time period? Without this structure, teams may ask a model to answer a question that the available data cannot support. Confounding is one of the most important threats. For example, a program may appear to improve outcomes because participants were already more connected to care. Selection bias may occur when data include only people who interacted with a system. Temporal ambiguity may occur when it is unclear whether the exposure occurred before the outcome. AI can detect patterns in these data, but it does not automatically solve the causal design problem. Methods such as matching, regression adjustment, difference-in-differences, interrupted time series, regression discontinuity, and instrumental variables may be useful when randomization is not possible. These methods require assumptions that should be documented and reviewed. Public health staff should know when to consult epidemiologists, statisticians, or evaluators before making causal claims.</a:t>
-            </a:r>
-            <a:endParaRPr lang="en-US" sz="1420" dirty="0"/>
+              <a:t>AI can make weak evidence appear stronger than it is.</a:t>
+            </a:r>
+            <a:endParaRPr lang="en-US" sz="1250" dirty="0"/>
+          </a:p>
+        </p:txBody>
+      </p:sp>
+      <p:sp>
+        <p:nvSpPr>
+          <p:cNvPr id="14" name="Shape 12"/>
+          <p:cNvSpPr/>
+          <p:nvPr/>
+        </p:nvSpPr>
+        <p:spPr>
+          <a:xfrm>
+            <a:off x="7909560" y="3520440"/>
+            <a:ext cx="3154680" cy="1737360"/>
+          </a:xfrm>
+          <a:prstGeom prst="roundRect">
+            <a:avLst>
+              <a:gd name="adj" fmla="val 6316"/>
+            </a:avLst>
+          </a:prstGeom>
+          <a:solidFill>
+            <a:srgbClr val="EAF6F8"/>
+          </a:solidFill>
+          <a:ln w="12700">
+            <a:solidFill>
+              <a:srgbClr val="B9D7E6"/>
+            </a:solidFill>
+            <a:prstDash val="solid"/>
+          </a:ln>
+        </p:spPr>
+      </p:sp>
+      <p:sp>
+        <p:nvSpPr>
+          <p:cNvPr id="15" name="Text 13"/>
+          <p:cNvSpPr/>
+          <p:nvPr/>
+        </p:nvSpPr>
+        <p:spPr>
+          <a:xfrm>
+            <a:off x="8074152" y="3666744"/>
+            <a:ext cx="2825496" cy="201168"/>
+          </a:xfrm>
+          <a:prstGeom prst="rect">
+            <a:avLst/>
+          </a:prstGeom>
+          <a:noFill/>
+          <a:ln/>
+        </p:spPr>
+        <p:txBody>
+          <a:bodyPr wrap="square" lIns="0" tIns="0" rIns="0" bIns="0" rtlCol="0" anchor="ctr"/>
+          <a:lstStyle/>
+          <a:p>
+            <a:pPr indent="0" marL="0">
+              <a:buNone/>
+            </a:pPr>
+            <a:r>
+              <a:rPr lang="en-US" sz="950" b="1" dirty="0">
+                <a:solidFill>
+                  <a:srgbClr val="0068B7"/>
+                </a:solidFill>
+                <a:latin typeface="Aptos" pitchFamily="34" charset="0"/>
+                <a:ea typeface="Aptos" pitchFamily="34" charset="-122"/>
+                <a:cs typeface="Aptos" pitchFamily="34" charset="-120"/>
+              </a:rPr>
+              <a:t>Use this for</a:t>
+            </a:r>
+            <a:endParaRPr lang="en-US" sz="950" dirty="0"/>
+          </a:p>
+        </p:txBody>
+      </p:sp>
+      <p:sp>
+        <p:nvSpPr>
+          <p:cNvPr id="16" name="Text 14"/>
+          <p:cNvSpPr/>
+          <p:nvPr/>
+        </p:nvSpPr>
+        <p:spPr>
+          <a:xfrm>
+            <a:off x="8074152" y="3959352"/>
+            <a:ext cx="2825496" cy="1170432"/>
+          </a:xfrm>
+          <a:prstGeom prst="rect">
+            <a:avLst/>
+          </a:prstGeom>
+          <a:noFill/>
+          <a:ln/>
+        </p:spPr>
+        <p:txBody>
+          <a:bodyPr wrap="square" lIns="0" tIns="0" rIns="0" bIns="0" rtlCol="0" anchor="t">
+            <a:normAutofit/>
+          </a:bodyPr>
+          <a:lstStyle/>
+          <a:p>
+            <a:pPr indent="0" marL="0">
+              <a:buNone/>
+            </a:pPr>
+            <a:r>
+              <a:rPr lang="en-US" sz="1250" dirty="0">
+                <a:solidFill>
+                  <a:srgbClr val="17364A"/>
+                </a:solidFill>
+                <a:latin typeface="Aptos" pitchFamily="34" charset="0"/>
+                <a:ea typeface="Aptos" pitchFamily="34" charset="-122"/>
+                <a:cs typeface="Aptos" pitchFamily="34" charset="-120"/>
+              </a:rPr>
+              <a:t>Connect the concept to public health decisions, safeguards, documentation, or implementation work.</a:t>
+            </a:r>
+            <a:endParaRPr lang="en-US" sz="1250" dirty="0"/>
           </a:p>
         </p:txBody>
       </p:sp>

--- a/downloads/presentations/modules/lesson-11-causal-inference-and-ai-in-public-health-decision-making.pptx
+++ b/downloads/presentations/modules/lesson-11-causal-inference-and-ai-in-public-health-decision-making.pptx
@@ -2998,6 +2998,45 @@
           </a:p>
         </p:txBody>
       </p:sp>
+      <p:sp>
+        <p:nvSpPr>
+          <p:cNvPr id="8" name="Text 5"/>
+          <p:cNvSpPr/>
+          <p:nvPr/>
+        </p:nvSpPr>
+        <p:spPr>
+          <a:xfrm>
+            <a:off x="11137392" y="6510528"/>
+            <a:ext cx="411480" cy="201168"/>
+          </a:xfrm>
+          <a:prstGeom prst="rect">
+            <a:avLst/>
+          </a:prstGeom>
+          <a:noFill/>
+          <a:ln/>
+        </p:spPr>
+        <p:txBody>
+          <a:bodyPr wrap="square" lIns="0" tIns="0" rIns="0" bIns="0" rtlCol="0" anchor="ctr"/>
+          <a:lstStyle/>
+          <a:p>
+            <a:pPr algn="r" indent="0" marL="0">
+              <a:buNone/>
+            </a:pPr>
+            <a:r>
+              <a:rPr lang="en-US" sz="900" dirty="0">
+                <a:solidFill>
+                  <a:srgbClr val="5F7181"/>
+                </a:solidFill>
+                <a:latin typeface="Aptos" pitchFamily="34" charset="0"/>
+                <a:ea typeface="Aptos" pitchFamily="34" charset="-122"/>
+                <a:cs typeface="Aptos" pitchFamily="34" charset="-120"/>
+              </a:rPr>
+              <a:t>1</a:t>
+            </a:r>
+            <a:endParaRPr lang="en-US" sz="900" dirty="0"/>
+          </a:p>
+        </p:txBody>
+      </p:sp>
     </p:spTree>
   </p:cSld>
   <p:clrMapOvr>
@@ -3191,7 +3230,7 @@
                 <a:ea typeface="Aptos" pitchFamily="34" charset="-122"/>
                 <a:cs typeface="Aptos" pitchFamily="34" charset="-120"/>
               </a:rPr>
-              <a:t>© Paula Soper</a:t>
+              <a:t>Â© Paula Soper</a:t>
             </a:r>
             <a:endParaRPr lang="en-US" sz="800" dirty="0"/>
           </a:p>
@@ -3199,7 +3238,46 @@
       </p:sp>
       <p:sp>
         <p:nvSpPr>
-          <p:cNvPr id="7" name="Shape 5"/>
+          <p:cNvPr id="7" name="Text 5"/>
+          <p:cNvSpPr/>
+          <p:nvPr/>
+        </p:nvSpPr>
+        <p:spPr>
+          <a:xfrm>
+            <a:off x="11137392" y="6510528"/>
+            <a:ext cx="411480" cy="201168"/>
+          </a:xfrm>
+          <a:prstGeom prst="rect">
+            <a:avLst/>
+          </a:prstGeom>
+          <a:noFill/>
+          <a:ln/>
+        </p:spPr>
+        <p:txBody>
+          <a:bodyPr wrap="square" lIns="0" tIns="0" rIns="0" bIns="0" rtlCol="0" anchor="ctr"/>
+          <a:lstStyle/>
+          <a:p>
+            <a:pPr algn="r" indent="0" marL="0">
+              <a:buNone/>
+            </a:pPr>
+            <a:r>
+              <a:rPr lang="en-US" sz="900" dirty="0">
+                <a:solidFill>
+                  <a:srgbClr val="5F7181"/>
+                </a:solidFill>
+                <a:latin typeface="Aptos" pitchFamily="34" charset="0"/>
+                <a:ea typeface="Aptos" pitchFamily="34" charset="-122"/>
+                <a:cs typeface="Aptos" pitchFamily="34" charset="-120"/>
+              </a:rPr>
+              <a:t>10</a:t>
+            </a:r>
+            <a:endParaRPr lang="en-US" sz="900" dirty="0"/>
+          </a:p>
+        </p:txBody>
+      </p:sp>
+      <p:sp>
+        <p:nvSpPr>
+          <p:cNvPr id="8" name="Shape 6"/>
           <p:cNvSpPr/>
           <p:nvPr/>
         </p:nvSpPr>
@@ -3224,7 +3302,7 @@
       </p:sp>
       <p:sp>
         <p:nvSpPr>
-          <p:cNvPr id="8" name="Text 6"/>
+          <p:cNvPr id="9" name="Text 7"/>
           <p:cNvSpPr/>
           <p:nvPr/>
         </p:nvSpPr>
@@ -3263,14 +3341,14 @@
       </p:sp>
       <p:sp>
         <p:nvSpPr>
-          <p:cNvPr id="9" name="Text 7"/>
+          <p:cNvPr id="10" name="Text 8"/>
           <p:cNvSpPr/>
           <p:nvPr/>
         </p:nvSpPr>
         <p:spPr>
           <a:xfrm>
             <a:off x="640080" y="621792"/>
-            <a:ext cx="10881360" cy="566928"/>
+            <a:ext cx="10881360" cy="713232"/>
           </a:xfrm>
           <a:prstGeom prst="rect">
             <a:avLst/>
@@ -3288,7 +3366,7 @@
               <a:buNone/>
             </a:pPr>
             <a:r>
-              <a:rPr lang="en-US" sz="2700" b="1" dirty="0">
+              <a:rPr lang="en-US" sz="3400" b="1" dirty="0">
                 <a:solidFill>
                   <a:srgbClr val="003A63"/>
                 </a:solidFill>
@@ -3298,20 +3376,20 @@
               </a:rPr>
               <a:t>Public Health Example</a:t>
             </a:r>
-            <a:endParaRPr lang="en-US" sz="2700" dirty="0"/>
-          </a:p>
-        </p:txBody>
-      </p:sp>
-      <p:sp>
-        <p:nvSpPr>
-          <p:cNvPr id="10" name="Text 8"/>
-          <p:cNvSpPr/>
-          <p:nvPr/>
-        </p:nvSpPr>
-        <p:spPr>
-          <a:xfrm>
-            <a:off x="868680" y="1417320"/>
-            <a:ext cx="6675120" cy="4434840"/>
+            <a:endParaRPr lang="en-US" sz="3400" dirty="0"/>
+          </a:p>
+        </p:txBody>
+      </p:sp>
+      <p:sp>
+        <p:nvSpPr>
+          <p:cNvPr id="11" name="Text 9"/>
+          <p:cNvSpPr/>
+          <p:nvPr/>
+        </p:nvSpPr>
+        <p:spPr>
+          <a:xfrm>
+            <a:off x="868680" y="1508760"/>
+            <a:ext cx="6537960" cy="4160520"/>
           </a:xfrm>
           <a:prstGeom prst="rect">
             <a:avLst/>
@@ -3326,7 +3404,7 @@
           <a:lstStyle/>
           <a:p>
             <a:r>
-              <a:rPr lang="en-US" sz="1700" dirty="0">
+              <a:rPr lang="en-US" sz="2100" dirty="0">
                 <a:solidFill>
                   <a:srgbClr val="17364A"/>
                 </a:solidFill>
@@ -3334,13 +3412,13 @@
                 <a:ea typeface="Aptos" pitchFamily="34" charset="-122"/>
                 <a:cs typeface="Aptos" pitchFamily="34" charset="-120"/>
               </a:rPr>
-              <a:t>A local health department uses an AI model to predict which neighborhoods are likely to experience low vaccination coverage.</a:t>
-            </a:r>
-            <a:endParaRPr lang="en-US" sz="1700" dirty="0"/>
-          </a:p>
-          <a:p>
-            <a:r>
-              <a:rPr lang="en-US" sz="1700" dirty="0">
+              <a:t>A local health department uses an AI model to predict which neighborhoods are likely to experience low.</a:t>
+            </a:r>
+            <a:endParaRPr lang="en-US" sz="2100" dirty="0"/>
+          </a:p>
+          <a:p>
+            <a:r>
+              <a:rPr lang="en-US" sz="2100" dirty="0">
                 <a:solidFill>
                   <a:srgbClr val="17364A"/>
                 </a:solidFill>
@@ -3348,13 +3426,13 @@
                 <a:ea typeface="Aptos" pitchFamily="34" charset="-122"/>
                 <a:cs typeface="Aptos" pitchFamily="34" charset="-120"/>
               </a:rPr>
-              <a:t>The model may help target outreach, but it does not prove why coverage is low or which outreach strategy will work.</a:t>
-            </a:r>
-            <a:endParaRPr lang="en-US" sz="1700" dirty="0"/>
-          </a:p>
-          <a:p>
-            <a:r>
-              <a:rPr lang="en-US" sz="1700" dirty="0">
+              <a:t>The model may help target outreach, but it does not prove why coverage is low or which outreach.</a:t>
+            </a:r>
+            <a:endParaRPr lang="en-US" sz="2100" dirty="0"/>
+          </a:p>
+          <a:p>
+            <a:r>
+              <a:rPr lang="en-US" sz="2100" dirty="0">
                 <a:solidFill>
                   <a:srgbClr val="17364A"/>
                 </a:solidFill>
@@ -3362,29 +3440,15 @@
                 <a:ea typeface="Aptos" pitchFamily="34" charset="-122"/>
                 <a:cs typeface="Aptos" pitchFamily="34" charset="-120"/>
               </a:rPr>
-              <a:t>If leaders want to know whether mobile clinics, reminder messages, school partnerships, or community health workers caused.</a:t>
-            </a:r>
-            <a:endParaRPr lang="en-US" sz="1700" dirty="0"/>
-          </a:p>
-          <a:p>
-            <a:r>
-              <a:rPr lang="en-US" sz="1700" dirty="0">
-                <a:solidFill>
-                  <a:srgbClr val="17364A"/>
-                </a:solidFill>
-                <a:latin typeface="Aptos" pitchFamily="34" charset="0"/>
-                <a:ea typeface="Aptos" pitchFamily="34" charset="-122"/>
-                <a:cs typeface="Aptos" pitchFamily="34" charset="-120"/>
-              </a:rPr>
-              <a:t>This distinction prevents overclaiming.</a:t>
-            </a:r>
-            <a:endParaRPr lang="en-US" sz="1700" dirty="0"/>
-          </a:p>
-        </p:txBody>
-      </p:sp>
-      <p:sp>
-        <p:nvSpPr>
-          <p:cNvPr id="11" name="Shape 9"/>
+              <a:t>If leaders want to know whether mobile clinics, reminder messages, school partnerships, or community.</a:t>
+            </a:r>
+            <a:endParaRPr lang="en-US" sz="2100" dirty="0"/>
+          </a:p>
+        </p:txBody>
+      </p:sp>
+      <p:sp>
+        <p:nvSpPr>
+          <p:cNvPr id="12" name="Shape 10"/>
           <p:cNvSpPr/>
           <p:nvPr/>
         </p:nvSpPr>
@@ -3411,14 +3475,14 @@
       </p:sp>
       <p:sp>
         <p:nvSpPr>
-          <p:cNvPr id="12" name="Text 10"/>
+          <p:cNvPr id="13" name="Text 11"/>
           <p:cNvSpPr/>
           <p:nvPr/>
         </p:nvSpPr>
         <p:spPr>
           <a:xfrm>
             <a:off x="8074152" y="1563624"/>
-            <a:ext cx="2825496" cy="201168"/>
+            <a:ext cx="2825496" cy="256032"/>
           </a:xfrm>
           <a:prstGeom prst="rect">
             <a:avLst/>
@@ -3434,7 +3498,7 @@
               <a:buNone/>
             </a:pPr>
             <a:r>
-              <a:rPr lang="en-US" sz="950" b="1" dirty="0">
+              <a:rPr lang="en-US" sz="1300" b="1" dirty="0">
                 <a:solidFill>
                   <a:srgbClr val="0068B7"/>
                 </a:solidFill>
@@ -3444,20 +3508,20 @@
               </a:rPr>
               <a:t>Key idea</a:t>
             </a:r>
-            <a:endParaRPr lang="en-US" sz="950" dirty="0"/>
-          </a:p>
-        </p:txBody>
-      </p:sp>
-      <p:sp>
-        <p:nvSpPr>
-          <p:cNvPr id="13" name="Text 11"/>
-          <p:cNvSpPr/>
-          <p:nvPr/>
-        </p:nvSpPr>
-        <p:spPr>
-          <a:xfrm>
-            <a:off x="8074152" y="1856232"/>
-            <a:ext cx="2825496" cy="1261872"/>
+            <a:endParaRPr lang="en-US" sz="1300" dirty="0"/>
+          </a:p>
+        </p:txBody>
+      </p:sp>
+      <p:sp>
+        <p:nvSpPr>
+          <p:cNvPr id="14" name="Text 12"/>
+          <p:cNvSpPr/>
+          <p:nvPr/>
+        </p:nvSpPr>
+        <p:spPr>
+          <a:xfrm>
+            <a:off x="8074152" y="1920240"/>
+            <a:ext cx="2825496" cy="1188720"/>
           </a:xfrm>
           <a:prstGeom prst="rect">
             <a:avLst/>
@@ -3475,7 +3539,7 @@
               <a:buNone/>
             </a:pPr>
             <a:r>
-              <a:rPr lang="en-US" sz="1250" dirty="0">
+              <a:rPr lang="en-US" sz="1550" dirty="0">
                 <a:solidFill>
                   <a:srgbClr val="17364A"/>
                 </a:solidFill>
@@ -3483,15 +3547,15 @@
                 <a:ea typeface="Aptos" pitchFamily="34" charset="-122"/>
                 <a:cs typeface="Aptos" pitchFamily="34" charset="-120"/>
               </a:rPr>
-              <a:t>A local health department uses an AI model to predict which neighborhoods are likely to experience low vaccination coverage.</a:t>
-            </a:r>
-            <a:endParaRPr lang="en-US" sz="1250" dirty="0"/>
-          </a:p>
-        </p:txBody>
-      </p:sp>
-      <p:sp>
-        <p:nvSpPr>
-          <p:cNvPr id="14" name="Shape 12"/>
+              <a:t>A local health department uses an AI model to predict which neighborhoods are likely to experience low.</a:t>
+            </a:r>
+            <a:endParaRPr lang="en-US" sz="1550" dirty="0"/>
+          </a:p>
+        </p:txBody>
+      </p:sp>
+      <p:sp>
+        <p:nvSpPr>
+          <p:cNvPr id="15" name="Shape 13"/>
           <p:cNvSpPr/>
           <p:nvPr/>
         </p:nvSpPr>
@@ -3518,14 +3582,14 @@
       </p:sp>
       <p:sp>
         <p:nvSpPr>
-          <p:cNvPr id="15" name="Text 13"/>
+          <p:cNvPr id="16" name="Text 14"/>
           <p:cNvSpPr/>
           <p:nvPr/>
         </p:nvSpPr>
         <p:spPr>
           <a:xfrm>
             <a:off x="8074152" y="3666744"/>
-            <a:ext cx="2825496" cy="201168"/>
+            <a:ext cx="2825496" cy="256032"/>
           </a:xfrm>
           <a:prstGeom prst="rect">
             <a:avLst/>
@@ -3541,7 +3605,7 @@
               <a:buNone/>
             </a:pPr>
             <a:r>
-              <a:rPr lang="en-US" sz="950" b="1" dirty="0">
+              <a:rPr lang="en-US" sz="1300" b="1" dirty="0">
                 <a:solidFill>
                   <a:srgbClr val="0068B7"/>
                 </a:solidFill>
@@ -3551,20 +3615,20 @@
               </a:rPr>
               <a:t>Use this for</a:t>
             </a:r>
-            <a:endParaRPr lang="en-US" sz="950" dirty="0"/>
-          </a:p>
-        </p:txBody>
-      </p:sp>
-      <p:sp>
-        <p:nvSpPr>
-          <p:cNvPr id="16" name="Text 14"/>
-          <p:cNvSpPr/>
-          <p:nvPr/>
-        </p:nvSpPr>
-        <p:spPr>
-          <a:xfrm>
-            <a:off x="8074152" y="3959352"/>
-            <a:ext cx="2825496" cy="1170432"/>
+            <a:endParaRPr lang="en-US" sz="1300" dirty="0"/>
+          </a:p>
+        </p:txBody>
+      </p:sp>
+      <p:sp>
+        <p:nvSpPr>
+          <p:cNvPr id="17" name="Text 15"/>
+          <p:cNvSpPr/>
+          <p:nvPr/>
+        </p:nvSpPr>
+        <p:spPr>
+          <a:xfrm>
+            <a:off x="8074152" y="4023360"/>
+            <a:ext cx="2825496" cy="1097280"/>
           </a:xfrm>
           <a:prstGeom prst="rect">
             <a:avLst/>
@@ -3582,7 +3646,7 @@
               <a:buNone/>
             </a:pPr>
             <a:r>
-              <a:rPr lang="en-US" sz="1250" dirty="0">
+              <a:rPr lang="en-US" sz="1550" dirty="0">
                 <a:solidFill>
                   <a:srgbClr val="17364A"/>
                 </a:solidFill>
@@ -3592,7 +3656,7 @@
               </a:rPr>
               <a:t>Connect the concept to public health decisions, safeguards, documentation, or implementation work.</a:t>
             </a:r>
-            <a:endParaRPr lang="en-US" sz="1250" dirty="0"/>
+            <a:endParaRPr lang="en-US" sz="1550" dirty="0"/>
           </a:p>
         </p:txBody>
       </p:sp>
@@ -3789,7 +3853,7 @@
                 <a:ea typeface="Aptos" pitchFamily="34" charset="-122"/>
                 <a:cs typeface="Aptos" pitchFamily="34" charset="-120"/>
               </a:rPr>
-              <a:t>© Paula Soper</a:t>
+              <a:t>Â© Paula Soper</a:t>
             </a:r>
             <a:endParaRPr lang="en-US" sz="800" dirty="0"/>
           </a:p>
@@ -3797,7 +3861,46 @@
       </p:sp>
       <p:sp>
         <p:nvSpPr>
-          <p:cNvPr id="7" name="Shape 5"/>
+          <p:cNvPr id="7" name="Text 5"/>
+          <p:cNvSpPr/>
+          <p:nvPr/>
+        </p:nvSpPr>
+        <p:spPr>
+          <a:xfrm>
+            <a:off x="11137392" y="6510528"/>
+            <a:ext cx="411480" cy="201168"/>
+          </a:xfrm>
+          <a:prstGeom prst="rect">
+            <a:avLst/>
+          </a:prstGeom>
+          <a:noFill/>
+          <a:ln/>
+        </p:spPr>
+        <p:txBody>
+          <a:bodyPr wrap="square" lIns="0" tIns="0" rIns="0" bIns="0" rtlCol="0" anchor="ctr"/>
+          <a:lstStyle/>
+          <a:p>
+            <a:pPr algn="r" indent="0" marL="0">
+              <a:buNone/>
+            </a:pPr>
+            <a:r>
+              <a:rPr lang="en-US" sz="900" dirty="0">
+                <a:solidFill>
+                  <a:srgbClr val="5F7181"/>
+                </a:solidFill>
+                <a:latin typeface="Aptos" pitchFamily="34" charset="0"/>
+                <a:ea typeface="Aptos" pitchFamily="34" charset="-122"/>
+                <a:cs typeface="Aptos" pitchFamily="34" charset="-120"/>
+              </a:rPr>
+              <a:t>11</a:t>
+            </a:r>
+            <a:endParaRPr lang="en-US" sz="900" dirty="0"/>
+          </a:p>
+        </p:txBody>
+      </p:sp>
+      <p:sp>
+        <p:nvSpPr>
+          <p:cNvPr id="8" name="Shape 6"/>
           <p:cNvSpPr/>
           <p:nvPr/>
         </p:nvSpPr>
@@ -3822,7 +3925,7 @@
       </p:sp>
       <p:sp>
         <p:nvSpPr>
-          <p:cNvPr id="8" name="Text 6"/>
+          <p:cNvPr id="9" name="Text 7"/>
           <p:cNvSpPr/>
           <p:nvPr/>
         </p:nvSpPr>
@@ -3861,14 +3964,14 @@
       </p:sp>
       <p:sp>
         <p:nvSpPr>
-          <p:cNvPr id="9" name="Text 7"/>
+          <p:cNvPr id="10" name="Text 8"/>
           <p:cNvSpPr/>
           <p:nvPr/>
         </p:nvSpPr>
         <p:spPr>
           <a:xfrm>
             <a:off x="640080" y="621792"/>
-            <a:ext cx="10881360" cy="566928"/>
+            <a:ext cx="10881360" cy="713232"/>
           </a:xfrm>
           <a:prstGeom prst="rect">
             <a:avLst/>
@@ -3886,7 +3989,7 @@
               <a:buNone/>
             </a:pPr>
             <a:r>
-              <a:rPr lang="en-US" sz="2700" b="1" dirty="0">
+              <a:rPr lang="en-US" sz="3400" b="1" dirty="0">
                 <a:solidFill>
                   <a:srgbClr val="003A63"/>
                 </a:solidFill>
@@ -3896,20 +3999,20 @@
               </a:rPr>
               <a:t>Technical and Operational Deep Dive</a:t>
             </a:r>
-            <a:endParaRPr lang="en-US" sz="2700" dirty="0"/>
-          </a:p>
-        </p:txBody>
-      </p:sp>
-      <p:sp>
-        <p:nvSpPr>
-          <p:cNvPr id="10" name="Text 8"/>
-          <p:cNvSpPr/>
-          <p:nvPr/>
-        </p:nvSpPr>
-        <p:spPr>
-          <a:xfrm>
-            <a:off x="868680" y="1417320"/>
-            <a:ext cx="6675120" cy="4434840"/>
+            <a:endParaRPr lang="en-US" sz="3400" dirty="0"/>
+          </a:p>
+        </p:txBody>
+      </p:sp>
+      <p:sp>
+        <p:nvSpPr>
+          <p:cNvPr id="11" name="Text 9"/>
+          <p:cNvSpPr/>
+          <p:nvPr/>
+        </p:nvSpPr>
+        <p:spPr>
+          <a:xfrm>
+            <a:off x="868680" y="1508760"/>
+            <a:ext cx="6537960" cy="4160520"/>
           </a:xfrm>
           <a:prstGeom prst="rect">
             <a:avLst/>
@@ -3924,7 +4027,7 @@
           <a:lstStyle/>
           <a:p>
             <a:r>
-              <a:rPr lang="en-US" sz="1700" dirty="0">
+              <a:rPr lang="en-US" sz="2100" dirty="0">
                 <a:solidFill>
                   <a:srgbClr val="17364A"/>
                 </a:solidFill>
@@ -3934,11 +4037,11 @@
               </a:rPr>
               <a:t>Causal inference begins with a clearly framed question.</a:t>
             </a:r>
-            <a:endParaRPr lang="en-US" sz="1700" dirty="0"/>
-          </a:p>
-          <a:p>
-            <a:r>
-              <a:rPr lang="en-US" sz="1700" dirty="0">
+            <a:endParaRPr lang="en-US" sz="2100" dirty="0"/>
+          </a:p>
+          <a:p>
+            <a:r>
+              <a:rPr lang="en-US" sz="2100" dirty="0">
                 <a:solidFill>
                   <a:srgbClr val="17364A"/>
                 </a:solidFill>
@@ -3946,13 +4049,13 @@
                 <a:ea typeface="Aptos" pitchFamily="34" charset="-122"/>
                 <a:cs typeface="Aptos" pitchFamily="34" charset="-120"/>
               </a:rPr>
-              <a:t>A useful structure is: among which population, what is the intervention or exposure, what is the comparison, what outcome.</a:t>
-            </a:r>
-            <a:endParaRPr lang="en-US" sz="1700" dirty="0"/>
-          </a:p>
-          <a:p>
-            <a:r>
-              <a:rPr lang="en-US" sz="1700" dirty="0">
+              <a:t>A useful structure is: among which population, what is the intervention or exposure, what is the.</a:t>
+            </a:r>
+            <a:endParaRPr lang="en-US" sz="2100" dirty="0"/>
+          </a:p>
+          <a:p>
+            <a:r>
+              <a:rPr lang="en-US" sz="2100" dirty="0">
                 <a:solidFill>
                   <a:srgbClr val="17364A"/>
                 </a:solidFill>
@@ -3960,29 +4063,15 @@
                 <a:ea typeface="Aptos" pitchFamily="34" charset="-122"/>
                 <a:cs typeface="Aptos" pitchFamily="34" charset="-120"/>
               </a:rPr>
-              <a:t>Without this structure, teams may ask a model to answer a question that the available data cannot support.</a:t>
-            </a:r>
-            <a:endParaRPr lang="en-US" sz="1700" dirty="0"/>
-          </a:p>
-          <a:p>
-            <a:r>
-              <a:rPr lang="en-US" sz="1700" dirty="0">
-                <a:solidFill>
-                  <a:srgbClr val="17364A"/>
-                </a:solidFill>
-                <a:latin typeface="Aptos" pitchFamily="34" charset="0"/>
-                <a:ea typeface="Aptos" pitchFamily="34" charset="-122"/>
-                <a:cs typeface="Aptos" pitchFamily="34" charset="-120"/>
-              </a:rPr>
-              <a:t>Confounding is one of the most important threats.</a:t>
-            </a:r>
-            <a:endParaRPr lang="en-US" sz="1700" dirty="0"/>
-          </a:p>
-        </p:txBody>
-      </p:sp>
-      <p:sp>
-        <p:nvSpPr>
-          <p:cNvPr id="11" name="Shape 9"/>
+              <a:t>Without this structure, teams may ask a model to answer a question that the available data cannot.</a:t>
+            </a:r>
+            <a:endParaRPr lang="en-US" sz="2100" dirty="0"/>
+          </a:p>
+        </p:txBody>
+      </p:sp>
+      <p:sp>
+        <p:nvSpPr>
+          <p:cNvPr id="12" name="Shape 10"/>
           <p:cNvSpPr/>
           <p:nvPr/>
         </p:nvSpPr>
@@ -4009,14 +4098,14 @@
       </p:sp>
       <p:sp>
         <p:nvSpPr>
-          <p:cNvPr id="12" name="Text 10"/>
+          <p:cNvPr id="13" name="Text 11"/>
           <p:cNvSpPr/>
           <p:nvPr/>
         </p:nvSpPr>
         <p:spPr>
           <a:xfrm>
             <a:off x="8074152" y="1563624"/>
-            <a:ext cx="2825496" cy="201168"/>
+            <a:ext cx="2825496" cy="256032"/>
           </a:xfrm>
           <a:prstGeom prst="rect">
             <a:avLst/>
@@ -4032,7 +4121,7 @@
               <a:buNone/>
             </a:pPr>
             <a:r>
-              <a:rPr lang="en-US" sz="950" b="1" dirty="0">
+              <a:rPr lang="en-US" sz="1300" b="1" dirty="0">
                 <a:solidFill>
                   <a:srgbClr val="0068B7"/>
                 </a:solidFill>
@@ -4042,20 +4131,20 @@
               </a:rPr>
               <a:t>Key idea</a:t>
             </a:r>
-            <a:endParaRPr lang="en-US" sz="950" dirty="0"/>
-          </a:p>
-        </p:txBody>
-      </p:sp>
-      <p:sp>
-        <p:nvSpPr>
-          <p:cNvPr id="13" name="Text 11"/>
-          <p:cNvSpPr/>
-          <p:nvPr/>
-        </p:nvSpPr>
-        <p:spPr>
-          <a:xfrm>
-            <a:off x="8074152" y="1856232"/>
-            <a:ext cx="2825496" cy="1261872"/>
+            <a:endParaRPr lang="en-US" sz="1300" dirty="0"/>
+          </a:p>
+        </p:txBody>
+      </p:sp>
+      <p:sp>
+        <p:nvSpPr>
+          <p:cNvPr id="14" name="Text 12"/>
+          <p:cNvSpPr/>
+          <p:nvPr/>
+        </p:nvSpPr>
+        <p:spPr>
+          <a:xfrm>
+            <a:off x="8074152" y="1920240"/>
+            <a:ext cx="2825496" cy="1188720"/>
           </a:xfrm>
           <a:prstGeom prst="rect">
             <a:avLst/>
@@ -4073,7 +4162,7 @@
               <a:buNone/>
             </a:pPr>
             <a:r>
-              <a:rPr lang="en-US" sz="1250" dirty="0">
+              <a:rPr lang="en-US" sz="1550" dirty="0">
                 <a:solidFill>
                   <a:srgbClr val="17364A"/>
                 </a:solidFill>
@@ -4083,13 +4172,13 @@
               </a:rPr>
               <a:t>Causal inference begins with a clearly framed question.</a:t>
             </a:r>
-            <a:endParaRPr lang="en-US" sz="1250" dirty="0"/>
-          </a:p>
-        </p:txBody>
-      </p:sp>
-      <p:sp>
-        <p:nvSpPr>
-          <p:cNvPr id="14" name="Shape 12"/>
+            <a:endParaRPr lang="en-US" sz="1550" dirty="0"/>
+          </a:p>
+        </p:txBody>
+      </p:sp>
+      <p:sp>
+        <p:nvSpPr>
+          <p:cNvPr id="15" name="Shape 13"/>
           <p:cNvSpPr/>
           <p:nvPr/>
         </p:nvSpPr>
@@ -4116,14 +4205,14 @@
       </p:sp>
       <p:sp>
         <p:nvSpPr>
-          <p:cNvPr id="15" name="Text 13"/>
+          <p:cNvPr id="16" name="Text 14"/>
           <p:cNvSpPr/>
           <p:nvPr/>
         </p:nvSpPr>
         <p:spPr>
           <a:xfrm>
             <a:off x="8074152" y="3666744"/>
-            <a:ext cx="2825496" cy="201168"/>
+            <a:ext cx="2825496" cy="256032"/>
           </a:xfrm>
           <a:prstGeom prst="rect">
             <a:avLst/>
@@ -4139,7 +4228,7 @@
               <a:buNone/>
             </a:pPr>
             <a:r>
-              <a:rPr lang="en-US" sz="950" b="1" dirty="0">
+              <a:rPr lang="en-US" sz="1300" b="1" dirty="0">
                 <a:solidFill>
                   <a:srgbClr val="0068B7"/>
                 </a:solidFill>
@@ -4149,20 +4238,20 @@
               </a:rPr>
               <a:t>Use this for</a:t>
             </a:r>
-            <a:endParaRPr lang="en-US" sz="950" dirty="0"/>
-          </a:p>
-        </p:txBody>
-      </p:sp>
-      <p:sp>
-        <p:nvSpPr>
-          <p:cNvPr id="16" name="Text 14"/>
-          <p:cNvSpPr/>
-          <p:nvPr/>
-        </p:nvSpPr>
-        <p:spPr>
-          <a:xfrm>
-            <a:off x="8074152" y="3959352"/>
-            <a:ext cx="2825496" cy="1170432"/>
+            <a:endParaRPr lang="en-US" sz="1300" dirty="0"/>
+          </a:p>
+        </p:txBody>
+      </p:sp>
+      <p:sp>
+        <p:nvSpPr>
+          <p:cNvPr id="17" name="Text 15"/>
+          <p:cNvSpPr/>
+          <p:nvPr/>
+        </p:nvSpPr>
+        <p:spPr>
+          <a:xfrm>
+            <a:off x="8074152" y="4023360"/>
+            <a:ext cx="2825496" cy="1097280"/>
           </a:xfrm>
           <a:prstGeom prst="rect">
             <a:avLst/>
@@ -4180,7 +4269,7 @@
               <a:buNone/>
             </a:pPr>
             <a:r>
-              <a:rPr lang="en-US" sz="1250" dirty="0">
+              <a:rPr lang="en-US" sz="1550" dirty="0">
                 <a:solidFill>
                   <a:srgbClr val="17364A"/>
                 </a:solidFill>
@@ -4190,7 +4279,7 @@
               </a:rPr>
               <a:t>Connect the concept to public health decisions, safeguards, documentation, or implementation work.</a:t>
             </a:r>
-            <a:endParaRPr lang="en-US" sz="1250" dirty="0"/>
+            <a:endParaRPr lang="en-US" sz="1550" dirty="0"/>
           </a:p>
         </p:txBody>
       </p:sp>
@@ -4387,7 +4476,7 @@
                 <a:ea typeface="Aptos" pitchFamily="34" charset="-122"/>
                 <a:cs typeface="Aptos" pitchFamily="34" charset="-120"/>
               </a:rPr>
-              <a:t>© Paula Soper</a:t>
+              <a:t>Â© Paula Soper</a:t>
             </a:r>
             <a:endParaRPr lang="en-US" sz="800" dirty="0"/>
           </a:p>
@@ -4395,7 +4484,46 @@
       </p:sp>
       <p:sp>
         <p:nvSpPr>
-          <p:cNvPr id="7" name="Shape 5"/>
+          <p:cNvPr id="7" name="Text 5"/>
+          <p:cNvSpPr/>
+          <p:nvPr/>
+        </p:nvSpPr>
+        <p:spPr>
+          <a:xfrm>
+            <a:off x="11137392" y="6510528"/>
+            <a:ext cx="411480" cy="201168"/>
+          </a:xfrm>
+          <a:prstGeom prst="rect">
+            <a:avLst/>
+          </a:prstGeom>
+          <a:noFill/>
+          <a:ln/>
+        </p:spPr>
+        <p:txBody>
+          <a:bodyPr wrap="square" lIns="0" tIns="0" rIns="0" bIns="0" rtlCol="0" anchor="ctr"/>
+          <a:lstStyle/>
+          <a:p>
+            <a:pPr algn="r" indent="0" marL="0">
+              <a:buNone/>
+            </a:pPr>
+            <a:r>
+              <a:rPr lang="en-US" sz="900" dirty="0">
+                <a:solidFill>
+                  <a:srgbClr val="5F7181"/>
+                </a:solidFill>
+                <a:latin typeface="Aptos" pitchFamily="34" charset="0"/>
+                <a:ea typeface="Aptos" pitchFamily="34" charset="-122"/>
+                <a:cs typeface="Aptos" pitchFamily="34" charset="-120"/>
+              </a:rPr>
+              <a:t>12</a:t>
+            </a:r>
+            <a:endParaRPr lang="en-US" sz="900" dirty="0"/>
+          </a:p>
+        </p:txBody>
+      </p:sp>
+      <p:sp>
+        <p:nvSpPr>
+          <p:cNvPr id="8" name="Shape 6"/>
           <p:cNvSpPr/>
           <p:nvPr/>
         </p:nvSpPr>
@@ -4420,7 +4548,7 @@
       </p:sp>
       <p:sp>
         <p:nvSpPr>
-          <p:cNvPr id="8" name="Text 6"/>
+          <p:cNvPr id="9" name="Text 7"/>
           <p:cNvSpPr/>
           <p:nvPr/>
         </p:nvSpPr>
@@ -4459,14 +4587,14 @@
       </p:sp>
       <p:sp>
         <p:nvSpPr>
-          <p:cNvPr id="9" name="Text 7"/>
+          <p:cNvPr id="10" name="Text 8"/>
           <p:cNvSpPr/>
           <p:nvPr/>
         </p:nvSpPr>
         <p:spPr>
           <a:xfrm>
             <a:off x="640080" y="621792"/>
-            <a:ext cx="10881360" cy="566928"/>
+            <a:ext cx="10881360" cy="713232"/>
           </a:xfrm>
           <a:prstGeom prst="rect">
             <a:avLst/>
@@ -4484,7 +4612,7 @@
               <a:buNone/>
             </a:pPr>
             <a:r>
-              <a:rPr lang="en-US" sz="2700" b="1" dirty="0">
+              <a:rPr lang="en-US" sz="3400" b="1" dirty="0">
                 <a:solidFill>
                   <a:srgbClr val="003A63"/>
                 </a:solidFill>
@@ -4494,20 +4622,20 @@
               </a:rPr>
               <a:t>Risks, Failure Modes, and Guardrails</a:t>
             </a:r>
-            <a:endParaRPr lang="en-US" sz="2700" dirty="0"/>
-          </a:p>
-        </p:txBody>
-      </p:sp>
-      <p:sp>
-        <p:nvSpPr>
-          <p:cNvPr id="10" name="Text 8"/>
-          <p:cNvSpPr/>
-          <p:nvPr/>
-        </p:nvSpPr>
-        <p:spPr>
-          <a:xfrm>
-            <a:off x="868680" y="1417320"/>
-            <a:ext cx="6675120" cy="4434840"/>
+            <a:endParaRPr lang="en-US" sz="3400" dirty="0"/>
+          </a:p>
+        </p:txBody>
+      </p:sp>
+      <p:sp>
+        <p:nvSpPr>
+          <p:cNvPr id="11" name="Text 9"/>
+          <p:cNvSpPr/>
+          <p:nvPr/>
+        </p:nvSpPr>
+        <p:spPr>
+          <a:xfrm>
+            <a:off x="868680" y="1508760"/>
+            <a:ext cx="6537960" cy="4160520"/>
           </a:xfrm>
           <a:prstGeom prst="rect">
             <a:avLst/>
@@ -4522,7 +4650,7 @@
           <a:lstStyle/>
           <a:p>
             <a:r>
-              <a:rPr lang="en-US" sz="1700" dirty="0">
+              <a:rPr lang="en-US" sz="2100" dirty="0">
                 <a:solidFill>
                   <a:srgbClr val="17364A"/>
                 </a:solidFill>
@@ -4532,11 +4660,11 @@
               </a:rPr>
               <a:t>The main failure mode is causal overreach.</a:t>
             </a:r>
-            <a:endParaRPr lang="en-US" sz="1700" dirty="0"/>
-          </a:p>
-          <a:p>
-            <a:r>
-              <a:rPr lang="en-US" sz="1700" dirty="0">
+            <a:endParaRPr lang="en-US" sz="2100" dirty="0"/>
+          </a:p>
+          <a:p>
+            <a:r>
+              <a:rPr lang="en-US" sz="2100" dirty="0">
                 <a:solidFill>
                   <a:srgbClr val="17364A"/>
                 </a:solidFill>
@@ -4544,13 +4672,13 @@
                 <a:ea typeface="Aptos" pitchFamily="34" charset="-122"/>
                 <a:cs typeface="Aptos" pitchFamily="34" charset="-120"/>
               </a:rPr>
-              <a:t>A dashboard or AI report may state that a program reduced disease, improved access, or changed behavior when the evidence.</a:t>
-            </a:r>
-            <a:endParaRPr lang="en-US" sz="1700" dirty="0"/>
-          </a:p>
-          <a:p>
-            <a:r>
-              <a:rPr lang="en-US" sz="1700" dirty="0">
+              <a:t>A dashboard or AI report may state that a program reduced disease, improved access, or changed behavior.</a:t>
+            </a:r>
+            <a:endParaRPr lang="en-US" sz="2100" dirty="0"/>
+          </a:p>
+          <a:p>
+            <a:r>
+              <a:rPr lang="en-US" sz="2100" dirty="0">
                 <a:solidFill>
                   <a:srgbClr val="17364A"/>
                 </a:solidFill>
@@ -4558,29 +4686,15 @@
                 <a:ea typeface="Aptos" pitchFamily="34" charset="-122"/>
                 <a:cs typeface="Aptos" pitchFamily="34" charset="-120"/>
               </a:rPr>
-              <a:t>A guardrail is to require causal language review before results are used in reports, funding decisions, policy.</a:t>
-            </a:r>
-            <a:endParaRPr lang="en-US" sz="1700" dirty="0"/>
-          </a:p>
-          <a:p>
-            <a:r>
-              <a:rPr lang="en-US" sz="1700" dirty="0">
-                <a:solidFill>
-                  <a:srgbClr val="17364A"/>
-                </a:solidFill>
-                <a:latin typeface="Aptos" pitchFamily="34" charset="0"/>
-                <a:ea typeface="Aptos" pitchFamily="34" charset="-122"/>
-                <a:cs typeface="Aptos" pitchFamily="34" charset="-120"/>
-              </a:rPr>
-              <a:t>Another risk is inequitable inference.</a:t>
-            </a:r>
-            <a:endParaRPr lang="en-US" sz="1700" dirty="0"/>
-          </a:p>
-        </p:txBody>
-      </p:sp>
-      <p:sp>
-        <p:nvSpPr>
-          <p:cNvPr id="11" name="Shape 9"/>
+              <a:t>A guardrail is to require causal language review before results are used in reports, funding decisions,.</a:t>
+            </a:r>
+            <a:endParaRPr lang="en-US" sz="2100" dirty="0"/>
+          </a:p>
+        </p:txBody>
+      </p:sp>
+      <p:sp>
+        <p:nvSpPr>
+          <p:cNvPr id="12" name="Shape 10"/>
           <p:cNvSpPr/>
           <p:nvPr/>
         </p:nvSpPr>
@@ -4607,14 +4721,14 @@
       </p:sp>
       <p:sp>
         <p:nvSpPr>
-          <p:cNvPr id="12" name="Text 10"/>
+          <p:cNvPr id="13" name="Text 11"/>
           <p:cNvSpPr/>
           <p:nvPr/>
         </p:nvSpPr>
         <p:spPr>
           <a:xfrm>
             <a:off x="8074152" y="1563624"/>
-            <a:ext cx="2825496" cy="201168"/>
+            <a:ext cx="2825496" cy="256032"/>
           </a:xfrm>
           <a:prstGeom prst="rect">
             <a:avLst/>
@@ -4630,7 +4744,7 @@
               <a:buNone/>
             </a:pPr>
             <a:r>
-              <a:rPr lang="en-US" sz="950" b="1" dirty="0">
+              <a:rPr lang="en-US" sz="1300" b="1" dirty="0">
                 <a:solidFill>
                   <a:srgbClr val="0068B7"/>
                 </a:solidFill>
@@ -4640,20 +4754,20 @@
               </a:rPr>
               <a:t>Key idea</a:t>
             </a:r>
-            <a:endParaRPr lang="en-US" sz="950" dirty="0"/>
-          </a:p>
-        </p:txBody>
-      </p:sp>
-      <p:sp>
-        <p:nvSpPr>
-          <p:cNvPr id="13" name="Text 11"/>
-          <p:cNvSpPr/>
-          <p:nvPr/>
-        </p:nvSpPr>
-        <p:spPr>
-          <a:xfrm>
-            <a:off x="8074152" y="1856232"/>
-            <a:ext cx="2825496" cy="1261872"/>
+            <a:endParaRPr lang="en-US" sz="1300" dirty="0"/>
+          </a:p>
+        </p:txBody>
+      </p:sp>
+      <p:sp>
+        <p:nvSpPr>
+          <p:cNvPr id="14" name="Text 12"/>
+          <p:cNvSpPr/>
+          <p:nvPr/>
+        </p:nvSpPr>
+        <p:spPr>
+          <a:xfrm>
+            <a:off x="8074152" y="1920240"/>
+            <a:ext cx="2825496" cy="1188720"/>
           </a:xfrm>
           <a:prstGeom prst="rect">
             <a:avLst/>
@@ -4671,7 +4785,7 @@
               <a:buNone/>
             </a:pPr>
             <a:r>
-              <a:rPr lang="en-US" sz="1250" dirty="0">
+              <a:rPr lang="en-US" sz="1550" dirty="0">
                 <a:solidFill>
                   <a:srgbClr val="17364A"/>
                 </a:solidFill>
@@ -4681,13 +4795,13 @@
               </a:rPr>
               <a:t>The main failure mode is causal overreach.</a:t>
             </a:r>
-            <a:endParaRPr lang="en-US" sz="1250" dirty="0"/>
-          </a:p>
-        </p:txBody>
-      </p:sp>
-      <p:sp>
-        <p:nvSpPr>
-          <p:cNvPr id="14" name="Shape 12"/>
+            <a:endParaRPr lang="en-US" sz="1550" dirty="0"/>
+          </a:p>
+        </p:txBody>
+      </p:sp>
+      <p:sp>
+        <p:nvSpPr>
+          <p:cNvPr id="15" name="Shape 13"/>
           <p:cNvSpPr/>
           <p:nvPr/>
         </p:nvSpPr>
@@ -4714,14 +4828,14 @@
       </p:sp>
       <p:sp>
         <p:nvSpPr>
-          <p:cNvPr id="15" name="Text 13"/>
+          <p:cNvPr id="16" name="Text 14"/>
           <p:cNvSpPr/>
           <p:nvPr/>
         </p:nvSpPr>
         <p:spPr>
           <a:xfrm>
             <a:off x="8074152" y="3666744"/>
-            <a:ext cx="2825496" cy="201168"/>
+            <a:ext cx="2825496" cy="256032"/>
           </a:xfrm>
           <a:prstGeom prst="rect">
             <a:avLst/>
@@ -4737,7 +4851,7 @@
               <a:buNone/>
             </a:pPr>
             <a:r>
-              <a:rPr lang="en-US" sz="950" b="1" dirty="0">
+              <a:rPr lang="en-US" sz="1300" b="1" dirty="0">
                 <a:solidFill>
                   <a:srgbClr val="0068B7"/>
                 </a:solidFill>
@@ -4747,20 +4861,20 @@
               </a:rPr>
               <a:t>Use this for</a:t>
             </a:r>
-            <a:endParaRPr lang="en-US" sz="950" dirty="0"/>
-          </a:p>
-        </p:txBody>
-      </p:sp>
-      <p:sp>
-        <p:nvSpPr>
-          <p:cNvPr id="16" name="Text 14"/>
-          <p:cNvSpPr/>
-          <p:nvPr/>
-        </p:nvSpPr>
-        <p:spPr>
-          <a:xfrm>
-            <a:off x="8074152" y="3959352"/>
-            <a:ext cx="2825496" cy="1170432"/>
+            <a:endParaRPr lang="en-US" sz="1300" dirty="0"/>
+          </a:p>
+        </p:txBody>
+      </p:sp>
+      <p:sp>
+        <p:nvSpPr>
+          <p:cNvPr id="17" name="Text 15"/>
+          <p:cNvSpPr/>
+          <p:nvPr/>
+        </p:nvSpPr>
+        <p:spPr>
+          <a:xfrm>
+            <a:off x="8074152" y="4023360"/>
+            <a:ext cx="2825496" cy="1097280"/>
           </a:xfrm>
           <a:prstGeom prst="rect">
             <a:avLst/>
@@ -4778,7 +4892,7 @@
               <a:buNone/>
             </a:pPr>
             <a:r>
-              <a:rPr lang="en-US" sz="1250" dirty="0">
+              <a:rPr lang="en-US" sz="1550" dirty="0">
                 <a:solidFill>
                   <a:srgbClr val="17364A"/>
                 </a:solidFill>
@@ -4788,7 +4902,7 @@
               </a:rPr>
               <a:t>Connect the concept to public health decisions, safeguards, documentation, or implementation work.</a:t>
             </a:r>
-            <a:endParaRPr lang="en-US" sz="1250" dirty="0"/>
+            <a:endParaRPr lang="en-US" sz="1550" dirty="0"/>
           </a:p>
         </p:txBody>
       </p:sp>
@@ -4985,7 +5099,7 @@
                 <a:ea typeface="Aptos" pitchFamily="34" charset="-122"/>
                 <a:cs typeface="Aptos" pitchFamily="34" charset="-120"/>
               </a:rPr>
-              <a:t>© Paula Soper</a:t>
+              <a:t>Â© Paula Soper</a:t>
             </a:r>
             <a:endParaRPr lang="en-US" sz="800" dirty="0"/>
           </a:p>
@@ -4993,7 +5107,46 @@
       </p:sp>
       <p:sp>
         <p:nvSpPr>
-          <p:cNvPr id="7" name="Shape 5"/>
+          <p:cNvPr id="7" name="Text 5"/>
+          <p:cNvSpPr/>
+          <p:nvPr/>
+        </p:nvSpPr>
+        <p:spPr>
+          <a:xfrm>
+            <a:off x="11137392" y="6510528"/>
+            <a:ext cx="411480" cy="201168"/>
+          </a:xfrm>
+          <a:prstGeom prst="rect">
+            <a:avLst/>
+          </a:prstGeom>
+          <a:noFill/>
+          <a:ln/>
+        </p:spPr>
+        <p:txBody>
+          <a:bodyPr wrap="square" lIns="0" tIns="0" rIns="0" bIns="0" rtlCol="0" anchor="ctr"/>
+          <a:lstStyle/>
+          <a:p>
+            <a:pPr algn="r" indent="0" marL="0">
+              <a:buNone/>
+            </a:pPr>
+            <a:r>
+              <a:rPr lang="en-US" sz="900" dirty="0">
+                <a:solidFill>
+                  <a:srgbClr val="5F7181"/>
+                </a:solidFill>
+                <a:latin typeface="Aptos" pitchFamily="34" charset="0"/>
+                <a:ea typeface="Aptos" pitchFamily="34" charset="-122"/>
+                <a:cs typeface="Aptos" pitchFamily="34" charset="-120"/>
+              </a:rPr>
+              <a:t>13</a:t>
+            </a:r>
+            <a:endParaRPr lang="en-US" sz="900" dirty="0"/>
+          </a:p>
+        </p:txBody>
+      </p:sp>
+      <p:sp>
+        <p:nvSpPr>
+          <p:cNvPr id="8" name="Shape 6"/>
           <p:cNvSpPr/>
           <p:nvPr/>
         </p:nvSpPr>
@@ -5018,7 +5171,7 @@
       </p:sp>
       <p:sp>
         <p:nvSpPr>
-          <p:cNvPr id="8" name="Text 6"/>
+          <p:cNvPr id="9" name="Text 7"/>
           <p:cNvSpPr/>
           <p:nvPr/>
         </p:nvSpPr>
@@ -5057,14 +5210,14 @@
       </p:sp>
       <p:sp>
         <p:nvSpPr>
-          <p:cNvPr id="9" name="Text 7"/>
+          <p:cNvPr id="10" name="Text 8"/>
           <p:cNvSpPr/>
           <p:nvPr/>
         </p:nvSpPr>
         <p:spPr>
           <a:xfrm>
             <a:off x="640080" y="621792"/>
-            <a:ext cx="10881360" cy="566928"/>
+            <a:ext cx="10881360" cy="713232"/>
           </a:xfrm>
           <a:prstGeom prst="rect">
             <a:avLst/>
@@ -5082,7 +5235,7 @@
               <a:buNone/>
             </a:pPr>
             <a:r>
-              <a:rPr lang="en-US" sz="2700" b="1" dirty="0">
+              <a:rPr lang="en-US" sz="3400" b="1" dirty="0">
                 <a:solidFill>
                   <a:srgbClr val="003A63"/>
                 </a:solidFill>
@@ -5092,20 +5245,20 @@
               </a:rPr>
               <a:t>Application to AI-Supported Workflows</a:t>
             </a:r>
-            <a:endParaRPr lang="en-US" sz="2700" dirty="0"/>
-          </a:p>
-        </p:txBody>
-      </p:sp>
-      <p:sp>
-        <p:nvSpPr>
-          <p:cNvPr id="10" name="Text 8"/>
-          <p:cNvSpPr/>
-          <p:nvPr/>
-        </p:nvSpPr>
-        <p:spPr>
-          <a:xfrm>
-            <a:off x="868680" y="1417320"/>
-            <a:ext cx="6675120" cy="4434840"/>
+            <a:endParaRPr lang="en-US" sz="3400" dirty="0"/>
+          </a:p>
+        </p:txBody>
+      </p:sp>
+      <p:sp>
+        <p:nvSpPr>
+          <p:cNvPr id="11" name="Text 9"/>
+          <p:cNvSpPr/>
+          <p:nvPr/>
+        </p:nvSpPr>
+        <p:spPr>
+          <a:xfrm>
+            <a:off x="868680" y="1508760"/>
+            <a:ext cx="6537960" cy="4160520"/>
           </a:xfrm>
           <a:prstGeom prst="rect">
             <a:avLst/>
@@ -5120,7 +5273,7 @@
           <a:lstStyle/>
           <a:p>
             <a:r>
-              <a:rPr lang="en-US" sz="1700" dirty="0">
+              <a:rPr lang="en-US" sz="2100" dirty="0">
                 <a:solidFill>
                   <a:srgbClr val="17364A"/>
                 </a:solidFill>
@@ -5128,13 +5281,13 @@
                 <a:ea typeface="Aptos" pitchFamily="34" charset="-122"/>
                 <a:cs typeface="Aptos" pitchFamily="34" charset="-120"/>
               </a:rPr>
-              <a:t>Predictive models can identify risk, but causal inference is needed to decide what action is likely to change that risk.</a:t>
-            </a:r>
-            <a:endParaRPr lang="en-US" sz="1700" dirty="0"/>
-          </a:p>
-          <a:p>
-            <a:r>
-              <a:rPr lang="en-US" sz="1700" dirty="0">
+              <a:t>Predictive models can identify risk, but causal inference is needed to decide what action is likely to.</a:t>
+            </a:r>
+            <a:endParaRPr lang="en-US" sz="2100" dirty="0"/>
+          </a:p>
+          <a:p>
+            <a:r>
+              <a:rPr lang="en-US" sz="2100" dirty="0">
                 <a:solidFill>
                   <a:srgbClr val="17364A"/>
                 </a:solidFill>
@@ -5142,13 +5295,13 @@
                 <a:ea typeface="Aptos" pitchFamily="34" charset="-122"/>
                 <a:cs typeface="Aptos" pitchFamily="34" charset="-120"/>
               </a:rPr>
-              <a:t>Generative AI may help draft evaluation questions or summarize literature, but humans must verify methods and assumptions.</a:t>
-            </a:r>
-            <a:endParaRPr lang="en-US" sz="1700" dirty="0"/>
-          </a:p>
-          <a:p>
-            <a:r>
-              <a:rPr lang="en-US" sz="1700" dirty="0">
+              <a:t>Generative AI may help draft evaluation questions or summarize literature, but humans must verify.</a:t>
+            </a:r>
+            <a:endParaRPr lang="en-US" sz="2100" dirty="0"/>
+          </a:p>
+          <a:p>
+            <a:r>
+              <a:rPr lang="en-US" sz="2100" dirty="0">
                 <a:solidFill>
                   <a:srgbClr val="17364A"/>
                 </a:solidFill>
@@ -5156,15 +5309,15 @@
                 <a:ea typeface="Aptos" pitchFamily="34" charset="-122"/>
                 <a:cs typeface="Aptos" pitchFamily="34" charset="-120"/>
               </a:rPr>
-              <a:t>AI-supported decision-making should label outputs clearly as prediction, association, causal evidence, or hypothesis.</a:t>
-            </a:r>
-            <a:endParaRPr lang="en-US" sz="1700" dirty="0"/>
-          </a:p>
-        </p:txBody>
-      </p:sp>
-      <p:sp>
-        <p:nvSpPr>
-          <p:cNvPr id="11" name="Shape 9"/>
+              <a:t>AI-supported decision-making should label outputs clearly as prediction, association, causal evidence,.</a:t>
+            </a:r>
+            <a:endParaRPr lang="en-US" sz="2100" dirty="0"/>
+          </a:p>
+        </p:txBody>
+      </p:sp>
+      <p:sp>
+        <p:nvSpPr>
+          <p:cNvPr id="12" name="Shape 10"/>
           <p:cNvSpPr/>
           <p:nvPr/>
         </p:nvSpPr>
@@ -5191,14 +5344,14 @@
       </p:sp>
       <p:sp>
         <p:nvSpPr>
-          <p:cNvPr id="12" name="Text 10"/>
+          <p:cNvPr id="13" name="Text 11"/>
           <p:cNvSpPr/>
           <p:nvPr/>
         </p:nvSpPr>
         <p:spPr>
           <a:xfrm>
             <a:off x="8074152" y="1563624"/>
-            <a:ext cx="2825496" cy="201168"/>
+            <a:ext cx="2825496" cy="256032"/>
           </a:xfrm>
           <a:prstGeom prst="rect">
             <a:avLst/>
@@ -5214,7 +5367,7 @@
               <a:buNone/>
             </a:pPr>
             <a:r>
-              <a:rPr lang="en-US" sz="950" b="1" dirty="0">
+              <a:rPr lang="en-US" sz="1300" b="1" dirty="0">
                 <a:solidFill>
                   <a:srgbClr val="0068B7"/>
                 </a:solidFill>
@@ -5224,20 +5377,20 @@
               </a:rPr>
               <a:t>Key idea</a:t>
             </a:r>
-            <a:endParaRPr lang="en-US" sz="950" dirty="0"/>
-          </a:p>
-        </p:txBody>
-      </p:sp>
-      <p:sp>
-        <p:nvSpPr>
-          <p:cNvPr id="13" name="Text 11"/>
-          <p:cNvSpPr/>
-          <p:nvPr/>
-        </p:nvSpPr>
-        <p:spPr>
-          <a:xfrm>
-            <a:off x="8074152" y="1856232"/>
-            <a:ext cx="2825496" cy="1261872"/>
+            <a:endParaRPr lang="en-US" sz="1300" dirty="0"/>
+          </a:p>
+        </p:txBody>
+      </p:sp>
+      <p:sp>
+        <p:nvSpPr>
+          <p:cNvPr id="14" name="Text 12"/>
+          <p:cNvSpPr/>
+          <p:nvPr/>
+        </p:nvSpPr>
+        <p:spPr>
+          <a:xfrm>
+            <a:off x="8074152" y="1920240"/>
+            <a:ext cx="2825496" cy="1188720"/>
           </a:xfrm>
           <a:prstGeom prst="rect">
             <a:avLst/>
@@ -5255,7 +5408,7 @@
               <a:buNone/>
             </a:pPr>
             <a:r>
-              <a:rPr lang="en-US" sz="1250" dirty="0">
+              <a:rPr lang="en-US" sz="1550" dirty="0">
                 <a:solidFill>
                   <a:srgbClr val="17364A"/>
                 </a:solidFill>
@@ -5263,15 +5416,15 @@
                 <a:ea typeface="Aptos" pitchFamily="34" charset="-122"/>
                 <a:cs typeface="Aptos" pitchFamily="34" charset="-120"/>
               </a:rPr>
-              <a:t>Predictive models can identify risk, but causal inference is needed to decide what action is likely to change that risk.</a:t>
-            </a:r>
-            <a:endParaRPr lang="en-US" sz="1250" dirty="0"/>
-          </a:p>
-        </p:txBody>
-      </p:sp>
-      <p:sp>
-        <p:nvSpPr>
-          <p:cNvPr id="14" name="Shape 12"/>
+              <a:t>Predictive models can identify risk, but causal inference is needed to decide what action is likely to.</a:t>
+            </a:r>
+            <a:endParaRPr lang="en-US" sz="1550" dirty="0"/>
+          </a:p>
+        </p:txBody>
+      </p:sp>
+      <p:sp>
+        <p:nvSpPr>
+          <p:cNvPr id="15" name="Shape 13"/>
           <p:cNvSpPr/>
           <p:nvPr/>
         </p:nvSpPr>
@@ -5298,14 +5451,14 @@
       </p:sp>
       <p:sp>
         <p:nvSpPr>
-          <p:cNvPr id="15" name="Text 13"/>
+          <p:cNvPr id="16" name="Text 14"/>
           <p:cNvSpPr/>
           <p:nvPr/>
         </p:nvSpPr>
         <p:spPr>
           <a:xfrm>
             <a:off x="8074152" y="3666744"/>
-            <a:ext cx="2825496" cy="201168"/>
+            <a:ext cx="2825496" cy="256032"/>
           </a:xfrm>
           <a:prstGeom prst="rect">
             <a:avLst/>
@@ -5321,7 +5474,7 @@
               <a:buNone/>
             </a:pPr>
             <a:r>
-              <a:rPr lang="en-US" sz="950" b="1" dirty="0">
+              <a:rPr lang="en-US" sz="1300" b="1" dirty="0">
                 <a:solidFill>
                   <a:srgbClr val="0068B7"/>
                 </a:solidFill>
@@ -5331,20 +5484,20 @@
               </a:rPr>
               <a:t>Use this for</a:t>
             </a:r>
-            <a:endParaRPr lang="en-US" sz="950" dirty="0"/>
-          </a:p>
-        </p:txBody>
-      </p:sp>
-      <p:sp>
-        <p:nvSpPr>
-          <p:cNvPr id="16" name="Text 14"/>
-          <p:cNvSpPr/>
-          <p:nvPr/>
-        </p:nvSpPr>
-        <p:spPr>
-          <a:xfrm>
-            <a:off x="8074152" y="3959352"/>
-            <a:ext cx="2825496" cy="1170432"/>
+            <a:endParaRPr lang="en-US" sz="1300" dirty="0"/>
+          </a:p>
+        </p:txBody>
+      </p:sp>
+      <p:sp>
+        <p:nvSpPr>
+          <p:cNvPr id="17" name="Text 15"/>
+          <p:cNvSpPr/>
+          <p:nvPr/>
+        </p:nvSpPr>
+        <p:spPr>
+          <a:xfrm>
+            <a:off x="8074152" y="4023360"/>
+            <a:ext cx="2825496" cy="1097280"/>
           </a:xfrm>
           <a:prstGeom prst="rect">
             <a:avLst/>
@@ -5362,7 +5515,7 @@
               <a:buNone/>
             </a:pPr>
             <a:r>
-              <a:rPr lang="en-US" sz="1250" dirty="0">
+              <a:rPr lang="en-US" sz="1550" dirty="0">
                 <a:solidFill>
                   <a:srgbClr val="17364A"/>
                 </a:solidFill>
@@ -5372,7 +5525,7 @@
               </a:rPr>
               <a:t>Connect the concept to public health decisions, safeguards, documentation, or implementation work.</a:t>
             </a:r>
-            <a:endParaRPr lang="en-US" sz="1250" dirty="0"/>
+            <a:endParaRPr lang="en-US" sz="1550" dirty="0"/>
           </a:p>
         </p:txBody>
       </p:sp>
@@ -5569,7 +5722,7 @@
                 <a:ea typeface="Aptos" pitchFamily="34" charset="-122"/>
                 <a:cs typeface="Aptos" pitchFamily="34" charset="-120"/>
               </a:rPr>
-              <a:t>© Paula Soper</a:t>
+              <a:t>Â© Paula Soper</a:t>
             </a:r>
             <a:endParaRPr lang="en-US" sz="800" dirty="0"/>
           </a:p>
@@ -5577,7 +5730,46 @@
       </p:sp>
       <p:sp>
         <p:nvSpPr>
-          <p:cNvPr id="7" name="Shape 5"/>
+          <p:cNvPr id="7" name="Text 5"/>
+          <p:cNvSpPr/>
+          <p:nvPr/>
+        </p:nvSpPr>
+        <p:spPr>
+          <a:xfrm>
+            <a:off x="11137392" y="6510528"/>
+            <a:ext cx="411480" cy="201168"/>
+          </a:xfrm>
+          <a:prstGeom prst="rect">
+            <a:avLst/>
+          </a:prstGeom>
+          <a:noFill/>
+          <a:ln/>
+        </p:spPr>
+        <p:txBody>
+          <a:bodyPr wrap="square" lIns="0" tIns="0" rIns="0" bIns="0" rtlCol="0" anchor="ctr"/>
+          <a:lstStyle/>
+          <a:p>
+            <a:pPr algn="r" indent="0" marL="0">
+              <a:buNone/>
+            </a:pPr>
+            <a:r>
+              <a:rPr lang="en-US" sz="900" dirty="0">
+                <a:solidFill>
+                  <a:srgbClr val="5F7181"/>
+                </a:solidFill>
+                <a:latin typeface="Aptos" pitchFamily="34" charset="0"/>
+                <a:ea typeface="Aptos" pitchFamily="34" charset="-122"/>
+                <a:cs typeface="Aptos" pitchFamily="34" charset="-120"/>
+              </a:rPr>
+              <a:t>14</a:t>
+            </a:r>
+            <a:endParaRPr lang="en-US" sz="900" dirty="0"/>
+          </a:p>
+        </p:txBody>
+      </p:sp>
+      <p:sp>
+        <p:nvSpPr>
+          <p:cNvPr id="8" name="Shape 6"/>
           <p:cNvSpPr/>
           <p:nvPr/>
         </p:nvSpPr>
@@ -5602,7 +5794,7 @@
       </p:sp>
       <p:sp>
         <p:nvSpPr>
-          <p:cNvPr id="8" name="Text 6"/>
+          <p:cNvPr id="9" name="Text 7"/>
           <p:cNvSpPr/>
           <p:nvPr/>
         </p:nvSpPr>
@@ -5641,14 +5833,14 @@
       </p:sp>
       <p:sp>
         <p:nvSpPr>
-          <p:cNvPr id="9" name="Text 7"/>
+          <p:cNvPr id="10" name="Text 8"/>
           <p:cNvSpPr/>
           <p:nvPr/>
         </p:nvSpPr>
         <p:spPr>
           <a:xfrm>
             <a:off x="640080" y="621792"/>
-            <a:ext cx="10881360" cy="566928"/>
+            <a:ext cx="10881360" cy="713232"/>
           </a:xfrm>
           <a:prstGeom prst="rect">
             <a:avLst/>
@@ -5666,7 +5858,7 @@
               <a:buNone/>
             </a:pPr>
             <a:r>
-              <a:rPr lang="en-US" sz="2700" b="1" dirty="0">
+              <a:rPr lang="en-US" sz="3400" b="1" dirty="0">
                 <a:solidFill>
                   <a:srgbClr val="003A63"/>
                 </a:solidFill>
@@ -5676,20 +5868,20 @@
               </a:rPr>
               <a:t>Reflection Questions</a:t>
             </a:r>
-            <a:endParaRPr lang="en-US" sz="2700" dirty="0"/>
-          </a:p>
-        </p:txBody>
-      </p:sp>
-      <p:sp>
-        <p:nvSpPr>
-          <p:cNvPr id="10" name="Text 8"/>
-          <p:cNvSpPr/>
-          <p:nvPr/>
-        </p:nvSpPr>
-        <p:spPr>
-          <a:xfrm>
-            <a:off x="868680" y="1417320"/>
-            <a:ext cx="6675120" cy="4434840"/>
+            <a:endParaRPr lang="en-US" sz="3400" dirty="0"/>
+          </a:p>
+        </p:txBody>
+      </p:sp>
+      <p:sp>
+        <p:nvSpPr>
+          <p:cNvPr id="11" name="Text 9"/>
+          <p:cNvSpPr/>
+          <p:nvPr/>
+        </p:nvSpPr>
+        <p:spPr>
+          <a:xfrm>
+            <a:off x="868680" y="1508760"/>
+            <a:ext cx="6537960" cy="4160520"/>
           </a:xfrm>
           <a:prstGeom prst="rect">
             <a:avLst/>
@@ -5704,7 +5896,7 @@
           <a:lstStyle/>
           <a:p>
             <a:r>
-              <a:rPr lang="en-US" sz="1700" dirty="0">
+              <a:rPr lang="en-US" sz="2100" dirty="0">
                 <a:solidFill>
                   <a:srgbClr val="17364A"/>
                 </a:solidFill>
@@ -5714,11 +5906,11 @@
               </a:rPr>
               <a:t>What AI outputs in your agency could be mistaken for causal evidence?</a:t>
             </a:r>
-            <a:endParaRPr lang="en-US" sz="1700" dirty="0"/>
-          </a:p>
-          <a:p>
-            <a:r>
-              <a:rPr lang="en-US" sz="1700" dirty="0">
+            <a:endParaRPr lang="en-US" sz="2100" dirty="0"/>
+          </a:p>
+          <a:p>
+            <a:r>
+              <a:rPr lang="en-US" sz="2100" dirty="0">
                 <a:solidFill>
                   <a:srgbClr val="17364A"/>
                 </a:solidFill>
@@ -5728,11 +5920,11 @@
               </a:rPr>
               <a:t>Which decisions require knowing what intervention will change an outcome?</a:t>
             </a:r>
-            <a:endParaRPr lang="en-US" sz="1700" dirty="0"/>
-          </a:p>
-          <a:p>
-            <a:r>
-              <a:rPr lang="en-US" sz="1700" dirty="0">
+            <a:endParaRPr lang="en-US" sz="2100" dirty="0"/>
+          </a:p>
+          <a:p>
+            <a:r>
+              <a:rPr lang="en-US" sz="2100" dirty="0">
                 <a:solidFill>
                   <a:srgbClr val="17364A"/>
                 </a:solidFill>
@@ -5742,13 +5934,13 @@
               </a:rPr>
               <a:t>What confounders are likely in your program area?</a:t>
             </a:r>
-            <a:endParaRPr lang="en-US" sz="1700" dirty="0"/>
-          </a:p>
-        </p:txBody>
-      </p:sp>
-      <p:sp>
-        <p:nvSpPr>
-          <p:cNvPr id="11" name="Shape 9"/>
+            <a:endParaRPr lang="en-US" sz="2100" dirty="0"/>
+          </a:p>
+        </p:txBody>
+      </p:sp>
+      <p:sp>
+        <p:nvSpPr>
+          <p:cNvPr id="12" name="Shape 10"/>
           <p:cNvSpPr/>
           <p:nvPr/>
         </p:nvSpPr>
@@ -5775,14 +5967,14 @@
       </p:sp>
       <p:sp>
         <p:nvSpPr>
-          <p:cNvPr id="12" name="Text 10"/>
+          <p:cNvPr id="13" name="Text 11"/>
           <p:cNvSpPr/>
           <p:nvPr/>
         </p:nvSpPr>
         <p:spPr>
           <a:xfrm>
             <a:off x="8074152" y="1563624"/>
-            <a:ext cx="2825496" cy="201168"/>
+            <a:ext cx="2825496" cy="256032"/>
           </a:xfrm>
           <a:prstGeom prst="rect">
             <a:avLst/>
@@ -5798,7 +5990,7 @@
               <a:buNone/>
             </a:pPr>
             <a:r>
-              <a:rPr lang="en-US" sz="950" b="1" dirty="0">
+              <a:rPr lang="en-US" sz="1300" b="1" dirty="0">
                 <a:solidFill>
                   <a:srgbClr val="0068B7"/>
                 </a:solidFill>
@@ -5808,20 +6000,20 @@
               </a:rPr>
               <a:t>Key idea</a:t>
             </a:r>
-            <a:endParaRPr lang="en-US" sz="950" dirty="0"/>
-          </a:p>
-        </p:txBody>
-      </p:sp>
-      <p:sp>
-        <p:nvSpPr>
-          <p:cNvPr id="13" name="Text 11"/>
-          <p:cNvSpPr/>
-          <p:nvPr/>
-        </p:nvSpPr>
-        <p:spPr>
-          <a:xfrm>
-            <a:off x="8074152" y="1856232"/>
-            <a:ext cx="2825496" cy="1261872"/>
+            <a:endParaRPr lang="en-US" sz="1300" dirty="0"/>
+          </a:p>
+        </p:txBody>
+      </p:sp>
+      <p:sp>
+        <p:nvSpPr>
+          <p:cNvPr id="14" name="Text 12"/>
+          <p:cNvSpPr/>
+          <p:nvPr/>
+        </p:nvSpPr>
+        <p:spPr>
+          <a:xfrm>
+            <a:off x="8074152" y="1920240"/>
+            <a:ext cx="2825496" cy="1188720"/>
           </a:xfrm>
           <a:prstGeom prst="rect">
             <a:avLst/>
@@ -5839,7 +6031,7 @@
               <a:buNone/>
             </a:pPr>
             <a:r>
-              <a:rPr lang="en-US" sz="1250" dirty="0">
+              <a:rPr lang="en-US" sz="1550" dirty="0">
                 <a:solidFill>
                   <a:srgbClr val="17364A"/>
                 </a:solidFill>
@@ -5849,13 +6041,13 @@
               </a:rPr>
               <a:t>What AI outputs in your agency could be mistaken for causal evidence?</a:t>
             </a:r>
-            <a:endParaRPr lang="en-US" sz="1250" dirty="0"/>
-          </a:p>
-        </p:txBody>
-      </p:sp>
-      <p:sp>
-        <p:nvSpPr>
-          <p:cNvPr id="14" name="Shape 12"/>
+            <a:endParaRPr lang="en-US" sz="1550" dirty="0"/>
+          </a:p>
+        </p:txBody>
+      </p:sp>
+      <p:sp>
+        <p:nvSpPr>
+          <p:cNvPr id="15" name="Shape 13"/>
           <p:cNvSpPr/>
           <p:nvPr/>
         </p:nvSpPr>
@@ -5882,14 +6074,14 @@
       </p:sp>
       <p:sp>
         <p:nvSpPr>
-          <p:cNvPr id="15" name="Text 13"/>
+          <p:cNvPr id="16" name="Text 14"/>
           <p:cNvSpPr/>
           <p:nvPr/>
         </p:nvSpPr>
         <p:spPr>
           <a:xfrm>
             <a:off x="8074152" y="3666744"/>
-            <a:ext cx="2825496" cy="201168"/>
+            <a:ext cx="2825496" cy="256032"/>
           </a:xfrm>
           <a:prstGeom prst="rect">
             <a:avLst/>
@@ -5905,7 +6097,7 @@
               <a:buNone/>
             </a:pPr>
             <a:r>
-              <a:rPr lang="en-US" sz="950" b="1" dirty="0">
+              <a:rPr lang="en-US" sz="1300" b="1" dirty="0">
                 <a:solidFill>
                   <a:srgbClr val="0068B7"/>
                 </a:solidFill>
@@ -5915,20 +6107,20 @@
               </a:rPr>
               <a:t>Use this for</a:t>
             </a:r>
-            <a:endParaRPr lang="en-US" sz="950" dirty="0"/>
-          </a:p>
-        </p:txBody>
-      </p:sp>
-      <p:sp>
-        <p:nvSpPr>
-          <p:cNvPr id="16" name="Text 14"/>
-          <p:cNvSpPr/>
-          <p:nvPr/>
-        </p:nvSpPr>
-        <p:spPr>
-          <a:xfrm>
-            <a:off x="8074152" y="3959352"/>
-            <a:ext cx="2825496" cy="1170432"/>
+            <a:endParaRPr lang="en-US" sz="1300" dirty="0"/>
+          </a:p>
+        </p:txBody>
+      </p:sp>
+      <p:sp>
+        <p:nvSpPr>
+          <p:cNvPr id="17" name="Text 15"/>
+          <p:cNvSpPr/>
+          <p:nvPr/>
+        </p:nvSpPr>
+        <p:spPr>
+          <a:xfrm>
+            <a:off x="8074152" y="4023360"/>
+            <a:ext cx="2825496" cy="1097280"/>
           </a:xfrm>
           <a:prstGeom prst="rect">
             <a:avLst/>
@@ -5946,7 +6138,7 @@
               <a:buNone/>
             </a:pPr>
             <a:r>
-              <a:rPr lang="en-US" sz="1250" dirty="0">
+              <a:rPr lang="en-US" sz="1550" dirty="0">
                 <a:solidFill>
                   <a:srgbClr val="17364A"/>
                 </a:solidFill>
@@ -5956,7 +6148,7 @@
               </a:rPr>
               <a:t>Connect the concept to public health decisions, safeguards, documentation, or implementation work.</a:t>
             </a:r>
-            <a:endParaRPr lang="en-US" sz="1250" dirty="0"/>
+            <a:endParaRPr lang="en-US" sz="1550" dirty="0"/>
           </a:p>
         </p:txBody>
       </p:sp>
@@ -6153,7 +6345,7 @@
                 <a:ea typeface="Aptos" pitchFamily="34" charset="-122"/>
                 <a:cs typeface="Aptos" pitchFamily="34" charset="-120"/>
               </a:rPr>
-              <a:t>© Paula Soper</a:t>
+              <a:t>Â© Paula Soper</a:t>
             </a:r>
             <a:endParaRPr lang="en-US" sz="800" dirty="0"/>
           </a:p>
@@ -6167,8 +6359,47 @@
         </p:nvSpPr>
         <p:spPr>
           <a:xfrm>
+            <a:off x="11137392" y="6510528"/>
+            <a:ext cx="411480" cy="201168"/>
+          </a:xfrm>
+          <a:prstGeom prst="rect">
+            <a:avLst/>
+          </a:prstGeom>
+          <a:noFill/>
+          <a:ln/>
+        </p:spPr>
+        <p:txBody>
+          <a:bodyPr wrap="square" lIns="0" tIns="0" rIns="0" bIns="0" rtlCol="0" anchor="ctr"/>
+          <a:lstStyle/>
+          <a:p>
+            <a:pPr algn="r" indent="0" marL="0">
+              <a:buNone/>
+            </a:pPr>
+            <a:r>
+              <a:rPr lang="en-US" sz="900" dirty="0">
+                <a:solidFill>
+                  <a:srgbClr val="5F7181"/>
+                </a:solidFill>
+                <a:latin typeface="Aptos" pitchFamily="34" charset="0"/>
+                <a:ea typeface="Aptos" pitchFamily="34" charset="-122"/>
+                <a:cs typeface="Aptos" pitchFamily="34" charset="-120"/>
+              </a:rPr>
+              <a:t>15</a:t>
+            </a:r>
+            <a:endParaRPr lang="en-US" sz="900" dirty="0"/>
+          </a:p>
+        </p:txBody>
+      </p:sp>
+      <p:sp>
+        <p:nvSpPr>
+          <p:cNvPr id="8" name="Text 6"/>
+          <p:cNvSpPr/>
+          <p:nvPr/>
+        </p:nvSpPr>
+        <p:spPr>
+          <a:xfrm>
             <a:off x="640080" y="658368"/>
-            <a:ext cx="10881360" cy="566928"/>
+            <a:ext cx="10881360" cy="713232"/>
           </a:xfrm>
           <a:prstGeom prst="rect">
             <a:avLst/>
@@ -6186,7 +6417,7 @@
               <a:buNone/>
             </a:pPr>
             <a:r>
-              <a:rPr lang="en-US" sz="2700" b="1" dirty="0">
+              <a:rPr lang="en-US" sz="3400" b="1" dirty="0">
                 <a:solidFill>
                   <a:srgbClr val="003A63"/>
                 </a:solidFill>
@@ -6196,20 +6427,20 @@
               </a:rPr>
               <a:t>Reflection Questions Continued</a:t>
             </a:r>
-            <a:endParaRPr lang="en-US" sz="2700" dirty="0"/>
-          </a:p>
-        </p:txBody>
-      </p:sp>
-      <p:sp>
-        <p:nvSpPr>
-          <p:cNvPr id="8" name="Text 6"/>
-          <p:cNvSpPr/>
-          <p:nvPr/>
-        </p:nvSpPr>
-        <p:spPr>
-          <a:xfrm>
-            <a:off x="868680" y="1417320"/>
-            <a:ext cx="6675120" cy="4434840"/>
+            <a:endParaRPr lang="en-US" sz="3400" dirty="0"/>
+          </a:p>
+        </p:txBody>
+      </p:sp>
+      <p:sp>
+        <p:nvSpPr>
+          <p:cNvPr id="9" name="Text 7"/>
+          <p:cNvSpPr/>
+          <p:nvPr/>
+        </p:nvSpPr>
+        <p:spPr>
+          <a:xfrm>
+            <a:off x="868680" y="1508760"/>
+            <a:ext cx="6537960" cy="4160520"/>
           </a:xfrm>
           <a:prstGeom prst="rect">
             <a:avLst/>
@@ -6224,7 +6455,7 @@
           <a:lstStyle/>
           <a:p>
             <a:r>
-              <a:rPr lang="en-US" sz="1700" dirty="0">
+              <a:rPr lang="en-US" sz="2100" dirty="0">
                 <a:solidFill>
                   <a:srgbClr val="17364A"/>
                 </a:solidFill>
@@ -6234,11 +6465,11 @@
               </a:rPr>
               <a:t>What comparison group could support evaluation?</a:t>
             </a:r>
-            <a:endParaRPr lang="en-US" sz="1700" dirty="0"/>
-          </a:p>
-          <a:p>
-            <a:r>
-              <a:rPr lang="en-US" sz="1700" dirty="0">
+            <a:endParaRPr lang="en-US" sz="2100" dirty="0"/>
+          </a:p>
+          <a:p>
+            <a:r>
+              <a:rPr lang="en-US" sz="2100" dirty="0">
                 <a:solidFill>
                   <a:srgbClr val="17364A"/>
                 </a:solidFill>
@@ -6248,13 +6479,13 @@
               </a:rPr>
               <a:t>Who should review causal claims before public release?</a:t>
             </a:r>
-            <a:endParaRPr lang="en-US" sz="1700" dirty="0"/>
-          </a:p>
-        </p:txBody>
-      </p:sp>
-      <p:sp>
-        <p:nvSpPr>
-          <p:cNvPr id="9" name="Shape 7"/>
+            <a:endParaRPr lang="en-US" sz="2100" dirty="0"/>
+          </a:p>
+        </p:txBody>
+      </p:sp>
+      <p:sp>
+        <p:nvSpPr>
+          <p:cNvPr id="10" name="Shape 8"/>
           <p:cNvSpPr/>
           <p:nvPr/>
         </p:nvSpPr>
@@ -6281,14 +6512,14 @@
       </p:sp>
       <p:sp>
         <p:nvSpPr>
-          <p:cNvPr id="10" name="Text 8"/>
+          <p:cNvPr id="11" name="Text 9"/>
           <p:cNvSpPr/>
           <p:nvPr/>
         </p:nvSpPr>
         <p:spPr>
           <a:xfrm>
             <a:off x="8074152" y="1563624"/>
-            <a:ext cx="2825496" cy="201168"/>
+            <a:ext cx="2825496" cy="256032"/>
           </a:xfrm>
           <a:prstGeom prst="rect">
             <a:avLst/>
@@ -6304,7 +6535,7 @@
               <a:buNone/>
             </a:pPr>
             <a:r>
-              <a:rPr lang="en-US" sz="950" b="1" dirty="0">
+              <a:rPr lang="en-US" sz="1300" b="1" dirty="0">
                 <a:solidFill>
                   <a:srgbClr val="0068B7"/>
                 </a:solidFill>
@@ -6314,20 +6545,20 @@
               </a:rPr>
               <a:t>Key idea</a:t>
             </a:r>
-            <a:endParaRPr lang="en-US" sz="950" dirty="0"/>
-          </a:p>
-        </p:txBody>
-      </p:sp>
-      <p:sp>
-        <p:nvSpPr>
-          <p:cNvPr id="11" name="Text 9"/>
-          <p:cNvSpPr/>
-          <p:nvPr/>
-        </p:nvSpPr>
-        <p:spPr>
-          <a:xfrm>
-            <a:off x="8074152" y="1856232"/>
-            <a:ext cx="2825496" cy="1261872"/>
+            <a:endParaRPr lang="en-US" sz="1300" dirty="0"/>
+          </a:p>
+        </p:txBody>
+      </p:sp>
+      <p:sp>
+        <p:nvSpPr>
+          <p:cNvPr id="12" name="Text 10"/>
+          <p:cNvSpPr/>
+          <p:nvPr/>
+        </p:nvSpPr>
+        <p:spPr>
+          <a:xfrm>
+            <a:off x="8074152" y="1920240"/>
+            <a:ext cx="2825496" cy="1188720"/>
           </a:xfrm>
           <a:prstGeom prst="rect">
             <a:avLst/>
@@ -6345,7 +6576,7 @@
               <a:buNone/>
             </a:pPr>
             <a:r>
-              <a:rPr lang="en-US" sz="1250" dirty="0">
+              <a:rPr lang="en-US" sz="1550" dirty="0">
                 <a:solidFill>
                   <a:srgbClr val="17364A"/>
                 </a:solidFill>
@@ -6355,13 +6586,13 @@
               </a:rPr>
               <a:t>What comparison group could support evaluation?</a:t>
             </a:r>
-            <a:endParaRPr lang="en-US" sz="1250" dirty="0"/>
-          </a:p>
-        </p:txBody>
-      </p:sp>
-      <p:sp>
-        <p:nvSpPr>
-          <p:cNvPr id="12" name="Shape 10"/>
+            <a:endParaRPr lang="en-US" sz="1550" dirty="0"/>
+          </a:p>
+        </p:txBody>
+      </p:sp>
+      <p:sp>
+        <p:nvSpPr>
+          <p:cNvPr id="13" name="Shape 11"/>
           <p:cNvSpPr/>
           <p:nvPr/>
         </p:nvSpPr>
@@ -6388,14 +6619,14 @@
       </p:sp>
       <p:sp>
         <p:nvSpPr>
-          <p:cNvPr id="13" name="Text 11"/>
+          <p:cNvPr id="14" name="Text 12"/>
           <p:cNvSpPr/>
           <p:nvPr/>
         </p:nvSpPr>
         <p:spPr>
           <a:xfrm>
             <a:off x="8074152" y="3666744"/>
-            <a:ext cx="2825496" cy="201168"/>
+            <a:ext cx="2825496" cy="256032"/>
           </a:xfrm>
           <a:prstGeom prst="rect">
             <a:avLst/>
@@ -6411,7 +6642,7 @@
               <a:buNone/>
             </a:pPr>
             <a:r>
-              <a:rPr lang="en-US" sz="950" b="1" dirty="0">
+              <a:rPr lang="en-US" sz="1300" b="1" dirty="0">
                 <a:solidFill>
                   <a:srgbClr val="0068B7"/>
                 </a:solidFill>
@@ -6421,20 +6652,20 @@
               </a:rPr>
               <a:t>Use this for</a:t>
             </a:r>
-            <a:endParaRPr lang="en-US" sz="950" dirty="0"/>
-          </a:p>
-        </p:txBody>
-      </p:sp>
-      <p:sp>
-        <p:nvSpPr>
-          <p:cNvPr id="14" name="Text 12"/>
-          <p:cNvSpPr/>
-          <p:nvPr/>
-        </p:nvSpPr>
-        <p:spPr>
-          <a:xfrm>
-            <a:off x="8074152" y="3959352"/>
-            <a:ext cx="2825496" cy="1170432"/>
+            <a:endParaRPr lang="en-US" sz="1300" dirty="0"/>
+          </a:p>
+        </p:txBody>
+      </p:sp>
+      <p:sp>
+        <p:nvSpPr>
+          <p:cNvPr id="15" name="Text 13"/>
+          <p:cNvSpPr/>
+          <p:nvPr/>
+        </p:nvSpPr>
+        <p:spPr>
+          <a:xfrm>
+            <a:off x="8074152" y="4023360"/>
+            <a:ext cx="2825496" cy="1097280"/>
           </a:xfrm>
           <a:prstGeom prst="rect">
             <a:avLst/>
@@ -6452,7 +6683,7 @@
               <a:buNone/>
             </a:pPr>
             <a:r>
-              <a:rPr lang="en-US" sz="1250" dirty="0">
+              <a:rPr lang="en-US" sz="1550" dirty="0">
                 <a:solidFill>
                   <a:srgbClr val="17364A"/>
                 </a:solidFill>
@@ -6462,7 +6693,7 @@
               </a:rPr>
               <a:t>Connect the concept to public health decisions, safeguards, documentation, or implementation work.</a:t>
             </a:r>
-            <a:endParaRPr lang="en-US" sz="1250" dirty="0"/>
+            <a:endParaRPr lang="en-US" sz="1550" dirty="0"/>
           </a:p>
         </p:txBody>
       </p:sp>
@@ -6659,7 +6890,7 @@
                 <a:ea typeface="Aptos" pitchFamily="34" charset="-122"/>
                 <a:cs typeface="Aptos" pitchFamily="34" charset="-120"/>
               </a:rPr>
-              <a:t>© Paula Soper</a:t>
+              <a:t>Â© Paula Soper</a:t>
             </a:r>
             <a:endParaRPr lang="en-US" sz="800" dirty="0"/>
           </a:p>
@@ -6667,7 +6898,46 @@
       </p:sp>
       <p:sp>
         <p:nvSpPr>
-          <p:cNvPr id="7" name="Shape 5"/>
+          <p:cNvPr id="7" name="Text 5"/>
+          <p:cNvSpPr/>
+          <p:nvPr/>
+        </p:nvSpPr>
+        <p:spPr>
+          <a:xfrm>
+            <a:off x="11137392" y="6510528"/>
+            <a:ext cx="411480" cy="201168"/>
+          </a:xfrm>
+          <a:prstGeom prst="rect">
+            <a:avLst/>
+          </a:prstGeom>
+          <a:noFill/>
+          <a:ln/>
+        </p:spPr>
+        <p:txBody>
+          <a:bodyPr wrap="square" lIns="0" tIns="0" rIns="0" bIns="0" rtlCol="0" anchor="ctr"/>
+          <a:lstStyle/>
+          <a:p>
+            <a:pPr algn="r" indent="0" marL="0">
+              <a:buNone/>
+            </a:pPr>
+            <a:r>
+              <a:rPr lang="en-US" sz="900" dirty="0">
+                <a:solidFill>
+                  <a:srgbClr val="5F7181"/>
+                </a:solidFill>
+                <a:latin typeface="Aptos" pitchFamily="34" charset="0"/>
+                <a:ea typeface="Aptos" pitchFamily="34" charset="-122"/>
+                <a:cs typeface="Aptos" pitchFamily="34" charset="-120"/>
+              </a:rPr>
+              <a:t>16</a:t>
+            </a:r>
+            <a:endParaRPr lang="en-US" sz="900" dirty="0"/>
+          </a:p>
+        </p:txBody>
+      </p:sp>
+      <p:sp>
+        <p:nvSpPr>
+          <p:cNvPr id="8" name="Shape 6"/>
           <p:cNvSpPr/>
           <p:nvPr/>
         </p:nvSpPr>
@@ -6692,7 +6962,7 @@
       </p:sp>
       <p:sp>
         <p:nvSpPr>
-          <p:cNvPr id="8" name="Text 6"/>
+          <p:cNvPr id="9" name="Text 7"/>
           <p:cNvSpPr/>
           <p:nvPr/>
         </p:nvSpPr>
@@ -6731,14 +7001,14 @@
       </p:sp>
       <p:sp>
         <p:nvSpPr>
-          <p:cNvPr id="9" name="Text 7"/>
+          <p:cNvPr id="10" name="Text 8"/>
           <p:cNvSpPr/>
           <p:nvPr/>
         </p:nvSpPr>
         <p:spPr>
           <a:xfrm>
             <a:off x="640080" y="621792"/>
-            <a:ext cx="10881360" cy="566928"/>
+            <a:ext cx="10881360" cy="713232"/>
           </a:xfrm>
           <a:prstGeom prst="rect">
             <a:avLst/>
@@ -6756,7 +7026,7 @@
               <a:buNone/>
             </a:pPr>
             <a:r>
-              <a:rPr lang="en-US" sz="2700" b="1" dirty="0">
+              <a:rPr lang="en-US" sz="3400" b="1" dirty="0">
                 <a:solidFill>
                   <a:srgbClr val="003A63"/>
                 </a:solidFill>
@@ -6766,20 +7036,20 @@
               </a:rPr>
               <a:t>Practical Exercise</a:t>
             </a:r>
-            <a:endParaRPr lang="en-US" sz="2700" dirty="0"/>
-          </a:p>
-        </p:txBody>
-      </p:sp>
-      <p:sp>
-        <p:nvSpPr>
-          <p:cNvPr id="10" name="Text 8"/>
-          <p:cNvSpPr/>
-          <p:nvPr/>
-        </p:nvSpPr>
-        <p:spPr>
-          <a:xfrm>
-            <a:off x="868680" y="1417320"/>
-            <a:ext cx="6675120" cy="4434840"/>
+            <a:endParaRPr lang="en-US" sz="3400" dirty="0"/>
+          </a:p>
+        </p:txBody>
+      </p:sp>
+      <p:sp>
+        <p:nvSpPr>
+          <p:cNvPr id="11" name="Text 9"/>
+          <p:cNvSpPr/>
+          <p:nvPr/>
+        </p:nvSpPr>
+        <p:spPr>
+          <a:xfrm>
+            <a:off x="868680" y="1508760"/>
+            <a:ext cx="6537960" cy="4160520"/>
           </a:xfrm>
           <a:prstGeom prst="rect">
             <a:avLst/>
@@ -6794,7 +7064,7 @@
           <a:lstStyle/>
           <a:p>
             <a:r>
-              <a:rPr lang="en-US" sz="1700" dirty="0">
+              <a:rPr lang="en-US" sz="2100" dirty="0">
                 <a:solidFill>
                   <a:srgbClr val="17364A"/>
                 </a:solidFill>
@@ -6804,11 +7074,11 @@
               </a:rPr>
               <a:t>Create a causal question framing worksheet for an AI-supported decision.</a:t>
             </a:r>
-            <a:endParaRPr lang="en-US" sz="1700" dirty="0"/>
-          </a:p>
-          <a:p>
-            <a:r>
-              <a:rPr lang="en-US" sz="1700" dirty="0">
+            <a:endParaRPr lang="en-US" sz="2100" dirty="0"/>
+          </a:p>
+          <a:p>
+            <a:r>
+              <a:rPr lang="en-US" sz="2100" dirty="0">
                 <a:solidFill>
                   <a:srgbClr val="17364A"/>
                 </a:solidFill>
@@ -6816,15 +7086,15 @@
                 <a:ea typeface="Aptos" pitchFamily="34" charset="-122"/>
                 <a:cs typeface="Aptos" pitchFamily="34" charset="-120"/>
               </a:rPr>
-              <a:t>Identify the population, intervention or exposure, comparison, outcome, time period, likely confounders, data limitations,.</a:t>
-            </a:r>
-            <a:endParaRPr lang="en-US" sz="1700" dirty="0"/>
-          </a:p>
-        </p:txBody>
-      </p:sp>
-      <p:sp>
-        <p:nvSpPr>
-          <p:cNvPr id="11" name="Shape 9"/>
+              <a:t>Identify the population, intervention or exposure, comparison, outcome, time period, likely.</a:t>
+            </a:r>
+            <a:endParaRPr lang="en-US" sz="2100" dirty="0"/>
+          </a:p>
+        </p:txBody>
+      </p:sp>
+      <p:sp>
+        <p:nvSpPr>
+          <p:cNvPr id="12" name="Shape 10"/>
           <p:cNvSpPr/>
           <p:nvPr/>
         </p:nvSpPr>
@@ -6851,14 +7121,14 @@
       </p:sp>
       <p:sp>
         <p:nvSpPr>
-          <p:cNvPr id="12" name="Text 10"/>
+          <p:cNvPr id="13" name="Text 11"/>
           <p:cNvSpPr/>
           <p:nvPr/>
         </p:nvSpPr>
         <p:spPr>
           <a:xfrm>
             <a:off x="8074152" y="1563624"/>
-            <a:ext cx="2825496" cy="201168"/>
+            <a:ext cx="2825496" cy="256032"/>
           </a:xfrm>
           <a:prstGeom prst="rect">
             <a:avLst/>
@@ -6874,7 +7144,7 @@
               <a:buNone/>
             </a:pPr>
             <a:r>
-              <a:rPr lang="en-US" sz="950" b="1" dirty="0">
+              <a:rPr lang="en-US" sz="1300" b="1" dirty="0">
                 <a:solidFill>
                   <a:srgbClr val="0068B7"/>
                 </a:solidFill>
@@ -6884,20 +7154,20 @@
               </a:rPr>
               <a:t>Key idea</a:t>
             </a:r>
-            <a:endParaRPr lang="en-US" sz="950" dirty="0"/>
-          </a:p>
-        </p:txBody>
-      </p:sp>
-      <p:sp>
-        <p:nvSpPr>
-          <p:cNvPr id="13" name="Text 11"/>
-          <p:cNvSpPr/>
-          <p:nvPr/>
-        </p:nvSpPr>
-        <p:spPr>
-          <a:xfrm>
-            <a:off x="8074152" y="1856232"/>
-            <a:ext cx="2825496" cy="1261872"/>
+            <a:endParaRPr lang="en-US" sz="1300" dirty="0"/>
+          </a:p>
+        </p:txBody>
+      </p:sp>
+      <p:sp>
+        <p:nvSpPr>
+          <p:cNvPr id="14" name="Text 12"/>
+          <p:cNvSpPr/>
+          <p:nvPr/>
+        </p:nvSpPr>
+        <p:spPr>
+          <a:xfrm>
+            <a:off x="8074152" y="1920240"/>
+            <a:ext cx="2825496" cy="1188720"/>
           </a:xfrm>
           <a:prstGeom prst="rect">
             <a:avLst/>
@@ -6915,7 +7185,7 @@
               <a:buNone/>
             </a:pPr>
             <a:r>
-              <a:rPr lang="en-US" sz="1250" dirty="0">
+              <a:rPr lang="en-US" sz="1550" dirty="0">
                 <a:solidFill>
                   <a:srgbClr val="17364A"/>
                 </a:solidFill>
@@ -6925,13 +7195,13 @@
               </a:rPr>
               <a:t>Create a causal question framing worksheet for an AI-supported decision.</a:t>
             </a:r>
-            <a:endParaRPr lang="en-US" sz="1250" dirty="0"/>
-          </a:p>
-        </p:txBody>
-      </p:sp>
-      <p:sp>
-        <p:nvSpPr>
-          <p:cNvPr id="14" name="Shape 12"/>
+            <a:endParaRPr lang="en-US" sz="1550" dirty="0"/>
+          </a:p>
+        </p:txBody>
+      </p:sp>
+      <p:sp>
+        <p:nvSpPr>
+          <p:cNvPr id="15" name="Shape 13"/>
           <p:cNvSpPr/>
           <p:nvPr/>
         </p:nvSpPr>
@@ -6958,14 +7228,14 @@
       </p:sp>
       <p:sp>
         <p:nvSpPr>
-          <p:cNvPr id="15" name="Text 13"/>
+          <p:cNvPr id="16" name="Text 14"/>
           <p:cNvSpPr/>
           <p:nvPr/>
         </p:nvSpPr>
         <p:spPr>
           <a:xfrm>
             <a:off x="8074152" y="3666744"/>
-            <a:ext cx="2825496" cy="201168"/>
+            <a:ext cx="2825496" cy="256032"/>
           </a:xfrm>
           <a:prstGeom prst="rect">
             <a:avLst/>
@@ -6981,7 +7251,7 @@
               <a:buNone/>
             </a:pPr>
             <a:r>
-              <a:rPr lang="en-US" sz="950" b="1" dirty="0">
+              <a:rPr lang="en-US" sz="1300" b="1" dirty="0">
                 <a:solidFill>
                   <a:srgbClr val="0068B7"/>
                 </a:solidFill>
@@ -6991,20 +7261,20 @@
               </a:rPr>
               <a:t>Use this for</a:t>
             </a:r>
-            <a:endParaRPr lang="en-US" sz="950" dirty="0"/>
-          </a:p>
-        </p:txBody>
-      </p:sp>
-      <p:sp>
-        <p:nvSpPr>
-          <p:cNvPr id="16" name="Text 14"/>
-          <p:cNvSpPr/>
-          <p:nvPr/>
-        </p:nvSpPr>
-        <p:spPr>
-          <a:xfrm>
-            <a:off x="8074152" y="3959352"/>
-            <a:ext cx="2825496" cy="1170432"/>
+            <a:endParaRPr lang="en-US" sz="1300" dirty="0"/>
+          </a:p>
+        </p:txBody>
+      </p:sp>
+      <p:sp>
+        <p:nvSpPr>
+          <p:cNvPr id="17" name="Text 15"/>
+          <p:cNvSpPr/>
+          <p:nvPr/>
+        </p:nvSpPr>
+        <p:spPr>
+          <a:xfrm>
+            <a:off x="8074152" y="4023360"/>
+            <a:ext cx="2825496" cy="1097280"/>
           </a:xfrm>
           <a:prstGeom prst="rect">
             <a:avLst/>
@@ -7022,7 +7292,7 @@
               <a:buNone/>
             </a:pPr>
             <a:r>
-              <a:rPr lang="en-US" sz="1250" dirty="0">
+              <a:rPr lang="en-US" sz="1550" dirty="0">
                 <a:solidFill>
                   <a:srgbClr val="17364A"/>
                 </a:solidFill>
@@ -7032,7 +7302,7 @@
               </a:rPr>
               <a:t>Connect the concept to public health decisions, safeguards, documentation, or implementation work.</a:t>
             </a:r>
-            <a:endParaRPr lang="en-US" sz="1250" dirty="0"/>
+            <a:endParaRPr lang="en-US" sz="1550" dirty="0"/>
           </a:p>
         </p:txBody>
       </p:sp>
@@ -7229,7 +7499,7 @@
                 <a:ea typeface="Aptos" pitchFamily="34" charset="-122"/>
                 <a:cs typeface="Aptos" pitchFamily="34" charset="-120"/>
               </a:rPr>
-              <a:t>© Paula Soper</a:t>
+              <a:t>Â© Paula Soper</a:t>
             </a:r>
             <a:endParaRPr lang="en-US" sz="800" dirty="0"/>
           </a:p>
@@ -7237,7 +7507,46 @@
       </p:sp>
       <p:sp>
         <p:nvSpPr>
-          <p:cNvPr id="7" name="Shape 5"/>
+          <p:cNvPr id="7" name="Text 5"/>
+          <p:cNvSpPr/>
+          <p:nvPr/>
+        </p:nvSpPr>
+        <p:spPr>
+          <a:xfrm>
+            <a:off x="11137392" y="6510528"/>
+            <a:ext cx="411480" cy="201168"/>
+          </a:xfrm>
+          <a:prstGeom prst="rect">
+            <a:avLst/>
+          </a:prstGeom>
+          <a:noFill/>
+          <a:ln/>
+        </p:spPr>
+        <p:txBody>
+          <a:bodyPr wrap="square" lIns="0" tIns="0" rIns="0" bIns="0" rtlCol="0" anchor="ctr"/>
+          <a:lstStyle/>
+          <a:p>
+            <a:pPr algn="r" indent="0" marL="0">
+              <a:buNone/>
+            </a:pPr>
+            <a:r>
+              <a:rPr lang="en-US" sz="900" dirty="0">
+                <a:solidFill>
+                  <a:srgbClr val="5F7181"/>
+                </a:solidFill>
+                <a:latin typeface="Aptos" pitchFamily="34" charset="0"/>
+                <a:ea typeface="Aptos" pitchFamily="34" charset="-122"/>
+                <a:cs typeface="Aptos" pitchFamily="34" charset="-120"/>
+              </a:rPr>
+              <a:t>17</a:t>
+            </a:r>
+            <a:endParaRPr lang="en-US" sz="900" dirty="0"/>
+          </a:p>
+        </p:txBody>
+      </p:sp>
+      <p:sp>
+        <p:nvSpPr>
+          <p:cNvPr id="8" name="Shape 6"/>
           <p:cNvSpPr/>
           <p:nvPr/>
         </p:nvSpPr>
@@ -7262,7 +7571,7 @@
       </p:sp>
       <p:sp>
         <p:nvSpPr>
-          <p:cNvPr id="8" name="Text 6"/>
+          <p:cNvPr id="9" name="Text 7"/>
           <p:cNvSpPr/>
           <p:nvPr/>
         </p:nvSpPr>
@@ -7301,14 +7610,14 @@
       </p:sp>
       <p:sp>
         <p:nvSpPr>
-          <p:cNvPr id="9" name="Text 7"/>
+          <p:cNvPr id="10" name="Text 8"/>
           <p:cNvSpPr/>
           <p:nvPr/>
         </p:nvSpPr>
         <p:spPr>
           <a:xfrm>
             <a:off x="640080" y="621792"/>
-            <a:ext cx="10881360" cy="566928"/>
+            <a:ext cx="10881360" cy="713232"/>
           </a:xfrm>
           <a:prstGeom prst="rect">
             <a:avLst/>
@@ -7326,7 +7635,7 @@
               <a:buNone/>
             </a:pPr>
             <a:r>
-              <a:rPr lang="en-US" sz="2700" b="1" dirty="0">
+              <a:rPr lang="en-US" sz="3400" b="1" dirty="0">
                 <a:solidFill>
                   <a:srgbClr val="003A63"/>
                 </a:solidFill>
@@ -7336,20 +7645,20 @@
               </a:rPr>
               <a:t>Expected Artifact or Evidence</a:t>
             </a:r>
-            <a:endParaRPr lang="en-US" sz="2700" dirty="0"/>
-          </a:p>
-        </p:txBody>
-      </p:sp>
-      <p:sp>
-        <p:nvSpPr>
-          <p:cNvPr id="10" name="Text 8"/>
-          <p:cNvSpPr/>
-          <p:nvPr/>
-        </p:nvSpPr>
-        <p:spPr>
-          <a:xfrm>
-            <a:off x="868680" y="1417320"/>
-            <a:ext cx="6675120" cy="4434840"/>
+            <a:endParaRPr lang="en-US" sz="3400" dirty="0"/>
+          </a:p>
+        </p:txBody>
+      </p:sp>
+      <p:sp>
+        <p:nvSpPr>
+          <p:cNvPr id="11" name="Text 9"/>
+          <p:cNvSpPr/>
+          <p:nvPr/>
+        </p:nvSpPr>
+        <p:spPr>
+          <a:xfrm>
+            <a:off x="868680" y="1508760"/>
+            <a:ext cx="6537960" cy="4160520"/>
           </a:xfrm>
           <a:prstGeom prst="rect">
             <a:avLst/>
@@ -7364,7 +7673,7 @@
           <a:lstStyle/>
           <a:p>
             <a:r>
-              <a:rPr lang="en-US" sz="1700" dirty="0">
+              <a:rPr lang="en-US" sz="2100" dirty="0">
                 <a:solidFill>
                   <a:srgbClr val="17364A"/>
                 </a:solidFill>
@@ -7374,11 +7683,11 @@
               </a:rPr>
               <a:t>Causal question framing worksheet</a:t>
             </a:r>
-            <a:endParaRPr lang="en-US" sz="1700" dirty="0"/>
-          </a:p>
-          <a:p>
-            <a:r>
-              <a:rPr lang="en-US" sz="1700" dirty="0">
+            <a:endParaRPr lang="en-US" sz="2100" dirty="0"/>
+          </a:p>
+          <a:p>
+            <a:r>
+              <a:rPr lang="en-US" sz="2100" dirty="0">
                 <a:solidFill>
                   <a:srgbClr val="17364A"/>
                 </a:solidFill>
@@ -7388,11 +7697,11 @@
               </a:rPr>
               <a:t>List of assumptions and likely confounders</a:t>
             </a:r>
-            <a:endParaRPr lang="en-US" sz="1700" dirty="0"/>
-          </a:p>
-          <a:p>
-            <a:r>
-              <a:rPr lang="en-US" sz="1700" dirty="0">
+            <a:endParaRPr lang="en-US" sz="2100" dirty="0"/>
+          </a:p>
+          <a:p>
+            <a:r>
+              <a:rPr lang="en-US" sz="2100" dirty="0">
                 <a:solidFill>
                   <a:srgbClr val="17364A"/>
                 </a:solidFill>
@@ -7402,13 +7711,13 @@
               </a:rPr>
               <a:t>Recommended evaluation design or expert consultation need</a:t>
             </a:r>
-            <a:endParaRPr lang="en-US" sz="1700" dirty="0"/>
-          </a:p>
-        </p:txBody>
-      </p:sp>
-      <p:sp>
-        <p:nvSpPr>
-          <p:cNvPr id="11" name="Shape 9"/>
+            <a:endParaRPr lang="en-US" sz="2100" dirty="0"/>
+          </a:p>
+        </p:txBody>
+      </p:sp>
+      <p:sp>
+        <p:nvSpPr>
+          <p:cNvPr id="12" name="Shape 10"/>
           <p:cNvSpPr/>
           <p:nvPr/>
         </p:nvSpPr>
@@ -7435,14 +7744,14 @@
       </p:sp>
       <p:sp>
         <p:nvSpPr>
-          <p:cNvPr id="12" name="Text 10"/>
+          <p:cNvPr id="13" name="Text 11"/>
           <p:cNvSpPr/>
           <p:nvPr/>
         </p:nvSpPr>
         <p:spPr>
           <a:xfrm>
             <a:off x="8074152" y="1563624"/>
-            <a:ext cx="2825496" cy="201168"/>
+            <a:ext cx="2825496" cy="256032"/>
           </a:xfrm>
           <a:prstGeom prst="rect">
             <a:avLst/>
@@ -7458,7 +7767,7 @@
               <a:buNone/>
             </a:pPr>
             <a:r>
-              <a:rPr lang="en-US" sz="950" b="1" dirty="0">
+              <a:rPr lang="en-US" sz="1300" b="1" dirty="0">
                 <a:solidFill>
                   <a:srgbClr val="0068B7"/>
                 </a:solidFill>
@@ -7468,20 +7777,20 @@
               </a:rPr>
               <a:t>Key idea</a:t>
             </a:r>
-            <a:endParaRPr lang="en-US" sz="950" dirty="0"/>
-          </a:p>
-        </p:txBody>
-      </p:sp>
-      <p:sp>
-        <p:nvSpPr>
-          <p:cNvPr id="13" name="Text 11"/>
-          <p:cNvSpPr/>
-          <p:nvPr/>
-        </p:nvSpPr>
-        <p:spPr>
-          <a:xfrm>
-            <a:off x="8074152" y="1856232"/>
-            <a:ext cx="2825496" cy="1261872"/>
+            <a:endParaRPr lang="en-US" sz="1300" dirty="0"/>
+          </a:p>
+        </p:txBody>
+      </p:sp>
+      <p:sp>
+        <p:nvSpPr>
+          <p:cNvPr id="14" name="Text 12"/>
+          <p:cNvSpPr/>
+          <p:nvPr/>
+        </p:nvSpPr>
+        <p:spPr>
+          <a:xfrm>
+            <a:off x="8074152" y="1920240"/>
+            <a:ext cx="2825496" cy="1188720"/>
           </a:xfrm>
           <a:prstGeom prst="rect">
             <a:avLst/>
@@ -7499,7 +7808,7 @@
               <a:buNone/>
             </a:pPr>
             <a:r>
-              <a:rPr lang="en-US" sz="1250" dirty="0">
+              <a:rPr lang="en-US" sz="1550" dirty="0">
                 <a:solidFill>
                   <a:srgbClr val="17364A"/>
                 </a:solidFill>
@@ -7509,13 +7818,13 @@
               </a:rPr>
               <a:t>Causal question framing worksheet</a:t>
             </a:r>
-            <a:endParaRPr lang="en-US" sz="1250" dirty="0"/>
-          </a:p>
-        </p:txBody>
-      </p:sp>
-      <p:sp>
-        <p:nvSpPr>
-          <p:cNvPr id="14" name="Shape 12"/>
+            <a:endParaRPr lang="en-US" sz="1550" dirty="0"/>
+          </a:p>
+        </p:txBody>
+      </p:sp>
+      <p:sp>
+        <p:nvSpPr>
+          <p:cNvPr id="15" name="Shape 13"/>
           <p:cNvSpPr/>
           <p:nvPr/>
         </p:nvSpPr>
@@ -7542,14 +7851,14 @@
       </p:sp>
       <p:sp>
         <p:nvSpPr>
-          <p:cNvPr id="15" name="Text 13"/>
+          <p:cNvPr id="16" name="Text 14"/>
           <p:cNvSpPr/>
           <p:nvPr/>
         </p:nvSpPr>
         <p:spPr>
           <a:xfrm>
             <a:off x="8074152" y="3666744"/>
-            <a:ext cx="2825496" cy="201168"/>
+            <a:ext cx="2825496" cy="256032"/>
           </a:xfrm>
           <a:prstGeom prst="rect">
             <a:avLst/>
@@ -7565,7 +7874,7 @@
               <a:buNone/>
             </a:pPr>
             <a:r>
-              <a:rPr lang="en-US" sz="950" b="1" dirty="0">
+              <a:rPr lang="en-US" sz="1300" b="1" dirty="0">
                 <a:solidFill>
                   <a:srgbClr val="0068B7"/>
                 </a:solidFill>
@@ -7575,20 +7884,20 @@
               </a:rPr>
               <a:t>Use this for</a:t>
             </a:r>
-            <a:endParaRPr lang="en-US" sz="950" dirty="0"/>
-          </a:p>
-        </p:txBody>
-      </p:sp>
-      <p:sp>
-        <p:nvSpPr>
-          <p:cNvPr id="16" name="Text 14"/>
-          <p:cNvSpPr/>
-          <p:nvPr/>
-        </p:nvSpPr>
-        <p:spPr>
-          <a:xfrm>
-            <a:off x="8074152" y="3959352"/>
-            <a:ext cx="2825496" cy="1170432"/>
+            <a:endParaRPr lang="en-US" sz="1300" dirty="0"/>
+          </a:p>
+        </p:txBody>
+      </p:sp>
+      <p:sp>
+        <p:nvSpPr>
+          <p:cNvPr id="17" name="Text 15"/>
+          <p:cNvSpPr/>
+          <p:nvPr/>
+        </p:nvSpPr>
+        <p:spPr>
+          <a:xfrm>
+            <a:off x="8074152" y="4023360"/>
+            <a:ext cx="2825496" cy="1097280"/>
           </a:xfrm>
           <a:prstGeom prst="rect">
             <a:avLst/>
@@ -7606,7 +7915,7 @@
               <a:buNone/>
             </a:pPr>
             <a:r>
-              <a:rPr lang="en-US" sz="1250" dirty="0">
+              <a:rPr lang="en-US" sz="1550" dirty="0">
                 <a:solidFill>
                   <a:srgbClr val="17364A"/>
                 </a:solidFill>
@@ -7616,7 +7925,7 @@
               </a:rPr>
               <a:t>Connect the concept to public health decisions, safeguards, documentation, or implementation work.</a:t>
             </a:r>
-            <a:endParaRPr lang="en-US" sz="1250" dirty="0"/>
+            <a:endParaRPr lang="en-US" sz="1550" dirty="0"/>
           </a:p>
         </p:txBody>
       </p:sp>
@@ -7813,7 +8122,7 @@
                 <a:ea typeface="Aptos" pitchFamily="34" charset="-122"/>
                 <a:cs typeface="Aptos" pitchFamily="34" charset="-120"/>
               </a:rPr>
-              <a:t>© Paula Soper</a:t>
+              <a:t>Â© Paula Soper</a:t>
             </a:r>
             <a:endParaRPr lang="en-US" sz="800" dirty="0"/>
           </a:p>
@@ -7827,8 +8136,47 @@
         </p:nvSpPr>
         <p:spPr>
           <a:xfrm>
+            <a:off x="11137392" y="6510528"/>
+            <a:ext cx="411480" cy="201168"/>
+          </a:xfrm>
+          <a:prstGeom prst="rect">
+            <a:avLst/>
+          </a:prstGeom>
+          <a:noFill/>
+          <a:ln/>
+        </p:spPr>
+        <p:txBody>
+          <a:bodyPr wrap="square" lIns="0" tIns="0" rIns="0" bIns="0" rtlCol="0" anchor="ctr"/>
+          <a:lstStyle/>
+          <a:p>
+            <a:pPr algn="r" indent="0" marL="0">
+              <a:buNone/>
+            </a:pPr>
+            <a:r>
+              <a:rPr lang="en-US" sz="900" dirty="0">
+                <a:solidFill>
+                  <a:srgbClr val="5F7181"/>
+                </a:solidFill>
+                <a:latin typeface="Aptos" pitchFamily="34" charset="0"/>
+                <a:ea typeface="Aptos" pitchFamily="34" charset="-122"/>
+                <a:cs typeface="Aptos" pitchFamily="34" charset="-120"/>
+              </a:rPr>
+              <a:t>18</a:t>
+            </a:r>
+            <a:endParaRPr lang="en-US" sz="900" dirty="0"/>
+          </a:p>
+        </p:txBody>
+      </p:sp>
+      <p:sp>
+        <p:nvSpPr>
+          <p:cNvPr id="8" name="Text 6"/>
+          <p:cNvSpPr/>
+          <p:nvPr/>
+        </p:nvSpPr>
+        <p:spPr>
+          <a:xfrm>
             <a:off x="640080" y="658368"/>
-            <a:ext cx="10881360" cy="566928"/>
+            <a:ext cx="10881360" cy="713232"/>
           </a:xfrm>
           <a:prstGeom prst="rect">
             <a:avLst/>
@@ -7846,7 +8194,7 @@
               <a:buNone/>
             </a:pPr>
             <a:r>
-              <a:rPr lang="en-US" sz="2700" b="1" dirty="0">
+              <a:rPr lang="en-US" sz="3400" b="1" dirty="0">
                 <a:solidFill>
                   <a:srgbClr val="003A63"/>
                 </a:solidFill>
@@ -7856,20 +8204,20 @@
               </a:rPr>
               <a:t>Expected Artifact or Evidence Continued</a:t>
             </a:r>
-            <a:endParaRPr lang="en-US" sz="2700" dirty="0"/>
-          </a:p>
-        </p:txBody>
-      </p:sp>
-      <p:sp>
-        <p:nvSpPr>
-          <p:cNvPr id="8" name="Text 6"/>
-          <p:cNvSpPr/>
-          <p:nvPr/>
-        </p:nvSpPr>
-        <p:spPr>
-          <a:xfrm>
-            <a:off x="868680" y="1417320"/>
-            <a:ext cx="6675120" cy="4434840"/>
+            <a:endParaRPr lang="en-US" sz="3400" dirty="0"/>
+          </a:p>
+        </p:txBody>
+      </p:sp>
+      <p:sp>
+        <p:nvSpPr>
+          <p:cNvPr id="9" name="Text 7"/>
+          <p:cNvSpPr/>
+          <p:nvPr/>
+        </p:nvSpPr>
+        <p:spPr>
+          <a:xfrm>
+            <a:off x="868680" y="1508760"/>
+            <a:ext cx="6537960" cy="4160520"/>
           </a:xfrm>
           <a:prstGeom prst="rect">
             <a:avLst/>
@@ -7884,7 +8232,7 @@
           <a:lstStyle/>
           <a:p>
             <a:r>
-              <a:rPr lang="en-US" sz="1700" dirty="0">
+              <a:rPr lang="en-US" sz="2100" dirty="0">
                 <a:solidFill>
                   <a:srgbClr val="17364A"/>
                 </a:solidFill>
@@ -7894,13 +8242,13 @@
               </a:rPr>
               <a:t>Plain-language statement distinguishing prediction from causation</a:t>
             </a:r>
-            <a:endParaRPr lang="en-US" sz="1700" dirty="0"/>
-          </a:p>
-        </p:txBody>
-      </p:sp>
-      <p:sp>
-        <p:nvSpPr>
-          <p:cNvPr id="9" name="Shape 7"/>
+            <a:endParaRPr lang="en-US" sz="2100" dirty="0"/>
+          </a:p>
+        </p:txBody>
+      </p:sp>
+      <p:sp>
+        <p:nvSpPr>
+          <p:cNvPr id="10" name="Shape 8"/>
           <p:cNvSpPr/>
           <p:nvPr/>
         </p:nvSpPr>
@@ -7927,14 +8275,14 @@
       </p:sp>
       <p:sp>
         <p:nvSpPr>
-          <p:cNvPr id="10" name="Text 8"/>
+          <p:cNvPr id="11" name="Text 9"/>
           <p:cNvSpPr/>
           <p:nvPr/>
         </p:nvSpPr>
         <p:spPr>
           <a:xfrm>
             <a:off x="8074152" y="1563624"/>
-            <a:ext cx="2825496" cy="201168"/>
+            <a:ext cx="2825496" cy="256032"/>
           </a:xfrm>
           <a:prstGeom prst="rect">
             <a:avLst/>
@@ -7950,7 +8298,7 @@
               <a:buNone/>
             </a:pPr>
             <a:r>
-              <a:rPr lang="en-US" sz="950" b="1" dirty="0">
+              <a:rPr lang="en-US" sz="1300" b="1" dirty="0">
                 <a:solidFill>
                   <a:srgbClr val="0068B7"/>
                 </a:solidFill>
@@ -7960,20 +8308,20 @@
               </a:rPr>
               <a:t>Key idea</a:t>
             </a:r>
-            <a:endParaRPr lang="en-US" sz="950" dirty="0"/>
-          </a:p>
-        </p:txBody>
-      </p:sp>
-      <p:sp>
-        <p:nvSpPr>
-          <p:cNvPr id="11" name="Text 9"/>
-          <p:cNvSpPr/>
-          <p:nvPr/>
-        </p:nvSpPr>
-        <p:spPr>
-          <a:xfrm>
-            <a:off x="8074152" y="1856232"/>
-            <a:ext cx="2825496" cy="1261872"/>
+            <a:endParaRPr lang="en-US" sz="1300" dirty="0"/>
+          </a:p>
+        </p:txBody>
+      </p:sp>
+      <p:sp>
+        <p:nvSpPr>
+          <p:cNvPr id="12" name="Text 10"/>
+          <p:cNvSpPr/>
+          <p:nvPr/>
+        </p:nvSpPr>
+        <p:spPr>
+          <a:xfrm>
+            <a:off x="8074152" y="1920240"/>
+            <a:ext cx="2825496" cy="1188720"/>
           </a:xfrm>
           <a:prstGeom prst="rect">
             <a:avLst/>
@@ -7991,7 +8339,7 @@
               <a:buNone/>
             </a:pPr>
             <a:r>
-              <a:rPr lang="en-US" sz="1250" dirty="0">
+              <a:rPr lang="en-US" sz="1550" dirty="0">
                 <a:solidFill>
                   <a:srgbClr val="17364A"/>
                 </a:solidFill>
@@ -8001,13 +8349,13 @@
               </a:rPr>
               <a:t>Plain-language statement distinguishing prediction from causation</a:t>
             </a:r>
-            <a:endParaRPr lang="en-US" sz="1250" dirty="0"/>
-          </a:p>
-        </p:txBody>
-      </p:sp>
-      <p:sp>
-        <p:nvSpPr>
-          <p:cNvPr id="12" name="Shape 10"/>
+            <a:endParaRPr lang="en-US" sz="1550" dirty="0"/>
+          </a:p>
+        </p:txBody>
+      </p:sp>
+      <p:sp>
+        <p:nvSpPr>
+          <p:cNvPr id="13" name="Shape 11"/>
           <p:cNvSpPr/>
           <p:nvPr/>
         </p:nvSpPr>
@@ -8034,14 +8382,14 @@
       </p:sp>
       <p:sp>
         <p:nvSpPr>
-          <p:cNvPr id="13" name="Text 11"/>
+          <p:cNvPr id="14" name="Text 12"/>
           <p:cNvSpPr/>
           <p:nvPr/>
         </p:nvSpPr>
         <p:spPr>
           <a:xfrm>
             <a:off x="8074152" y="3666744"/>
-            <a:ext cx="2825496" cy="201168"/>
+            <a:ext cx="2825496" cy="256032"/>
           </a:xfrm>
           <a:prstGeom prst="rect">
             <a:avLst/>
@@ -8057,7 +8405,7 @@
               <a:buNone/>
             </a:pPr>
             <a:r>
-              <a:rPr lang="en-US" sz="950" b="1" dirty="0">
+              <a:rPr lang="en-US" sz="1300" b="1" dirty="0">
                 <a:solidFill>
                   <a:srgbClr val="0068B7"/>
                 </a:solidFill>
@@ -8067,20 +8415,20 @@
               </a:rPr>
               <a:t>Use this for</a:t>
             </a:r>
-            <a:endParaRPr lang="en-US" sz="950" dirty="0"/>
-          </a:p>
-        </p:txBody>
-      </p:sp>
-      <p:sp>
-        <p:nvSpPr>
-          <p:cNvPr id="14" name="Text 12"/>
-          <p:cNvSpPr/>
-          <p:nvPr/>
-        </p:nvSpPr>
-        <p:spPr>
-          <a:xfrm>
-            <a:off x="8074152" y="3959352"/>
-            <a:ext cx="2825496" cy="1170432"/>
+            <a:endParaRPr lang="en-US" sz="1300" dirty="0"/>
+          </a:p>
+        </p:txBody>
+      </p:sp>
+      <p:sp>
+        <p:nvSpPr>
+          <p:cNvPr id="15" name="Text 13"/>
+          <p:cNvSpPr/>
+          <p:nvPr/>
+        </p:nvSpPr>
+        <p:spPr>
+          <a:xfrm>
+            <a:off x="8074152" y="4023360"/>
+            <a:ext cx="2825496" cy="1097280"/>
           </a:xfrm>
           <a:prstGeom prst="rect">
             <a:avLst/>
@@ -8098,7 +8446,7 @@
               <a:buNone/>
             </a:pPr>
             <a:r>
-              <a:rPr lang="en-US" sz="1250" dirty="0">
+              <a:rPr lang="en-US" sz="1550" dirty="0">
                 <a:solidFill>
                   <a:srgbClr val="17364A"/>
                 </a:solidFill>
@@ -8108,7 +8456,7 @@
               </a:rPr>
               <a:t>Connect the concept to public health decisions, safeguards, documentation, or implementation work.</a:t>
             </a:r>
-            <a:endParaRPr lang="en-US" sz="1250" dirty="0"/>
+            <a:endParaRPr lang="en-US" sz="1550" dirty="0"/>
           </a:p>
         </p:txBody>
       </p:sp>
@@ -8305,7 +8653,7 @@
                 <a:ea typeface="Aptos" pitchFamily="34" charset="-122"/>
                 <a:cs typeface="Aptos" pitchFamily="34" charset="-120"/>
               </a:rPr>
-              <a:t>© Paula Soper</a:t>
+              <a:t>Â© Paula Soper</a:t>
             </a:r>
             <a:endParaRPr lang="en-US" sz="800" dirty="0"/>
           </a:p>
@@ -8313,7 +8661,46 @@
       </p:sp>
       <p:sp>
         <p:nvSpPr>
-          <p:cNvPr id="7" name="Shape 5"/>
+          <p:cNvPr id="7" name="Text 5"/>
+          <p:cNvSpPr/>
+          <p:nvPr/>
+        </p:nvSpPr>
+        <p:spPr>
+          <a:xfrm>
+            <a:off x="11137392" y="6510528"/>
+            <a:ext cx="411480" cy="201168"/>
+          </a:xfrm>
+          <a:prstGeom prst="rect">
+            <a:avLst/>
+          </a:prstGeom>
+          <a:noFill/>
+          <a:ln/>
+        </p:spPr>
+        <p:txBody>
+          <a:bodyPr wrap="square" lIns="0" tIns="0" rIns="0" bIns="0" rtlCol="0" anchor="ctr"/>
+          <a:lstStyle/>
+          <a:p>
+            <a:pPr algn="r" indent="0" marL="0">
+              <a:buNone/>
+            </a:pPr>
+            <a:r>
+              <a:rPr lang="en-US" sz="900" dirty="0">
+                <a:solidFill>
+                  <a:srgbClr val="5F7181"/>
+                </a:solidFill>
+                <a:latin typeface="Aptos" pitchFamily="34" charset="0"/>
+                <a:ea typeface="Aptos" pitchFamily="34" charset="-122"/>
+                <a:cs typeface="Aptos" pitchFamily="34" charset="-120"/>
+              </a:rPr>
+              <a:t>19</a:t>
+            </a:r>
+            <a:endParaRPr lang="en-US" sz="900" dirty="0"/>
+          </a:p>
+        </p:txBody>
+      </p:sp>
+      <p:sp>
+        <p:nvSpPr>
+          <p:cNvPr id="8" name="Shape 6"/>
           <p:cNvSpPr/>
           <p:nvPr/>
         </p:nvSpPr>
@@ -8338,7 +8725,7 @@
       </p:sp>
       <p:sp>
         <p:nvSpPr>
-          <p:cNvPr id="8" name="Text 6"/>
+          <p:cNvPr id="9" name="Text 7"/>
           <p:cNvSpPr/>
           <p:nvPr/>
         </p:nvSpPr>
@@ -8377,14 +8764,14 @@
       </p:sp>
       <p:sp>
         <p:nvSpPr>
-          <p:cNvPr id="9" name="Text 7"/>
+          <p:cNvPr id="10" name="Text 8"/>
           <p:cNvSpPr/>
           <p:nvPr/>
         </p:nvSpPr>
         <p:spPr>
           <a:xfrm>
             <a:off x="640080" y="621792"/>
-            <a:ext cx="10881360" cy="566928"/>
+            <a:ext cx="10881360" cy="713232"/>
           </a:xfrm>
           <a:prstGeom prst="rect">
             <a:avLst/>
@@ -8402,7 +8789,7 @@
               <a:buNone/>
             </a:pPr>
             <a:r>
-              <a:rPr lang="en-US" sz="2700" b="1" dirty="0">
+              <a:rPr lang="en-US" sz="3400" b="1" dirty="0">
                 <a:solidFill>
                   <a:srgbClr val="003A63"/>
                 </a:solidFill>
@@ -8412,20 +8799,20 @@
               </a:rPr>
               <a:t>Expected Assignment</a:t>
             </a:r>
-            <a:endParaRPr lang="en-US" sz="2700" dirty="0"/>
-          </a:p>
-        </p:txBody>
-      </p:sp>
-      <p:sp>
-        <p:nvSpPr>
-          <p:cNvPr id="10" name="Text 8"/>
-          <p:cNvSpPr/>
-          <p:nvPr/>
-        </p:nvSpPr>
-        <p:spPr>
-          <a:xfrm>
-            <a:off x="868680" y="1417320"/>
-            <a:ext cx="6675120" cy="4434840"/>
+            <a:endParaRPr lang="en-US" sz="3400" dirty="0"/>
+          </a:p>
+        </p:txBody>
+      </p:sp>
+      <p:sp>
+        <p:nvSpPr>
+          <p:cNvPr id="11" name="Text 9"/>
+          <p:cNvSpPr/>
+          <p:nvPr/>
+        </p:nvSpPr>
+        <p:spPr>
+          <a:xfrm>
+            <a:off x="868680" y="1508760"/>
+            <a:ext cx="6537960" cy="4160520"/>
           </a:xfrm>
           <a:prstGeom prst="rect">
             <a:avLst/>
@@ -8440,7 +8827,7 @@
           <a:lstStyle/>
           <a:p>
             <a:r>
-              <a:rPr lang="en-US" sz="1700" dirty="0">
+              <a:rPr lang="en-US" sz="2100" dirty="0">
                 <a:solidFill>
                   <a:srgbClr val="17364A"/>
                 </a:solidFill>
@@ -8450,11 +8837,11 @@
               </a:rPr>
               <a:t>Causal question framing worksheet</a:t>
             </a:r>
-            <a:endParaRPr lang="en-US" sz="1700" dirty="0"/>
-          </a:p>
-          <a:p>
-            <a:r>
-              <a:rPr lang="en-US" sz="1700" dirty="0">
+            <a:endParaRPr lang="en-US" sz="2100" dirty="0"/>
+          </a:p>
+          <a:p>
+            <a:r>
+              <a:rPr lang="en-US" sz="2100" dirty="0">
                 <a:solidFill>
                   <a:srgbClr val="17364A"/>
                 </a:solidFill>
@@ -8464,11 +8851,11 @@
               </a:rPr>
               <a:t>List of assumptions and likely confounders</a:t>
             </a:r>
-            <a:endParaRPr lang="en-US" sz="1700" dirty="0"/>
-          </a:p>
-          <a:p>
-            <a:r>
-              <a:rPr lang="en-US" sz="1700" dirty="0">
+            <a:endParaRPr lang="en-US" sz="2100" dirty="0"/>
+          </a:p>
+          <a:p>
+            <a:r>
+              <a:rPr lang="en-US" sz="2100" dirty="0">
                 <a:solidFill>
                   <a:srgbClr val="17364A"/>
                 </a:solidFill>
@@ -8478,27 +8865,13 @@
               </a:rPr>
               <a:t>Recommended evaluation design or expert consultation need</a:t>
             </a:r>
-            <a:endParaRPr lang="en-US" sz="1700" dirty="0"/>
-          </a:p>
-          <a:p>
-            <a:r>
-              <a:rPr lang="en-US" sz="1700" dirty="0">
-                <a:solidFill>
-                  <a:srgbClr val="17364A"/>
-                </a:solidFill>
-                <a:latin typeface="Aptos" pitchFamily="34" charset="0"/>
-                <a:ea typeface="Aptos" pitchFamily="34" charset="-122"/>
-                <a:cs typeface="Aptos" pitchFamily="34" charset="-120"/>
-              </a:rPr>
-              <a:t>Plain-language statement distinguishing prediction from causation</a:t>
-            </a:r>
-            <a:endParaRPr lang="en-US" sz="1700" dirty="0"/>
-          </a:p>
-        </p:txBody>
-      </p:sp>
-      <p:sp>
-        <p:nvSpPr>
-          <p:cNvPr id="11" name="Shape 9"/>
+            <a:endParaRPr lang="en-US" sz="2100" dirty="0"/>
+          </a:p>
+        </p:txBody>
+      </p:sp>
+      <p:sp>
+        <p:nvSpPr>
+          <p:cNvPr id="12" name="Shape 10"/>
           <p:cNvSpPr/>
           <p:nvPr/>
         </p:nvSpPr>
@@ -8525,14 +8898,14 @@
       </p:sp>
       <p:sp>
         <p:nvSpPr>
-          <p:cNvPr id="12" name="Text 10"/>
+          <p:cNvPr id="13" name="Text 11"/>
           <p:cNvSpPr/>
           <p:nvPr/>
         </p:nvSpPr>
         <p:spPr>
           <a:xfrm>
             <a:off x="8074152" y="1563624"/>
-            <a:ext cx="2825496" cy="201168"/>
+            <a:ext cx="2825496" cy="256032"/>
           </a:xfrm>
           <a:prstGeom prst="rect">
             <a:avLst/>
@@ -8548,7 +8921,7 @@
               <a:buNone/>
             </a:pPr>
             <a:r>
-              <a:rPr lang="en-US" sz="950" b="1" dirty="0">
+              <a:rPr lang="en-US" sz="1300" b="1" dirty="0">
                 <a:solidFill>
                   <a:srgbClr val="0068B7"/>
                 </a:solidFill>
@@ -8558,20 +8931,20 @@
               </a:rPr>
               <a:t>Key idea</a:t>
             </a:r>
-            <a:endParaRPr lang="en-US" sz="950" dirty="0"/>
-          </a:p>
-        </p:txBody>
-      </p:sp>
-      <p:sp>
-        <p:nvSpPr>
-          <p:cNvPr id="13" name="Text 11"/>
-          <p:cNvSpPr/>
-          <p:nvPr/>
-        </p:nvSpPr>
-        <p:spPr>
-          <a:xfrm>
-            <a:off x="8074152" y="1856232"/>
-            <a:ext cx="2825496" cy="1261872"/>
+            <a:endParaRPr lang="en-US" sz="1300" dirty="0"/>
+          </a:p>
+        </p:txBody>
+      </p:sp>
+      <p:sp>
+        <p:nvSpPr>
+          <p:cNvPr id="14" name="Text 12"/>
+          <p:cNvSpPr/>
+          <p:nvPr/>
+        </p:nvSpPr>
+        <p:spPr>
+          <a:xfrm>
+            <a:off x="8074152" y="1920240"/>
+            <a:ext cx="2825496" cy="1188720"/>
           </a:xfrm>
           <a:prstGeom prst="rect">
             <a:avLst/>
@@ -8589,7 +8962,7 @@
               <a:buNone/>
             </a:pPr>
             <a:r>
-              <a:rPr lang="en-US" sz="1250" dirty="0">
+              <a:rPr lang="en-US" sz="1550" dirty="0">
                 <a:solidFill>
                   <a:srgbClr val="17364A"/>
                 </a:solidFill>
@@ -8599,13 +8972,13 @@
               </a:rPr>
               <a:t>Causal question framing worksheet</a:t>
             </a:r>
-            <a:endParaRPr lang="en-US" sz="1250" dirty="0"/>
-          </a:p>
-        </p:txBody>
-      </p:sp>
-      <p:sp>
-        <p:nvSpPr>
-          <p:cNvPr id="14" name="Shape 12"/>
+            <a:endParaRPr lang="en-US" sz="1550" dirty="0"/>
+          </a:p>
+        </p:txBody>
+      </p:sp>
+      <p:sp>
+        <p:nvSpPr>
+          <p:cNvPr id="15" name="Shape 13"/>
           <p:cNvSpPr/>
           <p:nvPr/>
         </p:nvSpPr>
@@ -8632,14 +9005,14 @@
       </p:sp>
       <p:sp>
         <p:nvSpPr>
-          <p:cNvPr id="15" name="Text 13"/>
+          <p:cNvPr id="16" name="Text 14"/>
           <p:cNvSpPr/>
           <p:nvPr/>
         </p:nvSpPr>
         <p:spPr>
           <a:xfrm>
             <a:off x="8074152" y="3666744"/>
-            <a:ext cx="2825496" cy="201168"/>
+            <a:ext cx="2825496" cy="256032"/>
           </a:xfrm>
           <a:prstGeom prst="rect">
             <a:avLst/>
@@ -8655,7 +9028,7 @@
               <a:buNone/>
             </a:pPr>
             <a:r>
-              <a:rPr lang="en-US" sz="950" b="1" dirty="0">
+              <a:rPr lang="en-US" sz="1300" b="1" dirty="0">
                 <a:solidFill>
                   <a:srgbClr val="0068B7"/>
                 </a:solidFill>
@@ -8665,20 +9038,20 @@
               </a:rPr>
               <a:t>Use this for</a:t>
             </a:r>
-            <a:endParaRPr lang="en-US" sz="950" dirty="0"/>
-          </a:p>
-        </p:txBody>
-      </p:sp>
-      <p:sp>
-        <p:nvSpPr>
-          <p:cNvPr id="16" name="Text 14"/>
-          <p:cNvSpPr/>
-          <p:nvPr/>
-        </p:nvSpPr>
-        <p:spPr>
-          <a:xfrm>
-            <a:off x="8074152" y="3959352"/>
-            <a:ext cx="2825496" cy="1170432"/>
+            <a:endParaRPr lang="en-US" sz="1300" dirty="0"/>
+          </a:p>
+        </p:txBody>
+      </p:sp>
+      <p:sp>
+        <p:nvSpPr>
+          <p:cNvPr id="17" name="Text 15"/>
+          <p:cNvSpPr/>
+          <p:nvPr/>
+        </p:nvSpPr>
+        <p:spPr>
+          <a:xfrm>
+            <a:off x="8074152" y="4023360"/>
+            <a:ext cx="2825496" cy="1097280"/>
           </a:xfrm>
           <a:prstGeom prst="rect">
             <a:avLst/>
@@ -8696,7 +9069,7 @@
               <a:buNone/>
             </a:pPr>
             <a:r>
-              <a:rPr lang="en-US" sz="1250" dirty="0">
+              <a:rPr lang="en-US" sz="1550" dirty="0">
                 <a:solidFill>
                   <a:srgbClr val="17364A"/>
                 </a:solidFill>
@@ -8706,7 +9079,7 @@
               </a:rPr>
               <a:t>Connect the concept to public health decisions, safeguards, documentation, or implementation work.</a:t>
             </a:r>
-            <a:endParaRPr lang="en-US" sz="1250" dirty="0"/>
+            <a:endParaRPr lang="en-US" sz="1550" dirty="0"/>
           </a:p>
         </p:txBody>
       </p:sp>
@@ -8903,7 +9276,7 @@
                 <a:ea typeface="Aptos" pitchFamily="34" charset="-122"/>
                 <a:cs typeface="Aptos" pitchFamily="34" charset="-120"/>
               </a:rPr>
-              <a:t>© Paula Soper</a:t>
+              <a:t>Â© Paula Soper</a:t>
             </a:r>
             <a:endParaRPr lang="en-US" sz="800" dirty="0"/>
           </a:p>
@@ -8917,8 +9290,47 @@
         </p:nvSpPr>
         <p:spPr>
           <a:xfrm>
+            <a:off x="11137392" y="6510528"/>
+            <a:ext cx="411480" cy="201168"/>
+          </a:xfrm>
+          <a:prstGeom prst="rect">
+            <a:avLst/>
+          </a:prstGeom>
+          <a:noFill/>
+          <a:ln/>
+        </p:spPr>
+        <p:txBody>
+          <a:bodyPr wrap="square" lIns="0" tIns="0" rIns="0" bIns="0" rtlCol="0" anchor="ctr"/>
+          <a:lstStyle/>
+          <a:p>
+            <a:pPr algn="r" indent="0" marL="0">
+              <a:buNone/>
+            </a:pPr>
+            <a:r>
+              <a:rPr lang="en-US" sz="900" dirty="0">
+                <a:solidFill>
+                  <a:srgbClr val="5F7181"/>
+                </a:solidFill>
+                <a:latin typeface="Aptos" pitchFamily="34" charset="0"/>
+                <a:ea typeface="Aptos" pitchFamily="34" charset="-122"/>
+                <a:cs typeface="Aptos" pitchFamily="34" charset="-120"/>
+              </a:rPr>
+              <a:t>2</a:t>
+            </a:r>
+            <a:endParaRPr lang="en-US" sz="900" dirty="0"/>
+          </a:p>
+        </p:txBody>
+      </p:sp>
+      <p:sp>
+        <p:nvSpPr>
+          <p:cNvPr id="8" name="Text 6"/>
+          <p:cNvSpPr/>
+          <p:nvPr/>
+        </p:nvSpPr>
+        <p:spPr>
+          <a:xfrm>
             <a:off x="640080" y="658368"/>
-            <a:ext cx="10881360" cy="566928"/>
+            <a:ext cx="10881360" cy="713232"/>
           </a:xfrm>
           <a:prstGeom prst="rect">
             <a:avLst/>
@@ -8936,7 +9348,7 @@
               <a:buNone/>
             </a:pPr>
             <a:r>
-              <a:rPr lang="en-US" sz="2700" b="1" dirty="0">
+              <a:rPr lang="en-US" sz="3400" b="1" dirty="0">
                 <a:solidFill>
                   <a:srgbClr val="003A63"/>
                 </a:solidFill>
@@ -8946,20 +9358,20 @@
               </a:rPr>
               <a:t>What this module helps you do</a:t>
             </a:r>
-            <a:endParaRPr lang="en-US" sz="2700" dirty="0"/>
-          </a:p>
-        </p:txBody>
-      </p:sp>
-      <p:sp>
-        <p:nvSpPr>
-          <p:cNvPr id="8" name="Text 6"/>
-          <p:cNvSpPr/>
-          <p:nvPr/>
-        </p:nvSpPr>
-        <p:spPr>
-          <a:xfrm>
-            <a:off x="868680" y="1417320"/>
-            <a:ext cx="6675120" cy="3291840"/>
+            <a:endParaRPr lang="en-US" sz="3400" dirty="0"/>
+          </a:p>
+        </p:txBody>
+      </p:sp>
+      <p:sp>
+        <p:nvSpPr>
+          <p:cNvPr id="9" name="Text 7"/>
+          <p:cNvSpPr/>
+          <p:nvPr/>
+        </p:nvSpPr>
+        <p:spPr>
+          <a:xfrm>
+            <a:off x="868680" y="1508760"/>
+            <a:ext cx="6446520" cy="2926080"/>
           </a:xfrm>
           <a:prstGeom prst="rect">
             <a:avLst/>
@@ -8974,7 +9386,7 @@
           <a:lstStyle/>
           <a:p>
             <a:r>
-              <a:rPr lang="en-US" sz="1700" dirty="0">
+              <a:rPr lang="en-US" sz="2100" dirty="0">
                 <a:solidFill>
                   <a:srgbClr val="17364A"/>
                 </a:solidFill>
@@ -8982,13 +9394,13 @@
                 <a:ea typeface="Aptos" pitchFamily="34" charset="-122"/>
                 <a:cs typeface="Aptos" pitchFamily="34" charset="-120"/>
               </a:rPr>
-              <a:t>AI models often predict what is likely to happen, but public health leaders frequently need to know what action will change an outcome.</a:t>
-            </a:r>
-            <a:endParaRPr lang="en-US" sz="1700" dirty="0"/>
-          </a:p>
-          <a:p>
-            <a:r>
-              <a:rPr lang="en-US" sz="1700" dirty="0">
+              <a:t>AI models often predict what is likely to happen, but public health leaders frequently need to know what action.</a:t>
+            </a:r>
+            <a:endParaRPr lang="en-US" sz="2100" dirty="0"/>
+          </a:p>
+          <a:p>
+            <a:r>
+              <a:rPr lang="en-US" sz="2100" dirty="0">
                 <a:solidFill>
                   <a:srgbClr val="17364A"/>
                 </a:solidFill>
@@ -8996,13 +9408,13 @@
                 <a:ea typeface="Aptos" pitchFamily="34" charset="-122"/>
                 <a:cs typeface="Aptos" pitchFamily="34" charset="-120"/>
               </a:rPr>
-              <a:t>This module helps learners distinguish prediction from causal inference so AI outputs are not misused as evidence that a program, policy, or.</a:t>
-            </a:r>
-            <a:endParaRPr lang="en-US" sz="1700" dirty="0"/>
-          </a:p>
-          <a:p>
-            <a:r>
-              <a:rPr lang="en-US" sz="1700" dirty="0">
+              <a:t>This module helps learners distinguish prediction from causal inference so AI outputs are not misused as evidence.</a:t>
+            </a:r>
+            <a:endParaRPr lang="en-US" sz="2100" dirty="0"/>
+          </a:p>
+          <a:p>
+            <a:r>
+              <a:rPr lang="en-US" sz="2100" dirty="0">
                 <a:solidFill>
                   <a:srgbClr val="17364A"/>
                 </a:solidFill>
@@ -9010,29 +9422,15 @@
                 <a:ea typeface="Aptos" pitchFamily="34" charset="-122"/>
                 <a:cs typeface="Aptos" pitchFamily="34" charset="-120"/>
               </a:rPr>
-              <a:t>Learners examine confounding, bias, comparison groups, counterfactual reasoning, directed acyclic graphs, and quasi-experimental designs at a.</a:t>
-            </a:r>
-            <a:endParaRPr lang="en-US" sz="1700" dirty="0"/>
-          </a:p>
-          <a:p>
-            <a:r>
-              <a:rPr lang="en-US" sz="1700" dirty="0">
-                <a:solidFill>
-                  <a:srgbClr val="17364A"/>
-                </a:solidFill>
-                <a:latin typeface="Aptos" pitchFamily="34" charset="0"/>
-                <a:ea typeface="Aptos" pitchFamily="34" charset="-122"/>
-                <a:cs typeface="Aptos" pitchFamily="34" charset="-120"/>
-              </a:rPr>
-              <a:t>The purpose is not to turn every learner into a causal methods expert.</a:t>
-            </a:r>
-            <a:endParaRPr lang="en-US" sz="1700" dirty="0"/>
-          </a:p>
-        </p:txBody>
-      </p:sp>
-      <p:sp>
-        <p:nvSpPr>
-          <p:cNvPr id="9" name="Shape 7"/>
+              <a:t>Learners examine confounding, bias, comparison groups, counterfactual reasoning, directed acyclic graphs, and.</a:t>
+            </a:r>
+            <a:endParaRPr lang="en-US" sz="2100" dirty="0"/>
+          </a:p>
+        </p:txBody>
+      </p:sp>
+      <p:sp>
+        <p:nvSpPr>
+          <p:cNvPr id="10" name="Shape 8"/>
           <p:cNvSpPr/>
           <p:nvPr/>
         </p:nvSpPr>
@@ -9059,14 +9457,14 @@
       </p:sp>
       <p:sp>
         <p:nvSpPr>
-          <p:cNvPr id="10" name="Text 8"/>
+          <p:cNvPr id="11" name="Text 9"/>
           <p:cNvSpPr/>
           <p:nvPr/>
         </p:nvSpPr>
         <p:spPr>
           <a:xfrm>
             <a:off x="8074152" y="1563624"/>
-            <a:ext cx="2825496" cy="201168"/>
+            <a:ext cx="2825496" cy="256032"/>
           </a:xfrm>
           <a:prstGeom prst="rect">
             <a:avLst/>
@@ -9082,7 +9480,7 @@
               <a:buNone/>
             </a:pPr>
             <a:r>
-              <a:rPr lang="en-US" sz="950" b="1" dirty="0">
+              <a:rPr lang="en-US" sz="1300" b="1" dirty="0">
                 <a:solidFill>
                   <a:srgbClr val="0068B7"/>
                 </a:solidFill>
@@ -9092,20 +9490,20 @@
               </a:rPr>
               <a:t>Module details</a:t>
             </a:r>
-            <a:endParaRPr lang="en-US" sz="950" dirty="0"/>
-          </a:p>
-        </p:txBody>
-      </p:sp>
-      <p:sp>
-        <p:nvSpPr>
-          <p:cNvPr id="11" name="Text 9"/>
-          <p:cNvSpPr/>
-          <p:nvPr/>
-        </p:nvSpPr>
-        <p:spPr>
-          <a:xfrm>
-            <a:off x="8074152" y="1856232"/>
-            <a:ext cx="2825496" cy="1353312"/>
+            <a:endParaRPr lang="en-US" sz="1300" dirty="0"/>
+          </a:p>
+        </p:txBody>
+      </p:sp>
+      <p:sp>
+        <p:nvSpPr>
+          <p:cNvPr id="12" name="Text 10"/>
+          <p:cNvSpPr/>
+          <p:nvPr/>
+        </p:nvSpPr>
+        <p:spPr>
+          <a:xfrm>
+            <a:off x="8074152" y="1920240"/>
+            <a:ext cx="2825496" cy="1280160"/>
           </a:xfrm>
           <a:prstGeom prst="rect">
             <a:avLst/>
@@ -9123,7 +9521,7 @@
               <a:buNone/>
             </a:pPr>
             <a:r>
-              <a:rPr lang="en-US" sz="1250" dirty="0">
+              <a:rPr lang="en-US" sz="1550" dirty="0">
                 <a:solidFill>
                   <a:srgbClr val="17364A"/>
                 </a:solidFill>
@@ -9133,14 +9531,14 @@
               </a:rPr>
               <a:t>Level: intermediate/practitioner</a:t>
             </a:r>
-            <a:endParaRPr lang="en-US" sz="1250" dirty="0"/>
+            <a:endParaRPr lang="en-US" sz="1550" dirty="0"/>
           </a:p>
           <a:p>
             <a:pPr indent="0" marL="0">
               <a:buNone/>
             </a:pPr>
             <a:r>
-              <a:rPr lang="en-US" sz="1250" dirty="0">
+              <a:rPr lang="en-US" sz="1550" dirty="0">
                 <a:solidFill>
                   <a:srgbClr val="17364A"/>
                 </a:solidFill>
@@ -9150,14 +9548,14 @@
               </a:rPr>
               <a:t>Primary track: Analytics and Modeling Track</a:t>
             </a:r>
-            <a:endParaRPr lang="en-US" sz="1250" dirty="0"/>
+            <a:endParaRPr lang="en-US" sz="1550" dirty="0"/>
           </a:p>
           <a:p>
             <a:pPr indent="0" marL="0">
               <a:buNone/>
             </a:pPr>
             <a:r>
-              <a:rPr lang="en-US" sz="1250" dirty="0">
+              <a:rPr lang="en-US" sz="1550" dirty="0">
                 <a:solidFill>
                   <a:srgbClr val="17364A"/>
                 </a:solidFill>
@@ -9167,32 +9565,32 @@
               </a:rPr>
               <a:t>Appears in tracks: analytics-modeling, epidemiology, policy, governance-security</a:t>
             </a:r>
-            <a:endParaRPr lang="en-US" sz="1250" dirty="0"/>
-          </a:p>
-        </p:txBody>
-      </p:sp>
-      <p:sp>
-        <p:nvSpPr>
-          <p:cNvPr id="12" name="Shape 10"/>
-          <p:cNvSpPr/>
-          <p:nvPr/>
-        </p:nvSpPr>
-        <p:spPr>
-          <a:xfrm>
-            <a:off x="7909560" y="3611880"/>
-            <a:ext cx="3154680" cy="1783080"/>
+            <a:endParaRPr lang="en-US" sz="1550" dirty="0"/>
+          </a:p>
+        </p:txBody>
+      </p:sp>
+      <p:sp>
+        <p:nvSpPr>
+          <p:cNvPr id="13" name="Shape 11"/>
+          <p:cNvSpPr/>
+          <p:nvPr/>
+        </p:nvSpPr>
+        <p:spPr>
+          <a:xfrm>
+            <a:off x="7635240" y="3730752"/>
+            <a:ext cx="1033272" cy="749808"/>
           </a:xfrm>
           <a:prstGeom prst="roundRect">
             <a:avLst>
-              <a:gd name="adj" fmla="val 6154"/>
+              <a:gd name="adj" fmla="val 14634"/>
             </a:avLst>
           </a:prstGeom>
           <a:solidFill>
-            <a:srgbClr val="EEF8ED"/>
+            <a:srgbClr val="0068B7"/>
           </a:solidFill>
           <a:ln w="12700">
             <a:solidFill>
-              <a:srgbClr val="B9D7E6"/>
+              <a:srgbClr val="0068B7"/>
             </a:solidFill>
             <a:prstDash val="solid"/>
           </a:ln>
@@ -9200,81 +9598,256 @@
       </p:sp>
       <p:sp>
         <p:nvSpPr>
-          <p:cNvPr id="13" name="Text 11"/>
-          <p:cNvSpPr/>
-          <p:nvPr/>
-        </p:nvSpPr>
-        <p:spPr>
-          <a:xfrm>
-            <a:off x="8074152" y="3758184"/>
-            <a:ext cx="2825496" cy="201168"/>
-          </a:xfrm>
-          <a:prstGeom prst="rect">
-            <a:avLst/>
-          </a:prstGeom>
-          <a:noFill/>
-          <a:ln/>
-        </p:spPr>
-        <p:txBody>
-          <a:bodyPr wrap="square" lIns="0" tIns="0" rIns="0" bIns="0" rtlCol="0" anchor="ctr"/>
-          <a:lstStyle/>
-          <a:p>
-            <a:pPr indent="0" marL="0">
-              <a:buNone/>
-            </a:pPr>
-            <a:r>
-              <a:rPr lang="en-US" sz="950" b="1" dirty="0">
-                <a:solidFill>
-                  <a:srgbClr val="0068B7"/>
-                </a:solidFill>
-                <a:latin typeface="Aptos" pitchFamily="34" charset="0"/>
-                <a:ea typeface="Aptos" pitchFamily="34" charset="-122"/>
-                <a:cs typeface="Aptos" pitchFamily="34" charset="-120"/>
-              </a:rPr>
-              <a:t>Learning approach</a:t>
-            </a:r>
-            <a:endParaRPr lang="en-US" sz="950" dirty="0"/>
-          </a:p>
-        </p:txBody>
-      </p:sp>
-      <p:sp>
-        <p:nvSpPr>
           <p:cNvPr id="14" name="Text 12"/>
           <p:cNvSpPr/>
           <p:nvPr/>
         </p:nvSpPr>
         <p:spPr>
           <a:xfrm>
-            <a:off x="8074152" y="4050792"/>
-            <a:ext cx="2825496" cy="1216152"/>
-          </a:xfrm>
-          <a:prstGeom prst="rect">
-            <a:avLst/>
-          </a:prstGeom>
-          <a:noFill/>
-          <a:ln/>
-        </p:spPr>
-        <p:txBody>
-          <a:bodyPr wrap="square" lIns="0" tIns="0" rIns="0" bIns="0" rtlCol="0" anchor="t">
+            <a:off x="7708392" y="3922776"/>
+            <a:ext cx="886968" cy="310896"/>
+          </a:xfrm>
+          <a:prstGeom prst="rect">
+            <a:avLst/>
+          </a:prstGeom>
+          <a:noFill/>
+          <a:ln/>
+        </p:spPr>
+        <p:txBody>
+          <a:bodyPr wrap="square" lIns="0" tIns="0" rIns="0" bIns="0" rtlCol="0" anchor="ctr">
             <a:normAutofit/>
           </a:bodyPr>
           <a:lstStyle/>
           <a:p>
-            <a:pPr indent="0" marL="0">
-              <a:buNone/>
-            </a:pPr>
-            <a:r>
-              <a:rPr lang="en-US" sz="1250" dirty="0">
-                <a:solidFill>
-                  <a:srgbClr val="17364A"/>
-                </a:solidFill>
-                <a:latin typeface="Aptos" pitchFamily="34" charset="0"/>
-                <a:ea typeface="Aptos" pitchFamily="34" charset="-122"/>
-                <a:cs typeface="Aptos" pitchFamily="34" charset="-120"/>
-              </a:rPr>
-              <a:t>Review the core ideas, complete the practical exercise, check your understanding, and use the related plays and tools to apply the lesson.</a:t>
-            </a:r>
-            <a:endParaRPr lang="en-US" sz="1250" dirty="0"/>
+            <a:pPr algn="ctr" indent="0" marL="0">
+              <a:buNone/>
+            </a:pPr>
+            <a:r>
+              <a:rPr lang="en-US" sz="1500" b="1" dirty="0">
+                <a:solidFill>
+                  <a:srgbClr val="FFFFFF"/>
+                </a:solidFill>
+                <a:latin typeface="Aptos" pitchFamily="34" charset="0"/>
+                <a:ea typeface="Aptos" pitchFamily="34" charset="-122"/>
+                <a:cs typeface="Aptos" pitchFamily="34" charset="-120"/>
+              </a:rPr>
+              <a:t>Learn</a:t>
+            </a:r>
+            <a:endParaRPr lang="en-US" sz="1500" dirty="0"/>
+          </a:p>
+        </p:txBody>
+      </p:sp>
+      <p:sp>
+        <p:nvSpPr>
+          <p:cNvPr id="15" name="Text 13"/>
+          <p:cNvSpPr/>
+          <p:nvPr/>
+        </p:nvSpPr>
+        <p:spPr>
+          <a:xfrm>
+            <a:off x="8695944" y="3941064"/>
+            <a:ext cx="201168" cy="256032"/>
+          </a:xfrm>
+          <a:prstGeom prst="rect">
+            <a:avLst/>
+          </a:prstGeom>
+          <a:noFill/>
+          <a:ln/>
+        </p:spPr>
+        <p:txBody>
+          <a:bodyPr wrap="square" lIns="0" tIns="0" rIns="0" bIns="0" rtlCol="0" anchor="ctr"/>
+          <a:lstStyle/>
+          <a:p>
+            <a:pPr algn="ctr" indent="0" marL="0">
+              <a:buNone/>
+            </a:pPr>
+            <a:r>
+              <a:rPr lang="en-US" sz="1800" b="1" dirty="0">
+                <a:solidFill>
+                  <a:srgbClr val="0068B7"/>
+                </a:solidFill>
+                <a:latin typeface="Aptos" pitchFamily="34" charset="0"/>
+                <a:ea typeface="Aptos" pitchFamily="34" charset="-122"/>
+                <a:cs typeface="Aptos" pitchFamily="34" charset="-120"/>
+              </a:rPr>
+              <a:t>â†’</a:t>
+            </a:r>
+            <a:endParaRPr lang="en-US" sz="1800" dirty="0"/>
+          </a:p>
+        </p:txBody>
+      </p:sp>
+      <p:sp>
+        <p:nvSpPr>
+          <p:cNvPr id="16" name="Shape 14"/>
+          <p:cNvSpPr/>
+          <p:nvPr/>
+        </p:nvSpPr>
+        <p:spPr>
+          <a:xfrm>
+            <a:off x="8924544" y="3730752"/>
+            <a:ext cx="1033272" cy="749808"/>
+          </a:xfrm>
+          <a:prstGeom prst="roundRect">
+            <a:avLst>
+              <a:gd name="adj" fmla="val 14634"/>
+            </a:avLst>
+          </a:prstGeom>
+          <a:solidFill>
+            <a:srgbClr val="2F8A28"/>
+          </a:solidFill>
+          <a:ln w="12700">
+            <a:solidFill>
+              <a:srgbClr val="2F8A28"/>
+            </a:solidFill>
+            <a:prstDash val="solid"/>
+          </a:ln>
+        </p:spPr>
+      </p:sp>
+      <p:sp>
+        <p:nvSpPr>
+          <p:cNvPr id="17" name="Text 15"/>
+          <p:cNvSpPr/>
+          <p:nvPr/>
+        </p:nvSpPr>
+        <p:spPr>
+          <a:xfrm>
+            <a:off x="8997696" y="3922776"/>
+            <a:ext cx="886968" cy="310896"/>
+          </a:xfrm>
+          <a:prstGeom prst="rect">
+            <a:avLst/>
+          </a:prstGeom>
+          <a:noFill/>
+          <a:ln/>
+        </p:spPr>
+        <p:txBody>
+          <a:bodyPr wrap="square" lIns="0" tIns="0" rIns="0" bIns="0" rtlCol="0" anchor="ctr">
+            <a:normAutofit/>
+          </a:bodyPr>
+          <a:lstStyle/>
+          <a:p>
+            <a:pPr algn="ctr" indent="0" marL="0">
+              <a:buNone/>
+            </a:pPr>
+            <a:r>
+              <a:rPr lang="en-US" sz="1500" b="1" dirty="0">
+                <a:solidFill>
+                  <a:srgbClr val="FFFFFF"/>
+                </a:solidFill>
+                <a:latin typeface="Aptos" pitchFamily="34" charset="0"/>
+                <a:ea typeface="Aptos" pitchFamily="34" charset="-122"/>
+                <a:cs typeface="Aptos" pitchFamily="34" charset="-120"/>
+              </a:rPr>
+              <a:t>Apply</a:t>
+            </a:r>
+            <a:endParaRPr lang="en-US" sz="1500" dirty="0"/>
+          </a:p>
+        </p:txBody>
+      </p:sp>
+      <p:sp>
+        <p:nvSpPr>
+          <p:cNvPr id="18" name="Text 16"/>
+          <p:cNvSpPr/>
+          <p:nvPr/>
+        </p:nvSpPr>
+        <p:spPr>
+          <a:xfrm>
+            <a:off x="9985248" y="3941064"/>
+            <a:ext cx="201168" cy="256032"/>
+          </a:xfrm>
+          <a:prstGeom prst="rect">
+            <a:avLst/>
+          </a:prstGeom>
+          <a:noFill/>
+          <a:ln/>
+        </p:spPr>
+        <p:txBody>
+          <a:bodyPr wrap="square" lIns="0" tIns="0" rIns="0" bIns="0" rtlCol="0" anchor="ctr"/>
+          <a:lstStyle/>
+          <a:p>
+            <a:pPr algn="ctr" indent="0" marL="0">
+              <a:buNone/>
+            </a:pPr>
+            <a:r>
+              <a:rPr lang="en-US" sz="1800" b="1" dirty="0">
+                <a:solidFill>
+                  <a:srgbClr val="0068B7"/>
+                </a:solidFill>
+                <a:latin typeface="Aptos" pitchFamily="34" charset="0"/>
+                <a:ea typeface="Aptos" pitchFamily="34" charset="-122"/>
+                <a:cs typeface="Aptos" pitchFamily="34" charset="-120"/>
+              </a:rPr>
+              <a:t>â†’</a:t>
+            </a:r>
+            <a:endParaRPr lang="en-US" sz="1800" dirty="0"/>
+          </a:p>
+        </p:txBody>
+      </p:sp>
+      <p:sp>
+        <p:nvSpPr>
+          <p:cNvPr id="19" name="Shape 17"/>
+          <p:cNvSpPr/>
+          <p:nvPr/>
+        </p:nvSpPr>
+        <p:spPr>
+          <a:xfrm>
+            <a:off x="10213848" y="3730752"/>
+            <a:ext cx="1033272" cy="749808"/>
+          </a:xfrm>
+          <a:prstGeom prst="roundRect">
+            <a:avLst>
+              <a:gd name="adj" fmla="val 14634"/>
+            </a:avLst>
+          </a:prstGeom>
+          <a:solidFill>
+            <a:srgbClr val="6A4CA3"/>
+          </a:solidFill>
+          <a:ln w="12700">
+            <a:solidFill>
+              <a:srgbClr val="6A4CA3"/>
+            </a:solidFill>
+            <a:prstDash val="solid"/>
+          </a:ln>
+        </p:spPr>
+      </p:sp>
+      <p:sp>
+        <p:nvSpPr>
+          <p:cNvPr id="20" name="Text 18"/>
+          <p:cNvSpPr/>
+          <p:nvPr/>
+        </p:nvSpPr>
+        <p:spPr>
+          <a:xfrm>
+            <a:off x="10287000" y="3922776"/>
+            <a:ext cx="886968" cy="310896"/>
+          </a:xfrm>
+          <a:prstGeom prst="rect">
+            <a:avLst/>
+          </a:prstGeom>
+          <a:noFill/>
+          <a:ln/>
+        </p:spPr>
+        <p:txBody>
+          <a:bodyPr wrap="square" lIns="0" tIns="0" rIns="0" bIns="0" rtlCol="0" anchor="ctr">
+            <a:normAutofit/>
+          </a:bodyPr>
+          <a:lstStyle/>
+          <a:p>
+            <a:pPr algn="ctr" indent="0" marL="0">
+              <a:buNone/>
+            </a:pPr>
+            <a:r>
+              <a:rPr lang="en-US" sz="1500" b="1" dirty="0">
+                <a:solidFill>
+                  <a:srgbClr val="FFFFFF"/>
+                </a:solidFill>
+                <a:latin typeface="Aptos" pitchFamily="34" charset="0"/>
+                <a:ea typeface="Aptos" pitchFamily="34" charset="-122"/>
+                <a:cs typeface="Aptos" pitchFamily="34" charset="-120"/>
+              </a:rPr>
+              <a:t>Document</a:t>
+            </a:r>
+            <a:endParaRPr lang="en-US" sz="1500" dirty="0"/>
           </a:p>
         </p:txBody>
       </p:sp>
@@ -9471,7 +10044,7 @@
                 <a:ea typeface="Aptos" pitchFamily="34" charset="-122"/>
                 <a:cs typeface="Aptos" pitchFamily="34" charset="-120"/>
               </a:rPr>
-              <a:t>© Paula Soper</a:t>
+              <a:t>Â© Paula Soper</a:t>
             </a:r>
             <a:endParaRPr lang="en-US" sz="800" dirty="0"/>
           </a:p>
@@ -9479,7 +10052,46 @@
       </p:sp>
       <p:sp>
         <p:nvSpPr>
-          <p:cNvPr id="7" name="Shape 5"/>
+          <p:cNvPr id="7" name="Text 5"/>
+          <p:cNvSpPr/>
+          <p:nvPr/>
+        </p:nvSpPr>
+        <p:spPr>
+          <a:xfrm>
+            <a:off x="11137392" y="6510528"/>
+            <a:ext cx="411480" cy="201168"/>
+          </a:xfrm>
+          <a:prstGeom prst="rect">
+            <a:avLst/>
+          </a:prstGeom>
+          <a:noFill/>
+          <a:ln/>
+        </p:spPr>
+        <p:txBody>
+          <a:bodyPr wrap="square" lIns="0" tIns="0" rIns="0" bIns="0" rtlCol="0" anchor="ctr"/>
+          <a:lstStyle/>
+          <a:p>
+            <a:pPr algn="r" indent="0" marL="0">
+              <a:buNone/>
+            </a:pPr>
+            <a:r>
+              <a:rPr lang="en-US" sz="900" dirty="0">
+                <a:solidFill>
+                  <a:srgbClr val="5F7181"/>
+                </a:solidFill>
+                <a:latin typeface="Aptos" pitchFamily="34" charset="0"/>
+                <a:ea typeface="Aptos" pitchFamily="34" charset="-122"/>
+                <a:cs typeface="Aptos" pitchFamily="34" charset="-120"/>
+              </a:rPr>
+              <a:t>20</a:t>
+            </a:r>
+            <a:endParaRPr lang="en-US" sz="900" dirty="0"/>
+          </a:p>
+        </p:txBody>
+      </p:sp>
+      <p:sp>
+        <p:nvSpPr>
+          <p:cNvPr id="8" name="Shape 6"/>
           <p:cNvSpPr/>
           <p:nvPr/>
         </p:nvSpPr>
@@ -9504,7 +10116,7 @@
       </p:sp>
       <p:sp>
         <p:nvSpPr>
-          <p:cNvPr id="8" name="Text 6"/>
+          <p:cNvPr id="9" name="Text 7"/>
           <p:cNvSpPr/>
           <p:nvPr/>
         </p:nvSpPr>
@@ -9543,14 +10155,14 @@
       </p:sp>
       <p:sp>
         <p:nvSpPr>
-          <p:cNvPr id="9" name="Text 7"/>
+          <p:cNvPr id="10" name="Text 8"/>
           <p:cNvSpPr/>
           <p:nvPr/>
         </p:nvSpPr>
         <p:spPr>
           <a:xfrm>
             <a:off x="640080" y="621792"/>
-            <a:ext cx="10881360" cy="566928"/>
+            <a:ext cx="10881360" cy="713232"/>
           </a:xfrm>
           <a:prstGeom prst="rect">
             <a:avLst/>
@@ -9568,7 +10180,7 @@
               <a:buNone/>
             </a:pPr>
             <a:r>
-              <a:rPr lang="en-US" sz="2700" b="1" dirty="0">
+              <a:rPr lang="en-US" sz="3400" b="1" dirty="0">
                 <a:solidFill>
                   <a:srgbClr val="003A63"/>
                 </a:solidFill>
@@ -9578,20 +10190,20 @@
               </a:rPr>
               <a:t>Knowledge Check</a:t>
             </a:r>
-            <a:endParaRPr lang="en-US" sz="2700" dirty="0"/>
-          </a:p>
-        </p:txBody>
-      </p:sp>
-      <p:sp>
-        <p:nvSpPr>
-          <p:cNvPr id="10" name="Text 8"/>
-          <p:cNvSpPr/>
-          <p:nvPr/>
-        </p:nvSpPr>
-        <p:spPr>
-          <a:xfrm>
-            <a:off x="868680" y="1417320"/>
-            <a:ext cx="6675120" cy="4434840"/>
+            <a:endParaRPr lang="en-US" sz="3400" dirty="0"/>
+          </a:p>
+        </p:txBody>
+      </p:sp>
+      <p:sp>
+        <p:nvSpPr>
+          <p:cNvPr id="11" name="Text 9"/>
+          <p:cNvSpPr/>
+          <p:nvPr/>
+        </p:nvSpPr>
+        <p:spPr>
+          <a:xfrm>
+            <a:off x="868680" y="1508760"/>
+            <a:ext cx="6537960" cy="4160520"/>
           </a:xfrm>
           <a:prstGeom prst="rect">
             <a:avLst/>
@@ -9606,7 +10218,7 @@
           <a:lstStyle/>
           <a:p>
             <a:r>
-              <a:rPr lang="en-US" sz="1700" dirty="0">
+              <a:rPr lang="en-US" sz="2100" dirty="0">
                 <a:solidFill>
                   <a:srgbClr val="17364A"/>
                 </a:solidFill>
@@ -9616,11 +10228,11 @@
               </a:rPr>
               <a:t>1. Which statement best distinguishes prediction from causal inference?</a:t>
             </a:r>
-            <a:endParaRPr lang="en-US" sz="1700" dirty="0"/>
-          </a:p>
-          <a:p>
-            <a:r>
-              <a:rPr lang="en-US" sz="1700" dirty="0">
+            <a:endParaRPr lang="en-US" sz="2100" dirty="0"/>
+          </a:p>
+          <a:p>
+            <a:r>
+              <a:rPr lang="en-US" sz="2100" dirty="0">
                 <a:solidFill>
                   <a:srgbClr val="17364A"/>
                 </a:solidFill>
@@ -9630,11 +10242,11 @@
               </a:rPr>
               <a:t>2. What is the best reason to assign an accountability owner?</a:t>
             </a:r>
-            <a:endParaRPr lang="en-US" sz="1700" dirty="0"/>
-          </a:p>
-          <a:p>
-            <a:r>
-              <a:rPr lang="en-US" sz="1700" dirty="0">
+            <a:endParaRPr lang="en-US" sz="2100" dirty="0"/>
+          </a:p>
+          <a:p>
+            <a:r>
+              <a:rPr lang="en-US" sz="2100" dirty="0">
                 <a:solidFill>
                   <a:srgbClr val="17364A"/>
                 </a:solidFill>
@@ -9644,27 +10256,13 @@
               </a:rPr>
               <a:t>3. When should an AI-supported workflow be escalated for review?</a:t>
             </a:r>
-            <a:endParaRPr lang="en-US" sz="1700" dirty="0"/>
-          </a:p>
-          <a:p>
-            <a:r>
-              <a:rPr lang="en-US" sz="1700" dirty="0">
-                <a:solidFill>
-                  <a:srgbClr val="17364A"/>
-                </a:solidFill>
-                <a:latin typeface="Aptos" pitchFamily="34" charset="0"/>
-                <a:ea typeface="Aptos" pitchFamily="34" charset="-122"/>
-                <a:cs typeface="Aptos" pitchFamily="34" charset="-120"/>
-              </a:rPr>
-              <a:t>4. Which practice best supports public accountability?</a:t>
-            </a:r>
-            <a:endParaRPr lang="en-US" sz="1700" dirty="0"/>
-          </a:p>
-        </p:txBody>
-      </p:sp>
-      <p:sp>
-        <p:nvSpPr>
-          <p:cNvPr id="11" name="Shape 9"/>
+            <a:endParaRPr lang="en-US" sz="2100" dirty="0"/>
+          </a:p>
+        </p:txBody>
+      </p:sp>
+      <p:sp>
+        <p:nvSpPr>
+          <p:cNvPr id="12" name="Shape 10"/>
           <p:cNvSpPr/>
           <p:nvPr/>
         </p:nvSpPr>
@@ -9691,14 +10289,14 @@
       </p:sp>
       <p:sp>
         <p:nvSpPr>
-          <p:cNvPr id="12" name="Text 10"/>
+          <p:cNvPr id="13" name="Text 11"/>
           <p:cNvSpPr/>
           <p:nvPr/>
         </p:nvSpPr>
         <p:spPr>
           <a:xfrm>
             <a:off x="8074152" y="1563624"/>
-            <a:ext cx="2825496" cy="201168"/>
+            <a:ext cx="2825496" cy="256032"/>
           </a:xfrm>
           <a:prstGeom prst="rect">
             <a:avLst/>
@@ -9714,7 +10312,7 @@
               <a:buNone/>
             </a:pPr>
             <a:r>
-              <a:rPr lang="en-US" sz="950" b="1" dirty="0">
+              <a:rPr lang="en-US" sz="1300" b="1" dirty="0">
                 <a:solidFill>
                   <a:srgbClr val="0068B7"/>
                 </a:solidFill>
@@ -9724,20 +10322,20 @@
               </a:rPr>
               <a:t>Key idea</a:t>
             </a:r>
-            <a:endParaRPr lang="en-US" sz="950" dirty="0"/>
-          </a:p>
-        </p:txBody>
-      </p:sp>
-      <p:sp>
-        <p:nvSpPr>
-          <p:cNvPr id="13" name="Text 11"/>
-          <p:cNvSpPr/>
-          <p:nvPr/>
-        </p:nvSpPr>
-        <p:spPr>
-          <a:xfrm>
-            <a:off x="8074152" y="1856232"/>
-            <a:ext cx="2825496" cy="1261872"/>
+            <a:endParaRPr lang="en-US" sz="1300" dirty="0"/>
+          </a:p>
+        </p:txBody>
+      </p:sp>
+      <p:sp>
+        <p:nvSpPr>
+          <p:cNvPr id="14" name="Text 12"/>
+          <p:cNvSpPr/>
+          <p:nvPr/>
+        </p:nvSpPr>
+        <p:spPr>
+          <a:xfrm>
+            <a:off x="8074152" y="1920240"/>
+            <a:ext cx="2825496" cy="1188720"/>
           </a:xfrm>
           <a:prstGeom prst="rect">
             <a:avLst/>
@@ -9755,7 +10353,7 @@
               <a:buNone/>
             </a:pPr>
             <a:r>
-              <a:rPr lang="en-US" sz="1250" dirty="0">
+              <a:rPr lang="en-US" sz="1550" dirty="0">
                 <a:solidFill>
                   <a:srgbClr val="17364A"/>
                 </a:solidFill>
@@ -9765,13 +10363,13 @@
               </a:rPr>
               <a:t>1. Which statement best distinguishes prediction from causal inference?</a:t>
             </a:r>
-            <a:endParaRPr lang="en-US" sz="1250" dirty="0"/>
-          </a:p>
-        </p:txBody>
-      </p:sp>
-      <p:sp>
-        <p:nvSpPr>
-          <p:cNvPr id="14" name="Shape 12"/>
+            <a:endParaRPr lang="en-US" sz="1550" dirty="0"/>
+          </a:p>
+        </p:txBody>
+      </p:sp>
+      <p:sp>
+        <p:nvSpPr>
+          <p:cNvPr id="15" name="Shape 13"/>
           <p:cNvSpPr/>
           <p:nvPr/>
         </p:nvSpPr>
@@ -9798,14 +10396,14 @@
       </p:sp>
       <p:sp>
         <p:nvSpPr>
-          <p:cNvPr id="15" name="Text 13"/>
+          <p:cNvPr id="16" name="Text 14"/>
           <p:cNvSpPr/>
           <p:nvPr/>
         </p:nvSpPr>
         <p:spPr>
           <a:xfrm>
             <a:off x="8074152" y="3666744"/>
-            <a:ext cx="2825496" cy="201168"/>
+            <a:ext cx="2825496" cy="256032"/>
           </a:xfrm>
           <a:prstGeom prst="rect">
             <a:avLst/>
@@ -9821,7 +10419,7 @@
               <a:buNone/>
             </a:pPr>
             <a:r>
-              <a:rPr lang="en-US" sz="950" b="1" dirty="0">
+              <a:rPr lang="en-US" sz="1300" b="1" dirty="0">
                 <a:solidFill>
                   <a:srgbClr val="0068B7"/>
                 </a:solidFill>
@@ -9831,20 +10429,20 @@
               </a:rPr>
               <a:t>Use this for</a:t>
             </a:r>
-            <a:endParaRPr lang="en-US" sz="950" dirty="0"/>
-          </a:p>
-        </p:txBody>
-      </p:sp>
-      <p:sp>
-        <p:nvSpPr>
-          <p:cNvPr id="16" name="Text 14"/>
-          <p:cNvSpPr/>
-          <p:nvPr/>
-        </p:nvSpPr>
-        <p:spPr>
-          <a:xfrm>
-            <a:off x="8074152" y="3959352"/>
-            <a:ext cx="2825496" cy="1170432"/>
+            <a:endParaRPr lang="en-US" sz="1300" dirty="0"/>
+          </a:p>
+        </p:txBody>
+      </p:sp>
+      <p:sp>
+        <p:nvSpPr>
+          <p:cNvPr id="17" name="Text 15"/>
+          <p:cNvSpPr/>
+          <p:nvPr/>
+        </p:nvSpPr>
+        <p:spPr>
+          <a:xfrm>
+            <a:off x="8074152" y="4023360"/>
+            <a:ext cx="2825496" cy="1097280"/>
           </a:xfrm>
           <a:prstGeom prst="rect">
             <a:avLst/>
@@ -9862,7 +10460,7 @@
               <a:buNone/>
             </a:pPr>
             <a:r>
-              <a:rPr lang="en-US" sz="1250" dirty="0">
+              <a:rPr lang="en-US" sz="1550" dirty="0">
                 <a:solidFill>
                   <a:srgbClr val="17364A"/>
                 </a:solidFill>
@@ -9872,7 +10470,7 @@
               </a:rPr>
               <a:t>Connect the concept to public health decisions, safeguards, documentation, or implementation work.</a:t>
             </a:r>
-            <a:endParaRPr lang="en-US" sz="1250" dirty="0"/>
+            <a:endParaRPr lang="en-US" sz="1550" dirty="0"/>
           </a:p>
         </p:txBody>
       </p:sp>
@@ -10069,7 +10667,7 @@
                 <a:ea typeface="Aptos" pitchFamily="34" charset="-122"/>
                 <a:cs typeface="Aptos" pitchFamily="34" charset="-120"/>
               </a:rPr>
-              <a:t>© Paula Soper</a:t>
+              <a:t>Â© Paula Soper</a:t>
             </a:r>
             <a:endParaRPr lang="en-US" sz="800" dirty="0"/>
           </a:p>
@@ -10077,7 +10675,46 @@
       </p:sp>
       <p:sp>
         <p:nvSpPr>
-          <p:cNvPr id="7" name="Shape 5"/>
+          <p:cNvPr id="7" name="Text 5"/>
+          <p:cNvSpPr/>
+          <p:nvPr/>
+        </p:nvSpPr>
+        <p:spPr>
+          <a:xfrm>
+            <a:off x="11137392" y="6510528"/>
+            <a:ext cx="411480" cy="201168"/>
+          </a:xfrm>
+          <a:prstGeom prst="rect">
+            <a:avLst/>
+          </a:prstGeom>
+          <a:noFill/>
+          <a:ln/>
+        </p:spPr>
+        <p:txBody>
+          <a:bodyPr wrap="square" lIns="0" tIns="0" rIns="0" bIns="0" rtlCol="0" anchor="ctr"/>
+          <a:lstStyle/>
+          <a:p>
+            <a:pPr algn="r" indent="0" marL="0">
+              <a:buNone/>
+            </a:pPr>
+            <a:r>
+              <a:rPr lang="en-US" sz="900" dirty="0">
+                <a:solidFill>
+                  <a:srgbClr val="5F7181"/>
+                </a:solidFill>
+                <a:latin typeface="Aptos" pitchFamily="34" charset="0"/>
+                <a:ea typeface="Aptos" pitchFamily="34" charset="-122"/>
+                <a:cs typeface="Aptos" pitchFamily="34" charset="-120"/>
+              </a:rPr>
+              <a:t>21</a:t>
+            </a:r>
+            <a:endParaRPr lang="en-US" sz="900" dirty="0"/>
+          </a:p>
+        </p:txBody>
+      </p:sp>
+      <p:sp>
+        <p:nvSpPr>
+          <p:cNvPr id="8" name="Shape 6"/>
           <p:cNvSpPr/>
           <p:nvPr/>
         </p:nvSpPr>
@@ -10102,7 +10739,7 @@
       </p:sp>
       <p:sp>
         <p:nvSpPr>
-          <p:cNvPr id="8" name="Text 6"/>
+          <p:cNvPr id="9" name="Text 7"/>
           <p:cNvSpPr/>
           <p:nvPr/>
         </p:nvSpPr>
@@ -10141,14 +10778,14 @@
       </p:sp>
       <p:sp>
         <p:nvSpPr>
-          <p:cNvPr id="9" name="Text 7"/>
+          <p:cNvPr id="10" name="Text 8"/>
           <p:cNvSpPr/>
           <p:nvPr/>
         </p:nvSpPr>
         <p:spPr>
           <a:xfrm>
             <a:off x="640080" y="621792"/>
-            <a:ext cx="10881360" cy="566928"/>
+            <a:ext cx="10881360" cy="713232"/>
           </a:xfrm>
           <a:prstGeom prst="rect">
             <a:avLst/>
@@ -10166,7 +10803,7 @@
               <a:buNone/>
             </a:pPr>
             <a:r>
-              <a:rPr lang="en-US" sz="2700" b="1" dirty="0">
+              <a:rPr lang="en-US" sz="3400" b="1" dirty="0">
                 <a:solidFill>
                   <a:srgbClr val="003A63"/>
                 </a:solidFill>
@@ -10176,20 +10813,20 @@
               </a:rPr>
               <a:t>References and Resources</a:t>
             </a:r>
-            <a:endParaRPr lang="en-US" sz="2700" dirty="0"/>
-          </a:p>
-        </p:txBody>
-      </p:sp>
-      <p:sp>
-        <p:nvSpPr>
-          <p:cNvPr id="10" name="Text 8"/>
-          <p:cNvSpPr/>
-          <p:nvPr/>
-        </p:nvSpPr>
-        <p:spPr>
-          <a:xfrm>
-            <a:off x="868680" y="1417320"/>
-            <a:ext cx="6675120" cy="4434840"/>
+            <a:endParaRPr lang="en-US" sz="3400" dirty="0"/>
+          </a:p>
+        </p:txBody>
+      </p:sp>
+      <p:sp>
+        <p:nvSpPr>
+          <p:cNvPr id="11" name="Text 9"/>
+          <p:cNvSpPr/>
+          <p:nvPr/>
+        </p:nvSpPr>
+        <p:spPr>
+          <a:xfrm>
+            <a:off x="868680" y="1508760"/>
+            <a:ext cx="6537960" cy="4160520"/>
           </a:xfrm>
           <a:prstGeom prst="rect">
             <a:avLst/>
@@ -10204,7 +10841,7 @@
           <a:lstStyle/>
           <a:p>
             <a:r>
-              <a:rPr lang="en-US" sz="1700" dirty="0">
+              <a:rPr lang="en-US" sz="2100" dirty="0">
                 <a:solidFill>
                   <a:srgbClr val="17364A"/>
                 </a:solidFill>
@@ -10214,11 +10851,11 @@
               </a:rPr>
               <a:t>CDC Public Health Data Strategy and Data Modernization resources:.</a:t>
             </a:r>
-            <a:endParaRPr lang="en-US" sz="1700" dirty="0"/>
-          </a:p>
-          <a:p>
-            <a:r>
-              <a:rPr lang="en-US" sz="1700" dirty="0">
+            <a:endParaRPr lang="en-US" sz="2100" dirty="0"/>
+          </a:p>
+          <a:p>
+            <a:r>
+              <a:rPr lang="en-US" sz="2100" dirty="0">
                 <a:solidFill>
                   <a:srgbClr val="17364A"/>
                 </a:solidFill>
@@ -10228,11 +10865,11 @@
               </a:rPr>
               <a:t>NIST Artificial Intelligence Risk Management Framework and NIST Generative AI Profile:.</a:t>
             </a:r>
-            <a:endParaRPr lang="en-US" sz="1700" dirty="0"/>
-          </a:p>
-          <a:p>
-            <a:r>
-              <a:rPr lang="en-US" sz="1700" dirty="0">
+            <a:endParaRPr lang="en-US" sz="2100" dirty="0"/>
+          </a:p>
+          <a:p>
+            <a:r>
+              <a:rPr lang="en-US" sz="2100" dirty="0">
                 <a:solidFill>
                   <a:srgbClr val="17364A"/>
                 </a:solidFill>
@@ -10240,29 +10877,15 @@
                 <a:ea typeface="Aptos" pitchFamily="34" charset="-122"/>
                 <a:cs typeface="Aptos" pitchFamily="34" charset="-120"/>
               </a:rPr>
-              <a:t>WHO Ethics and Governance of Artificial Intelligence for Health guidance: https://www.who.int/publications/i/item/9789240029200</a:t>
-            </a:r>
-            <a:endParaRPr lang="en-US" sz="1700" dirty="0"/>
-          </a:p>
-          <a:p>
-            <a:r>
-              <a:rPr lang="en-US" sz="1700" dirty="0">
-                <a:solidFill>
-                  <a:srgbClr val="17364A"/>
-                </a:solidFill>
-                <a:latin typeface="Aptos" pitchFamily="34" charset="0"/>
-                <a:ea typeface="Aptos" pitchFamily="34" charset="-122"/>
-                <a:cs typeface="Aptos" pitchFamily="34" charset="-120"/>
-              </a:rPr>
-              <a:t>OWASP Top 10 for Large Language Model Applications: https://owasp.org/www-project-top-10-for-large-language-model-applications/</a:t>
-            </a:r>
-            <a:endParaRPr lang="en-US" sz="1700" dirty="0"/>
-          </a:p>
-        </p:txBody>
-      </p:sp>
-      <p:sp>
-        <p:nvSpPr>
-          <p:cNvPr id="11" name="Shape 9"/>
+              <a:t>WHO Ethics and Governance of Artificial Intelligence for Health guidance:.</a:t>
+            </a:r>
+            <a:endParaRPr lang="en-US" sz="2100" dirty="0"/>
+          </a:p>
+        </p:txBody>
+      </p:sp>
+      <p:sp>
+        <p:nvSpPr>
+          <p:cNvPr id="12" name="Shape 10"/>
           <p:cNvSpPr/>
           <p:nvPr/>
         </p:nvSpPr>
@@ -10289,14 +10912,14 @@
       </p:sp>
       <p:sp>
         <p:nvSpPr>
-          <p:cNvPr id="12" name="Text 10"/>
+          <p:cNvPr id="13" name="Text 11"/>
           <p:cNvSpPr/>
           <p:nvPr/>
         </p:nvSpPr>
         <p:spPr>
           <a:xfrm>
             <a:off x="8074152" y="1563624"/>
-            <a:ext cx="2825496" cy="201168"/>
+            <a:ext cx="2825496" cy="256032"/>
           </a:xfrm>
           <a:prstGeom prst="rect">
             <a:avLst/>
@@ -10312,7 +10935,7 @@
               <a:buNone/>
             </a:pPr>
             <a:r>
-              <a:rPr lang="en-US" sz="950" b="1" dirty="0">
+              <a:rPr lang="en-US" sz="1300" b="1" dirty="0">
                 <a:solidFill>
                   <a:srgbClr val="0068B7"/>
                 </a:solidFill>
@@ -10322,20 +10945,20 @@
               </a:rPr>
               <a:t>Key idea</a:t>
             </a:r>
-            <a:endParaRPr lang="en-US" sz="950" dirty="0"/>
-          </a:p>
-        </p:txBody>
-      </p:sp>
-      <p:sp>
-        <p:nvSpPr>
-          <p:cNvPr id="13" name="Text 11"/>
-          <p:cNvSpPr/>
-          <p:nvPr/>
-        </p:nvSpPr>
-        <p:spPr>
-          <a:xfrm>
-            <a:off x="8074152" y="1856232"/>
-            <a:ext cx="2825496" cy="1261872"/>
+            <a:endParaRPr lang="en-US" sz="1300" dirty="0"/>
+          </a:p>
+        </p:txBody>
+      </p:sp>
+      <p:sp>
+        <p:nvSpPr>
+          <p:cNvPr id="14" name="Text 12"/>
+          <p:cNvSpPr/>
+          <p:nvPr/>
+        </p:nvSpPr>
+        <p:spPr>
+          <a:xfrm>
+            <a:off x="8074152" y="1920240"/>
+            <a:ext cx="2825496" cy="1188720"/>
           </a:xfrm>
           <a:prstGeom prst="rect">
             <a:avLst/>
@@ -10353,7 +10976,7 @@
               <a:buNone/>
             </a:pPr>
             <a:r>
-              <a:rPr lang="en-US" sz="1250" dirty="0">
+              <a:rPr lang="en-US" sz="1550" dirty="0">
                 <a:solidFill>
                   <a:srgbClr val="17364A"/>
                 </a:solidFill>
@@ -10363,13 +10986,13 @@
               </a:rPr>
               <a:t>CDC Public Health Data Strategy and Data Modernization resources:.</a:t>
             </a:r>
-            <a:endParaRPr lang="en-US" sz="1250" dirty="0"/>
-          </a:p>
-        </p:txBody>
-      </p:sp>
-      <p:sp>
-        <p:nvSpPr>
-          <p:cNvPr id="14" name="Shape 12"/>
+            <a:endParaRPr lang="en-US" sz="1550" dirty="0"/>
+          </a:p>
+        </p:txBody>
+      </p:sp>
+      <p:sp>
+        <p:nvSpPr>
+          <p:cNvPr id="15" name="Shape 13"/>
           <p:cNvSpPr/>
           <p:nvPr/>
         </p:nvSpPr>
@@ -10396,14 +11019,14 @@
       </p:sp>
       <p:sp>
         <p:nvSpPr>
-          <p:cNvPr id="15" name="Text 13"/>
+          <p:cNvPr id="16" name="Text 14"/>
           <p:cNvSpPr/>
           <p:nvPr/>
         </p:nvSpPr>
         <p:spPr>
           <a:xfrm>
             <a:off x="8074152" y="3666744"/>
-            <a:ext cx="2825496" cy="201168"/>
+            <a:ext cx="2825496" cy="256032"/>
           </a:xfrm>
           <a:prstGeom prst="rect">
             <a:avLst/>
@@ -10419,7 +11042,7 @@
               <a:buNone/>
             </a:pPr>
             <a:r>
-              <a:rPr lang="en-US" sz="950" b="1" dirty="0">
+              <a:rPr lang="en-US" sz="1300" b="1" dirty="0">
                 <a:solidFill>
                   <a:srgbClr val="0068B7"/>
                 </a:solidFill>
@@ -10429,20 +11052,20 @@
               </a:rPr>
               <a:t>Use this for</a:t>
             </a:r>
-            <a:endParaRPr lang="en-US" sz="950" dirty="0"/>
-          </a:p>
-        </p:txBody>
-      </p:sp>
-      <p:sp>
-        <p:nvSpPr>
-          <p:cNvPr id="16" name="Text 14"/>
-          <p:cNvSpPr/>
-          <p:nvPr/>
-        </p:nvSpPr>
-        <p:spPr>
-          <a:xfrm>
-            <a:off x="8074152" y="3959352"/>
-            <a:ext cx="2825496" cy="1170432"/>
+            <a:endParaRPr lang="en-US" sz="1300" dirty="0"/>
+          </a:p>
+        </p:txBody>
+      </p:sp>
+      <p:sp>
+        <p:nvSpPr>
+          <p:cNvPr id="17" name="Text 15"/>
+          <p:cNvSpPr/>
+          <p:nvPr/>
+        </p:nvSpPr>
+        <p:spPr>
+          <a:xfrm>
+            <a:off x="8074152" y="4023360"/>
+            <a:ext cx="2825496" cy="1097280"/>
           </a:xfrm>
           <a:prstGeom prst="rect">
             <a:avLst/>
@@ -10460,7 +11083,7 @@
               <a:buNone/>
             </a:pPr>
             <a:r>
-              <a:rPr lang="en-US" sz="1250" dirty="0">
+              <a:rPr lang="en-US" sz="1550" dirty="0">
                 <a:solidFill>
                   <a:srgbClr val="17364A"/>
                 </a:solidFill>
@@ -10470,7 +11093,7 @@
               </a:rPr>
               <a:t>Connect the concept to public health decisions, safeguards, documentation, or implementation work.</a:t>
             </a:r>
-            <a:endParaRPr lang="en-US" sz="1250" dirty="0"/>
+            <a:endParaRPr lang="en-US" sz="1550" dirty="0"/>
           </a:p>
         </p:txBody>
       </p:sp>
@@ -10667,7 +11290,7 @@
                 <a:ea typeface="Aptos" pitchFamily="34" charset="-122"/>
                 <a:cs typeface="Aptos" pitchFamily="34" charset="-120"/>
               </a:rPr>
-              <a:t>© Paula Soper</a:t>
+              <a:t>Â© Paula Soper</a:t>
             </a:r>
             <a:endParaRPr lang="en-US" sz="800" dirty="0"/>
           </a:p>
@@ -10681,8 +11304,47 @@
         </p:nvSpPr>
         <p:spPr>
           <a:xfrm>
+            <a:off x="11137392" y="6510528"/>
+            <a:ext cx="411480" cy="201168"/>
+          </a:xfrm>
+          <a:prstGeom prst="rect">
+            <a:avLst/>
+          </a:prstGeom>
+          <a:noFill/>
+          <a:ln/>
+        </p:spPr>
+        <p:txBody>
+          <a:bodyPr wrap="square" lIns="0" tIns="0" rIns="0" bIns="0" rtlCol="0" anchor="ctr"/>
+          <a:lstStyle/>
+          <a:p>
+            <a:pPr algn="r" indent="0" marL="0">
+              <a:buNone/>
+            </a:pPr>
+            <a:r>
+              <a:rPr lang="en-US" sz="900" dirty="0">
+                <a:solidFill>
+                  <a:srgbClr val="5F7181"/>
+                </a:solidFill>
+                <a:latin typeface="Aptos" pitchFamily="34" charset="0"/>
+                <a:ea typeface="Aptos" pitchFamily="34" charset="-122"/>
+                <a:cs typeface="Aptos" pitchFamily="34" charset="-120"/>
+              </a:rPr>
+              <a:t>22</a:t>
+            </a:r>
+            <a:endParaRPr lang="en-US" sz="900" dirty="0"/>
+          </a:p>
+        </p:txBody>
+      </p:sp>
+      <p:sp>
+        <p:nvSpPr>
+          <p:cNvPr id="8" name="Text 6"/>
+          <p:cNvSpPr/>
+          <p:nvPr/>
+        </p:nvSpPr>
+        <p:spPr>
+          <a:xfrm>
             <a:off x="640080" y="658368"/>
-            <a:ext cx="10881360" cy="566928"/>
+            <a:ext cx="10881360" cy="713232"/>
           </a:xfrm>
           <a:prstGeom prst="rect">
             <a:avLst/>
@@ -10700,7 +11362,7 @@
               <a:buNone/>
             </a:pPr>
             <a:r>
-              <a:rPr lang="en-US" sz="2700" b="1" dirty="0">
+              <a:rPr lang="en-US" sz="3400" b="1" dirty="0">
                 <a:solidFill>
                   <a:srgbClr val="003A63"/>
                 </a:solidFill>
@@ -10710,20 +11372,20 @@
               </a:rPr>
               <a:t>References and Resources Continued</a:t>
             </a:r>
-            <a:endParaRPr lang="en-US" sz="2700" dirty="0"/>
-          </a:p>
-        </p:txBody>
-      </p:sp>
-      <p:sp>
-        <p:nvSpPr>
-          <p:cNvPr id="8" name="Text 6"/>
-          <p:cNvSpPr/>
-          <p:nvPr/>
-        </p:nvSpPr>
-        <p:spPr>
-          <a:xfrm>
-            <a:off x="868680" y="1417320"/>
-            <a:ext cx="6675120" cy="4434840"/>
+            <a:endParaRPr lang="en-US" sz="3400" dirty="0"/>
+          </a:p>
+        </p:txBody>
+      </p:sp>
+      <p:sp>
+        <p:nvSpPr>
+          <p:cNvPr id="9" name="Text 7"/>
+          <p:cNvSpPr/>
+          <p:nvPr/>
+        </p:nvSpPr>
+        <p:spPr>
+          <a:xfrm>
+            <a:off x="868680" y="1508760"/>
+            <a:ext cx="6537960" cy="4160520"/>
           </a:xfrm>
           <a:prstGeom prst="rect">
             <a:avLst/>
@@ -10738,7 +11400,7 @@
           <a:lstStyle/>
           <a:p>
             <a:r>
-              <a:rPr lang="en-US" sz="1700" dirty="0">
+              <a:rPr lang="en-US" sz="2100" dirty="0">
                 <a:solidFill>
                   <a:srgbClr val="17364A"/>
                 </a:solidFill>
@@ -10746,15 +11408,15 @@
                 <a:ea typeface="Aptos" pitchFamily="34" charset="-122"/>
                 <a:cs typeface="Aptos" pitchFamily="34" charset="-120"/>
               </a:rPr>
-              <a:t>Agency policies for privacy, public records, cybersecurity, procurement, civil rights, accessibility, language access, and.</a:t>
-            </a:r>
-            <a:endParaRPr lang="en-US" sz="1700" dirty="0"/>
-          </a:p>
-        </p:txBody>
-      </p:sp>
-      <p:sp>
-        <p:nvSpPr>
-          <p:cNvPr id="9" name="Shape 7"/>
+              <a:t>Agency policies for privacy, public records, cybersecurity, procurement, civil rights, accessibility,.</a:t>
+            </a:r>
+            <a:endParaRPr lang="en-US" sz="2100" dirty="0"/>
+          </a:p>
+        </p:txBody>
+      </p:sp>
+      <p:sp>
+        <p:nvSpPr>
+          <p:cNvPr id="10" name="Shape 8"/>
           <p:cNvSpPr/>
           <p:nvPr/>
         </p:nvSpPr>
@@ -10781,14 +11443,14 @@
       </p:sp>
       <p:sp>
         <p:nvSpPr>
-          <p:cNvPr id="10" name="Text 8"/>
+          <p:cNvPr id="11" name="Text 9"/>
           <p:cNvSpPr/>
           <p:nvPr/>
         </p:nvSpPr>
         <p:spPr>
           <a:xfrm>
             <a:off x="8074152" y="1563624"/>
-            <a:ext cx="2825496" cy="201168"/>
+            <a:ext cx="2825496" cy="256032"/>
           </a:xfrm>
           <a:prstGeom prst="rect">
             <a:avLst/>
@@ -10804,7 +11466,7 @@
               <a:buNone/>
             </a:pPr>
             <a:r>
-              <a:rPr lang="en-US" sz="950" b="1" dirty="0">
+              <a:rPr lang="en-US" sz="1300" b="1" dirty="0">
                 <a:solidFill>
                   <a:srgbClr val="0068B7"/>
                 </a:solidFill>
@@ -10814,20 +11476,20 @@
               </a:rPr>
               <a:t>Key idea</a:t>
             </a:r>
-            <a:endParaRPr lang="en-US" sz="950" dirty="0"/>
-          </a:p>
-        </p:txBody>
-      </p:sp>
-      <p:sp>
-        <p:nvSpPr>
-          <p:cNvPr id="11" name="Text 9"/>
-          <p:cNvSpPr/>
-          <p:nvPr/>
-        </p:nvSpPr>
-        <p:spPr>
-          <a:xfrm>
-            <a:off x="8074152" y="1856232"/>
-            <a:ext cx="2825496" cy="1261872"/>
+            <a:endParaRPr lang="en-US" sz="1300" dirty="0"/>
+          </a:p>
+        </p:txBody>
+      </p:sp>
+      <p:sp>
+        <p:nvSpPr>
+          <p:cNvPr id="12" name="Text 10"/>
+          <p:cNvSpPr/>
+          <p:nvPr/>
+        </p:nvSpPr>
+        <p:spPr>
+          <a:xfrm>
+            <a:off x="8074152" y="1920240"/>
+            <a:ext cx="2825496" cy="1188720"/>
           </a:xfrm>
           <a:prstGeom prst="rect">
             <a:avLst/>
@@ -10845,7 +11507,7 @@
               <a:buNone/>
             </a:pPr>
             <a:r>
-              <a:rPr lang="en-US" sz="1250" dirty="0">
+              <a:rPr lang="en-US" sz="1550" dirty="0">
                 <a:solidFill>
                   <a:srgbClr val="17364A"/>
                 </a:solidFill>
@@ -10853,15 +11515,15 @@
                 <a:ea typeface="Aptos" pitchFamily="34" charset="-122"/>
                 <a:cs typeface="Aptos" pitchFamily="34" charset="-120"/>
               </a:rPr>
-              <a:t>Agency policies for privacy, public records, cybersecurity, procurement, civil rights, accessibility, language access, and.</a:t>
-            </a:r>
-            <a:endParaRPr lang="en-US" sz="1250" dirty="0"/>
-          </a:p>
-        </p:txBody>
-      </p:sp>
-      <p:sp>
-        <p:nvSpPr>
-          <p:cNvPr id="12" name="Shape 10"/>
+              <a:t>Agency policies for privacy, public records, cybersecurity, procurement, civil rights, accessibility,.</a:t>
+            </a:r>
+            <a:endParaRPr lang="en-US" sz="1550" dirty="0"/>
+          </a:p>
+        </p:txBody>
+      </p:sp>
+      <p:sp>
+        <p:nvSpPr>
+          <p:cNvPr id="13" name="Shape 11"/>
           <p:cNvSpPr/>
           <p:nvPr/>
         </p:nvSpPr>
@@ -10888,14 +11550,14 @@
       </p:sp>
       <p:sp>
         <p:nvSpPr>
-          <p:cNvPr id="13" name="Text 11"/>
+          <p:cNvPr id="14" name="Text 12"/>
           <p:cNvSpPr/>
           <p:nvPr/>
         </p:nvSpPr>
         <p:spPr>
           <a:xfrm>
             <a:off x="8074152" y="3666744"/>
-            <a:ext cx="2825496" cy="201168"/>
+            <a:ext cx="2825496" cy="256032"/>
           </a:xfrm>
           <a:prstGeom prst="rect">
             <a:avLst/>
@@ -10911,7 +11573,7 @@
               <a:buNone/>
             </a:pPr>
             <a:r>
-              <a:rPr lang="en-US" sz="950" b="1" dirty="0">
+              <a:rPr lang="en-US" sz="1300" b="1" dirty="0">
                 <a:solidFill>
                   <a:srgbClr val="0068B7"/>
                 </a:solidFill>
@@ -10921,20 +11583,20 @@
               </a:rPr>
               <a:t>Use this for</a:t>
             </a:r>
-            <a:endParaRPr lang="en-US" sz="950" dirty="0"/>
-          </a:p>
-        </p:txBody>
-      </p:sp>
-      <p:sp>
-        <p:nvSpPr>
-          <p:cNvPr id="14" name="Text 12"/>
-          <p:cNvSpPr/>
-          <p:nvPr/>
-        </p:nvSpPr>
-        <p:spPr>
-          <a:xfrm>
-            <a:off x="8074152" y="3959352"/>
-            <a:ext cx="2825496" cy="1170432"/>
+            <a:endParaRPr lang="en-US" sz="1300" dirty="0"/>
+          </a:p>
+        </p:txBody>
+      </p:sp>
+      <p:sp>
+        <p:nvSpPr>
+          <p:cNvPr id="15" name="Text 13"/>
+          <p:cNvSpPr/>
+          <p:nvPr/>
+        </p:nvSpPr>
+        <p:spPr>
+          <a:xfrm>
+            <a:off x="8074152" y="4023360"/>
+            <a:ext cx="2825496" cy="1097280"/>
           </a:xfrm>
           <a:prstGeom prst="rect">
             <a:avLst/>
@@ -10952,7 +11614,7 @@
               <a:buNone/>
             </a:pPr>
             <a:r>
-              <a:rPr lang="en-US" sz="1250" dirty="0">
+              <a:rPr lang="en-US" sz="1550" dirty="0">
                 <a:solidFill>
                   <a:srgbClr val="17364A"/>
                 </a:solidFill>
@@ -10962,7 +11624,7 @@
               </a:rPr>
               <a:t>Connect the concept to public health decisions, safeguards, documentation, or implementation work.</a:t>
             </a:r>
-            <a:endParaRPr lang="en-US" sz="1250" dirty="0"/>
+            <a:endParaRPr lang="en-US" sz="1550" dirty="0"/>
           </a:p>
         </p:txBody>
       </p:sp>
@@ -11159,7 +11821,7 @@
                 <a:ea typeface="Aptos" pitchFamily="34" charset="-122"/>
                 <a:cs typeface="Aptos" pitchFamily="34" charset="-120"/>
               </a:rPr>
-              <a:t>© Paula Soper</a:t>
+              <a:t>Â© Paula Soper</a:t>
             </a:r>
             <a:endParaRPr lang="en-US" sz="800" dirty="0"/>
           </a:p>
@@ -11173,8 +11835,47 @@
         </p:nvSpPr>
         <p:spPr>
           <a:xfrm>
+            <a:off x="11137392" y="6510528"/>
+            <a:ext cx="411480" cy="201168"/>
+          </a:xfrm>
+          <a:prstGeom prst="rect">
+            <a:avLst/>
+          </a:prstGeom>
+          <a:noFill/>
+          <a:ln/>
+        </p:spPr>
+        <p:txBody>
+          <a:bodyPr wrap="square" lIns="0" tIns="0" rIns="0" bIns="0" rtlCol="0" anchor="ctr"/>
+          <a:lstStyle/>
+          <a:p>
+            <a:pPr algn="r" indent="0" marL="0">
+              <a:buNone/>
+            </a:pPr>
+            <a:r>
+              <a:rPr lang="en-US" sz="900" dirty="0">
+                <a:solidFill>
+                  <a:srgbClr val="5F7181"/>
+                </a:solidFill>
+                <a:latin typeface="Aptos" pitchFamily="34" charset="0"/>
+                <a:ea typeface="Aptos" pitchFamily="34" charset="-122"/>
+                <a:cs typeface="Aptos" pitchFamily="34" charset="-120"/>
+              </a:rPr>
+              <a:t>3</a:t>
+            </a:r>
+            <a:endParaRPr lang="en-US" sz="900" dirty="0"/>
+          </a:p>
+        </p:txBody>
+      </p:sp>
+      <p:sp>
+        <p:nvSpPr>
+          <p:cNvPr id="8" name="Text 6"/>
+          <p:cNvSpPr/>
+          <p:nvPr/>
+        </p:nvSpPr>
+        <p:spPr>
+          <a:xfrm>
             <a:off x="640080" y="658368"/>
-            <a:ext cx="10881360" cy="566928"/>
+            <a:ext cx="10881360" cy="713232"/>
           </a:xfrm>
           <a:prstGeom prst="rect">
             <a:avLst/>
@@ -11192,7 +11893,7 @@
               <a:buNone/>
             </a:pPr>
             <a:r>
-              <a:rPr lang="en-US" sz="2700" b="1" dirty="0">
+              <a:rPr lang="en-US" sz="3400" b="1" dirty="0">
                 <a:solidFill>
                   <a:srgbClr val="003A63"/>
                 </a:solidFill>
@@ -11202,20 +11903,20 @@
               </a:rPr>
               <a:t>How this module connects to the playbook</a:t>
             </a:r>
-            <a:endParaRPr lang="en-US" sz="2700" dirty="0"/>
-          </a:p>
-        </p:txBody>
-      </p:sp>
-      <p:sp>
-        <p:nvSpPr>
-          <p:cNvPr id="8" name="Text 6"/>
-          <p:cNvSpPr/>
-          <p:nvPr/>
-        </p:nvSpPr>
-        <p:spPr>
-          <a:xfrm>
-            <a:off x="868680" y="1417320"/>
-            <a:ext cx="6903720" cy="4480560"/>
+            <a:endParaRPr lang="en-US" sz="3400" dirty="0"/>
+          </a:p>
+        </p:txBody>
+      </p:sp>
+      <p:sp>
+        <p:nvSpPr>
+          <p:cNvPr id="9" name="Text 7"/>
+          <p:cNvSpPr/>
+          <p:nvPr/>
+        </p:nvSpPr>
+        <p:spPr>
+          <a:xfrm>
+            <a:off x="868680" y="1508760"/>
+            <a:ext cx="6812280" cy="3977640"/>
           </a:xfrm>
           <a:prstGeom prst="rect">
             <a:avLst/>
@@ -11230,7 +11931,7 @@
           <a:lstStyle/>
           <a:p>
             <a:r>
-              <a:rPr lang="en-US" sz="1540" dirty="0">
+              <a:rPr lang="en-US" sz="1900" dirty="0">
                 <a:solidFill>
                   <a:srgbClr val="17364A"/>
                 </a:solidFill>
@@ -11238,13 +11939,13 @@
                 <a:ea typeface="Aptos" pitchFamily="34" charset="-122"/>
                 <a:cs typeface="Aptos" pitchFamily="34" charset="-120"/>
               </a:rPr>
-              <a:t>Play 11: Build and Deploy AI Solutions - This lesson informs Play 11 by helping learners connect the lesson topic to build and deploy.</a:t>
-            </a:r>
-            <a:endParaRPr lang="en-US" sz="1540" dirty="0"/>
-          </a:p>
-          <a:p>
-            <a:r>
-              <a:rPr lang="en-US" sz="1540" dirty="0">
+              <a:t>Play 11: Build and Deploy AI Solutions - This lesson informs Play 11 by helping learners connect the lesson.</a:t>
+            </a:r>
+            <a:endParaRPr lang="en-US" sz="1900" dirty="0"/>
+          </a:p>
+          <a:p>
+            <a:r>
+              <a:rPr lang="en-US" sz="1900" dirty="0">
                 <a:solidFill>
                   <a:srgbClr val="17364A"/>
                 </a:solidFill>
@@ -11252,13 +11953,13 @@
                 <a:ea typeface="Aptos" pitchFamily="34" charset="-122"/>
                 <a:cs typeface="Aptos" pitchFamily="34" charset="-120"/>
               </a:rPr>
-              <a:t>Play 7: Prioritize Use Cases - This lesson informs Play 7 by helping learners connect the lesson topic to prioritize use cases work.</a:t>
-            </a:r>
-            <a:endParaRPr lang="en-US" sz="1540" dirty="0"/>
-          </a:p>
-          <a:p>
-            <a:r>
-              <a:rPr lang="en-US" sz="1540" dirty="0">
+              <a:t>Play 7: Prioritize Use Cases - This lesson informs Play 7 by helping learners connect the lesson topic to.</a:t>
+            </a:r>
+            <a:endParaRPr lang="en-US" sz="1900" dirty="0"/>
+          </a:p>
+          <a:p>
+            <a:r>
+              <a:rPr lang="en-US" sz="1900" dirty="0">
                 <a:solidFill>
                   <a:srgbClr val="17364A"/>
                 </a:solidFill>
@@ -11266,13 +11967,13 @@
                 <a:ea typeface="Aptos" pitchFamily="34" charset="-122"/>
                 <a:cs typeface="Aptos" pitchFamily="34" charset="-120"/>
               </a:rPr>
-              <a:t>Play 1: Vision &amp; Guardrails - This lesson informs Play 1 by helping learners connect the lesson topic to vision &amp; guardrails work in.</a:t>
-            </a:r>
-            <a:endParaRPr lang="en-US" sz="1540" dirty="0"/>
-          </a:p>
-          <a:p>
-            <a:r>
-              <a:rPr lang="en-US" sz="1540" dirty="0">
+              <a:t>Play 1: Vision &amp; Guardrails - This lesson informs Play 1 by helping learners connect the lesson topic to.</a:t>
+            </a:r>
+            <a:endParaRPr lang="en-US" sz="1900" dirty="0"/>
+          </a:p>
+          <a:p>
+            <a:r>
+              <a:rPr lang="en-US" sz="1900" dirty="0">
                 <a:solidFill>
                   <a:srgbClr val="17364A"/>
                 </a:solidFill>
@@ -11280,15 +11981,15 @@
                 <a:ea typeface="Aptos" pitchFamily="34" charset="-122"/>
                 <a:cs typeface="Aptos" pitchFamily="34" charset="-120"/>
               </a:rPr>
-              <a:t>Play 2: Readiness Assessment - This lesson informs Play 2 by helping learners connect the lesson topic to readiness assessment work.</a:t>
-            </a:r>
-            <a:endParaRPr lang="en-US" sz="1540" dirty="0"/>
-          </a:p>
-        </p:txBody>
-      </p:sp>
-      <p:sp>
-        <p:nvSpPr>
-          <p:cNvPr id="9" name="Shape 7"/>
+              <a:t>Play 2: Readiness Assessment - This lesson informs Play 2 by helping learners connect the lesson topic to.</a:t>
+            </a:r>
+            <a:endParaRPr lang="en-US" sz="1900" dirty="0"/>
+          </a:p>
+        </p:txBody>
+      </p:sp>
+      <p:sp>
+        <p:nvSpPr>
+          <p:cNvPr id="10" name="Shape 8"/>
           <p:cNvSpPr/>
           <p:nvPr/>
         </p:nvSpPr>
@@ -11315,14 +12016,14 @@
       </p:sp>
       <p:sp>
         <p:nvSpPr>
-          <p:cNvPr id="10" name="Text 8"/>
+          <p:cNvPr id="11" name="Text 9"/>
           <p:cNvSpPr/>
           <p:nvPr/>
         </p:nvSpPr>
         <p:spPr>
           <a:xfrm>
             <a:off x="8211312" y="1563624"/>
-            <a:ext cx="2734056" cy="201168"/>
+            <a:ext cx="2734056" cy="256032"/>
           </a:xfrm>
           <a:prstGeom prst="rect">
             <a:avLst/>
@@ -11338,7 +12039,7 @@
               <a:buNone/>
             </a:pPr>
             <a:r>
-              <a:rPr lang="en-US" sz="950" b="1" dirty="0">
+              <a:rPr lang="en-US" sz="1300" b="1" dirty="0">
                 <a:solidFill>
                   <a:srgbClr val="0068B7"/>
                 </a:solidFill>
@@ -11348,20 +12049,20 @@
               </a:rPr>
               <a:t>Apply the lesson</a:t>
             </a:r>
-            <a:endParaRPr lang="en-US" sz="950" dirty="0"/>
-          </a:p>
-        </p:txBody>
-      </p:sp>
-      <p:sp>
-        <p:nvSpPr>
-          <p:cNvPr id="11" name="Text 9"/>
-          <p:cNvSpPr/>
-          <p:nvPr/>
-        </p:nvSpPr>
-        <p:spPr>
-          <a:xfrm>
-            <a:off x="8211312" y="1856232"/>
-            <a:ext cx="2734056" cy="1536192"/>
+            <a:endParaRPr lang="en-US" sz="1300" dirty="0"/>
+          </a:p>
+        </p:txBody>
+      </p:sp>
+      <p:sp>
+        <p:nvSpPr>
+          <p:cNvPr id="12" name="Text 10"/>
+          <p:cNvSpPr/>
+          <p:nvPr/>
+        </p:nvSpPr>
+        <p:spPr>
+          <a:xfrm>
+            <a:off x="8211312" y="1920240"/>
+            <a:ext cx="2734056" cy="1463040"/>
           </a:xfrm>
           <a:prstGeom prst="rect">
             <a:avLst/>
@@ -11379,7 +12080,7 @@
               <a:buNone/>
             </a:pPr>
             <a:r>
-              <a:rPr lang="en-US" sz="1250" dirty="0">
+              <a:rPr lang="en-US" sz="1550" dirty="0">
                 <a:solidFill>
                   <a:srgbClr val="17364A"/>
                 </a:solidFill>
@@ -11389,32 +12090,32 @@
               </a:rPr>
               <a:t>Use the related plays to identify decisions, participants, timing, approvals, and documentation needed for responsible implementation.</a:t>
             </a:r>
-            <a:endParaRPr lang="en-US" sz="1250" dirty="0"/>
-          </a:p>
-        </p:txBody>
-      </p:sp>
-      <p:sp>
-        <p:nvSpPr>
-          <p:cNvPr id="12" name="Shape 10"/>
-          <p:cNvSpPr/>
-          <p:nvPr/>
-        </p:nvSpPr>
-        <p:spPr>
-          <a:xfrm>
-            <a:off x="8046720" y="3794760"/>
-            <a:ext cx="3063240" cy="1508760"/>
+            <a:endParaRPr lang="en-US" sz="1550" dirty="0"/>
+          </a:p>
+        </p:txBody>
+      </p:sp>
+      <p:sp>
+        <p:nvSpPr>
+          <p:cNvPr id="13" name="Shape 11"/>
+          <p:cNvSpPr/>
+          <p:nvPr/>
+        </p:nvSpPr>
+        <p:spPr>
+          <a:xfrm>
+            <a:off x="7818120" y="3977640"/>
+            <a:ext cx="972312" cy="749808"/>
           </a:xfrm>
           <a:prstGeom prst="roundRect">
             <a:avLst>
-              <a:gd name="adj" fmla="val 7273"/>
+              <a:gd name="adj" fmla="val 14634"/>
             </a:avLst>
           </a:prstGeom>
           <a:solidFill>
-            <a:srgbClr val="FFF4D9"/>
+            <a:srgbClr val="0068B7"/>
           </a:solidFill>
           <a:ln w="12700">
             <a:solidFill>
-              <a:srgbClr val="B9D7E6"/>
+              <a:srgbClr val="0068B7"/>
             </a:solidFill>
             <a:prstDash val="solid"/>
           </a:ln>
@@ -11422,81 +12123,256 @@
       </p:sp>
       <p:sp>
         <p:nvSpPr>
-          <p:cNvPr id="13" name="Text 11"/>
-          <p:cNvSpPr/>
-          <p:nvPr/>
-        </p:nvSpPr>
-        <p:spPr>
-          <a:xfrm>
-            <a:off x="8211312" y="3941064"/>
-            <a:ext cx="2734056" cy="201168"/>
-          </a:xfrm>
-          <a:prstGeom prst="rect">
-            <a:avLst/>
-          </a:prstGeom>
-          <a:noFill/>
-          <a:ln/>
-        </p:spPr>
-        <p:txBody>
-          <a:bodyPr wrap="square" lIns="0" tIns="0" rIns="0" bIns="0" rtlCol="0" anchor="ctr"/>
-          <a:lstStyle/>
-          <a:p>
-            <a:pPr indent="0" marL="0">
-              <a:buNone/>
-            </a:pPr>
-            <a:r>
-              <a:rPr lang="en-US" sz="950" b="1" dirty="0">
-                <a:solidFill>
-                  <a:srgbClr val="0068B7"/>
-                </a:solidFill>
-                <a:latin typeface="Aptos" pitchFamily="34" charset="0"/>
-                <a:ea typeface="Aptos" pitchFamily="34" charset="-122"/>
-                <a:cs typeface="Aptos" pitchFamily="34" charset="-120"/>
-              </a:rPr>
-              <a:t>Keep in mind</a:t>
-            </a:r>
-            <a:endParaRPr lang="en-US" sz="950" dirty="0"/>
-          </a:p>
-        </p:txBody>
-      </p:sp>
-      <p:sp>
-        <p:nvSpPr>
           <p:cNvPr id="14" name="Text 12"/>
           <p:cNvSpPr/>
           <p:nvPr/>
         </p:nvSpPr>
         <p:spPr>
           <a:xfrm>
-            <a:off x="8211312" y="4233672"/>
-            <a:ext cx="2734056" cy="941832"/>
-          </a:xfrm>
-          <a:prstGeom prst="rect">
-            <a:avLst/>
-          </a:prstGeom>
-          <a:noFill/>
-          <a:ln/>
-        </p:spPr>
-        <p:txBody>
-          <a:bodyPr wrap="square" lIns="0" tIns="0" rIns="0" bIns="0" rtlCol="0" anchor="t">
+            <a:off x="7891272" y="4169664"/>
+            <a:ext cx="826008" cy="310896"/>
+          </a:xfrm>
+          <a:prstGeom prst="rect">
+            <a:avLst/>
+          </a:prstGeom>
+          <a:noFill/>
+          <a:ln/>
+        </p:spPr>
+        <p:txBody>
+          <a:bodyPr wrap="square" lIns="0" tIns="0" rIns="0" bIns="0" rtlCol="0" anchor="ctr">
             <a:normAutofit/>
           </a:bodyPr>
           <a:lstStyle/>
           <a:p>
-            <a:pPr indent="0" marL="0">
-              <a:buNone/>
-            </a:pPr>
-            <a:r>
-              <a:rPr lang="en-US" sz="1250" dirty="0">
-                <a:solidFill>
-                  <a:srgbClr val="17364A"/>
-                </a:solidFill>
-                <a:latin typeface="Aptos" pitchFamily="34" charset="0"/>
-                <a:ea typeface="Aptos" pitchFamily="34" charset="-122"/>
-                <a:cs typeface="Aptos" pitchFamily="34" charset="-120"/>
-              </a:rPr>
-              <a:t>The playbook connection helps turn training into agency work, not just individual knowledge.</a:t>
-            </a:r>
-            <a:endParaRPr lang="en-US" sz="1250" dirty="0"/>
+            <a:pPr algn="ctr" indent="0" marL="0">
+              <a:buNone/>
+            </a:pPr>
+            <a:r>
+              <a:rPr lang="en-US" sz="1500" b="1" dirty="0">
+                <a:solidFill>
+                  <a:srgbClr val="FFFFFF"/>
+                </a:solidFill>
+                <a:latin typeface="Aptos" pitchFamily="34" charset="0"/>
+                <a:ea typeface="Aptos" pitchFamily="34" charset="-122"/>
+                <a:cs typeface="Aptos" pitchFamily="34" charset="-120"/>
+              </a:rPr>
+              <a:t>Lesson</a:t>
+            </a:r>
+            <a:endParaRPr lang="en-US" sz="1500" dirty="0"/>
+          </a:p>
+        </p:txBody>
+      </p:sp>
+      <p:sp>
+        <p:nvSpPr>
+          <p:cNvPr id="15" name="Text 13"/>
+          <p:cNvSpPr/>
+          <p:nvPr/>
+        </p:nvSpPr>
+        <p:spPr>
+          <a:xfrm>
+            <a:off x="8817864" y="4187952"/>
+            <a:ext cx="201168" cy="256032"/>
+          </a:xfrm>
+          <a:prstGeom prst="rect">
+            <a:avLst/>
+          </a:prstGeom>
+          <a:noFill/>
+          <a:ln/>
+        </p:spPr>
+        <p:txBody>
+          <a:bodyPr wrap="square" lIns="0" tIns="0" rIns="0" bIns="0" rtlCol="0" anchor="ctr"/>
+          <a:lstStyle/>
+          <a:p>
+            <a:pPr algn="ctr" indent="0" marL="0">
+              <a:buNone/>
+            </a:pPr>
+            <a:r>
+              <a:rPr lang="en-US" sz="1800" b="1" dirty="0">
+                <a:solidFill>
+                  <a:srgbClr val="0068B7"/>
+                </a:solidFill>
+                <a:latin typeface="Aptos" pitchFamily="34" charset="0"/>
+                <a:ea typeface="Aptos" pitchFamily="34" charset="-122"/>
+                <a:cs typeface="Aptos" pitchFamily="34" charset="-120"/>
+              </a:rPr>
+              <a:t>â†’</a:t>
+            </a:r>
+            <a:endParaRPr lang="en-US" sz="1800" dirty="0"/>
+          </a:p>
+        </p:txBody>
+      </p:sp>
+      <p:sp>
+        <p:nvSpPr>
+          <p:cNvPr id="16" name="Shape 14"/>
+          <p:cNvSpPr/>
+          <p:nvPr/>
+        </p:nvSpPr>
+        <p:spPr>
+          <a:xfrm>
+            <a:off x="9046464" y="3977640"/>
+            <a:ext cx="972312" cy="749808"/>
+          </a:xfrm>
+          <a:prstGeom prst="roundRect">
+            <a:avLst>
+              <a:gd name="adj" fmla="val 14634"/>
+            </a:avLst>
+          </a:prstGeom>
+          <a:solidFill>
+            <a:srgbClr val="2F8A28"/>
+          </a:solidFill>
+          <a:ln w="12700">
+            <a:solidFill>
+              <a:srgbClr val="2F8A28"/>
+            </a:solidFill>
+            <a:prstDash val="solid"/>
+          </a:ln>
+        </p:spPr>
+      </p:sp>
+      <p:sp>
+        <p:nvSpPr>
+          <p:cNvPr id="17" name="Text 15"/>
+          <p:cNvSpPr/>
+          <p:nvPr/>
+        </p:nvSpPr>
+        <p:spPr>
+          <a:xfrm>
+            <a:off x="9119616" y="4169664"/>
+            <a:ext cx="826008" cy="310896"/>
+          </a:xfrm>
+          <a:prstGeom prst="rect">
+            <a:avLst/>
+          </a:prstGeom>
+          <a:noFill/>
+          <a:ln/>
+        </p:spPr>
+        <p:txBody>
+          <a:bodyPr wrap="square" lIns="0" tIns="0" rIns="0" bIns="0" rtlCol="0" anchor="ctr">
+            <a:normAutofit/>
+          </a:bodyPr>
+          <a:lstStyle/>
+          <a:p>
+            <a:pPr algn="ctr" indent="0" marL="0">
+              <a:buNone/>
+            </a:pPr>
+            <a:r>
+              <a:rPr lang="en-US" sz="1500" b="1" dirty="0">
+                <a:solidFill>
+                  <a:srgbClr val="FFFFFF"/>
+                </a:solidFill>
+                <a:latin typeface="Aptos" pitchFamily="34" charset="0"/>
+                <a:ea typeface="Aptos" pitchFamily="34" charset="-122"/>
+                <a:cs typeface="Aptos" pitchFamily="34" charset="-120"/>
+              </a:rPr>
+              <a:t>Plays</a:t>
+            </a:r>
+            <a:endParaRPr lang="en-US" sz="1500" dirty="0"/>
+          </a:p>
+        </p:txBody>
+      </p:sp>
+      <p:sp>
+        <p:nvSpPr>
+          <p:cNvPr id="18" name="Text 16"/>
+          <p:cNvSpPr/>
+          <p:nvPr/>
+        </p:nvSpPr>
+        <p:spPr>
+          <a:xfrm>
+            <a:off x="10046208" y="4187952"/>
+            <a:ext cx="201168" cy="256032"/>
+          </a:xfrm>
+          <a:prstGeom prst="rect">
+            <a:avLst/>
+          </a:prstGeom>
+          <a:noFill/>
+          <a:ln/>
+        </p:spPr>
+        <p:txBody>
+          <a:bodyPr wrap="square" lIns="0" tIns="0" rIns="0" bIns="0" rtlCol="0" anchor="ctr"/>
+          <a:lstStyle/>
+          <a:p>
+            <a:pPr algn="ctr" indent="0" marL="0">
+              <a:buNone/>
+            </a:pPr>
+            <a:r>
+              <a:rPr lang="en-US" sz="1800" b="1" dirty="0">
+                <a:solidFill>
+                  <a:srgbClr val="0068B7"/>
+                </a:solidFill>
+                <a:latin typeface="Aptos" pitchFamily="34" charset="0"/>
+                <a:ea typeface="Aptos" pitchFamily="34" charset="-122"/>
+                <a:cs typeface="Aptos" pitchFamily="34" charset="-120"/>
+              </a:rPr>
+              <a:t>â†’</a:t>
+            </a:r>
+            <a:endParaRPr lang="en-US" sz="1800" dirty="0"/>
+          </a:p>
+        </p:txBody>
+      </p:sp>
+      <p:sp>
+        <p:nvSpPr>
+          <p:cNvPr id="19" name="Shape 17"/>
+          <p:cNvSpPr/>
+          <p:nvPr/>
+        </p:nvSpPr>
+        <p:spPr>
+          <a:xfrm>
+            <a:off x="10274808" y="3977640"/>
+            <a:ext cx="972312" cy="749808"/>
+          </a:xfrm>
+          <a:prstGeom prst="roundRect">
+            <a:avLst>
+              <a:gd name="adj" fmla="val 14634"/>
+            </a:avLst>
+          </a:prstGeom>
+          <a:solidFill>
+            <a:srgbClr val="6A4CA3"/>
+          </a:solidFill>
+          <a:ln w="12700">
+            <a:solidFill>
+              <a:srgbClr val="6A4CA3"/>
+            </a:solidFill>
+            <a:prstDash val="solid"/>
+          </a:ln>
+        </p:spPr>
+      </p:sp>
+      <p:sp>
+        <p:nvSpPr>
+          <p:cNvPr id="20" name="Text 18"/>
+          <p:cNvSpPr/>
+          <p:nvPr/>
+        </p:nvSpPr>
+        <p:spPr>
+          <a:xfrm>
+            <a:off x="10347960" y="4169664"/>
+            <a:ext cx="826008" cy="310896"/>
+          </a:xfrm>
+          <a:prstGeom prst="rect">
+            <a:avLst/>
+          </a:prstGeom>
+          <a:noFill/>
+          <a:ln/>
+        </p:spPr>
+        <p:txBody>
+          <a:bodyPr wrap="square" lIns="0" tIns="0" rIns="0" bIns="0" rtlCol="0" anchor="ctr">
+            <a:normAutofit/>
+          </a:bodyPr>
+          <a:lstStyle/>
+          <a:p>
+            <a:pPr algn="ctr" indent="0" marL="0">
+              <a:buNone/>
+            </a:pPr>
+            <a:r>
+              <a:rPr lang="en-US" sz="1500" b="1" dirty="0">
+                <a:solidFill>
+                  <a:srgbClr val="FFFFFF"/>
+                </a:solidFill>
+                <a:latin typeface="Aptos" pitchFamily="34" charset="0"/>
+                <a:ea typeface="Aptos" pitchFamily="34" charset="-122"/>
+                <a:cs typeface="Aptos" pitchFamily="34" charset="-120"/>
+              </a:rPr>
+              <a:t>Action</a:t>
+            </a:r>
+            <a:endParaRPr lang="en-US" sz="1500" dirty="0"/>
           </a:p>
         </p:txBody>
       </p:sp>
@@ -11693,7 +12569,7 @@
                 <a:ea typeface="Aptos" pitchFamily="34" charset="-122"/>
                 <a:cs typeface="Aptos" pitchFamily="34" charset="-120"/>
               </a:rPr>
-              <a:t>© Paula Soper</a:t>
+              <a:t>Â© Paula Soper</a:t>
             </a:r>
             <a:endParaRPr lang="en-US" sz="800" dirty="0"/>
           </a:p>
@@ -11707,8 +12583,47 @@
         </p:nvSpPr>
         <p:spPr>
           <a:xfrm>
+            <a:off x="11137392" y="6510528"/>
+            <a:ext cx="411480" cy="201168"/>
+          </a:xfrm>
+          <a:prstGeom prst="rect">
+            <a:avLst/>
+          </a:prstGeom>
+          <a:noFill/>
+          <a:ln/>
+        </p:spPr>
+        <p:txBody>
+          <a:bodyPr wrap="square" lIns="0" tIns="0" rIns="0" bIns="0" rtlCol="0" anchor="ctr"/>
+          <a:lstStyle/>
+          <a:p>
+            <a:pPr algn="r" indent="0" marL="0">
+              <a:buNone/>
+            </a:pPr>
+            <a:r>
+              <a:rPr lang="en-US" sz="900" dirty="0">
+                <a:solidFill>
+                  <a:srgbClr val="5F7181"/>
+                </a:solidFill>
+                <a:latin typeface="Aptos" pitchFamily="34" charset="0"/>
+                <a:ea typeface="Aptos" pitchFamily="34" charset="-122"/>
+                <a:cs typeface="Aptos" pitchFamily="34" charset="-120"/>
+              </a:rPr>
+              <a:t>4</a:t>
+            </a:r>
+            <a:endParaRPr lang="en-US" sz="900" dirty="0"/>
+          </a:p>
+        </p:txBody>
+      </p:sp>
+      <p:sp>
+        <p:nvSpPr>
+          <p:cNvPr id="8" name="Text 6"/>
+          <p:cNvSpPr/>
+          <p:nvPr/>
+        </p:nvSpPr>
+        <p:spPr>
+          <a:xfrm>
             <a:off x="640080" y="658368"/>
-            <a:ext cx="10881360" cy="566928"/>
+            <a:ext cx="10881360" cy="713232"/>
           </a:xfrm>
           <a:prstGeom prst="rect">
             <a:avLst/>
@@ -11726,7 +12641,7 @@
               <a:buNone/>
             </a:pPr>
             <a:r>
-              <a:rPr lang="en-US" sz="2700" b="1" dirty="0">
+              <a:rPr lang="en-US" sz="3400" b="1" dirty="0">
                 <a:solidFill>
                   <a:srgbClr val="003A63"/>
                 </a:solidFill>
@@ -11736,20 +12651,20 @@
               </a:rPr>
               <a:t>Related toolkit resources</a:t>
             </a:r>
-            <a:endParaRPr lang="en-US" sz="2700" dirty="0"/>
-          </a:p>
-        </p:txBody>
-      </p:sp>
-      <p:sp>
-        <p:nvSpPr>
-          <p:cNvPr id="8" name="Text 6"/>
-          <p:cNvSpPr/>
-          <p:nvPr/>
-        </p:nvSpPr>
-        <p:spPr>
-          <a:xfrm>
-            <a:off x="868680" y="1417320"/>
-            <a:ext cx="6903720" cy="4480560"/>
+            <a:endParaRPr lang="en-US" sz="3400" dirty="0"/>
+          </a:p>
+        </p:txBody>
+      </p:sp>
+      <p:sp>
+        <p:nvSpPr>
+          <p:cNvPr id="9" name="Text 7"/>
+          <p:cNvSpPr/>
+          <p:nvPr/>
+        </p:nvSpPr>
+        <p:spPr>
+          <a:xfrm>
+            <a:off x="868680" y="1508760"/>
+            <a:ext cx="6812280" cy="3977640"/>
           </a:xfrm>
           <a:prstGeom prst="rect">
             <a:avLst/>
@@ -11764,7 +12679,7 @@
           <a:lstStyle/>
           <a:p>
             <a:r>
-              <a:rPr lang="en-US" sz="1460" dirty="0">
+              <a:rPr lang="en-US" sz="1850" dirty="0">
                 <a:solidFill>
                   <a:srgbClr val="17364A"/>
                 </a:solidFill>
@@ -11772,13 +12687,13 @@
                 <a:ea typeface="Aptos" pitchFamily="34" charset="-122"/>
                 <a:cs typeface="Aptos" pitchFamily="34" charset="-120"/>
               </a:rPr>
-              <a:t>Tool 3: Equity Impact Assessment Checklist (Checklist) - Use this tool to complete or strengthen the practical exercise for the.</a:t>
-            </a:r>
-            <a:endParaRPr lang="en-US" sz="1460" dirty="0"/>
-          </a:p>
-          <a:p>
-            <a:r>
-              <a:rPr lang="en-US" sz="1460" dirty="0">
+              <a:t>Tool 3: Equity Impact Assessment Checklist (Checklist) - Use this tool to complete or strengthen the.</a:t>
+            </a:r>
+            <a:endParaRPr lang="en-US" sz="1850" dirty="0"/>
+          </a:p>
+          <a:p>
+            <a:r>
+              <a:rPr lang="en-US" sz="1850" dirty="0">
                 <a:solidFill>
                   <a:srgbClr val="17364A"/>
                 </a:solidFill>
@@ -11786,13 +12701,13 @@
                 <a:ea typeface="Aptos" pitchFamily="34" charset="-122"/>
                 <a:cs typeface="Aptos" pitchFamily="34" charset="-120"/>
               </a:rPr>
-              <a:t>Tool 4: AI Policy Landscape Scan (Worksheet) - Use AI Policy Landscape Scan to translate this lesson into a documented public health.</a:t>
-            </a:r>
-            <a:endParaRPr lang="en-US" sz="1460" dirty="0"/>
-          </a:p>
-          <a:p>
-            <a:r>
-              <a:rPr lang="en-US" sz="1460" dirty="0">
+              <a:t>Tool 4: AI Policy Landscape Scan (Worksheet) - Use AI Policy Landscape Scan to translate this lesson into a.</a:t>
+            </a:r>
+            <a:endParaRPr lang="en-US" sz="1850" dirty="0"/>
+          </a:p>
+          <a:p>
+            <a:r>
+              <a:rPr lang="en-US" sz="1850" dirty="0">
                 <a:solidFill>
                   <a:srgbClr val="17364A"/>
                 </a:solidFill>
@@ -11800,13 +12715,13 @@
                 <a:ea typeface="Aptos" pitchFamily="34" charset="-122"/>
                 <a:cs typeface="Aptos" pitchFamily="34" charset="-120"/>
               </a:rPr>
-              <a:t>Tool 5: AI Environmental and Resource Impact Review (Checklist) - Use AI Environmental and Resource Impact Review to translate this.</a:t>
-            </a:r>
-            <a:endParaRPr lang="en-US" sz="1460" dirty="0"/>
-          </a:p>
-          <a:p>
-            <a:r>
-              <a:rPr lang="en-US" sz="1460" dirty="0">
+              <a:t>Tool 5: AI Environmental and Resource Impact Review (Checklist) - Use AI Environmental and Resource Impact.</a:t>
+            </a:r>
+            <a:endParaRPr lang="en-US" sz="1850" dirty="0"/>
+          </a:p>
+          <a:p>
+            <a:r>
+              <a:rPr lang="en-US" sz="1850" dirty="0">
                 <a:solidFill>
                   <a:srgbClr val="17364A"/>
                 </a:solidFill>
@@ -11814,29 +12729,15 @@
                 <a:ea typeface="Aptos" pitchFamily="34" charset="-122"/>
                 <a:cs typeface="Aptos" pitchFamily="34" charset="-120"/>
               </a:rPr>
-              <a:t>Tool 6: Human-Centered AI Decision Rule Checklist (Checklist) - Use Human-Centered AI Decision Rule Checklist to translate this.</a:t>
-            </a:r>
-            <a:endParaRPr lang="en-US" sz="1460" dirty="0"/>
-          </a:p>
-          <a:p>
-            <a:r>
-              <a:rPr lang="en-US" sz="1460" dirty="0">
-                <a:solidFill>
-                  <a:srgbClr val="17364A"/>
-                </a:solidFill>
-                <a:latin typeface="Aptos" pitchFamily="34" charset="0"/>
-                <a:ea typeface="Aptos" pitchFamily="34" charset="-122"/>
-                <a:cs typeface="Aptos" pitchFamily="34" charset="-120"/>
-              </a:rPr>
-              <a:t>Tool 8: AI Project Charter (Planning) - Use AI Project Charter to translate this lesson into a documented public health AI planning,.</a:t>
-            </a:r>
-            <a:endParaRPr lang="en-US" sz="1460" dirty="0"/>
-          </a:p>
-        </p:txBody>
-      </p:sp>
-      <p:sp>
-        <p:nvSpPr>
-          <p:cNvPr id="9" name="Shape 7"/>
+              <a:t>Tool 6: Human-Centered AI Decision Rule Checklist (Checklist) - Use Human-Centered AI Decision Rule.</a:t>
+            </a:r>
+            <a:endParaRPr lang="en-US" sz="1850" dirty="0"/>
+          </a:p>
+        </p:txBody>
+      </p:sp>
+      <p:sp>
+        <p:nvSpPr>
+          <p:cNvPr id="10" name="Shape 8"/>
           <p:cNvSpPr/>
           <p:nvPr/>
         </p:nvSpPr>
@@ -11863,14 +12764,14 @@
       </p:sp>
       <p:sp>
         <p:nvSpPr>
-          <p:cNvPr id="10" name="Text 8"/>
+          <p:cNvPr id="11" name="Text 9"/>
           <p:cNvSpPr/>
           <p:nvPr/>
         </p:nvSpPr>
         <p:spPr>
           <a:xfrm>
             <a:off x="8211312" y="1563624"/>
-            <a:ext cx="2734056" cy="201168"/>
+            <a:ext cx="2734056" cy="256032"/>
           </a:xfrm>
           <a:prstGeom prst="rect">
             <a:avLst/>
@@ -11886,7 +12787,7 @@
               <a:buNone/>
             </a:pPr>
             <a:r>
-              <a:rPr lang="en-US" sz="950" b="1" dirty="0">
+              <a:rPr lang="en-US" sz="1300" b="1" dirty="0">
                 <a:solidFill>
                   <a:srgbClr val="0068B7"/>
                 </a:solidFill>
@@ -11896,20 +12797,20 @@
               </a:rPr>
               <a:t>Use the tools</a:t>
             </a:r>
-            <a:endParaRPr lang="en-US" sz="950" dirty="0"/>
-          </a:p>
-        </p:txBody>
-      </p:sp>
-      <p:sp>
-        <p:nvSpPr>
-          <p:cNvPr id="11" name="Text 9"/>
-          <p:cNvSpPr/>
-          <p:nvPr/>
-        </p:nvSpPr>
-        <p:spPr>
-          <a:xfrm>
-            <a:off x="8211312" y="1856232"/>
-            <a:ext cx="2734056" cy="1536192"/>
+            <a:endParaRPr lang="en-US" sz="1300" dirty="0"/>
+          </a:p>
+        </p:txBody>
+      </p:sp>
+      <p:sp>
+        <p:nvSpPr>
+          <p:cNvPr id="12" name="Text 10"/>
+          <p:cNvSpPr/>
+          <p:nvPr/>
+        </p:nvSpPr>
+        <p:spPr>
+          <a:xfrm>
+            <a:off x="8211312" y="1920240"/>
+            <a:ext cx="2734056" cy="1463040"/>
           </a:xfrm>
           <a:prstGeom prst="rect">
             <a:avLst/>
@@ -11927,7 +12828,7 @@
               <a:buNone/>
             </a:pPr>
             <a:r>
-              <a:rPr lang="en-US" sz="1250" dirty="0">
+              <a:rPr lang="en-US" sz="1550" dirty="0">
                 <a:solidFill>
                   <a:srgbClr val="17364A"/>
                 </a:solidFill>
@@ -11937,32 +12838,32 @@
               </a:rPr>
               <a:t>Use linked tools when your department needs a structured worksheet, template, checklist, review process, or documentation artifact.</a:t>
             </a:r>
-            <a:endParaRPr lang="en-US" sz="1250" dirty="0"/>
-          </a:p>
-        </p:txBody>
-      </p:sp>
-      <p:sp>
-        <p:nvSpPr>
-          <p:cNvPr id="12" name="Shape 10"/>
-          <p:cNvSpPr/>
-          <p:nvPr/>
-        </p:nvSpPr>
-        <p:spPr>
-          <a:xfrm>
-            <a:off x="8046720" y="3794760"/>
-            <a:ext cx="3063240" cy="1508760"/>
+            <a:endParaRPr lang="en-US" sz="1550" dirty="0"/>
+          </a:p>
+        </p:txBody>
+      </p:sp>
+      <p:sp>
+        <p:nvSpPr>
+          <p:cNvPr id="13" name="Shape 11"/>
+          <p:cNvSpPr/>
+          <p:nvPr/>
+        </p:nvSpPr>
+        <p:spPr>
+          <a:xfrm>
+            <a:off x="7818120" y="3977640"/>
+            <a:ext cx="972312" cy="749808"/>
           </a:xfrm>
           <a:prstGeom prst="roundRect">
             <a:avLst>
-              <a:gd name="adj" fmla="val 7273"/>
+              <a:gd name="adj" fmla="val 14634"/>
             </a:avLst>
           </a:prstGeom>
           <a:solidFill>
-            <a:srgbClr val="EEF8ED"/>
+            <a:srgbClr val="0068B7"/>
           </a:solidFill>
           <a:ln w="12700">
             <a:solidFill>
-              <a:srgbClr val="B9D7E6"/>
+              <a:srgbClr val="0068B7"/>
             </a:solidFill>
             <a:prstDash val="solid"/>
           </a:ln>
@@ -11970,81 +12871,256 @@
       </p:sp>
       <p:sp>
         <p:nvSpPr>
-          <p:cNvPr id="13" name="Text 11"/>
-          <p:cNvSpPr/>
-          <p:nvPr/>
-        </p:nvSpPr>
-        <p:spPr>
-          <a:xfrm>
-            <a:off x="8211312" y="3941064"/>
-            <a:ext cx="2734056" cy="201168"/>
-          </a:xfrm>
-          <a:prstGeom prst="rect">
-            <a:avLst/>
-          </a:prstGeom>
-          <a:noFill/>
-          <a:ln/>
-        </p:spPr>
-        <p:txBody>
-          <a:bodyPr wrap="square" lIns="0" tIns="0" rIns="0" bIns="0" rtlCol="0" anchor="ctr"/>
-          <a:lstStyle/>
-          <a:p>
-            <a:pPr indent="0" marL="0">
-              <a:buNone/>
-            </a:pPr>
-            <a:r>
-              <a:rPr lang="en-US" sz="950" b="1" dirty="0">
-                <a:solidFill>
-                  <a:srgbClr val="0068B7"/>
-                </a:solidFill>
-                <a:latin typeface="Aptos" pitchFamily="34" charset="0"/>
-                <a:ea typeface="Aptos" pitchFamily="34" charset="-122"/>
-                <a:cs typeface="Aptos" pitchFamily="34" charset="-120"/>
-              </a:rPr>
-              <a:t>Avoid duplication</a:t>
-            </a:r>
-            <a:endParaRPr lang="en-US" sz="950" dirty="0"/>
-          </a:p>
-        </p:txBody>
-      </p:sp>
-      <p:sp>
-        <p:nvSpPr>
           <p:cNvPr id="14" name="Text 12"/>
           <p:cNvSpPr/>
           <p:nvPr/>
         </p:nvSpPr>
         <p:spPr>
           <a:xfrm>
-            <a:off x="8211312" y="4233672"/>
-            <a:ext cx="2734056" cy="941832"/>
-          </a:xfrm>
-          <a:prstGeom prst="rect">
-            <a:avLst/>
-          </a:prstGeom>
-          <a:noFill/>
-          <a:ln/>
-        </p:spPr>
-        <p:txBody>
-          <a:bodyPr wrap="square" lIns="0" tIns="0" rIns="0" bIns="0" rtlCol="0" anchor="t">
+            <a:off x="7891272" y="4169664"/>
+            <a:ext cx="826008" cy="310896"/>
+          </a:xfrm>
+          <a:prstGeom prst="rect">
+            <a:avLst/>
+          </a:prstGeom>
+          <a:noFill/>
+          <a:ln/>
+        </p:spPr>
+        <p:txBody>
+          <a:bodyPr wrap="square" lIns="0" tIns="0" rIns="0" bIns="0" rtlCol="0" anchor="ctr">
             <a:normAutofit/>
           </a:bodyPr>
           <a:lstStyle/>
           <a:p>
-            <a:pPr indent="0" marL="0">
-              <a:buNone/>
-            </a:pPr>
-            <a:r>
-              <a:rPr lang="en-US" sz="1250" dirty="0">
-                <a:solidFill>
-                  <a:srgbClr val="17364A"/>
-                </a:solidFill>
-                <a:latin typeface="Aptos" pitchFamily="34" charset="0"/>
-                <a:ea typeface="Aptos" pitchFamily="34" charset="-122"/>
-                <a:cs typeface="Aptos" pitchFamily="34" charset="-120"/>
-              </a:rPr>
-              <a:t>If your department already has a strong equivalent tool, adapt or use the existing process instead of recreating it.</a:t>
-            </a:r>
-            <a:endParaRPr lang="en-US" sz="1250" dirty="0"/>
+            <a:pPr algn="ctr" indent="0" marL="0">
+              <a:buNone/>
+            </a:pPr>
+            <a:r>
+              <a:rPr lang="en-US" sz="1500" b="1" dirty="0">
+                <a:solidFill>
+                  <a:srgbClr val="FFFFFF"/>
+                </a:solidFill>
+                <a:latin typeface="Aptos" pitchFamily="34" charset="0"/>
+                <a:ea typeface="Aptos" pitchFamily="34" charset="-122"/>
+                <a:cs typeface="Aptos" pitchFamily="34" charset="-120"/>
+              </a:rPr>
+              <a:t>Concept</a:t>
+            </a:r>
+            <a:endParaRPr lang="en-US" sz="1500" dirty="0"/>
+          </a:p>
+        </p:txBody>
+      </p:sp>
+      <p:sp>
+        <p:nvSpPr>
+          <p:cNvPr id="15" name="Text 13"/>
+          <p:cNvSpPr/>
+          <p:nvPr/>
+        </p:nvSpPr>
+        <p:spPr>
+          <a:xfrm>
+            <a:off x="8817864" y="4187952"/>
+            <a:ext cx="201168" cy="256032"/>
+          </a:xfrm>
+          <a:prstGeom prst="rect">
+            <a:avLst/>
+          </a:prstGeom>
+          <a:noFill/>
+          <a:ln/>
+        </p:spPr>
+        <p:txBody>
+          <a:bodyPr wrap="square" lIns="0" tIns="0" rIns="0" bIns="0" rtlCol="0" anchor="ctr"/>
+          <a:lstStyle/>
+          <a:p>
+            <a:pPr algn="ctr" indent="0" marL="0">
+              <a:buNone/>
+            </a:pPr>
+            <a:r>
+              <a:rPr lang="en-US" sz="1800" b="1" dirty="0">
+                <a:solidFill>
+                  <a:srgbClr val="0068B7"/>
+                </a:solidFill>
+                <a:latin typeface="Aptos" pitchFamily="34" charset="0"/>
+                <a:ea typeface="Aptos" pitchFamily="34" charset="-122"/>
+                <a:cs typeface="Aptos" pitchFamily="34" charset="-120"/>
+              </a:rPr>
+              <a:t>â†’</a:t>
+            </a:r>
+            <a:endParaRPr lang="en-US" sz="1800" dirty="0"/>
+          </a:p>
+        </p:txBody>
+      </p:sp>
+      <p:sp>
+        <p:nvSpPr>
+          <p:cNvPr id="16" name="Shape 14"/>
+          <p:cNvSpPr/>
+          <p:nvPr/>
+        </p:nvSpPr>
+        <p:spPr>
+          <a:xfrm>
+            <a:off x="9046464" y="3977640"/>
+            <a:ext cx="972312" cy="749808"/>
+          </a:xfrm>
+          <a:prstGeom prst="roundRect">
+            <a:avLst>
+              <a:gd name="adj" fmla="val 14634"/>
+            </a:avLst>
+          </a:prstGeom>
+          <a:solidFill>
+            <a:srgbClr val="2F8A28"/>
+          </a:solidFill>
+          <a:ln w="12700">
+            <a:solidFill>
+              <a:srgbClr val="2F8A28"/>
+            </a:solidFill>
+            <a:prstDash val="solid"/>
+          </a:ln>
+        </p:spPr>
+      </p:sp>
+      <p:sp>
+        <p:nvSpPr>
+          <p:cNvPr id="17" name="Text 15"/>
+          <p:cNvSpPr/>
+          <p:nvPr/>
+        </p:nvSpPr>
+        <p:spPr>
+          <a:xfrm>
+            <a:off x="9119616" y="4169664"/>
+            <a:ext cx="826008" cy="310896"/>
+          </a:xfrm>
+          <a:prstGeom prst="rect">
+            <a:avLst/>
+          </a:prstGeom>
+          <a:noFill/>
+          <a:ln/>
+        </p:spPr>
+        <p:txBody>
+          <a:bodyPr wrap="square" lIns="0" tIns="0" rIns="0" bIns="0" rtlCol="0" anchor="ctr">
+            <a:normAutofit/>
+          </a:bodyPr>
+          <a:lstStyle/>
+          <a:p>
+            <a:pPr algn="ctr" indent="0" marL="0">
+              <a:buNone/>
+            </a:pPr>
+            <a:r>
+              <a:rPr lang="en-US" sz="1500" b="1" dirty="0">
+                <a:solidFill>
+                  <a:srgbClr val="FFFFFF"/>
+                </a:solidFill>
+                <a:latin typeface="Aptos" pitchFamily="34" charset="0"/>
+                <a:ea typeface="Aptos" pitchFamily="34" charset="-122"/>
+                <a:cs typeface="Aptos" pitchFamily="34" charset="-120"/>
+              </a:rPr>
+              <a:t>Tool</a:t>
+            </a:r>
+            <a:endParaRPr lang="en-US" sz="1500" dirty="0"/>
+          </a:p>
+        </p:txBody>
+      </p:sp>
+      <p:sp>
+        <p:nvSpPr>
+          <p:cNvPr id="18" name="Text 16"/>
+          <p:cNvSpPr/>
+          <p:nvPr/>
+        </p:nvSpPr>
+        <p:spPr>
+          <a:xfrm>
+            <a:off x="10046208" y="4187952"/>
+            <a:ext cx="201168" cy="256032"/>
+          </a:xfrm>
+          <a:prstGeom prst="rect">
+            <a:avLst/>
+          </a:prstGeom>
+          <a:noFill/>
+          <a:ln/>
+        </p:spPr>
+        <p:txBody>
+          <a:bodyPr wrap="square" lIns="0" tIns="0" rIns="0" bIns="0" rtlCol="0" anchor="ctr"/>
+          <a:lstStyle/>
+          <a:p>
+            <a:pPr algn="ctr" indent="0" marL="0">
+              <a:buNone/>
+            </a:pPr>
+            <a:r>
+              <a:rPr lang="en-US" sz="1800" b="1" dirty="0">
+                <a:solidFill>
+                  <a:srgbClr val="0068B7"/>
+                </a:solidFill>
+                <a:latin typeface="Aptos" pitchFamily="34" charset="0"/>
+                <a:ea typeface="Aptos" pitchFamily="34" charset="-122"/>
+                <a:cs typeface="Aptos" pitchFamily="34" charset="-120"/>
+              </a:rPr>
+              <a:t>â†’</a:t>
+            </a:r>
+            <a:endParaRPr lang="en-US" sz="1800" dirty="0"/>
+          </a:p>
+        </p:txBody>
+      </p:sp>
+      <p:sp>
+        <p:nvSpPr>
+          <p:cNvPr id="19" name="Shape 17"/>
+          <p:cNvSpPr/>
+          <p:nvPr/>
+        </p:nvSpPr>
+        <p:spPr>
+          <a:xfrm>
+            <a:off x="10274808" y="3977640"/>
+            <a:ext cx="972312" cy="749808"/>
+          </a:xfrm>
+          <a:prstGeom prst="roundRect">
+            <a:avLst>
+              <a:gd name="adj" fmla="val 14634"/>
+            </a:avLst>
+          </a:prstGeom>
+          <a:solidFill>
+            <a:srgbClr val="D69A2D"/>
+          </a:solidFill>
+          <a:ln w="12700">
+            <a:solidFill>
+              <a:srgbClr val="D69A2D"/>
+            </a:solidFill>
+            <a:prstDash val="solid"/>
+          </a:ln>
+        </p:spPr>
+      </p:sp>
+      <p:sp>
+        <p:nvSpPr>
+          <p:cNvPr id="20" name="Text 18"/>
+          <p:cNvSpPr/>
+          <p:nvPr/>
+        </p:nvSpPr>
+        <p:spPr>
+          <a:xfrm>
+            <a:off x="10347960" y="4169664"/>
+            <a:ext cx="826008" cy="310896"/>
+          </a:xfrm>
+          <a:prstGeom prst="rect">
+            <a:avLst/>
+          </a:prstGeom>
+          <a:noFill/>
+          <a:ln/>
+        </p:spPr>
+        <p:txBody>
+          <a:bodyPr wrap="square" lIns="0" tIns="0" rIns="0" bIns="0" rtlCol="0" anchor="ctr">
+            <a:normAutofit/>
+          </a:bodyPr>
+          <a:lstStyle/>
+          <a:p>
+            <a:pPr algn="ctr" indent="0" marL="0">
+              <a:buNone/>
+            </a:pPr>
+            <a:r>
+              <a:rPr lang="en-US" sz="1500" b="1" dirty="0">
+                <a:solidFill>
+                  <a:srgbClr val="FFFFFF"/>
+                </a:solidFill>
+                <a:latin typeface="Aptos" pitchFamily="34" charset="0"/>
+                <a:ea typeface="Aptos" pitchFamily="34" charset="-122"/>
+                <a:cs typeface="Aptos" pitchFamily="34" charset="-120"/>
+              </a:rPr>
+              <a:t>Artifact</a:t>
+            </a:r>
+            <a:endParaRPr lang="en-US" sz="1500" dirty="0"/>
           </a:p>
         </p:txBody>
       </p:sp>
@@ -12241,7 +13317,7 @@
                 <a:ea typeface="Aptos" pitchFamily="34" charset="-122"/>
                 <a:cs typeface="Aptos" pitchFamily="34" charset="-120"/>
               </a:rPr>
-              <a:t>© Paula Soper</a:t>
+              <a:t>Â© Paula Soper</a:t>
             </a:r>
             <a:endParaRPr lang="en-US" sz="800" dirty="0"/>
           </a:p>
@@ -12249,7 +13325,46 @@
       </p:sp>
       <p:sp>
         <p:nvSpPr>
-          <p:cNvPr id="7" name="Shape 5"/>
+          <p:cNvPr id="7" name="Text 5"/>
+          <p:cNvSpPr/>
+          <p:nvPr/>
+        </p:nvSpPr>
+        <p:spPr>
+          <a:xfrm>
+            <a:off x="11137392" y="6510528"/>
+            <a:ext cx="411480" cy="201168"/>
+          </a:xfrm>
+          <a:prstGeom prst="rect">
+            <a:avLst/>
+          </a:prstGeom>
+          <a:noFill/>
+          <a:ln/>
+        </p:spPr>
+        <p:txBody>
+          <a:bodyPr wrap="square" lIns="0" tIns="0" rIns="0" bIns="0" rtlCol="0" anchor="ctr"/>
+          <a:lstStyle/>
+          <a:p>
+            <a:pPr algn="r" indent="0" marL="0">
+              <a:buNone/>
+            </a:pPr>
+            <a:r>
+              <a:rPr lang="en-US" sz="900" dirty="0">
+                <a:solidFill>
+                  <a:srgbClr val="5F7181"/>
+                </a:solidFill>
+                <a:latin typeface="Aptos" pitchFamily="34" charset="0"/>
+                <a:ea typeface="Aptos" pitchFamily="34" charset="-122"/>
+                <a:cs typeface="Aptos" pitchFamily="34" charset="-120"/>
+              </a:rPr>
+              <a:t>5</a:t>
+            </a:r>
+            <a:endParaRPr lang="en-US" sz="900" dirty="0"/>
+          </a:p>
+        </p:txBody>
+      </p:sp>
+      <p:sp>
+        <p:nvSpPr>
+          <p:cNvPr id="8" name="Shape 6"/>
           <p:cNvSpPr/>
           <p:nvPr/>
         </p:nvSpPr>
@@ -12274,7 +13389,7 @@
       </p:sp>
       <p:sp>
         <p:nvSpPr>
-          <p:cNvPr id="8" name="Text 6"/>
+          <p:cNvPr id="9" name="Text 7"/>
           <p:cNvSpPr/>
           <p:nvPr/>
         </p:nvSpPr>
@@ -12313,14 +13428,14 @@
       </p:sp>
       <p:sp>
         <p:nvSpPr>
-          <p:cNvPr id="9" name="Text 7"/>
+          <p:cNvPr id="10" name="Text 8"/>
           <p:cNvSpPr/>
           <p:nvPr/>
         </p:nvSpPr>
         <p:spPr>
           <a:xfrm>
             <a:off x="640080" y="621792"/>
-            <a:ext cx="10881360" cy="566928"/>
+            <a:ext cx="10881360" cy="713232"/>
           </a:xfrm>
           <a:prstGeom prst="rect">
             <a:avLst/>
@@ -12338,7 +13453,7 @@
               <a:buNone/>
             </a:pPr>
             <a:r>
-              <a:rPr lang="en-US" sz="2700" b="1" dirty="0">
+              <a:rPr lang="en-US" sz="3400" b="1" dirty="0">
                 <a:solidFill>
                   <a:srgbClr val="003A63"/>
                 </a:solidFill>
@@ -12348,20 +13463,20 @@
               </a:rPr>
               <a:t>Learning Objectives</a:t>
             </a:r>
-            <a:endParaRPr lang="en-US" sz="2700" dirty="0"/>
-          </a:p>
-        </p:txBody>
-      </p:sp>
-      <p:sp>
-        <p:nvSpPr>
-          <p:cNvPr id="10" name="Text 8"/>
-          <p:cNvSpPr/>
-          <p:nvPr/>
-        </p:nvSpPr>
-        <p:spPr>
-          <a:xfrm>
-            <a:off x="868680" y="1417320"/>
-            <a:ext cx="6675120" cy="4434840"/>
+            <a:endParaRPr lang="en-US" sz="3400" dirty="0"/>
+          </a:p>
+        </p:txBody>
+      </p:sp>
+      <p:sp>
+        <p:nvSpPr>
+          <p:cNvPr id="11" name="Text 9"/>
+          <p:cNvSpPr/>
+          <p:nvPr/>
+        </p:nvSpPr>
+        <p:spPr>
+          <a:xfrm>
+            <a:off x="868680" y="1508760"/>
+            <a:ext cx="6537960" cy="4160520"/>
           </a:xfrm>
           <a:prstGeom prst="rect">
             <a:avLst/>
@@ -12376,7 +13491,7 @@
           <a:lstStyle/>
           <a:p>
             <a:r>
-              <a:rPr lang="en-US" sz="1700" dirty="0">
+              <a:rPr lang="en-US" sz="2100" dirty="0">
                 <a:solidFill>
                   <a:srgbClr val="17364A"/>
                 </a:solidFill>
@@ -12386,11 +13501,11 @@
               </a:rPr>
               <a:t>Distinguish prediction from causal inference in public health AI.</a:t>
             </a:r>
-            <a:endParaRPr lang="en-US" sz="1700" dirty="0"/>
-          </a:p>
-          <a:p>
-            <a:r>
-              <a:rPr lang="en-US" sz="1700" dirty="0">
+            <a:endParaRPr lang="en-US" sz="2100" dirty="0"/>
+          </a:p>
+          <a:p>
+            <a:r>
+              <a:rPr lang="en-US" sz="2100" dirty="0">
                 <a:solidFill>
                   <a:srgbClr val="17364A"/>
                 </a:solidFill>
@@ -12400,11 +13515,11 @@
               </a:rPr>
               <a:t>Explain why correlation and prediction do not establish causation.</a:t>
             </a:r>
-            <a:endParaRPr lang="en-US" sz="1700" dirty="0"/>
-          </a:p>
-          <a:p>
-            <a:r>
-              <a:rPr lang="en-US" sz="1700" dirty="0">
+            <a:endParaRPr lang="en-US" sz="2100" dirty="0"/>
+          </a:p>
+          <a:p>
+            <a:r>
+              <a:rPr lang="en-US" sz="2100" dirty="0">
                 <a:solidFill>
                   <a:srgbClr val="17364A"/>
                 </a:solidFill>
@@ -12414,27 +13529,13 @@
               </a:rPr>
               <a:t>Identify confounding, selection bias, collider bias, and temporal ambiguity in public health data.</a:t>
             </a:r>
-            <a:endParaRPr lang="en-US" sz="1700" dirty="0"/>
-          </a:p>
-          <a:p>
-            <a:r>
-              <a:rPr lang="en-US" sz="1700" dirty="0">
-                <a:solidFill>
-                  <a:srgbClr val="17364A"/>
-                </a:solidFill>
-                <a:latin typeface="Aptos" pitchFamily="34" charset="0"/>
-                <a:ea typeface="Aptos" pitchFamily="34" charset="-122"/>
-                <a:cs typeface="Aptos" pitchFamily="34" charset="-120"/>
-              </a:rPr>
-              <a:t>Recognize when a decision requires causal evidence rather than risk prediction alone.</a:t>
-            </a:r>
-            <a:endParaRPr lang="en-US" sz="1700" dirty="0"/>
-          </a:p>
-        </p:txBody>
-      </p:sp>
-      <p:sp>
-        <p:nvSpPr>
-          <p:cNvPr id="11" name="Shape 9"/>
+            <a:endParaRPr lang="en-US" sz="2100" dirty="0"/>
+          </a:p>
+        </p:txBody>
+      </p:sp>
+      <p:sp>
+        <p:nvSpPr>
+          <p:cNvPr id="12" name="Shape 10"/>
           <p:cNvSpPr/>
           <p:nvPr/>
         </p:nvSpPr>
@@ -12461,14 +13562,14 @@
       </p:sp>
       <p:sp>
         <p:nvSpPr>
-          <p:cNvPr id="12" name="Text 10"/>
+          <p:cNvPr id="13" name="Text 11"/>
           <p:cNvSpPr/>
           <p:nvPr/>
         </p:nvSpPr>
         <p:spPr>
           <a:xfrm>
             <a:off x="8074152" y="1563624"/>
-            <a:ext cx="2825496" cy="201168"/>
+            <a:ext cx="2825496" cy="256032"/>
           </a:xfrm>
           <a:prstGeom prst="rect">
             <a:avLst/>
@@ -12484,7 +13585,7 @@
               <a:buNone/>
             </a:pPr>
             <a:r>
-              <a:rPr lang="en-US" sz="950" b="1" dirty="0">
+              <a:rPr lang="en-US" sz="1300" b="1" dirty="0">
                 <a:solidFill>
                   <a:srgbClr val="0068B7"/>
                 </a:solidFill>
@@ -12494,20 +13595,20 @@
               </a:rPr>
               <a:t>Key idea</a:t>
             </a:r>
-            <a:endParaRPr lang="en-US" sz="950" dirty="0"/>
-          </a:p>
-        </p:txBody>
-      </p:sp>
-      <p:sp>
-        <p:nvSpPr>
-          <p:cNvPr id="13" name="Text 11"/>
-          <p:cNvSpPr/>
-          <p:nvPr/>
-        </p:nvSpPr>
-        <p:spPr>
-          <a:xfrm>
-            <a:off x="8074152" y="1856232"/>
-            <a:ext cx="2825496" cy="1261872"/>
+            <a:endParaRPr lang="en-US" sz="1300" dirty="0"/>
+          </a:p>
+        </p:txBody>
+      </p:sp>
+      <p:sp>
+        <p:nvSpPr>
+          <p:cNvPr id="14" name="Text 12"/>
+          <p:cNvSpPr/>
+          <p:nvPr/>
+        </p:nvSpPr>
+        <p:spPr>
+          <a:xfrm>
+            <a:off x="8074152" y="1920240"/>
+            <a:ext cx="2825496" cy="1188720"/>
           </a:xfrm>
           <a:prstGeom prst="rect">
             <a:avLst/>
@@ -12525,7 +13626,7 @@
               <a:buNone/>
             </a:pPr>
             <a:r>
-              <a:rPr lang="en-US" sz="1250" dirty="0">
+              <a:rPr lang="en-US" sz="1550" dirty="0">
                 <a:solidFill>
                   <a:srgbClr val="17364A"/>
                 </a:solidFill>
@@ -12535,13 +13636,13 @@
               </a:rPr>
               <a:t>Distinguish prediction from causal inference in public health AI.</a:t>
             </a:r>
-            <a:endParaRPr lang="en-US" sz="1250" dirty="0"/>
-          </a:p>
-        </p:txBody>
-      </p:sp>
-      <p:sp>
-        <p:nvSpPr>
-          <p:cNvPr id="14" name="Shape 12"/>
+            <a:endParaRPr lang="en-US" sz="1550" dirty="0"/>
+          </a:p>
+        </p:txBody>
+      </p:sp>
+      <p:sp>
+        <p:nvSpPr>
+          <p:cNvPr id="15" name="Shape 13"/>
           <p:cNvSpPr/>
           <p:nvPr/>
         </p:nvSpPr>
@@ -12568,14 +13669,14 @@
       </p:sp>
       <p:sp>
         <p:nvSpPr>
-          <p:cNvPr id="15" name="Text 13"/>
+          <p:cNvPr id="16" name="Text 14"/>
           <p:cNvSpPr/>
           <p:nvPr/>
         </p:nvSpPr>
         <p:spPr>
           <a:xfrm>
             <a:off x="8074152" y="3666744"/>
-            <a:ext cx="2825496" cy="201168"/>
+            <a:ext cx="2825496" cy="256032"/>
           </a:xfrm>
           <a:prstGeom prst="rect">
             <a:avLst/>
@@ -12591,7 +13692,7 @@
               <a:buNone/>
             </a:pPr>
             <a:r>
-              <a:rPr lang="en-US" sz="950" b="1" dirty="0">
+              <a:rPr lang="en-US" sz="1300" b="1" dirty="0">
                 <a:solidFill>
                   <a:srgbClr val="0068B7"/>
                 </a:solidFill>
@@ -12601,20 +13702,20 @@
               </a:rPr>
               <a:t>Use this for</a:t>
             </a:r>
-            <a:endParaRPr lang="en-US" sz="950" dirty="0"/>
-          </a:p>
-        </p:txBody>
-      </p:sp>
-      <p:sp>
-        <p:nvSpPr>
-          <p:cNvPr id="16" name="Text 14"/>
-          <p:cNvSpPr/>
-          <p:nvPr/>
-        </p:nvSpPr>
-        <p:spPr>
-          <a:xfrm>
-            <a:off x="8074152" y="3959352"/>
-            <a:ext cx="2825496" cy="1170432"/>
+            <a:endParaRPr lang="en-US" sz="1300" dirty="0"/>
+          </a:p>
+        </p:txBody>
+      </p:sp>
+      <p:sp>
+        <p:nvSpPr>
+          <p:cNvPr id="17" name="Text 15"/>
+          <p:cNvSpPr/>
+          <p:nvPr/>
+        </p:nvSpPr>
+        <p:spPr>
+          <a:xfrm>
+            <a:off x="8074152" y="4023360"/>
+            <a:ext cx="2825496" cy="1097280"/>
           </a:xfrm>
           <a:prstGeom prst="rect">
             <a:avLst/>
@@ -12632,7 +13733,7 @@
               <a:buNone/>
             </a:pPr>
             <a:r>
-              <a:rPr lang="en-US" sz="1250" dirty="0">
+              <a:rPr lang="en-US" sz="1550" dirty="0">
                 <a:solidFill>
                   <a:srgbClr val="17364A"/>
                 </a:solidFill>
@@ -12642,7 +13743,7 @@
               </a:rPr>
               <a:t>Connect the concept to public health decisions, safeguards, documentation, or implementation work.</a:t>
             </a:r>
-            <a:endParaRPr lang="en-US" sz="1250" dirty="0"/>
+            <a:endParaRPr lang="en-US" sz="1550" dirty="0"/>
           </a:p>
         </p:txBody>
       </p:sp>
@@ -12839,7 +13940,7 @@
                 <a:ea typeface="Aptos" pitchFamily="34" charset="-122"/>
                 <a:cs typeface="Aptos" pitchFamily="34" charset="-120"/>
               </a:rPr>
-              <a:t>© Paula Soper</a:t>
+              <a:t>Â© Paula Soper</a:t>
             </a:r>
             <a:endParaRPr lang="en-US" sz="800" dirty="0"/>
           </a:p>
@@ -12853,8 +13954,47 @@
         </p:nvSpPr>
         <p:spPr>
           <a:xfrm>
+            <a:off x="11137392" y="6510528"/>
+            <a:ext cx="411480" cy="201168"/>
+          </a:xfrm>
+          <a:prstGeom prst="rect">
+            <a:avLst/>
+          </a:prstGeom>
+          <a:noFill/>
+          <a:ln/>
+        </p:spPr>
+        <p:txBody>
+          <a:bodyPr wrap="square" lIns="0" tIns="0" rIns="0" bIns="0" rtlCol="0" anchor="ctr"/>
+          <a:lstStyle/>
+          <a:p>
+            <a:pPr algn="r" indent="0" marL="0">
+              <a:buNone/>
+            </a:pPr>
+            <a:r>
+              <a:rPr lang="en-US" sz="900" dirty="0">
+                <a:solidFill>
+                  <a:srgbClr val="5F7181"/>
+                </a:solidFill>
+                <a:latin typeface="Aptos" pitchFamily="34" charset="0"/>
+                <a:ea typeface="Aptos" pitchFamily="34" charset="-122"/>
+                <a:cs typeface="Aptos" pitchFamily="34" charset="-120"/>
+              </a:rPr>
+              <a:t>6</a:t>
+            </a:r>
+            <a:endParaRPr lang="en-US" sz="900" dirty="0"/>
+          </a:p>
+        </p:txBody>
+      </p:sp>
+      <p:sp>
+        <p:nvSpPr>
+          <p:cNvPr id="8" name="Text 6"/>
+          <p:cNvSpPr/>
+          <p:nvPr/>
+        </p:nvSpPr>
+        <p:spPr>
+          <a:xfrm>
             <a:off x="640080" y="658368"/>
-            <a:ext cx="10881360" cy="566928"/>
+            <a:ext cx="10881360" cy="713232"/>
           </a:xfrm>
           <a:prstGeom prst="rect">
             <a:avLst/>
@@ -12872,7 +14012,7 @@
               <a:buNone/>
             </a:pPr>
             <a:r>
-              <a:rPr lang="en-US" sz="2700" b="1" dirty="0">
+              <a:rPr lang="en-US" sz="3400" b="1" dirty="0">
                 <a:solidFill>
                   <a:srgbClr val="003A63"/>
                 </a:solidFill>
@@ -12882,20 +14022,20 @@
               </a:rPr>
               <a:t>Learning Objectives Continued</a:t>
             </a:r>
-            <a:endParaRPr lang="en-US" sz="2700" dirty="0"/>
-          </a:p>
-        </p:txBody>
-      </p:sp>
-      <p:sp>
-        <p:nvSpPr>
-          <p:cNvPr id="8" name="Text 6"/>
-          <p:cNvSpPr/>
-          <p:nvPr/>
-        </p:nvSpPr>
-        <p:spPr>
-          <a:xfrm>
-            <a:off x="868680" y="1417320"/>
-            <a:ext cx="6675120" cy="4434840"/>
+            <a:endParaRPr lang="en-US" sz="3400" dirty="0"/>
+          </a:p>
+        </p:txBody>
+      </p:sp>
+      <p:sp>
+        <p:nvSpPr>
+          <p:cNvPr id="9" name="Text 7"/>
+          <p:cNvSpPr/>
+          <p:nvPr/>
+        </p:nvSpPr>
+        <p:spPr>
+          <a:xfrm>
+            <a:off x="868680" y="1508760"/>
+            <a:ext cx="6537960" cy="4160520"/>
           </a:xfrm>
           <a:prstGeom prst="rect">
             <a:avLst/>
@@ -12910,7 +14050,7 @@
           <a:lstStyle/>
           <a:p>
             <a:r>
-              <a:rPr lang="en-US" sz="1700" dirty="0">
+              <a:rPr lang="en-US" sz="2100" dirty="0">
                 <a:solidFill>
                   <a:srgbClr val="17364A"/>
                 </a:solidFill>
@@ -12920,13 +14060,13 @@
               </a:rPr>
               <a:t>Create a causal question framing worksheet for an AI-supported decision.</a:t>
             </a:r>
-            <a:endParaRPr lang="en-US" sz="1700" dirty="0"/>
-          </a:p>
-        </p:txBody>
-      </p:sp>
-      <p:sp>
-        <p:nvSpPr>
-          <p:cNvPr id="9" name="Shape 7"/>
+            <a:endParaRPr lang="en-US" sz="2100" dirty="0"/>
+          </a:p>
+        </p:txBody>
+      </p:sp>
+      <p:sp>
+        <p:nvSpPr>
+          <p:cNvPr id="10" name="Shape 8"/>
           <p:cNvSpPr/>
           <p:nvPr/>
         </p:nvSpPr>
@@ -12953,14 +14093,14 @@
       </p:sp>
       <p:sp>
         <p:nvSpPr>
-          <p:cNvPr id="10" name="Text 8"/>
+          <p:cNvPr id="11" name="Text 9"/>
           <p:cNvSpPr/>
           <p:nvPr/>
         </p:nvSpPr>
         <p:spPr>
           <a:xfrm>
             <a:off x="8074152" y="1563624"/>
-            <a:ext cx="2825496" cy="201168"/>
+            <a:ext cx="2825496" cy="256032"/>
           </a:xfrm>
           <a:prstGeom prst="rect">
             <a:avLst/>
@@ -12976,7 +14116,7 @@
               <a:buNone/>
             </a:pPr>
             <a:r>
-              <a:rPr lang="en-US" sz="950" b="1" dirty="0">
+              <a:rPr lang="en-US" sz="1300" b="1" dirty="0">
                 <a:solidFill>
                   <a:srgbClr val="0068B7"/>
                 </a:solidFill>
@@ -12986,20 +14126,20 @@
               </a:rPr>
               <a:t>Key idea</a:t>
             </a:r>
-            <a:endParaRPr lang="en-US" sz="950" dirty="0"/>
-          </a:p>
-        </p:txBody>
-      </p:sp>
-      <p:sp>
-        <p:nvSpPr>
-          <p:cNvPr id="11" name="Text 9"/>
-          <p:cNvSpPr/>
-          <p:nvPr/>
-        </p:nvSpPr>
-        <p:spPr>
-          <a:xfrm>
-            <a:off x="8074152" y="1856232"/>
-            <a:ext cx="2825496" cy="1261872"/>
+            <a:endParaRPr lang="en-US" sz="1300" dirty="0"/>
+          </a:p>
+        </p:txBody>
+      </p:sp>
+      <p:sp>
+        <p:nvSpPr>
+          <p:cNvPr id="12" name="Text 10"/>
+          <p:cNvSpPr/>
+          <p:nvPr/>
+        </p:nvSpPr>
+        <p:spPr>
+          <a:xfrm>
+            <a:off x="8074152" y="1920240"/>
+            <a:ext cx="2825496" cy="1188720"/>
           </a:xfrm>
           <a:prstGeom prst="rect">
             <a:avLst/>
@@ -13017,7 +14157,7 @@
               <a:buNone/>
             </a:pPr>
             <a:r>
-              <a:rPr lang="en-US" sz="1250" dirty="0">
+              <a:rPr lang="en-US" sz="1550" dirty="0">
                 <a:solidFill>
                   <a:srgbClr val="17364A"/>
                 </a:solidFill>
@@ -13027,13 +14167,13 @@
               </a:rPr>
               <a:t>Create a causal question framing worksheet for an AI-supported decision.</a:t>
             </a:r>
-            <a:endParaRPr lang="en-US" sz="1250" dirty="0"/>
-          </a:p>
-        </p:txBody>
-      </p:sp>
-      <p:sp>
-        <p:nvSpPr>
-          <p:cNvPr id="12" name="Shape 10"/>
+            <a:endParaRPr lang="en-US" sz="1550" dirty="0"/>
+          </a:p>
+        </p:txBody>
+      </p:sp>
+      <p:sp>
+        <p:nvSpPr>
+          <p:cNvPr id="13" name="Shape 11"/>
           <p:cNvSpPr/>
           <p:nvPr/>
         </p:nvSpPr>
@@ -13060,14 +14200,14 @@
       </p:sp>
       <p:sp>
         <p:nvSpPr>
-          <p:cNvPr id="13" name="Text 11"/>
+          <p:cNvPr id="14" name="Text 12"/>
           <p:cNvSpPr/>
           <p:nvPr/>
         </p:nvSpPr>
         <p:spPr>
           <a:xfrm>
             <a:off x="8074152" y="3666744"/>
-            <a:ext cx="2825496" cy="201168"/>
+            <a:ext cx="2825496" cy="256032"/>
           </a:xfrm>
           <a:prstGeom prst="rect">
             <a:avLst/>
@@ -13083,7 +14223,7 @@
               <a:buNone/>
             </a:pPr>
             <a:r>
-              <a:rPr lang="en-US" sz="950" b="1" dirty="0">
+              <a:rPr lang="en-US" sz="1300" b="1" dirty="0">
                 <a:solidFill>
                   <a:srgbClr val="0068B7"/>
                 </a:solidFill>
@@ -13093,20 +14233,20 @@
               </a:rPr>
               <a:t>Use this for</a:t>
             </a:r>
-            <a:endParaRPr lang="en-US" sz="950" dirty="0"/>
-          </a:p>
-        </p:txBody>
-      </p:sp>
-      <p:sp>
-        <p:nvSpPr>
-          <p:cNvPr id="14" name="Text 12"/>
-          <p:cNvSpPr/>
-          <p:nvPr/>
-        </p:nvSpPr>
-        <p:spPr>
-          <a:xfrm>
-            <a:off x="8074152" y="3959352"/>
-            <a:ext cx="2825496" cy="1170432"/>
+            <a:endParaRPr lang="en-US" sz="1300" dirty="0"/>
+          </a:p>
+        </p:txBody>
+      </p:sp>
+      <p:sp>
+        <p:nvSpPr>
+          <p:cNvPr id="15" name="Text 13"/>
+          <p:cNvSpPr/>
+          <p:nvPr/>
+        </p:nvSpPr>
+        <p:spPr>
+          <a:xfrm>
+            <a:off x="8074152" y="4023360"/>
+            <a:ext cx="2825496" cy="1097280"/>
           </a:xfrm>
           <a:prstGeom prst="rect">
             <a:avLst/>
@@ -13124,7 +14264,7 @@
               <a:buNone/>
             </a:pPr>
             <a:r>
-              <a:rPr lang="en-US" sz="1250" dirty="0">
+              <a:rPr lang="en-US" sz="1550" dirty="0">
                 <a:solidFill>
                   <a:srgbClr val="17364A"/>
                 </a:solidFill>
@@ -13134,7 +14274,7 @@
               </a:rPr>
               <a:t>Connect the concept to public health decisions, safeguards, documentation, or implementation work.</a:t>
             </a:r>
-            <a:endParaRPr lang="en-US" sz="1250" dirty="0"/>
+            <a:endParaRPr lang="en-US" sz="1550" dirty="0"/>
           </a:p>
         </p:txBody>
       </p:sp>
@@ -13331,7 +14471,7 @@
                 <a:ea typeface="Aptos" pitchFamily="34" charset="-122"/>
                 <a:cs typeface="Aptos" pitchFamily="34" charset="-120"/>
               </a:rPr>
-              <a:t>© Paula Soper</a:t>
+              <a:t>Â© Paula Soper</a:t>
             </a:r>
             <a:endParaRPr lang="en-US" sz="800" dirty="0"/>
           </a:p>
@@ -13339,7 +14479,46 @@
       </p:sp>
       <p:sp>
         <p:nvSpPr>
-          <p:cNvPr id="7" name="Shape 5"/>
+          <p:cNvPr id="7" name="Text 5"/>
+          <p:cNvSpPr/>
+          <p:nvPr/>
+        </p:nvSpPr>
+        <p:spPr>
+          <a:xfrm>
+            <a:off x="11137392" y="6510528"/>
+            <a:ext cx="411480" cy="201168"/>
+          </a:xfrm>
+          <a:prstGeom prst="rect">
+            <a:avLst/>
+          </a:prstGeom>
+          <a:noFill/>
+          <a:ln/>
+        </p:spPr>
+        <p:txBody>
+          <a:bodyPr wrap="square" lIns="0" tIns="0" rIns="0" bIns="0" rtlCol="0" anchor="ctr"/>
+          <a:lstStyle/>
+          <a:p>
+            <a:pPr algn="r" indent="0" marL="0">
+              <a:buNone/>
+            </a:pPr>
+            <a:r>
+              <a:rPr lang="en-US" sz="900" dirty="0">
+                <a:solidFill>
+                  <a:srgbClr val="5F7181"/>
+                </a:solidFill>
+                <a:latin typeface="Aptos" pitchFamily="34" charset="0"/>
+                <a:ea typeface="Aptos" pitchFamily="34" charset="-122"/>
+                <a:cs typeface="Aptos" pitchFamily="34" charset="-120"/>
+              </a:rPr>
+              <a:t>7</a:t>
+            </a:r>
+            <a:endParaRPr lang="en-US" sz="900" dirty="0"/>
+          </a:p>
+        </p:txBody>
+      </p:sp>
+      <p:sp>
+        <p:nvSpPr>
+          <p:cNvPr id="8" name="Shape 6"/>
           <p:cNvSpPr/>
           <p:nvPr/>
         </p:nvSpPr>
@@ -13364,7 +14543,7 @@
       </p:sp>
       <p:sp>
         <p:nvSpPr>
-          <p:cNvPr id="8" name="Text 6"/>
+          <p:cNvPr id="9" name="Text 7"/>
           <p:cNvSpPr/>
           <p:nvPr/>
         </p:nvSpPr>
@@ -13403,14 +14582,14 @@
       </p:sp>
       <p:sp>
         <p:nvSpPr>
-          <p:cNvPr id="9" name="Text 7"/>
+          <p:cNvPr id="10" name="Text 8"/>
           <p:cNvSpPr/>
           <p:nvPr/>
         </p:nvSpPr>
         <p:spPr>
           <a:xfrm>
             <a:off x="640080" y="621792"/>
-            <a:ext cx="10881360" cy="566928"/>
+            <a:ext cx="10881360" cy="713232"/>
           </a:xfrm>
           <a:prstGeom prst="rect">
             <a:avLst/>
@@ -13428,7 +14607,7 @@
               <a:buNone/>
             </a:pPr>
             <a:r>
-              <a:rPr lang="en-US" sz="2700" b="1" dirty="0">
+              <a:rPr lang="en-US" sz="3400" b="1" dirty="0">
                 <a:solidFill>
                   <a:srgbClr val="003A63"/>
                 </a:solidFill>
@@ -13438,20 +14617,20 @@
               </a:rPr>
               <a:t>Module Overview</a:t>
             </a:r>
-            <a:endParaRPr lang="en-US" sz="2700" dirty="0"/>
-          </a:p>
-        </p:txBody>
-      </p:sp>
-      <p:sp>
-        <p:nvSpPr>
-          <p:cNvPr id="10" name="Text 8"/>
-          <p:cNvSpPr/>
-          <p:nvPr/>
-        </p:nvSpPr>
-        <p:spPr>
-          <a:xfrm>
-            <a:off x="868680" y="1417320"/>
-            <a:ext cx="6675120" cy="4434840"/>
+            <a:endParaRPr lang="en-US" sz="3400" dirty="0"/>
+          </a:p>
+        </p:txBody>
+      </p:sp>
+      <p:sp>
+        <p:nvSpPr>
+          <p:cNvPr id="11" name="Text 9"/>
+          <p:cNvSpPr/>
+          <p:nvPr/>
+        </p:nvSpPr>
+        <p:spPr>
+          <a:xfrm>
+            <a:off x="868680" y="1508760"/>
+            <a:ext cx="6537960" cy="4160520"/>
           </a:xfrm>
           <a:prstGeom prst="rect">
             <a:avLst/>
@@ -13466,7 +14645,7 @@
           <a:lstStyle/>
           <a:p>
             <a:r>
-              <a:rPr lang="en-US" sz="1700" dirty="0">
+              <a:rPr lang="en-US" sz="2100" dirty="0">
                 <a:solidFill>
                   <a:srgbClr val="17364A"/>
                 </a:solidFill>
@@ -13474,13 +14653,13 @@
                 <a:ea typeface="Aptos" pitchFamily="34" charset="-122"/>
                 <a:cs typeface="Aptos" pitchFamily="34" charset="-120"/>
               </a:rPr>
-              <a:t>AI models often predict what is likely to happen, but public health leaders frequently need to know what action will change.</a:t>
-            </a:r>
-            <a:endParaRPr lang="en-US" sz="1700" dirty="0"/>
-          </a:p>
-          <a:p>
-            <a:r>
-              <a:rPr lang="en-US" sz="1700" dirty="0">
+              <a:t>AI models often predict what is likely to happen, but public health leaders frequently need to know.</a:t>
+            </a:r>
+            <a:endParaRPr lang="en-US" sz="2100" dirty="0"/>
+          </a:p>
+          <a:p>
+            <a:r>
+              <a:rPr lang="en-US" sz="2100" dirty="0">
                 <a:solidFill>
                   <a:srgbClr val="17364A"/>
                 </a:solidFill>
@@ -13488,13 +14667,13 @@
                 <a:ea typeface="Aptos" pitchFamily="34" charset="-122"/>
                 <a:cs typeface="Aptos" pitchFamily="34" charset="-120"/>
               </a:rPr>
-              <a:t>This module helps learners distinguish prediction from causal inference so AI outputs are not misused as evidence that a.</a:t>
-            </a:r>
-            <a:endParaRPr lang="en-US" sz="1700" dirty="0"/>
-          </a:p>
-          <a:p>
-            <a:r>
-              <a:rPr lang="en-US" sz="1700" dirty="0">
+              <a:t>This module helps learners distinguish prediction from causal inference so AI outputs are not misused.</a:t>
+            </a:r>
+            <a:endParaRPr lang="en-US" sz="2100" dirty="0"/>
+          </a:p>
+          <a:p>
+            <a:r>
+              <a:rPr lang="en-US" sz="2100" dirty="0">
                 <a:solidFill>
                   <a:srgbClr val="17364A"/>
                 </a:solidFill>
@@ -13502,29 +14681,15 @@
                 <a:ea typeface="Aptos" pitchFamily="34" charset="-122"/>
                 <a:cs typeface="Aptos" pitchFamily="34" charset="-120"/>
               </a:rPr>
-              <a:t>Learners examine confounding, bias, comparison groups, counterfactual reasoning, directed acyclic graphs, and.</a:t>
-            </a:r>
-            <a:endParaRPr lang="en-US" sz="1700" dirty="0"/>
-          </a:p>
-          <a:p>
-            <a:r>
-              <a:rPr lang="en-US" sz="1700" dirty="0">
-                <a:solidFill>
-                  <a:srgbClr val="17364A"/>
-                </a:solidFill>
-                <a:latin typeface="Aptos" pitchFamily="34" charset="0"/>
-                <a:ea typeface="Aptos" pitchFamily="34" charset="-122"/>
-                <a:cs typeface="Aptos" pitchFamily="34" charset="-120"/>
-              </a:rPr>
-              <a:t>The purpose is not to turn every learner into a causal methods expert.</a:t>
-            </a:r>
-            <a:endParaRPr lang="en-US" sz="1700" dirty="0"/>
-          </a:p>
-        </p:txBody>
-      </p:sp>
-      <p:sp>
-        <p:nvSpPr>
-          <p:cNvPr id="11" name="Shape 9"/>
+              <a:t>Learners examine confounding, bias, comparison groups, counterfactual reasoning, directed acyclic.</a:t>
+            </a:r>
+            <a:endParaRPr lang="en-US" sz="2100" dirty="0"/>
+          </a:p>
+        </p:txBody>
+      </p:sp>
+      <p:sp>
+        <p:nvSpPr>
+          <p:cNvPr id="12" name="Shape 10"/>
           <p:cNvSpPr/>
           <p:nvPr/>
         </p:nvSpPr>
@@ -13551,14 +14716,14 @@
       </p:sp>
       <p:sp>
         <p:nvSpPr>
-          <p:cNvPr id="12" name="Text 10"/>
+          <p:cNvPr id="13" name="Text 11"/>
           <p:cNvSpPr/>
           <p:nvPr/>
         </p:nvSpPr>
         <p:spPr>
           <a:xfrm>
             <a:off x="8074152" y="1563624"/>
-            <a:ext cx="2825496" cy="201168"/>
+            <a:ext cx="2825496" cy="256032"/>
           </a:xfrm>
           <a:prstGeom prst="rect">
             <a:avLst/>
@@ -13574,7 +14739,7 @@
               <a:buNone/>
             </a:pPr>
             <a:r>
-              <a:rPr lang="en-US" sz="950" b="1" dirty="0">
+              <a:rPr lang="en-US" sz="1300" b="1" dirty="0">
                 <a:solidFill>
                   <a:srgbClr val="0068B7"/>
                 </a:solidFill>
@@ -13584,20 +14749,20 @@
               </a:rPr>
               <a:t>Key idea</a:t>
             </a:r>
-            <a:endParaRPr lang="en-US" sz="950" dirty="0"/>
-          </a:p>
-        </p:txBody>
-      </p:sp>
-      <p:sp>
-        <p:nvSpPr>
-          <p:cNvPr id="13" name="Text 11"/>
-          <p:cNvSpPr/>
-          <p:nvPr/>
-        </p:nvSpPr>
-        <p:spPr>
-          <a:xfrm>
-            <a:off x="8074152" y="1856232"/>
-            <a:ext cx="2825496" cy="1261872"/>
+            <a:endParaRPr lang="en-US" sz="1300" dirty="0"/>
+          </a:p>
+        </p:txBody>
+      </p:sp>
+      <p:sp>
+        <p:nvSpPr>
+          <p:cNvPr id="14" name="Text 12"/>
+          <p:cNvSpPr/>
+          <p:nvPr/>
+        </p:nvSpPr>
+        <p:spPr>
+          <a:xfrm>
+            <a:off x="8074152" y="1920240"/>
+            <a:ext cx="2825496" cy="1188720"/>
           </a:xfrm>
           <a:prstGeom prst="rect">
             <a:avLst/>
@@ -13615,7 +14780,7 @@
               <a:buNone/>
             </a:pPr>
             <a:r>
-              <a:rPr lang="en-US" sz="1250" dirty="0">
+              <a:rPr lang="en-US" sz="1550" dirty="0">
                 <a:solidFill>
                   <a:srgbClr val="17364A"/>
                 </a:solidFill>
@@ -13623,15 +14788,15 @@
                 <a:ea typeface="Aptos" pitchFamily="34" charset="-122"/>
                 <a:cs typeface="Aptos" pitchFamily="34" charset="-120"/>
               </a:rPr>
-              <a:t>AI models often predict what is likely to happen, but public health leaders frequently need to know what action will change.</a:t>
-            </a:r>
-            <a:endParaRPr lang="en-US" sz="1250" dirty="0"/>
-          </a:p>
-        </p:txBody>
-      </p:sp>
-      <p:sp>
-        <p:nvSpPr>
-          <p:cNvPr id="14" name="Shape 12"/>
+              <a:t>AI models often predict what is likely to happen, but public health leaders frequently need to know.</a:t>
+            </a:r>
+            <a:endParaRPr lang="en-US" sz="1550" dirty="0"/>
+          </a:p>
+        </p:txBody>
+      </p:sp>
+      <p:sp>
+        <p:nvSpPr>
+          <p:cNvPr id="15" name="Shape 13"/>
           <p:cNvSpPr/>
           <p:nvPr/>
         </p:nvSpPr>
@@ -13658,14 +14823,14 @@
       </p:sp>
       <p:sp>
         <p:nvSpPr>
-          <p:cNvPr id="15" name="Text 13"/>
+          <p:cNvPr id="16" name="Text 14"/>
           <p:cNvSpPr/>
           <p:nvPr/>
         </p:nvSpPr>
         <p:spPr>
           <a:xfrm>
             <a:off x="8074152" y="3666744"/>
-            <a:ext cx="2825496" cy="201168"/>
+            <a:ext cx="2825496" cy="256032"/>
           </a:xfrm>
           <a:prstGeom prst="rect">
             <a:avLst/>
@@ -13681,7 +14846,7 @@
               <a:buNone/>
             </a:pPr>
             <a:r>
-              <a:rPr lang="en-US" sz="950" b="1" dirty="0">
+              <a:rPr lang="en-US" sz="1300" b="1" dirty="0">
                 <a:solidFill>
                   <a:srgbClr val="0068B7"/>
                 </a:solidFill>
@@ -13691,20 +14856,20 @@
               </a:rPr>
               <a:t>Use this for</a:t>
             </a:r>
-            <a:endParaRPr lang="en-US" sz="950" dirty="0"/>
-          </a:p>
-        </p:txBody>
-      </p:sp>
-      <p:sp>
-        <p:nvSpPr>
-          <p:cNvPr id="16" name="Text 14"/>
-          <p:cNvSpPr/>
-          <p:nvPr/>
-        </p:nvSpPr>
-        <p:spPr>
-          <a:xfrm>
-            <a:off x="8074152" y="3959352"/>
-            <a:ext cx="2825496" cy="1170432"/>
+            <a:endParaRPr lang="en-US" sz="1300" dirty="0"/>
+          </a:p>
+        </p:txBody>
+      </p:sp>
+      <p:sp>
+        <p:nvSpPr>
+          <p:cNvPr id="17" name="Text 15"/>
+          <p:cNvSpPr/>
+          <p:nvPr/>
+        </p:nvSpPr>
+        <p:spPr>
+          <a:xfrm>
+            <a:off x="8074152" y="4023360"/>
+            <a:ext cx="2825496" cy="1097280"/>
           </a:xfrm>
           <a:prstGeom prst="rect">
             <a:avLst/>
@@ -13722,7 +14887,7 @@
               <a:buNone/>
             </a:pPr>
             <a:r>
-              <a:rPr lang="en-US" sz="1250" dirty="0">
+              <a:rPr lang="en-US" sz="1550" dirty="0">
                 <a:solidFill>
                   <a:srgbClr val="17364A"/>
                 </a:solidFill>
@@ -13732,7 +14897,7 @@
               </a:rPr>
               <a:t>Connect the concept to public health decisions, safeguards, documentation, or implementation work.</a:t>
             </a:r>
-            <a:endParaRPr lang="en-US" sz="1250" dirty="0"/>
+            <a:endParaRPr lang="en-US" sz="1550" dirty="0"/>
           </a:p>
         </p:txBody>
       </p:sp>
@@ -13929,7 +15094,7 @@
                 <a:ea typeface="Aptos" pitchFamily="34" charset="-122"/>
                 <a:cs typeface="Aptos" pitchFamily="34" charset="-120"/>
               </a:rPr>
-              <a:t>© Paula Soper</a:t>
+              <a:t>Â© Paula Soper</a:t>
             </a:r>
             <a:endParaRPr lang="en-US" sz="800" dirty="0"/>
           </a:p>
@@ -13937,7 +15102,46 @@
       </p:sp>
       <p:sp>
         <p:nvSpPr>
-          <p:cNvPr id="7" name="Shape 5"/>
+          <p:cNvPr id="7" name="Text 5"/>
+          <p:cNvSpPr/>
+          <p:nvPr/>
+        </p:nvSpPr>
+        <p:spPr>
+          <a:xfrm>
+            <a:off x="11137392" y="6510528"/>
+            <a:ext cx="411480" cy="201168"/>
+          </a:xfrm>
+          <a:prstGeom prst="rect">
+            <a:avLst/>
+          </a:prstGeom>
+          <a:noFill/>
+          <a:ln/>
+        </p:spPr>
+        <p:txBody>
+          <a:bodyPr wrap="square" lIns="0" tIns="0" rIns="0" bIns="0" rtlCol="0" anchor="ctr"/>
+          <a:lstStyle/>
+          <a:p>
+            <a:pPr algn="r" indent="0" marL="0">
+              <a:buNone/>
+            </a:pPr>
+            <a:r>
+              <a:rPr lang="en-US" sz="900" dirty="0">
+                <a:solidFill>
+                  <a:srgbClr val="5F7181"/>
+                </a:solidFill>
+                <a:latin typeface="Aptos" pitchFamily="34" charset="0"/>
+                <a:ea typeface="Aptos" pitchFamily="34" charset="-122"/>
+                <a:cs typeface="Aptos" pitchFamily="34" charset="-120"/>
+              </a:rPr>
+              <a:t>8</a:t>
+            </a:r>
+            <a:endParaRPr lang="en-US" sz="900" dirty="0"/>
+          </a:p>
+        </p:txBody>
+      </p:sp>
+      <p:sp>
+        <p:nvSpPr>
+          <p:cNvPr id="8" name="Shape 6"/>
           <p:cNvSpPr/>
           <p:nvPr/>
         </p:nvSpPr>
@@ -13962,7 +15166,7 @@
       </p:sp>
       <p:sp>
         <p:nvSpPr>
-          <p:cNvPr id="8" name="Text 6"/>
+          <p:cNvPr id="9" name="Text 7"/>
           <p:cNvSpPr/>
           <p:nvPr/>
         </p:nvSpPr>
@@ -14001,14 +15205,14 @@
       </p:sp>
       <p:sp>
         <p:nvSpPr>
-          <p:cNvPr id="9" name="Text 7"/>
+          <p:cNvPr id="10" name="Text 8"/>
           <p:cNvSpPr/>
           <p:nvPr/>
         </p:nvSpPr>
         <p:spPr>
           <a:xfrm>
             <a:off x="640080" y="621792"/>
-            <a:ext cx="10881360" cy="566928"/>
+            <a:ext cx="10881360" cy="713232"/>
           </a:xfrm>
           <a:prstGeom prst="rect">
             <a:avLst/>
@@ -14026,7 +15230,7 @@
               <a:buNone/>
             </a:pPr>
             <a:r>
-              <a:rPr lang="en-US" sz="2700" b="1" dirty="0">
+              <a:rPr lang="en-US" sz="3400" b="1" dirty="0">
                 <a:solidFill>
                   <a:srgbClr val="003A63"/>
                 </a:solidFill>
@@ -14036,20 +15240,20 @@
               </a:rPr>
               <a:t>Definitions</a:t>
             </a:r>
-            <a:endParaRPr lang="en-US" sz="2700" dirty="0"/>
-          </a:p>
-        </p:txBody>
-      </p:sp>
-      <p:sp>
-        <p:nvSpPr>
-          <p:cNvPr id="10" name="Text 8"/>
-          <p:cNvSpPr/>
-          <p:nvPr/>
-        </p:nvSpPr>
-        <p:spPr>
-          <a:xfrm>
-            <a:off x="868680" y="1417320"/>
-            <a:ext cx="6675120" cy="4434840"/>
+            <a:endParaRPr lang="en-US" sz="3400" dirty="0"/>
+          </a:p>
+        </p:txBody>
+      </p:sp>
+      <p:sp>
+        <p:nvSpPr>
+          <p:cNvPr id="11" name="Text 9"/>
+          <p:cNvSpPr/>
+          <p:nvPr/>
+        </p:nvSpPr>
+        <p:spPr>
+          <a:xfrm>
+            <a:off x="868680" y="1508760"/>
+            <a:ext cx="6537960" cy="4160520"/>
           </a:xfrm>
           <a:prstGeom prst="rect">
             <a:avLst/>
@@ -14064,7 +15268,7 @@
           <a:lstStyle/>
           <a:p>
             <a:r>
-              <a:rPr lang="en-US" sz="1700" dirty="0">
+              <a:rPr lang="en-US" sz="2100" dirty="0">
                 <a:solidFill>
                   <a:srgbClr val="17364A"/>
                 </a:solidFill>
@@ -14074,11 +15278,11 @@
               </a:rPr>
               <a:t>Prediction: An estimate of what is likely to happen based on observed patterns.</a:t>
             </a:r>
-            <a:endParaRPr lang="en-US" sz="1700" dirty="0"/>
-          </a:p>
-          <a:p>
-            <a:r>
-              <a:rPr lang="en-US" sz="1700" dirty="0">
+            <a:endParaRPr lang="en-US" sz="2100" dirty="0"/>
+          </a:p>
+          <a:p>
+            <a:r>
+              <a:rPr lang="en-US" sz="2100" dirty="0">
                 <a:solidFill>
                   <a:srgbClr val="17364A"/>
                 </a:solidFill>
@@ -14086,13 +15290,13 @@
                 <a:ea typeface="Aptos" pitchFamily="34" charset="-122"/>
                 <a:cs typeface="Aptos" pitchFamily="34" charset="-120"/>
               </a:rPr>
-              <a:t>Causal inference: The process of estimating whether and how an exposure, policy, program, or intervention changes an outcome.</a:t>
-            </a:r>
-            <a:endParaRPr lang="en-US" sz="1700" dirty="0"/>
-          </a:p>
-          <a:p>
-            <a:r>
-              <a:rPr lang="en-US" sz="1700" dirty="0">
+              <a:t>Causal inference: The process of estimating whether and how an exposure, policy, program, or.</a:t>
+            </a:r>
+            <a:endParaRPr lang="en-US" sz="2100" dirty="0"/>
+          </a:p>
+          <a:p>
+            <a:r>
+              <a:rPr lang="en-US" sz="2100" dirty="0">
                 <a:solidFill>
                   <a:srgbClr val="17364A"/>
                 </a:solidFill>
@@ -14100,29 +15304,15 @@
                 <a:ea typeface="Aptos" pitchFamily="34" charset="-122"/>
                 <a:cs typeface="Aptos" pitchFamily="34" charset="-120"/>
               </a:rPr>
-              <a:t>Confounding: A distortion that occurs when another factor is related to both the exposure and the outcome.</a:t>
-            </a:r>
-            <a:endParaRPr lang="en-US" sz="1700" dirty="0"/>
-          </a:p>
-          <a:p>
-            <a:r>
-              <a:rPr lang="en-US" sz="1700" dirty="0">
-                <a:solidFill>
-                  <a:srgbClr val="17364A"/>
-                </a:solidFill>
-                <a:latin typeface="Aptos" pitchFamily="34" charset="0"/>
-                <a:ea typeface="Aptos" pitchFamily="34" charset="-122"/>
-                <a:cs typeface="Aptos" pitchFamily="34" charset="-120"/>
-              </a:rPr>
-              <a:t>Counterfactual: The outcome that would have occurred under a different condition or intervention.</a:t>
-            </a:r>
-            <a:endParaRPr lang="en-US" sz="1700" dirty="0"/>
-          </a:p>
-        </p:txBody>
-      </p:sp>
-      <p:sp>
-        <p:nvSpPr>
-          <p:cNvPr id="11" name="Shape 9"/>
+              <a:t>Confounding: A distortion that occurs when another factor is related to both the exposure and the.</a:t>
+            </a:r>
+            <a:endParaRPr lang="en-US" sz="2100" dirty="0"/>
+          </a:p>
+        </p:txBody>
+      </p:sp>
+      <p:sp>
+        <p:nvSpPr>
+          <p:cNvPr id="12" name="Shape 10"/>
           <p:cNvSpPr/>
           <p:nvPr/>
         </p:nvSpPr>
@@ -14149,14 +15339,14 @@
       </p:sp>
       <p:sp>
         <p:nvSpPr>
-          <p:cNvPr id="12" name="Text 10"/>
+          <p:cNvPr id="13" name="Text 11"/>
           <p:cNvSpPr/>
           <p:nvPr/>
         </p:nvSpPr>
         <p:spPr>
           <a:xfrm>
             <a:off x="8074152" y="1563624"/>
-            <a:ext cx="2825496" cy="201168"/>
+            <a:ext cx="2825496" cy="256032"/>
           </a:xfrm>
           <a:prstGeom prst="rect">
             <a:avLst/>
@@ -14172,7 +15362,7 @@
               <a:buNone/>
             </a:pPr>
             <a:r>
-              <a:rPr lang="en-US" sz="950" b="1" dirty="0">
+              <a:rPr lang="en-US" sz="1300" b="1" dirty="0">
                 <a:solidFill>
                   <a:srgbClr val="0068B7"/>
                 </a:solidFill>
@@ -14182,20 +15372,20 @@
               </a:rPr>
               <a:t>Key idea</a:t>
             </a:r>
-            <a:endParaRPr lang="en-US" sz="950" dirty="0"/>
-          </a:p>
-        </p:txBody>
-      </p:sp>
-      <p:sp>
-        <p:nvSpPr>
-          <p:cNvPr id="13" name="Text 11"/>
-          <p:cNvSpPr/>
-          <p:nvPr/>
-        </p:nvSpPr>
-        <p:spPr>
-          <a:xfrm>
-            <a:off x="8074152" y="1856232"/>
-            <a:ext cx="2825496" cy="1261872"/>
+            <a:endParaRPr lang="en-US" sz="1300" dirty="0"/>
+          </a:p>
+        </p:txBody>
+      </p:sp>
+      <p:sp>
+        <p:nvSpPr>
+          <p:cNvPr id="14" name="Text 12"/>
+          <p:cNvSpPr/>
+          <p:nvPr/>
+        </p:nvSpPr>
+        <p:spPr>
+          <a:xfrm>
+            <a:off x="8074152" y="1920240"/>
+            <a:ext cx="2825496" cy="1188720"/>
           </a:xfrm>
           <a:prstGeom prst="rect">
             <a:avLst/>
@@ -14213,7 +15403,7 @@
               <a:buNone/>
             </a:pPr>
             <a:r>
-              <a:rPr lang="en-US" sz="1250" dirty="0">
+              <a:rPr lang="en-US" sz="1550" dirty="0">
                 <a:solidFill>
                   <a:srgbClr val="17364A"/>
                 </a:solidFill>
@@ -14223,13 +15413,13 @@
               </a:rPr>
               <a:t>Prediction: An estimate of what is likely to happen based on observed patterns.</a:t>
             </a:r>
-            <a:endParaRPr lang="en-US" sz="1250" dirty="0"/>
-          </a:p>
-        </p:txBody>
-      </p:sp>
-      <p:sp>
-        <p:nvSpPr>
-          <p:cNvPr id="14" name="Shape 12"/>
+            <a:endParaRPr lang="en-US" sz="1550" dirty="0"/>
+          </a:p>
+        </p:txBody>
+      </p:sp>
+      <p:sp>
+        <p:nvSpPr>
+          <p:cNvPr id="15" name="Shape 13"/>
           <p:cNvSpPr/>
           <p:nvPr/>
         </p:nvSpPr>
@@ -14256,14 +15446,14 @@
       </p:sp>
       <p:sp>
         <p:nvSpPr>
-          <p:cNvPr id="15" name="Text 13"/>
+          <p:cNvPr id="16" name="Text 14"/>
           <p:cNvSpPr/>
           <p:nvPr/>
         </p:nvSpPr>
         <p:spPr>
           <a:xfrm>
             <a:off x="8074152" y="3666744"/>
-            <a:ext cx="2825496" cy="201168"/>
+            <a:ext cx="2825496" cy="256032"/>
           </a:xfrm>
           <a:prstGeom prst="rect">
             <a:avLst/>
@@ -14279,7 +15469,7 @@
               <a:buNone/>
             </a:pPr>
             <a:r>
-              <a:rPr lang="en-US" sz="950" b="1" dirty="0">
+              <a:rPr lang="en-US" sz="1300" b="1" dirty="0">
                 <a:solidFill>
                   <a:srgbClr val="0068B7"/>
                 </a:solidFill>
@@ -14289,20 +15479,20 @@
               </a:rPr>
               <a:t>Use this for</a:t>
             </a:r>
-            <a:endParaRPr lang="en-US" sz="950" dirty="0"/>
-          </a:p>
-        </p:txBody>
-      </p:sp>
-      <p:sp>
-        <p:nvSpPr>
-          <p:cNvPr id="16" name="Text 14"/>
-          <p:cNvSpPr/>
-          <p:nvPr/>
-        </p:nvSpPr>
-        <p:spPr>
-          <a:xfrm>
-            <a:off x="8074152" y="3959352"/>
-            <a:ext cx="2825496" cy="1170432"/>
+            <a:endParaRPr lang="en-US" sz="1300" dirty="0"/>
+          </a:p>
+        </p:txBody>
+      </p:sp>
+      <p:sp>
+        <p:nvSpPr>
+          <p:cNvPr id="17" name="Text 15"/>
+          <p:cNvSpPr/>
+          <p:nvPr/>
+        </p:nvSpPr>
+        <p:spPr>
+          <a:xfrm>
+            <a:off x="8074152" y="4023360"/>
+            <a:ext cx="2825496" cy="1097280"/>
           </a:xfrm>
           <a:prstGeom prst="rect">
             <a:avLst/>
@@ -14320,7 +15510,7 @@
               <a:buNone/>
             </a:pPr>
             <a:r>
-              <a:rPr lang="en-US" sz="1250" dirty="0">
+              <a:rPr lang="en-US" sz="1550" dirty="0">
                 <a:solidFill>
                   <a:srgbClr val="17364A"/>
                 </a:solidFill>
@@ -14330,7 +15520,7 @@
               </a:rPr>
               <a:t>Connect the concept to public health decisions, safeguards, documentation, or implementation work.</a:t>
             </a:r>
-            <a:endParaRPr lang="en-US" sz="1250" dirty="0"/>
+            <a:endParaRPr lang="en-US" sz="1550" dirty="0"/>
           </a:p>
         </p:txBody>
       </p:sp>
@@ -14527,7 +15717,7 @@
                 <a:ea typeface="Aptos" pitchFamily="34" charset="-122"/>
                 <a:cs typeface="Aptos" pitchFamily="34" charset="-120"/>
               </a:rPr>
-              <a:t>© Paula Soper</a:t>
+              <a:t>Â© Paula Soper</a:t>
             </a:r>
             <a:endParaRPr lang="en-US" sz="800" dirty="0"/>
           </a:p>
@@ -14535,7 +15725,46 @@
       </p:sp>
       <p:sp>
         <p:nvSpPr>
-          <p:cNvPr id="7" name="Shape 5"/>
+          <p:cNvPr id="7" name="Text 5"/>
+          <p:cNvSpPr/>
+          <p:nvPr/>
+        </p:nvSpPr>
+        <p:spPr>
+          <a:xfrm>
+            <a:off x="11137392" y="6510528"/>
+            <a:ext cx="411480" cy="201168"/>
+          </a:xfrm>
+          <a:prstGeom prst="rect">
+            <a:avLst/>
+          </a:prstGeom>
+          <a:noFill/>
+          <a:ln/>
+        </p:spPr>
+        <p:txBody>
+          <a:bodyPr wrap="square" lIns="0" tIns="0" rIns="0" bIns="0" rtlCol="0" anchor="ctr"/>
+          <a:lstStyle/>
+          <a:p>
+            <a:pPr algn="r" indent="0" marL="0">
+              <a:buNone/>
+            </a:pPr>
+            <a:r>
+              <a:rPr lang="en-US" sz="900" dirty="0">
+                <a:solidFill>
+                  <a:srgbClr val="5F7181"/>
+                </a:solidFill>
+                <a:latin typeface="Aptos" pitchFamily="34" charset="0"/>
+                <a:ea typeface="Aptos" pitchFamily="34" charset="-122"/>
+                <a:cs typeface="Aptos" pitchFamily="34" charset="-120"/>
+              </a:rPr>
+              <a:t>9</a:t>
+            </a:r>
+            <a:endParaRPr lang="en-US" sz="900" dirty="0"/>
+          </a:p>
+        </p:txBody>
+      </p:sp>
+      <p:sp>
+        <p:nvSpPr>
+          <p:cNvPr id="8" name="Shape 6"/>
           <p:cNvSpPr/>
           <p:nvPr/>
         </p:nvSpPr>
@@ -14560,7 +15789,7 @@
       </p:sp>
       <p:sp>
         <p:nvSpPr>
-          <p:cNvPr id="8" name="Text 6"/>
+          <p:cNvPr id="9" name="Text 7"/>
           <p:cNvSpPr/>
           <p:nvPr/>
         </p:nvSpPr>
@@ -14599,14 +15828,14 @@
       </p:sp>
       <p:sp>
         <p:nvSpPr>
-          <p:cNvPr id="9" name="Text 7"/>
+          <p:cNvPr id="10" name="Text 8"/>
           <p:cNvSpPr/>
           <p:nvPr/>
         </p:nvSpPr>
         <p:spPr>
           <a:xfrm>
             <a:off x="640080" y="621792"/>
-            <a:ext cx="10881360" cy="566928"/>
+            <a:ext cx="10881360" cy="713232"/>
           </a:xfrm>
           <a:prstGeom prst="rect">
             <a:avLst/>
@@ -14624,7 +15853,7 @@
               <a:buNone/>
             </a:pPr>
             <a:r>
-              <a:rPr lang="en-US" sz="2700" b="1" dirty="0">
+              <a:rPr lang="en-US" sz="3400" b="1" dirty="0">
                 <a:solidFill>
                   <a:srgbClr val="003A63"/>
                 </a:solidFill>
@@ -14634,20 +15863,20 @@
               </a:rPr>
               <a:t>Why This Topic Matters for Public Health AI</a:t>
             </a:r>
-            <a:endParaRPr lang="en-US" sz="2700" dirty="0"/>
-          </a:p>
-        </p:txBody>
-      </p:sp>
-      <p:sp>
-        <p:nvSpPr>
-          <p:cNvPr id="10" name="Text 8"/>
-          <p:cNvSpPr/>
-          <p:nvPr/>
-        </p:nvSpPr>
-        <p:spPr>
-          <a:xfrm>
-            <a:off x="868680" y="1417320"/>
-            <a:ext cx="6675120" cy="4434840"/>
+            <a:endParaRPr lang="en-US" sz="3400" dirty="0"/>
+          </a:p>
+        </p:txBody>
+      </p:sp>
+      <p:sp>
+        <p:nvSpPr>
+          <p:cNvPr id="11" name="Text 9"/>
+          <p:cNvSpPr/>
+          <p:nvPr/>
+        </p:nvSpPr>
+        <p:spPr>
+          <a:xfrm>
+            <a:off x="868680" y="1508760"/>
+            <a:ext cx="6537960" cy="4160520"/>
           </a:xfrm>
           <a:prstGeom prst="rect">
             <a:avLst/>
@@ -14662,7 +15891,7 @@
           <a:lstStyle/>
           <a:p>
             <a:r>
-              <a:rPr lang="en-US" sz="1700" dirty="0">
+              <a:rPr lang="en-US" sz="2100" dirty="0">
                 <a:solidFill>
                   <a:srgbClr val="17364A"/>
                 </a:solidFill>
@@ -14672,11 +15901,11 @@
               </a:rPr>
               <a:t>AI can make weak evidence appear stronger than it is.</a:t>
             </a:r>
-            <a:endParaRPr lang="en-US" sz="1700" dirty="0"/>
-          </a:p>
-          <a:p>
-            <a:r>
-              <a:rPr lang="en-US" sz="1700" dirty="0">
+            <a:endParaRPr lang="en-US" sz="2100" dirty="0"/>
+          </a:p>
+          <a:p>
+            <a:r>
+              <a:rPr lang="en-US" sz="2100" dirty="0">
                 <a:solidFill>
                   <a:srgbClr val="17364A"/>
                 </a:solidFill>
@@ -14684,13 +15913,13 @@
                 <a:ea typeface="Aptos" pitchFamily="34" charset="-122"/>
                 <a:cs typeface="Aptos" pitchFamily="34" charset="-120"/>
               </a:rPr>
-              <a:t>A model may predict which communities have higher hospitalization risk, but that does not prove which intervention will.</a:t>
-            </a:r>
-            <a:endParaRPr lang="en-US" sz="1700" dirty="0"/>
-          </a:p>
-          <a:p>
-            <a:r>
-              <a:rPr lang="en-US" sz="1700" dirty="0">
+              <a:t>A model may predict which communities have higher hospitalization risk, but that does not prove which.</a:t>
+            </a:r>
+            <a:endParaRPr lang="en-US" sz="2100" dirty="0"/>
+          </a:p>
+          <a:p>
+            <a:r>
+              <a:rPr lang="en-US" sz="2100" dirty="0">
                 <a:solidFill>
                   <a:srgbClr val="17364A"/>
                 </a:solidFill>
@@ -14698,29 +15927,15 @@
                 <a:ea typeface="Aptos" pitchFamily="34" charset="-122"/>
                 <a:cs typeface="Aptos" pitchFamily="34" charset="-120"/>
               </a:rPr>
-              <a:t>A model may find that people who receive a service have better outcomes, but that pattern may reflect who was able to.</a:t>
-            </a:r>
-            <a:endParaRPr lang="en-US" sz="1700" dirty="0"/>
-          </a:p>
-          <a:p>
-            <a:r>
-              <a:rPr lang="en-US" sz="1700" dirty="0">
-                <a:solidFill>
-                  <a:srgbClr val="17364A"/>
-                </a:solidFill>
-                <a:latin typeface="Aptos" pitchFamily="34" charset="0"/>
-                <a:ea typeface="Aptos" pitchFamily="34" charset="-122"/>
-                <a:cs typeface="Aptos" pitchFamily="34" charset="-120"/>
-              </a:rPr>
-              <a:t>Public health decisions often involve resource allocation, program design, policy evaluation, and equity tradeoffs.</a:t>
-            </a:r>
-            <a:endParaRPr lang="en-US" sz="1700" dirty="0"/>
-          </a:p>
-        </p:txBody>
-      </p:sp>
-      <p:sp>
-        <p:nvSpPr>
-          <p:cNvPr id="11" name="Shape 9"/>
+              <a:t>A model may find that people who receive a service have better outcomes, but that pattern may reflect.</a:t>
+            </a:r>
+            <a:endParaRPr lang="en-US" sz="2100" dirty="0"/>
+          </a:p>
+        </p:txBody>
+      </p:sp>
+      <p:sp>
+        <p:nvSpPr>
+          <p:cNvPr id="12" name="Shape 10"/>
           <p:cNvSpPr/>
           <p:nvPr/>
         </p:nvSpPr>
@@ -14747,14 +15962,14 @@
       </p:sp>
       <p:sp>
         <p:nvSpPr>
-          <p:cNvPr id="12" name="Text 10"/>
+          <p:cNvPr id="13" name="Text 11"/>
           <p:cNvSpPr/>
           <p:nvPr/>
         </p:nvSpPr>
         <p:spPr>
           <a:xfrm>
             <a:off x="8074152" y="1563624"/>
-            <a:ext cx="2825496" cy="201168"/>
+            <a:ext cx="2825496" cy="256032"/>
           </a:xfrm>
           <a:prstGeom prst="rect">
             <a:avLst/>
@@ -14770,7 +15985,7 @@
               <a:buNone/>
             </a:pPr>
             <a:r>
-              <a:rPr lang="en-US" sz="950" b="1" dirty="0">
+              <a:rPr lang="en-US" sz="1300" b="1" dirty="0">
                 <a:solidFill>
                   <a:srgbClr val="0068B7"/>
                 </a:solidFill>
@@ -14780,20 +15995,20 @@
               </a:rPr>
               <a:t>Key idea</a:t>
             </a:r>
-            <a:endParaRPr lang="en-US" sz="950" dirty="0"/>
-          </a:p>
-        </p:txBody>
-      </p:sp>
-      <p:sp>
-        <p:nvSpPr>
-          <p:cNvPr id="13" name="Text 11"/>
-          <p:cNvSpPr/>
-          <p:nvPr/>
-        </p:nvSpPr>
-        <p:spPr>
-          <a:xfrm>
-            <a:off x="8074152" y="1856232"/>
-            <a:ext cx="2825496" cy="1261872"/>
+            <a:endParaRPr lang="en-US" sz="1300" dirty="0"/>
+          </a:p>
+        </p:txBody>
+      </p:sp>
+      <p:sp>
+        <p:nvSpPr>
+          <p:cNvPr id="14" name="Text 12"/>
+          <p:cNvSpPr/>
+          <p:nvPr/>
+        </p:nvSpPr>
+        <p:spPr>
+          <a:xfrm>
+            <a:off x="8074152" y="1920240"/>
+            <a:ext cx="2825496" cy="1188720"/>
           </a:xfrm>
           <a:prstGeom prst="rect">
             <a:avLst/>
@@ -14811,7 +16026,7 @@
               <a:buNone/>
             </a:pPr>
             <a:r>
-              <a:rPr lang="en-US" sz="1250" dirty="0">
+              <a:rPr lang="en-US" sz="1550" dirty="0">
                 <a:solidFill>
                   <a:srgbClr val="17364A"/>
                 </a:solidFill>
@@ -14821,13 +16036,13 @@
               </a:rPr>
               <a:t>AI can make weak evidence appear stronger than it is.</a:t>
             </a:r>
-            <a:endParaRPr lang="en-US" sz="1250" dirty="0"/>
-          </a:p>
-        </p:txBody>
-      </p:sp>
-      <p:sp>
-        <p:nvSpPr>
-          <p:cNvPr id="14" name="Shape 12"/>
+            <a:endParaRPr lang="en-US" sz="1550" dirty="0"/>
+          </a:p>
+        </p:txBody>
+      </p:sp>
+      <p:sp>
+        <p:nvSpPr>
+          <p:cNvPr id="15" name="Shape 13"/>
           <p:cNvSpPr/>
           <p:nvPr/>
         </p:nvSpPr>
@@ -14854,14 +16069,14 @@
       </p:sp>
       <p:sp>
         <p:nvSpPr>
-          <p:cNvPr id="15" name="Text 13"/>
+          <p:cNvPr id="16" name="Text 14"/>
           <p:cNvSpPr/>
           <p:nvPr/>
         </p:nvSpPr>
         <p:spPr>
           <a:xfrm>
             <a:off x="8074152" y="3666744"/>
-            <a:ext cx="2825496" cy="201168"/>
+            <a:ext cx="2825496" cy="256032"/>
           </a:xfrm>
           <a:prstGeom prst="rect">
             <a:avLst/>
@@ -14877,7 +16092,7 @@
               <a:buNone/>
             </a:pPr>
             <a:r>
-              <a:rPr lang="en-US" sz="950" b="1" dirty="0">
+              <a:rPr lang="en-US" sz="1300" b="1" dirty="0">
                 <a:solidFill>
                   <a:srgbClr val="0068B7"/>
                 </a:solidFill>
@@ -14887,20 +16102,20 @@
               </a:rPr>
               <a:t>Use this for</a:t>
             </a:r>
-            <a:endParaRPr lang="en-US" sz="950" dirty="0"/>
-          </a:p>
-        </p:txBody>
-      </p:sp>
-      <p:sp>
-        <p:nvSpPr>
-          <p:cNvPr id="16" name="Text 14"/>
-          <p:cNvSpPr/>
-          <p:nvPr/>
-        </p:nvSpPr>
-        <p:spPr>
-          <a:xfrm>
-            <a:off x="8074152" y="3959352"/>
-            <a:ext cx="2825496" cy="1170432"/>
+            <a:endParaRPr lang="en-US" sz="1300" dirty="0"/>
+          </a:p>
+        </p:txBody>
+      </p:sp>
+      <p:sp>
+        <p:nvSpPr>
+          <p:cNvPr id="17" name="Text 15"/>
+          <p:cNvSpPr/>
+          <p:nvPr/>
+        </p:nvSpPr>
+        <p:spPr>
+          <a:xfrm>
+            <a:off x="8074152" y="4023360"/>
+            <a:ext cx="2825496" cy="1097280"/>
           </a:xfrm>
           <a:prstGeom prst="rect">
             <a:avLst/>
@@ -14918,7 +16133,7 @@
               <a:buNone/>
             </a:pPr>
             <a:r>
-              <a:rPr lang="en-US" sz="1250" dirty="0">
+              <a:rPr lang="en-US" sz="1550" dirty="0">
                 <a:solidFill>
                   <a:srgbClr val="17364A"/>
                 </a:solidFill>
@@ -14928,7 +16143,7 @@
               </a:rPr>
               <a:t>Connect the concept to public health decisions, safeguards, documentation, or implementation work.</a:t>
             </a:r>
-            <a:endParaRPr lang="en-US" sz="1250" dirty="0"/>
+            <a:endParaRPr lang="en-US" sz="1550" dirty="0"/>
           </a:p>
         </p:txBody>
       </p:sp>
